--- a/prompts/marp-template.pptx
+++ b/prompts/marp-template.pptx
@@ -14,7 +14,6 @@
     <p:sldId id="262" r:id="rId9"/>
     <p:sldId id="263" r:id="rId10"/>
     <p:sldId id="264" r:id="rId11"/>
-    <p:sldId id="265" r:id="rId12"/>
   </p:sldIdLst>
   <p:sldSz cx="12192000" cy="6858000"/>
   <p:notesSz cx="7559675" cy="10691813"/>
@@ -819,32 +818,9 @@
           </a:p>
         </p:txBody>
       </p:sp>
-      <p:pic>
-        <p:nvPicPr>
-          <p:cNvPr id="11" name="" descr=""/>
-          <p:cNvPicPr/>
-          <p:nvPr/>
-        </p:nvPicPr>
-        <p:blipFill>
-          <a:blip r:embed="rId1"/>
-          <a:stretch/>
-        </p:blipFill>
-        <p:spPr>
-          <a:xfrm>
-            <a:off x="4809960" y="-190440"/>
-            <a:ext cx="2571480" cy="2571480"/>
-          </a:xfrm>
-          <a:prstGeom prst="rect">
-            <a:avLst/>
-          </a:prstGeom>
-          <a:ln w="0">
-            <a:noFill/>
-          </a:ln>
-        </p:spPr>
-      </p:pic>
-      <p:sp>
-        <p:nvSpPr>
-          <p:cNvPr id="12" name=""/>
+      <p:sp>
+        <p:nvSpPr>
+          <p:cNvPr id="11" name=""/>
           <p:cNvSpPr/>
           <p:nvPr/>
         </p:nvSpPr>
@@ -902,7 +878,7 @@
       </p:sp>
       <p:sp>
         <p:nvSpPr>
-          <p:cNvPr id="13" name=""/>
+          <p:cNvPr id="12" name=""/>
           <p:cNvSpPr txBox="1"/>
           <p:nvPr/>
         </p:nvSpPr>
@@ -945,13 +921,13 @@
       </p:sp>
       <p:sp>
         <p:nvSpPr>
-          <p:cNvPr id="14" name=""/>
-          <p:cNvSpPr txBox="1"/>
-          <p:nvPr/>
-        </p:nvSpPr>
-        <p:spPr>
-          <a:xfrm>
-            <a:off x="3313800" y="4668840"/>
+          <p:cNvPr id="13" name=""/>
+          <p:cNvSpPr txBox="1"/>
+          <p:nvPr/>
+        </p:nvSpPr>
+        <p:spPr>
+          <a:xfrm>
+            <a:off x="3388680" y="4497480"/>
             <a:ext cx="457920" cy="331200"/>
           </a:xfrm>
           <a:prstGeom prst="rect">
@@ -988,13 +964,13 @@
       </p:sp>
       <p:sp>
         <p:nvSpPr>
-          <p:cNvPr id="15" name=""/>
-          <p:cNvSpPr txBox="1"/>
-          <p:nvPr/>
-        </p:nvSpPr>
-        <p:spPr>
-          <a:xfrm>
-            <a:off x="3771000" y="4727160"/>
+          <p:cNvPr id="14" name=""/>
+          <p:cNvSpPr txBox="1"/>
+          <p:nvPr/>
+        </p:nvSpPr>
+        <p:spPr>
+          <a:xfrm>
+            <a:off x="3845880" y="4555440"/>
             <a:ext cx="228240" cy="256320"/>
           </a:xfrm>
           <a:prstGeom prst="rect">
@@ -1031,13 +1007,13 @@
       </p:sp>
       <p:sp>
         <p:nvSpPr>
-          <p:cNvPr id="16" name=""/>
-          <p:cNvSpPr txBox="1"/>
-          <p:nvPr/>
-        </p:nvSpPr>
-        <p:spPr>
-          <a:xfrm>
-            <a:off x="3847320" y="4668840"/>
+          <p:cNvPr id="15" name=""/>
+          <p:cNvSpPr txBox="1"/>
+          <p:nvPr/>
+        </p:nvSpPr>
+        <p:spPr>
+          <a:xfrm>
+            <a:off x="3922200" y="4497480"/>
             <a:ext cx="229320" cy="331200"/>
           </a:xfrm>
           <a:prstGeom prst="rect">
@@ -1074,13 +1050,13 @@
       </p:sp>
       <p:sp>
         <p:nvSpPr>
-          <p:cNvPr id="17" name=""/>
-          <p:cNvSpPr txBox="1"/>
-          <p:nvPr/>
-        </p:nvSpPr>
-        <p:spPr>
-          <a:xfrm>
-            <a:off x="4075920" y="4727160"/>
+          <p:cNvPr id="16" name=""/>
+          <p:cNvSpPr txBox="1"/>
+          <p:nvPr/>
+        </p:nvSpPr>
+        <p:spPr>
+          <a:xfrm>
+            <a:off x="4150800" y="4555440"/>
             <a:ext cx="228240" cy="256320"/>
           </a:xfrm>
           <a:prstGeom prst="rect">
@@ -1117,13 +1093,13 @@
       </p:sp>
       <p:sp>
         <p:nvSpPr>
-          <p:cNvPr id="18" name=""/>
-          <p:cNvSpPr txBox="1"/>
-          <p:nvPr/>
-        </p:nvSpPr>
-        <p:spPr>
-          <a:xfrm>
-            <a:off x="4151880" y="4668840"/>
+          <p:cNvPr id="17" name=""/>
+          <p:cNvSpPr txBox="1"/>
+          <p:nvPr/>
+        </p:nvSpPr>
+        <p:spPr>
+          <a:xfrm>
+            <a:off x="4226760" y="4497480"/>
             <a:ext cx="915120" cy="331200"/>
           </a:xfrm>
           <a:prstGeom prst="rect">
@@ -1160,13 +1136,13 @@
       </p:sp>
       <p:sp>
         <p:nvSpPr>
-          <p:cNvPr id="19" name=""/>
-          <p:cNvSpPr txBox="1"/>
-          <p:nvPr/>
-        </p:nvSpPr>
-        <p:spPr>
-          <a:xfrm>
-            <a:off x="5066280" y="4727160"/>
+          <p:cNvPr id="18" name=""/>
+          <p:cNvSpPr txBox="1"/>
+          <p:nvPr/>
+        </p:nvSpPr>
+        <p:spPr>
+          <a:xfrm>
+            <a:off x="5141160" y="4555440"/>
             <a:ext cx="228240" cy="256320"/>
           </a:xfrm>
           <a:prstGeom prst="rect">
@@ -1203,13 +1179,13 @@
       </p:sp>
       <p:sp>
         <p:nvSpPr>
-          <p:cNvPr id="20" name=""/>
-          <p:cNvSpPr txBox="1"/>
-          <p:nvPr/>
-        </p:nvSpPr>
-        <p:spPr>
-          <a:xfrm>
-            <a:off x="5130000" y="4668840"/>
+          <p:cNvPr id="19" name=""/>
+          <p:cNvSpPr txBox="1"/>
+          <p:nvPr/>
+        </p:nvSpPr>
+        <p:spPr>
+          <a:xfrm>
+            <a:off x="5204880" y="4497480"/>
             <a:ext cx="686520" cy="331200"/>
           </a:xfrm>
           <a:prstGeom prst="rect">
@@ -1246,13 +1222,13 @@
       </p:sp>
       <p:sp>
         <p:nvSpPr>
-          <p:cNvPr id="21" name=""/>
-          <p:cNvSpPr txBox="1"/>
-          <p:nvPr/>
-        </p:nvSpPr>
-        <p:spPr>
-          <a:xfrm>
-            <a:off x="5815800" y="4727160"/>
+          <p:cNvPr id="20" name=""/>
+          <p:cNvSpPr txBox="1"/>
+          <p:nvPr/>
+        </p:nvSpPr>
+        <p:spPr>
+          <a:xfrm>
+            <a:off x="5890680" y="4555440"/>
             <a:ext cx="228240" cy="256320"/>
           </a:xfrm>
           <a:prstGeom prst="rect">
@@ -1289,13 +1265,13 @@
       </p:sp>
       <p:sp>
         <p:nvSpPr>
-          <p:cNvPr id="22" name=""/>
-          <p:cNvSpPr txBox="1"/>
-          <p:nvPr/>
-        </p:nvSpPr>
-        <p:spPr>
-          <a:xfrm>
-            <a:off x="5879160" y="4668840"/>
+          <p:cNvPr id="21" name=""/>
+          <p:cNvSpPr txBox="1"/>
+          <p:nvPr/>
+        </p:nvSpPr>
+        <p:spPr>
+          <a:xfrm>
+            <a:off x="5954040" y="4497480"/>
             <a:ext cx="915120" cy="331200"/>
           </a:xfrm>
           <a:prstGeom prst="rect">
@@ -1332,13 +1308,13 @@
       </p:sp>
       <p:sp>
         <p:nvSpPr>
-          <p:cNvPr id="23" name=""/>
-          <p:cNvSpPr txBox="1"/>
-          <p:nvPr/>
-        </p:nvSpPr>
-        <p:spPr>
-          <a:xfrm>
-            <a:off x="6793560" y="4727160"/>
+          <p:cNvPr id="22" name=""/>
+          <p:cNvSpPr txBox="1"/>
+          <p:nvPr/>
+        </p:nvSpPr>
+        <p:spPr>
+          <a:xfrm>
+            <a:off x="6868440" y="4555440"/>
             <a:ext cx="228240" cy="256320"/>
           </a:xfrm>
           <a:prstGeom prst="rect">
@@ -1375,13 +1351,13 @@
       </p:sp>
       <p:sp>
         <p:nvSpPr>
-          <p:cNvPr id="24" name=""/>
-          <p:cNvSpPr txBox="1"/>
-          <p:nvPr/>
-        </p:nvSpPr>
-        <p:spPr>
-          <a:xfrm>
-            <a:off x="6857280" y="4668840"/>
+          <p:cNvPr id="23" name=""/>
+          <p:cNvSpPr txBox="1"/>
+          <p:nvPr/>
+        </p:nvSpPr>
+        <p:spPr>
+          <a:xfrm>
+            <a:off x="6932160" y="4497480"/>
             <a:ext cx="1600920" cy="331200"/>
           </a:xfrm>
           <a:prstGeom prst="rect">
@@ -1418,14 +1394,14 @@
       </p:sp>
       <p:sp>
         <p:nvSpPr>
-          <p:cNvPr id="25" name=""/>
-          <p:cNvSpPr txBox="1"/>
-          <p:nvPr/>
-        </p:nvSpPr>
-        <p:spPr>
-          <a:xfrm>
-            <a:off x="8445960" y="4727160"/>
-            <a:ext cx="430560" cy="256320"/>
+          <p:cNvPr id="24" name=""/>
+          <p:cNvSpPr txBox="1"/>
+          <p:nvPr/>
+        </p:nvSpPr>
+        <p:spPr>
+          <a:xfrm>
+            <a:off x="8520840" y="4555440"/>
+            <a:ext cx="228240" cy="256320"/>
           </a:xfrm>
           <a:prstGeom prst="rect">
             <a:avLst/>
@@ -1450,6 +1426,39 @@
               </a:rPr>
               <a:t> </a:t>
             </a:r>
+            <a:endParaRPr b="0" lang="en-US" sz="1800" spc="-1" strike="noStrike">
+              <a:solidFill>
+                <a:srgbClr val="000000"/>
+              </a:solidFill>
+              <a:latin typeface="Times New Roman"/>
+            </a:endParaRPr>
+          </a:p>
+        </p:txBody>
+      </p:sp>
+      <p:sp>
+        <p:nvSpPr>
+          <p:cNvPr id="25" name=""/>
+          <p:cNvSpPr txBox="1"/>
+          <p:nvPr/>
+        </p:nvSpPr>
+        <p:spPr>
+          <a:xfrm>
+            <a:off x="5770800" y="4898520"/>
+            <a:ext cx="367920" cy="256320"/>
+          </a:xfrm>
+          <a:prstGeom prst="rect">
+            <a:avLst/>
+          </a:prstGeom>
+          <a:noFill/>
+          <a:ln w="0">
+            <a:noFill/>
+          </a:ln>
+        </p:spPr>
+        <p:txBody>
+          <a:bodyPr wrap="none" lIns="0" rIns="0" tIns="0" bIns="0" anchor="t">
+            <a:noAutofit/>
+          </a:bodyPr>
+          <a:p>
             <a:r>
               <a:rPr b="1" lang="en-US" sz="1800" spc="-1" strike="noStrike">
                 <a:solidFill>
@@ -1477,7 +1486,7 @@
         </p:nvSpPr>
         <p:spPr>
           <a:xfrm>
-            <a:off x="4772160" y="5240520"/>
+            <a:off x="4772160" y="5412240"/>
             <a:ext cx="573840" cy="415080"/>
           </a:xfrm>
           <a:prstGeom prst="rect">
@@ -1520,7 +1529,7 @@
         </p:nvSpPr>
         <p:spPr>
           <a:xfrm>
-            <a:off x="5343840" y="5313600"/>
+            <a:off x="5343840" y="5484960"/>
             <a:ext cx="285480" cy="320400"/>
           </a:xfrm>
           <a:prstGeom prst="rect">
@@ -1563,7 +1572,7 @@
         </p:nvSpPr>
         <p:spPr>
           <a:xfrm>
-            <a:off x="5438880" y="5240520"/>
+            <a:off x="5438880" y="5412240"/>
             <a:ext cx="287280" cy="415080"/>
           </a:xfrm>
           <a:prstGeom prst="rect">
@@ -1606,7 +1615,7 @@
         </p:nvSpPr>
         <p:spPr>
           <a:xfrm>
-            <a:off x="5724720" y="5313600"/>
+            <a:off x="5724720" y="5484960"/>
             <a:ext cx="285480" cy="320400"/>
           </a:xfrm>
           <a:prstGeom prst="rect">
@@ -1649,7 +1658,7 @@
         </p:nvSpPr>
         <p:spPr>
           <a:xfrm>
-            <a:off x="5819760" y="5240520"/>
+            <a:off x="5819760" y="5412240"/>
             <a:ext cx="573840" cy="415080"/>
           </a:xfrm>
           <a:prstGeom prst="rect">
@@ -1692,7 +1701,7 @@
         </p:nvSpPr>
         <p:spPr>
           <a:xfrm>
-            <a:off x="6391080" y="5313600"/>
+            <a:off x="6391080" y="5484960"/>
             <a:ext cx="285480" cy="320400"/>
           </a:xfrm>
           <a:prstGeom prst="rect">
@@ -1735,7 +1744,7 @@
         </p:nvSpPr>
         <p:spPr>
           <a:xfrm>
-            <a:off x="6470640" y="5240520"/>
+            <a:off x="6470640" y="5412240"/>
             <a:ext cx="573840" cy="415080"/>
           </a:xfrm>
           <a:prstGeom prst="rect">
@@ -1778,7 +1787,7 @@
         </p:nvSpPr>
         <p:spPr>
           <a:xfrm>
-            <a:off x="7041960" y="5313600"/>
+            <a:off x="7041960" y="5484960"/>
             <a:ext cx="285480" cy="320400"/>
           </a:xfrm>
           <a:prstGeom prst="rect">
@@ -1846,2237 +1855,6 @@
                 <a:ea typeface="Arial"/>
               </a:rPr>
               <a:t>1</a:t>
-            </a:r>
-            <a:endParaRPr b="0" lang="en-US" sz="2400" spc="-1" strike="noStrike">
-              <a:solidFill>
-                <a:srgbClr val="000000"/>
-              </a:solidFill>
-              <a:latin typeface="Times New Roman"/>
-            </a:endParaRPr>
-          </a:p>
-        </p:txBody>
-      </p:sp>
-    </p:spTree>
-  </p:cSld>
-  <mc:AlternateContent>
-    <mc:Choice Requires="p14">
-      <p:transition spd="slow" p14:dur="2000"/>
-    </mc:Choice>
-    <mc:Fallback>
-      <p:transition spd="slow"/>
-    </mc:Fallback>
-  </mc:AlternateContent>
-</p:sld>
-</file>
-
-<file path=ppt/slides/slide10.xml><?xml version="1.0" encoding="utf-8"?>
-<p:sld xmlns:a="http://schemas.openxmlformats.org/drawingml/2006/main" xmlns:p="http://schemas.openxmlformats.org/presentationml/2006/main" xmlns:r="http://schemas.openxmlformats.org/officeDocument/2006/relationships" xmlns:p14="http://schemas.microsoft.com/office/powerpoint/2010/main" xmlns:p15="http://schemas.microsoft.com/office/powerpoint/2012/main" xmlns:mc="http://schemas.openxmlformats.org/markup-compatibility/2006">
-  <p:cSld>
-    <p:spTree>
-      <p:nvGrpSpPr>
-        <p:cNvPr id="1" name=""/>
-        <p:cNvGrpSpPr/>
-        <p:nvPr/>
-      </p:nvGrpSpPr>
-      <p:grpSpPr>
-        <a:xfrm>
-          <a:off x="0" y="0"/>
-          <a:ext cx="0" cy="0"/>
-          <a:chOff x="0" y="0"/>
-          <a:chExt cx="0" cy="0"/>
-        </a:xfrm>
-      </p:grpSpPr>
-      <p:sp>
-        <p:nvSpPr>
-          <p:cNvPr id="209" name=""/>
-          <p:cNvSpPr/>
-          <p:nvPr/>
-        </p:nvSpPr>
-        <p:spPr>
-          <a:xfrm>
-            <a:off x="0" y="0"/>
-            <a:ext cx="12192120" cy="6858000"/>
-          </a:xfrm>
-          <a:custGeom>
-            <a:avLst/>
-            <a:gdLst/>
-            <a:ahLst/>
-            <a:rect l="0" t="0" r="r" b="b"/>
-            <a:pathLst>
-              <a:path w="33867" h="19050">
-                <a:moveTo>
-                  <a:pt x="0" y="0"/>
-                </a:moveTo>
-                <a:lnTo>
-                  <a:pt x="33867" y="0"/>
-                </a:lnTo>
-                <a:lnTo>
-                  <a:pt x="33867" y="19050"/>
-                </a:lnTo>
-                <a:lnTo>
-                  <a:pt x="0" y="19050"/>
-                </a:lnTo>
-                <a:lnTo>
-                  <a:pt x="0" y="0"/>
-                </a:lnTo>
-                <a:close/>
-              </a:path>
-            </a:pathLst>
-          </a:custGeom>
-          <a:solidFill>
-            <a:srgbClr val="ffffff"/>
-          </a:solidFill>
-          <a:ln w="0">
-            <a:noFill/>
-          </a:ln>
-        </p:spPr>
-        <p:txBody>
-          <a:bodyPr lIns="0" rIns="0" tIns="0" bIns="0" anchor="t">
-            <a:noAutofit/>
-          </a:bodyPr>
-          <a:p>
-            <a:endParaRPr b="0" lang="en-US" sz="2400" spc="-1" strike="noStrike">
-              <a:solidFill>
-                <a:srgbClr val="000000"/>
-              </a:solidFill>
-              <a:latin typeface="Times New Roman"/>
-            </a:endParaRPr>
-          </a:p>
-        </p:txBody>
-      </p:sp>
-      <p:sp>
-        <p:nvSpPr>
-          <p:cNvPr id="210" name=""/>
-          <p:cNvSpPr/>
-          <p:nvPr/>
-        </p:nvSpPr>
-        <p:spPr>
-          <a:xfrm>
-            <a:off x="0" y="0"/>
-            <a:ext cx="12192120" cy="6858000"/>
-          </a:xfrm>
-          <a:custGeom>
-            <a:avLst/>
-            <a:gdLst/>
-            <a:ahLst/>
-            <a:rect l="0" t="0" r="r" b="b"/>
-            <a:pathLst>
-              <a:path w="33867" h="19050">
-                <a:moveTo>
-                  <a:pt x="0" y="0"/>
-                </a:moveTo>
-                <a:lnTo>
-                  <a:pt x="33867" y="0"/>
-                </a:lnTo>
-                <a:lnTo>
-                  <a:pt x="33867" y="19050"/>
-                </a:lnTo>
-                <a:lnTo>
-                  <a:pt x="0" y="19050"/>
-                </a:lnTo>
-                <a:lnTo>
-                  <a:pt x="0" y="0"/>
-                </a:lnTo>
-                <a:close/>
-              </a:path>
-            </a:pathLst>
-          </a:custGeom>
-          <a:solidFill>
-            <a:srgbClr val="ffffff"/>
-          </a:solidFill>
-          <a:ln w="0">
-            <a:noFill/>
-          </a:ln>
-        </p:spPr>
-        <p:txBody>
-          <a:bodyPr lIns="0" rIns="0" tIns="0" bIns="0" anchor="t">
-            <a:noAutofit/>
-          </a:bodyPr>
-          <a:p>
-            <a:endParaRPr b="0" lang="en-US" sz="2400" spc="-1" strike="noStrike">
-              <a:solidFill>
-                <a:srgbClr val="000000"/>
-              </a:solidFill>
-              <a:latin typeface="Times New Roman"/>
-            </a:endParaRPr>
-          </a:p>
-        </p:txBody>
-      </p:sp>
-      <p:sp>
-        <p:nvSpPr>
-          <p:cNvPr id="211" name=""/>
-          <p:cNvSpPr/>
-          <p:nvPr/>
-        </p:nvSpPr>
-        <p:spPr>
-          <a:xfrm>
-            <a:off x="0" y="0"/>
-            <a:ext cx="12192120" cy="6858000"/>
-          </a:xfrm>
-          <a:custGeom>
-            <a:avLst/>
-            <a:gdLst/>
-            <a:ahLst/>
-            <a:rect l="0" t="0" r="r" b="b"/>
-            <a:pathLst>
-              <a:path w="33867" h="19050">
-                <a:moveTo>
-                  <a:pt x="0" y="0"/>
-                </a:moveTo>
-                <a:lnTo>
-                  <a:pt x="33867" y="0"/>
-                </a:lnTo>
-                <a:lnTo>
-                  <a:pt x="33867" y="19050"/>
-                </a:lnTo>
-                <a:lnTo>
-                  <a:pt x="0" y="19050"/>
-                </a:lnTo>
-                <a:lnTo>
-                  <a:pt x="0" y="0"/>
-                </a:lnTo>
-                <a:close/>
-              </a:path>
-            </a:pathLst>
-          </a:custGeom>
-          <a:solidFill>
-            <a:srgbClr val="c9c9c9"/>
-          </a:solidFill>
-          <a:ln w="0">
-            <a:noFill/>
-          </a:ln>
-        </p:spPr>
-        <p:txBody>
-          <a:bodyPr lIns="0" rIns="0" tIns="0" bIns="0" anchor="t">
-            <a:noAutofit/>
-          </a:bodyPr>
-          <a:p>
-            <a:endParaRPr b="0" lang="en-US" sz="2400" spc="-1" strike="noStrike">
-              <a:solidFill>
-                <a:srgbClr val="000000"/>
-              </a:solidFill>
-              <a:latin typeface="Times New Roman"/>
-            </a:endParaRPr>
-          </a:p>
-        </p:txBody>
-      </p:sp>
-      <p:sp>
-        <p:nvSpPr>
-          <p:cNvPr id="212" name=""/>
-          <p:cNvSpPr/>
-          <p:nvPr/>
-        </p:nvSpPr>
-        <p:spPr>
-          <a:xfrm>
-            <a:off x="228240" y="228240"/>
-            <a:ext cx="11735280" cy="6401160"/>
-          </a:xfrm>
-          <a:custGeom>
-            <a:avLst/>
-            <a:gdLst/>
-            <a:ahLst/>
-            <a:rect l="0" t="0" r="r" b="b"/>
-            <a:pathLst>
-              <a:path w="32598" h="17781">
-                <a:moveTo>
-                  <a:pt x="530" y="0"/>
-                </a:moveTo>
-                <a:lnTo>
-                  <a:pt x="32069" y="0"/>
-                </a:lnTo>
-                <a:cubicBezTo>
-                  <a:pt x="32104" y="0"/>
-                  <a:pt x="32138" y="4"/>
-                  <a:pt x="32172" y="11"/>
-                </a:cubicBezTo>
-                <a:cubicBezTo>
-                  <a:pt x="32206" y="17"/>
-                  <a:pt x="32239" y="27"/>
-                  <a:pt x="32271" y="41"/>
-                </a:cubicBezTo>
-                <a:cubicBezTo>
-                  <a:pt x="32304" y="54"/>
-                  <a:pt x="32334" y="70"/>
-                  <a:pt x="32363" y="90"/>
-                </a:cubicBezTo>
-                <a:cubicBezTo>
-                  <a:pt x="32392" y="109"/>
-                  <a:pt x="32419" y="131"/>
-                  <a:pt x="32443" y="155"/>
-                </a:cubicBezTo>
-                <a:cubicBezTo>
-                  <a:pt x="32468" y="180"/>
-                  <a:pt x="32490" y="207"/>
-                  <a:pt x="32509" y="236"/>
-                </a:cubicBezTo>
-                <a:cubicBezTo>
-                  <a:pt x="32528" y="265"/>
-                  <a:pt x="32545" y="295"/>
-                  <a:pt x="32558" y="327"/>
-                </a:cubicBezTo>
-                <a:cubicBezTo>
-                  <a:pt x="32571" y="359"/>
-                  <a:pt x="32581" y="392"/>
-                  <a:pt x="32588" y="426"/>
-                </a:cubicBezTo>
-                <a:cubicBezTo>
-                  <a:pt x="32595" y="461"/>
-                  <a:pt x="32598" y="495"/>
-                  <a:pt x="32598" y="530"/>
-                </a:cubicBezTo>
-                <a:lnTo>
-                  <a:pt x="32598" y="17252"/>
-                </a:lnTo>
-                <a:cubicBezTo>
-                  <a:pt x="32598" y="17287"/>
-                  <a:pt x="32595" y="17321"/>
-                  <a:pt x="32588" y="17356"/>
-                </a:cubicBezTo>
-                <a:cubicBezTo>
-                  <a:pt x="32581" y="17390"/>
-                  <a:pt x="32571" y="17423"/>
-                  <a:pt x="32558" y="17455"/>
-                </a:cubicBezTo>
-                <a:cubicBezTo>
-                  <a:pt x="32545" y="17487"/>
-                  <a:pt x="32528" y="17517"/>
-                  <a:pt x="32509" y="17546"/>
-                </a:cubicBezTo>
-                <a:cubicBezTo>
-                  <a:pt x="32490" y="17575"/>
-                  <a:pt x="32468" y="17602"/>
-                  <a:pt x="32443" y="17627"/>
-                </a:cubicBezTo>
-                <a:cubicBezTo>
-                  <a:pt x="32419" y="17651"/>
-                  <a:pt x="32392" y="17673"/>
-                  <a:pt x="32363" y="17692"/>
-                </a:cubicBezTo>
-                <a:cubicBezTo>
-                  <a:pt x="32334" y="17712"/>
-                  <a:pt x="32304" y="17728"/>
-                  <a:pt x="32271" y="17741"/>
-                </a:cubicBezTo>
-                <a:cubicBezTo>
-                  <a:pt x="32239" y="17755"/>
-                  <a:pt x="32206" y="17765"/>
-                  <a:pt x="32172" y="17771"/>
-                </a:cubicBezTo>
-                <a:cubicBezTo>
-                  <a:pt x="32138" y="17778"/>
-                  <a:pt x="32104" y="17781"/>
-                  <a:pt x="32069" y="17781"/>
-                </a:cubicBezTo>
-                <a:lnTo>
-                  <a:pt x="530" y="17781"/>
-                </a:lnTo>
-                <a:cubicBezTo>
-                  <a:pt x="495" y="17781"/>
-                  <a:pt x="461" y="17778"/>
-                  <a:pt x="426" y="17771"/>
-                </a:cubicBezTo>
-                <a:cubicBezTo>
-                  <a:pt x="392" y="17765"/>
-                  <a:pt x="359" y="17755"/>
-                  <a:pt x="327" y="17741"/>
-                </a:cubicBezTo>
-                <a:cubicBezTo>
-                  <a:pt x="295" y="17728"/>
-                  <a:pt x="265" y="17712"/>
-                  <a:pt x="236" y="17692"/>
-                </a:cubicBezTo>
-                <a:cubicBezTo>
-                  <a:pt x="207" y="17673"/>
-                  <a:pt x="180" y="17651"/>
-                  <a:pt x="155" y="17627"/>
-                </a:cubicBezTo>
-                <a:cubicBezTo>
-                  <a:pt x="131" y="17602"/>
-                  <a:pt x="109" y="17575"/>
-                  <a:pt x="90" y="17546"/>
-                </a:cubicBezTo>
-                <a:cubicBezTo>
-                  <a:pt x="70" y="17517"/>
-                  <a:pt x="54" y="17487"/>
-                  <a:pt x="41" y="17455"/>
-                </a:cubicBezTo>
-                <a:cubicBezTo>
-                  <a:pt x="27" y="17423"/>
-                  <a:pt x="17" y="17390"/>
-                  <a:pt x="11" y="17356"/>
-                </a:cubicBezTo>
-                <a:cubicBezTo>
-                  <a:pt x="4" y="17321"/>
-                  <a:pt x="0" y="17287"/>
-                  <a:pt x="0" y="17252"/>
-                </a:cubicBezTo>
-                <a:lnTo>
-                  <a:pt x="0" y="530"/>
-                </a:lnTo>
-                <a:cubicBezTo>
-                  <a:pt x="0" y="495"/>
-                  <a:pt x="4" y="461"/>
-                  <a:pt x="11" y="426"/>
-                </a:cubicBezTo>
-                <a:cubicBezTo>
-                  <a:pt x="17" y="392"/>
-                  <a:pt x="27" y="359"/>
-                  <a:pt x="41" y="327"/>
-                </a:cubicBezTo>
-                <a:cubicBezTo>
-                  <a:pt x="54" y="295"/>
-                  <a:pt x="70" y="265"/>
-                  <a:pt x="90" y="236"/>
-                </a:cubicBezTo>
-                <a:cubicBezTo>
-                  <a:pt x="109" y="207"/>
-                  <a:pt x="131" y="180"/>
-                  <a:pt x="155" y="155"/>
-                </a:cubicBezTo>
-                <a:cubicBezTo>
-                  <a:pt x="180" y="131"/>
-                  <a:pt x="207" y="109"/>
-                  <a:pt x="236" y="90"/>
-                </a:cubicBezTo>
-                <a:cubicBezTo>
-                  <a:pt x="265" y="70"/>
-                  <a:pt x="295" y="54"/>
-                  <a:pt x="327" y="41"/>
-                </a:cubicBezTo>
-                <a:cubicBezTo>
-                  <a:pt x="359" y="27"/>
-                  <a:pt x="392" y="17"/>
-                  <a:pt x="426" y="11"/>
-                </a:cubicBezTo>
-                <a:cubicBezTo>
-                  <a:pt x="461" y="4"/>
-                  <a:pt x="495" y="0"/>
-                  <a:pt x="530" y="0"/>
-                </a:cubicBezTo>
-                <a:close/>
-              </a:path>
-            </a:pathLst>
-          </a:custGeom>
-          <a:solidFill>
-            <a:srgbClr val="ffffff"/>
-          </a:solidFill>
-          <a:ln w="0">
-            <a:noFill/>
-          </a:ln>
-        </p:spPr>
-        <p:txBody>
-          <a:bodyPr lIns="0" rIns="0" tIns="0" bIns="0" anchor="t">
-            <a:noAutofit/>
-          </a:bodyPr>
-          <a:p>
-            <a:endParaRPr b="0" lang="en-US" sz="2400" spc="-1" strike="noStrike">
-              <a:solidFill>
-                <a:srgbClr val="000000"/>
-              </a:solidFill>
-              <a:latin typeface="Times New Roman"/>
-            </a:endParaRPr>
-          </a:p>
-        </p:txBody>
-      </p:sp>
-      <p:pic>
-        <p:nvPicPr>
-          <p:cNvPr id="213" name="" descr=""/>
-          <p:cNvPicPr/>
-          <p:nvPr/>
-        </p:nvPicPr>
-        <p:blipFill>
-          <a:blip r:embed="rId1"/>
-          <a:stretch/>
-        </p:blipFill>
-        <p:spPr>
-          <a:xfrm>
-            <a:off x="10515600" y="38160"/>
-            <a:ext cx="1142640" cy="1142640"/>
-          </a:xfrm>
-          <a:prstGeom prst="rect">
-            <a:avLst/>
-          </a:prstGeom>
-          <a:ln w="0">
-            <a:noFill/>
-          </a:ln>
-        </p:spPr>
-      </p:pic>
-      <p:sp>
-        <p:nvSpPr>
-          <p:cNvPr id="214" name=""/>
-          <p:cNvSpPr txBox="1"/>
-          <p:nvPr/>
-        </p:nvSpPr>
-        <p:spPr>
-          <a:xfrm>
-            <a:off x="533520" y="940680"/>
-            <a:ext cx="720000" cy="308160"/>
-          </a:xfrm>
-          <a:prstGeom prst="rect">
-            <a:avLst/>
-          </a:prstGeom>
-          <a:noFill/>
-          <a:ln w="0">
-            <a:noFill/>
-          </a:ln>
-        </p:spPr>
-        <p:txBody>
-          <a:bodyPr wrap="none" lIns="0" rIns="0" tIns="0" bIns="0" anchor="t">
-            <a:noAutofit/>
-          </a:bodyPr>
-          <a:p>
-            <a:r>
-              <a:rPr b="0" lang="en-US" sz="2170" spc="-1" strike="noStrike">
-                <a:solidFill>
-                  <a:srgbClr val="111111"/>
-                </a:solidFill>
-                <a:latin typeface="Arial"/>
-                <a:ea typeface="Arial"/>
-              </a:rPr>
-              <a:t>PPTX</a:t>
-            </a:r>
-            <a:endParaRPr b="0" lang="en-US" sz="2170" spc="-1" strike="noStrike">
-              <a:solidFill>
-                <a:srgbClr val="000000"/>
-              </a:solidFill>
-              <a:latin typeface="Times New Roman"/>
-            </a:endParaRPr>
-          </a:p>
-        </p:txBody>
-      </p:sp>
-      <p:sp>
-        <p:nvSpPr>
-          <p:cNvPr id="215" name=""/>
-          <p:cNvSpPr txBox="1"/>
-          <p:nvPr/>
-        </p:nvSpPr>
-        <p:spPr>
-          <a:xfrm>
-            <a:off x="1254960" y="870120"/>
-            <a:ext cx="1655640" cy="399600"/>
-          </a:xfrm>
-          <a:prstGeom prst="rect">
-            <a:avLst/>
-          </a:prstGeom>
-          <a:noFill/>
-          <a:ln w="0">
-            <a:noFill/>
-          </a:ln>
-        </p:spPr>
-        <p:txBody>
-          <a:bodyPr wrap="none" lIns="0" rIns="0" tIns="0" bIns="0" anchor="t">
-            <a:noAutofit/>
-          </a:bodyPr>
-          <a:p>
-            <a:r>
-              <a:rPr b="0" lang="zh-CN" sz="2170" spc="-1" strike="noStrike">
-                <a:solidFill>
-                  <a:srgbClr val="111111"/>
-                </a:solidFill>
-                <a:latin typeface="NotoSansCJKjp"/>
-                <a:ea typeface="NotoSansCJKjp"/>
-              </a:rPr>
-              <a:t>（編集可能）</a:t>
-            </a:r>
-            <a:endParaRPr b="0" lang="en-US" sz="2170" spc="-1" strike="noStrike">
-              <a:solidFill>
-                <a:srgbClr val="000000"/>
-              </a:solidFill>
-              <a:latin typeface="Times New Roman"/>
-            </a:endParaRPr>
-          </a:p>
-        </p:txBody>
-      </p:sp>
-      <p:sp>
-        <p:nvSpPr>
-          <p:cNvPr id="216" name=""/>
-          <p:cNvSpPr/>
-          <p:nvPr/>
-        </p:nvSpPr>
-        <p:spPr>
-          <a:xfrm>
-            <a:off x="537840" y="1490400"/>
-            <a:ext cx="11116080" cy="581400"/>
-          </a:xfrm>
-          <a:custGeom>
-            <a:avLst/>
-            <a:gdLst/>
-            <a:ahLst/>
-            <a:rect l="0" t="0" r="r" b="b"/>
-            <a:pathLst>
-              <a:path w="30878" h="1615">
-                <a:moveTo>
-                  <a:pt x="0" y="1416"/>
-                </a:moveTo>
-                <a:lnTo>
-                  <a:pt x="0" y="199"/>
-                </a:lnTo>
-                <a:cubicBezTo>
-                  <a:pt x="0" y="186"/>
-                  <a:pt x="2" y="173"/>
-                  <a:pt x="4" y="160"/>
-                </a:cubicBezTo>
-                <a:cubicBezTo>
-                  <a:pt x="7" y="147"/>
-                  <a:pt x="11" y="135"/>
-                  <a:pt x="16" y="123"/>
-                </a:cubicBezTo>
-                <a:cubicBezTo>
-                  <a:pt x="20" y="111"/>
-                  <a:pt x="27" y="99"/>
-                  <a:pt x="34" y="88"/>
-                </a:cubicBezTo>
-                <a:cubicBezTo>
-                  <a:pt x="41" y="78"/>
-                  <a:pt x="49" y="68"/>
-                  <a:pt x="59" y="58"/>
-                </a:cubicBezTo>
-                <a:cubicBezTo>
-                  <a:pt x="68" y="49"/>
-                  <a:pt x="78" y="41"/>
-                  <a:pt x="89" y="34"/>
-                </a:cubicBezTo>
-                <a:cubicBezTo>
-                  <a:pt x="99" y="26"/>
-                  <a:pt x="111" y="20"/>
-                  <a:pt x="123" y="15"/>
-                </a:cubicBezTo>
-                <a:cubicBezTo>
-                  <a:pt x="135" y="10"/>
-                  <a:pt x="147" y="7"/>
-                  <a:pt x="160" y="4"/>
-                </a:cubicBezTo>
-                <a:cubicBezTo>
-                  <a:pt x="173" y="2"/>
-                  <a:pt x="186" y="0"/>
-                  <a:pt x="199" y="0"/>
-                </a:cubicBezTo>
-                <a:lnTo>
-                  <a:pt x="30680" y="0"/>
-                </a:lnTo>
-                <a:cubicBezTo>
-                  <a:pt x="30693" y="0"/>
-                  <a:pt x="30706" y="2"/>
-                  <a:pt x="30719" y="4"/>
-                </a:cubicBezTo>
-                <a:cubicBezTo>
-                  <a:pt x="30731" y="7"/>
-                  <a:pt x="30744" y="10"/>
-                  <a:pt x="30756" y="15"/>
-                </a:cubicBezTo>
-                <a:cubicBezTo>
-                  <a:pt x="30768" y="20"/>
-                  <a:pt x="30779" y="26"/>
-                  <a:pt x="30790" y="34"/>
-                </a:cubicBezTo>
-                <a:cubicBezTo>
-                  <a:pt x="30801" y="41"/>
-                  <a:pt x="30811" y="49"/>
-                  <a:pt x="30820" y="58"/>
-                </a:cubicBezTo>
-                <a:cubicBezTo>
-                  <a:pt x="30829" y="68"/>
-                  <a:pt x="30838" y="78"/>
-                  <a:pt x="30845" y="88"/>
-                </a:cubicBezTo>
-                <a:cubicBezTo>
-                  <a:pt x="30852" y="99"/>
-                  <a:pt x="30858" y="111"/>
-                  <a:pt x="30863" y="123"/>
-                </a:cubicBezTo>
-                <a:cubicBezTo>
-                  <a:pt x="30868" y="135"/>
-                  <a:pt x="30872" y="147"/>
-                  <a:pt x="30874" y="160"/>
-                </a:cubicBezTo>
-                <a:cubicBezTo>
-                  <a:pt x="30877" y="173"/>
-                  <a:pt x="30878" y="186"/>
-                  <a:pt x="30878" y="199"/>
-                </a:cubicBezTo>
-                <a:lnTo>
-                  <a:pt x="30878" y="1416"/>
-                </a:lnTo>
-                <a:cubicBezTo>
-                  <a:pt x="30878" y="1429"/>
-                  <a:pt x="30877" y="1442"/>
-                  <a:pt x="30874" y="1454"/>
-                </a:cubicBezTo>
-                <a:cubicBezTo>
-                  <a:pt x="30872" y="1467"/>
-                  <a:pt x="30868" y="1480"/>
-                  <a:pt x="30863" y="1492"/>
-                </a:cubicBezTo>
-                <a:cubicBezTo>
-                  <a:pt x="30858" y="1504"/>
-                  <a:pt x="30852" y="1516"/>
-                  <a:pt x="30845" y="1527"/>
-                </a:cubicBezTo>
-                <a:cubicBezTo>
-                  <a:pt x="30838" y="1538"/>
-                  <a:pt x="30829" y="1548"/>
-                  <a:pt x="30820" y="1557"/>
-                </a:cubicBezTo>
-                <a:cubicBezTo>
-                  <a:pt x="30811" y="1566"/>
-                  <a:pt x="30801" y="1575"/>
-                  <a:pt x="30790" y="1582"/>
-                </a:cubicBezTo>
-                <a:cubicBezTo>
-                  <a:pt x="30779" y="1589"/>
-                  <a:pt x="30768" y="1595"/>
-                  <a:pt x="30756" y="1600"/>
-                </a:cubicBezTo>
-                <a:cubicBezTo>
-                  <a:pt x="30744" y="1605"/>
-                  <a:pt x="30731" y="1609"/>
-                  <a:pt x="30719" y="1611"/>
-                </a:cubicBezTo>
-                <a:cubicBezTo>
-                  <a:pt x="30706" y="1614"/>
-                  <a:pt x="30693" y="1615"/>
-                  <a:pt x="30680" y="1615"/>
-                </a:cubicBezTo>
-                <a:lnTo>
-                  <a:pt x="199" y="1615"/>
-                </a:lnTo>
-                <a:cubicBezTo>
-                  <a:pt x="186" y="1615"/>
-                  <a:pt x="173" y="1614"/>
-                  <a:pt x="160" y="1611"/>
-                </a:cubicBezTo>
-                <a:cubicBezTo>
-                  <a:pt x="147" y="1609"/>
-                  <a:pt x="135" y="1605"/>
-                  <a:pt x="123" y="1600"/>
-                </a:cubicBezTo>
-                <a:cubicBezTo>
-                  <a:pt x="111" y="1595"/>
-                  <a:pt x="99" y="1589"/>
-                  <a:pt x="89" y="1582"/>
-                </a:cubicBezTo>
-                <a:cubicBezTo>
-                  <a:pt x="78" y="1575"/>
-                  <a:pt x="68" y="1566"/>
-                  <a:pt x="59" y="1557"/>
-                </a:cubicBezTo>
-                <a:cubicBezTo>
-                  <a:pt x="49" y="1548"/>
-                  <a:pt x="41" y="1538"/>
-                  <a:pt x="34" y="1527"/>
-                </a:cubicBezTo>
-                <a:cubicBezTo>
-                  <a:pt x="27" y="1516"/>
-                  <a:pt x="20" y="1504"/>
-                  <a:pt x="16" y="1492"/>
-                </a:cubicBezTo>
-                <a:cubicBezTo>
-                  <a:pt x="11" y="1480"/>
-                  <a:pt x="7" y="1467"/>
-                  <a:pt x="4" y="1454"/>
-                </a:cubicBezTo>
-                <a:cubicBezTo>
-                  <a:pt x="2" y="1442"/>
-                  <a:pt x="0" y="1429"/>
-                  <a:pt x="0" y="1416"/>
-                </a:cubicBezTo>
-                <a:close/>
-              </a:path>
-            </a:pathLst>
-          </a:custGeom>
-          <a:solidFill>
-            <a:srgbClr val="f5f7fa"/>
-          </a:solidFill>
-          <a:ln w="0">
-            <a:noFill/>
-          </a:ln>
-        </p:spPr>
-        <p:txBody>
-          <a:bodyPr lIns="0" rIns="0" tIns="0" bIns="0" anchor="t">
-            <a:noAutofit/>
-          </a:bodyPr>
-          <a:p>
-            <a:endParaRPr b="0" lang="en-US" sz="2400" spc="-1" strike="noStrike">
-              <a:solidFill>
-                <a:srgbClr val="000000"/>
-              </a:solidFill>
-              <a:latin typeface="Times New Roman"/>
-            </a:endParaRPr>
-          </a:p>
-        </p:txBody>
-      </p:sp>
-      <p:sp>
-        <p:nvSpPr>
-          <p:cNvPr id="217" name=""/>
-          <p:cNvSpPr/>
-          <p:nvPr/>
-        </p:nvSpPr>
-        <p:spPr>
-          <a:xfrm>
-            <a:off x="537840" y="1490400"/>
-            <a:ext cx="11116080" cy="581400"/>
-          </a:xfrm>
-          <a:custGeom>
-            <a:avLst/>
-            <a:gdLst/>
-            <a:ahLst/>
-            <a:rect l="0" t="0" r="r" b="b"/>
-            <a:pathLst>
-              <a:path w="30878" h="1615">
-                <a:moveTo>
-                  <a:pt x="0" y="1416"/>
-                </a:moveTo>
-                <a:lnTo>
-                  <a:pt x="0" y="199"/>
-                </a:lnTo>
-                <a:cubicBezTo>
-                  <a:pt x="0" y="186"/>
-                  <a:pt x="2" y="173"/>
-                  <a:pt x="4" y="160"/>
-                </a:cubicBezTo>
-                <a:cubicBezTo>
-                  <a:pt x="7" y="147"/>
-                  <a:pt x="11" y="135"/>
-                  <a:pt x="16" y="123"/>
-                </a:cubicBezTo>
-                <a:cubicBezTo>
-                  <a:pt x="20" y="111"/>
-                  <a:pt x="27" y="99"/>
-                  <a:pt x="34" y="88"/>
-                </a:cubicBezTo>
-                <a:cubicBezTo>
-                  <a:pt x="41" y="78"/>
-                  <a:pt x="49" y="68"/>
-                  <a:pt x="59" y="58"/>
-                </a:cubicBezTo>
-                <a:cubicBezTo>
-                  <a:pt x="68" y="49"/>
-                  <a:pt x="78" y="41"/>
-                  <a:pt x="89" y="34"/>
-                </a:cubicBezTo>
-                <a:cubicBezTo>
-                  <a:pt x="99" y="26"/>
-                  <a:pt x="111" y="20"/>
-                  <a:pt x="123" y="15"/>
-                </a:cubicBezTo>
-                <a:cubicBezTo>
-                  <a:pt x="135" y="10"/>
-                  <a:pt x="147" y="7"/>
-                  <a:pt x="160" y="4"/>
-                </a:cubicBezTo>
-                <a:cubicBezTo>
-                  <a:pt x="173" y="2"/>
-                  <a:pt x="186" y="0"/>
-                  <a:pt x="199" y="0"/>
-                </a:cubicBezTo>
-                <a:lnTo>
-                  <a:pt x="30680" y="0"/>
-                </a:lnTo>
-                <a:cubicBezTo>
-                  <a:pt x="30693" y="0"/>
-                  <a:pt x="30706" y="2"/>
-                  <a:pt x="30719" y="4"/>
-                </a:cubicBezTo>
-                <a:cubicBezTo>
-                  <a:pt x="30731" y="7"/>
-                  <a:pt x="30744" y="10"/>
-                  <a:pt x="30756" y="15"/>
-                </a:cubicBezTo>
-                <a:cubicBezTo>
-                  <a:pt x="30768" y="20"/>
-                  <a:pt x="30779" y="26"/>
-                  <a:pt x="30790" y="34"/>
-                </a:cubicBezTo>
-                <a:cubicBezTo>
-                  <a:pt x="30801" y="41"/>
-                  <a:pt x="30811" y="49"/>
-                  <a:pt x="30820" y="58"/>
-                </a:cubicBezTo>
-                <a:cubicBezTo>
-                  <a:pt x="30829" y="68"/>
-                  <a:pt x="30838" y="78"/>
-                  <a:pt x="30845" y="88"/>
-                </a:cubicBezTo>
-                <a:cubicBezTo>
-                  <a:pt x="30852" y="99"/>
-                  <a:pt x="30858" y="111"/>
-                  <a:pt x="30863" y="123"/>
-                </a:cubicBezTo>
-                <a:cubicBezTo>
-                  <a:pt x="30868" y="135"/>
-                  <a:pt x="30872" y="147"/>
-                  <a:pt x="30874" y="160"/>
-                </a:cubicBezTo>
-                <a:cubicBezTo>
-                  <a:pt x="30877" y="173"/>
-                  <a:pt x="30878" y="186"/>
-                  <a:pt x="30878" y="199"/>
-                </a:cubicBezTo>
-                <a:lnTo>
-                  <a:pt x="30878" y="1416"/>
-                </a:lnTo>
-                <a:cubicBezTo>
-                  <a:pt x="30878" y="1429"/>
-                  <a:pt x="30877" y="1442"/>
-                  <a:pt x="30874" y="1454"/>
-                </a:cubicBezTo>
-                <a:cubicBezTo>
-                  <a:pt x="30872" y="1467"/>
-                  <a:pt x="30868" y="1480"/>
-                  <a:pt x="30863" y="1492"/>
-                </a:cubicBezTo>
-                <a:cubicBezTo>
-                  <a:pt x="30858" y="1504"/>
-                  <a:pt x="30852" y="1516"/>
-                  <a:pt x="30845" y="1527"/>
-                </a:cubicBezTo>
-                <a:cubicBezTo>
-                  <a:pt x="30838" y="1538"/>
-                  <a:pt x="30829" y="1548"/>
-                  <a:pt x="30820" y="1557"/>
-                </a:cubicBezTo>
-                <a:cubicBezTo>
-                  <a:pt x="30811" y="1566"/>
-                  <a:pt x="30801" y="1575"/>
-                  <a:pt x="30790" y="1582"/>
-                </a:cubicBezTo>
-                <a:cubicBezTo>
-                  <a:pt x="30779" y="1589"/>
-                  <a:pt x="30768" y="1595"/>
-                  <a:pt x="30756" y="1600"/>
-                </a:cubicBezTo>
-                <a:cubicBezTo>
-                  <a:pt x="30744" y="1605"/>
-                  <a:pt x="30731" y="1609"/>
-                  <a:pt x="30719" y="1611"/>
-                </a:cubicBezTo>
-                <a:cubicBezTo>
-                  <a:pt x="30706" y="1614"/>
-                  <a:pt x="30693" y="1615"/>
-                  <a:pt x="30680" y="1615"/>
-                </a:cubicBezTo>
-                <a:lnTo>
-                  <a:pt x="199" y="1615"/>
-                </a:lnTo>
-                <a:cubicBezTo>
-                  <a:pt x="186" y="1615"/>
-                  <a:pt x="173" y="1614"/>
-                  <a:pt x="160" y="1611"/>
-                </a:cubicBezTo>
-                <a:cubicBezTo>
-                  <a:pt x="147" y="1609"/>
-                  <a:pt x="135" y="1605"/>
-                  <a:pt x="123" y="1600"/>
-                </a:cubicBezTo>
-                <a:cubicBezTo>
-                  <a:pt x="111" y="1595"/>
-                  <a:pt x="99" y="1589"/>
-                  <a:pt x="89" y="1582"/>
-                </a:cubicBezTo>
-                <a:cubicBezTo>
-                  <a:pt x="78" y="1575"/>
-                  <a:pt x="68" y="1566"/>
-                  <a:pt x="59" y="1557"/>
-                </a:cubicBezTo>
-                <a:cubicBezTo>
-                  <a:pt x="49" y="1548"/>
-                  <a:pt x="41" y="1538"/>
-                  <a:pt x="34" y="1527"/>
-                </a:cubicBezTo>
-                <a:cubicBezTo>
-                  <a:pt x="27" y="1516"/>
-                  <a:pt x="20" y="1504"/>
-                  <a:pt x="16" y="1492"/>
-                </a:cubicBezTo>
-                <a:cubicBezTo>
-                  <a:pt x="11" y="1480"/>
-                  <a:pt x="7" y="1467"/>
-                  <a:pt x="4" y="1454"/>
-                </a:cubicBezTo>
-                <a:cubicBezTo>
-                  <a:pt x="2" y="1442"/>
-                  <a:pt x="0" y="1429"/>
-                  <a:pt x="0" y="1416"/>
-                </a:cubicBezTo>
-                <a:close/>
-              </a:path>
-            </a:pathLst>
-          </a:custGeom>
-          <a:noFill/>
-          <a:ln w="9360">
-            <a:solidFill>
-              <a:srgbClr val="d7dde5"/>
-            </a:solidFill>
-            <a:miter/>
-          </a:ln>
-        </p:spPr>
-        <p:txBody>
-          <a:bodyPr lIns="4680" rIns="4680" tIns="4680" bIns="4680" anchor="t">
-            <a:noAutofit/>
-          </a:bodyPr>
-          <a:p>
-            <a:endParaRPr b="0" lang="en-US" sz="2400" spc="-1" strike="noStrike">
-              <a:solidFill>
-                <a:srgbClr val="000000"/>
-              </a:solidFill>
-              <a:latin typeface="Times New Roman"/>
-            </a:endParaRPr>
-          </a:p>
-        </p:txBody>
-      </p:sp>
-      <p:sp>
-        <p:nvSpPr>
-          <p:cNvPr id="218" name=""/>
-          <p:cNvSpPr txBox="1"/>
-          <p:nvPr/>
-        </p:nvSpPr>
-        <p:spPr>
-          <a:xfrm>
-            <a:off x="2912040" y="940680"/>
-            <a:ext cx="275760" cy="308160"/>
-          </a:xfrm>
-          <a:prstGeom prst="rect">
-            <a:avLst/>
-          </a:prstGeom>
-          <a:noFill/>
-          <a:ln w="0">
-            <a:noFill/>
-          </a:ln>
-        </p:spPr>
-        <p:txBody>
-          <a:bodyPr wrap="none" lIns="0" rIns="0" tIns="0" bIns="0" anchor="t">
-            <a:noAutofit/>
-          </a:bodyPr>
-          <a:p>
-            <a:r>
-              <a:rPr b="0" lang="en-US" sz="2170" spc="-1" strike="noStrike">
-                <a:solidFill>
-                  <a:srgbClr val="111111"/>
-                </a:solidFill>
-                <a:latin typeface="Arial"/>
-                <a:ea typeface="Arial"/>
-              </a:rPr>
-              <a:t>:</a:t>
-            </a:r>
-            <a:endParaRPr b="0" lang="en-US" sz="2170" spc="-1" strike="noStrike">
-              <a:solidFill>
-                <a:srgbClr val="000000"/>
-              </a:solidFill>
-              <a:latin typeface="Times New Roman"/>
-            </a:endParaRPr>
-          </a:p>
-        </p:txBody>
-      </p:sp>
-      <p:sp>
-        <p:nvSpPr>
-          <p:cNvPr id="219" name=""/>
-          <p:cNvSpPr txBox="1"/>
-          <p:nvPr/>
-        </p:nvSpPr>
-        <p:spPr>
-          <a:xfrm>
-            <a:off x="714240" y="1669680"/>
-            <a:ext cx="9556200" cy="198360"/>
-          </a:xfrm>
-          <a:prstGeom prst="rect">
-            <a:avLst/>
-          </a:prstGeom>
-          <a:noFill/>
-          <a:ln w="0">
-            <a:noFill/>
-          </a:ln>
-        </p:spPr>
-        <p:txBody>
-          <a:bodyPr wrap="none" lIns="0" rIns="0" tIns="0" bIns="0" anchor="t">
-            <a:noAutofit/>
-          </a:bodyPr>
-          <a:p>
-            <a:r>
-              <a:rPr b="0" lang="en-US" sz="1350" spc="-1" strike="noStrike">
-                <a:solidFill>
-                  <a:srgbClr val="1b1b1b"/>
-                </a:solidFill>
-                <a:latin typeface="DejaVuSansMono"/>
-                <a:ea typeface="DejaVuSansMono"/>
-              </a:rPr>
-              <a:t>npx @marp-team/marp-cli ./slide.md --pptx --pptx-editable --allow-local-files -o ./slide.pptx</a:t>
-            </a:r>
-            <a:endParaRPr b="0" lang="en-US" sz="1350" spc="-1" strike="noStrike">
-              <a:solidFill>
-                <a:srgbClr val="000000"/>
-              </a:solidFill>
-              <a:latin typeface="Times New Roman"/>
-            </a:endParaRPr>
-          </a:p>
-        </p:txBody>
-      </p:sp>
-      <p:sp>
-        <p:nvSpPr>
-          <p:cNvPr id="220" name=""/>
-          <p:cNvSpPr txBox="1"/>
-          <p:nvPr/>
-        </p:nvSpPr>
-        <p:spPr>
-          <a:xfrm>
-            <a:off x="533520" y="2051280"/>
-            <a:ext cx="1104120" cy="399600"/>
-          </a:xfrm>
-          <a:prstGeom prst="rect">
-            <a:avLst/>
-          </a:prstGeom>
-          <a:noFill/>
-          <a:ln w="0">
-            <a:noFill/>
-          </a:ln>
-        </p:spPr>
-        <p:txBody>
-          <a:bodyPr wrap="none" lIns="0" rIns="0" tIns="0" bIns="0" anchor="t">
-            <a:noAutofit/>
-          </a:bodyPr>
-          <a:p>
-            <a:r>
-              <a:rPr b="0" lang="zh-CN" sz="2170" spc="-1" strike="noStrike">
-                <a:solidFill>
-                  <a:srgbClr val="111111"/>
-                </a:solidFill>
-                <a:latin typeface="NotoSansCJKjp"/>
-                <a:ea typeface="NotoSansCJKjp"/>
-              </a:rPr>
-              <a:t>ただし、</a:t>
-            </a:r>
-            <a:endParaRPr b="0" lang="en-US" sz="2170" spc="-1" strike="noStrike">
-              <a:solidFill>
-                <a:srgbClr val="000000"/>
-              </a:solidFill>
-              <a:latin typeface="Times New Roman"/>
-            </a:endParaRPr>
-          </a:p>
-        </p:txBody>
-      </p:sp>
-      <p:sp>
-        <p:nvSpPr>
-          <p:cNvPr id="221" name=""/>
-          <p:cNvSpPr txBox="1"/>
-          <p:nvPr/>
-        </p:nvSpPr>
-        <p:spPr>
-          <a:xfrm>
-            <a:off x="1638360" y="2121840"/>
-            <a:ext cx="1334160" cy="308160"/>
-          </a:xfrm>
-          <a:prstGeom prst="rect">
-            <a:avLst/>
-          </a:prstGeom>
-          <a:noFill/>
-          <a:ln w="0">
-            <a:noFill/>
-          </a:ln>
-        </p:spPr>
-        <p:txBody>
-          <a:bodyPr wrap="none" lIns="0" rIns="0" tIns="0" bIns="0" anchor="t">
-            <a:noAutofit/>
-          </a:bodyPr>
-          <a:p>
-            <a:r>
-              <a:rPr b="0" lang="en-US" sz="2170" spc="-1" strike="noStrike">
-                <a:solidFill>
-                  <a:srgbClr val="111111"/>
-                </a:solidFill>
-                <a:latin typeface="Arial"/>
-                <a:ea typeface="Arial"/>
-              </a:rPr>
-              <a:t>LibreOffice</a:t>
-            </a:r>
-            <a:endParaRPr b="0" lang="en-US" sz="2170" spc="-1" strike="noStrike">
-              <a:solidFill>
-                <a:srgbClr val="000000"/>
-              </a:solidFill>
-              <a:latin typeface="Times New Roman"/>
-            </a:endParaRPr>
-          </a:p>
-        </p:txBody>
-      </p:sp>
-      <p:sp>
-        <p:nvSpPr>
-          <p:cNvPr id="222" name=""/>
-          <p:cNvSpPr txBox="1"/>
-          <p:nvPr/>
-        </p:nvSpPr>
-        <p:spPr>
-          <a:xfrm>
-            <a:off x="2968920" y="2051280"/>
-            <a:ext cx="3586680" cy="399600"/>
-          </a:xfrm>
-          <a:prstGeom prst="rect">
-            <a:avLst/>
-          </a:prstGeom>
-          <a:noFill/>
-          <a:ln w="0">
-            <a:noFill/>
-          </a:ln>
-        </p:spPr>
-        <p:txBody>
-          <a:bodyPr wrap="none" lIns="0" rIns="0" tIns="0" bIns="0" anchor="t">
-            <a:noAutofit/>
-          </a:bodyPr>
-          <a:p>
-            <a:r>
-              <a:rPr b="0" lang="zh-CN" sz="2170" spc="-1" strike="noStrike">
-                <a:solidFill>
-                  <a:srgbClr val="111111"/>
-                </a:solidFill>
-                <a:latin typeface="NotoSansCJKjp"/>
-                <a:ea typeface="NotoSansCJKjp"/>
-              </a:rPr>
-              <a:t>のインストールが必要です。</a:t>
-            </a:r>
-            <a:endParaRPr b="0" lang="en-US" sz="2170" spc="-1" strike="noStrike">
-              <a:solidFill>
-                <a:srgbClr val="000000"/>
-              </a:solidFill>
-              <a:latin typeface="Times New Roman"/>
-            </a:endParaRPr>
-          </a:p>
-        </p:txBody>
-      </p:sp>
-      <p:sp>
-        <p:nvSpPr>
-          <p:cNvPr id="223" name=""/>
-          <p:cNvSpPr txBox="1"/>
-          <p:nvPr/>
-        </p:nvSpPr>
-        <p:spPr>
-          <a:xfrm>
-            <a:off x="533520" y="2460960"/>
-            <a:ext cx="8827560" cy="399600"/>
-          </a:xfrm>
-          <a:prstGeom prst="rect">
-            <a:avLst/>
-          </a:prstGeom>
-          <a:noFill/>
-          <a:ln w="0">
-            <a:noFill/>
-          </a:ln>
-        </p:spPr>
-        <p:txBody>
-          <a:bodyPr wrap="none" lIns="0" rIns="0" tIns="0" bIns="0" anchor="t">
-            <a:noAutofit/>
-          </a:bodyPr>
-          <a:p>
-            <a:r>
-              <a:rPr b="0" lang="zh-CN" sz="2170" spc="-1" strike="noStrike">
-                <a:solidFill>
-                  <a:srgbClr val="111111"/>
-                </a:solidFill>
-                <a:latin typeface="NotoSansCJKjp"/>
-                <a:ea typeface="NotoSansCJKjp"/>
-              </a:rPr>
-              <a:t>実験的機能なので数式の表⽰がおかしくなったりすることがあります。</a:t>
-            </a:r>
-            <a:endParaRPr b="0" lang="en-US" sz="2170" spc="-1" strike="noStrike">
-              <a:solidFill>
-                <a:srgbClr val="000000"/>
-              </a:solidFill>
-              <a:latin typeface="Times New Roman"/>
-            </a:endParaRPr>
-          </a:p>
-        </p:txBody>
-      </p:sp>
-      <p:sp>
-        <p:nvSpPr>
-          <p:cNvPr id="224" name=""/>
-          <p:cNvSpPr txBox="1"/>
-          <p:nvPr/>
-        </p:nvSpPr>
-        <p:spPr>
-          <a:xfrm>
-            <a:off x="533520" y="2950560"/>
-            <a:ext cx="720000" cy="308160"/>
-          </a:xfrm>
-          <a:prstGeom prst="rect">
-            <a:avLst/>
-          </a:prstGeom>
-          <a:noFill/>
-          <a:ln w="0">
-            <a:noFill/>
-          </a:ln>
-        </p:spPr>
-        <p:txBody>
-          <a:bodyPr wrap="none" lIns="0" rIns="0" tIns="0" bIns="0" anchor="t">
-            <a:noAutofit/>
-          </a:bodyPr>
-          <a:p>
-            <a:r>
-              <a:rPr b="0" lang="en-US" sz="2170" spc="-1" strike="noStrike">
-                <a:solidFill>
-                  <a:srgbClr val="111111"/>
-                </a:solidFill>
-                <a:latin typeface="Arial"/>
-                <a:ea typeface="Arial"/>
-              </a:rPr>
-              <a:t>PPTX</a:t>
-            </a:r>
-            <a:endParaRPr b="0" lang="en-US" sz="2170" spc="-1" strike="noStrike">
-              <a:solidFill>
-                <a:srgbClr val="000000"/>
-              </a:solidFill>
-              <a:latin typeface="Times New Roman"/>
-            </a:endParaRPr>
-          </a:p>
-        </p:txBody>
-      </p:sp>
-      <p:sp>
-        <p:nvSpPr>
-          <p:cNvPr id="225" name=""/>
-          <p:cNvSpPr txBox="1"/>
-          <p:nvPr/>
-        </p:nvSpPr>
-        <p:spPr>
-          <a:xfrm>
-            <a:off x="1254960" y="2880000"/>
-            <a:ext cx="4965840" cy="399600"/>
-          </a:xfrm>
-          <a:prstGeom prst="rect">
-            <a:avLst/>
-          </a:prstGeom>
-          <a:noFill/>
-          <a:ln w="0">
-            <a:noFill/>
-          </a:ln>
-        </p:spPr>
-        <p:txBody>
-          <a:bodyPr wrap="none" lIns="0" rIns="0" tIns="0" bIns="0" anchor="t">
-            <a:noAutofit/>
-          </a:bodyPr>
-          <a:p>
-            <a:r>
-              <a:rPr b="0" lang="zh-CN" sz="2170" spc="-1" strike="noStrike">
-                <a:solidFill>
-                  <a:srgbClr val="111111"/>
-                </a:solidFill>
-                <a:latin typeface="NotoSansCJKjp"/>
-                <a:ea typeface="NotoSansCJKjp"/>
-              </a:rPr>
-              <a:t>ファイルに変換するとしても編集不可の</a:t>
-            </a:r>
-            <a:endParaRPr b="0" lang="en-US" sz="2170" spc="-1" strike="noStrike">
-              <a:solidFill>
-                <a:srgbClr val="000000"/>
-              </a:solidFill>
-              <a:latin typeface="Times New Roman"/>
-            </a:endParaRPr>
-          </a:p>
-        </p:txBody>
-      </p:sp>
-      <p:sp>
-        <p:nvSpPr>
-          <p:cNvPr id="226" name=""/>
-          <p:cNvSpPr txBox="1"/>
-          <p:nvPr/>
-        </p:nvSpPr>
-        <p:spPr>
-          <a:xfrm>
-            <a:off x="6204960" y="2950560"/>
-            <a:ext cx="720000" cy="308160"/>
-          </a:xfrm>
-          <a:prstGeom prst="rect">
-            <a:avLst/>
-          </a:prstGeom>
-          <a:noFill/>
-          <a:ln w="0">
-            <a:noFill/>
-          </a:ln>
-        </p:spPr>
-        <p:txBody>
-          <a:bodyPr wrap="none" lIns="0" rIns="0" tIns="0" bIns="0" anchor="t">
-            <a:noAutofit/>
-          </a:bodyPr>
-          <a:p>
-            <a:r>
-              <a:rPr b="0" lang="en-US" sz="2170" spc="-1" strike="noStrike">
-                <a:solidFill>
-                  <a:srgbClr val="111111"/>
-                </a:solidFill>
-                <a:latin typeface="Arial"/>
-                <a:ea typeface="Arial"/>
-              </a:rPr>
-              <a:t>PPTX</a:t>
-            </a:r>
-            <a:endParaRPr b="0" lang="en-US" sz="2170" spc="-1" strike="noStrike">
-              <a:solidFill>
-                <a:srgbClr val="000000"/>
-              </a:solidFill>
-              <a:latin typeface="Times New Roman"/>
-            </a:endParaRPr>
-          </a:p>
-        </p:txBody>
-      </p:sp>
-      <p:sp>
-        <p:nvSpPr>
-          <p:cNvPr id="227" name=""/>
-          <p:cNvSpPr txBox="1"/>
-          <p:nvPr/>
-        </p:nvSpPr>
-        <p:spPr>
-          <a:xfrm>
-            <a:off x="6926400" y="2880000"/>
-            <a:ext cx="4690080" cy="399600"/>
-          </a:xfrm>
-          <a:prstGeom prst="rect">
-            <a:avLst/>
-          </a:prstGeom>
-          <a:noFill/>
-          <a:ln w="0">
-            <a:noFill/>
-          </a:ln>
-        </p:spPr>
-        <p:txBody>
-          <a:bodyPr wrap="none" lIns="0" rIns="0" tIns="0" bIns="0" anchor="t">
-            <a:noAutofit/>
-          </a:bodyPr>
-          <a:p>
-            <a:r>
-              <a:rPr b="0" lang="zh-CN" sz="2170" spc="-1" strike="noStrike">
-                <a:solidFill>
-                  <a:srgbClr val="111111"/>
-                </a:solidFill>
-                <a:latin typeface="NotoSansCJKjp"/>
-                <a:ea typeface="NotoSansCJKjp"/>
-              </a:rPr>
-              <a:t>ファイルへの変換の⽅が安定しやすい</a:t>
-            </a:r>
-            <a:endParaRPr b="0" lang="en-US" sz="2170" spc="-1" strike="noStrike">
-              <a:solidFill>
-                <a:srgbClr val="000000"/>
-              </a:solidFill>
-              <a:latin typeface="Times New Roman"/>
-            </a:endParaRPr>
-          </a:p>
-        </p:txBody>
-      </p:sp>
-      <p:sp>
-        <p:nvSpPr>
-          <p:cNvPr id="228" name=""/>
-          <p:cNvSpPr txBox="1"/>
-          <p:nvPr/>
-        </p:nvSpPr>
-        <p:spPr>
-          <a:xfrm>
-            <a:off x="533520" y="3289680"/>
-            <a:ext cx="828360" cy="399600"/>
-          </a:xfrm>
-          <a:prstGeom prst="rect">
-            <a:avLst/>
-          </a:prstGeom>
-          <a:noFill/>
-          <a:ln w="0">
-            <a:noFill/>
-          </a:ln>
-        </p:spPr>
-        <p:txBody>
-          <a:bodyPr wrap="none" lIns="0" rIns="0" tIns="0" bIns="0" anchor="t">
-            <a:noAutofit/>
-          </a:bodyPr>
-          <a:p>
-            <a:r>
-              <a:rPr b="0" lang="zh-CN" sz="2170" spc="-1" strike="noStrike">
-                <a:solidFill>
-                  <a:srgbClr val="111111"/>
-                </a:solidFill>
-                <a:latin typeface="NotoSansCJKjp"/>
-                <a:ea typeface="NotoSansCJKjp"/>
-              </a:rPr>
-              <a:t>です。</a:t>
-            </a:r>
-            <a:endParaRPr b="0" lang="en-US" sz="2170" spc="-1" strike="noStrike">
-              <a:solidFill>
-                <a:srgbClr val="000000"/>
-              </a:solidFill>
-              <a:latin typeface="Times New Roman"/>
-            </a:endParaRPr>
-          </a:p>
-        </p:txBody>
-      </p:sp>
-      <p:sp>
-        <p:nvSpPr>
-          <p:cNvPr id="229" name=""/>
-          <p:cNvSpPr/>
-          <p:nvPr/>
-        </p:nvSpPr>
-        <p:spPr>
-          <a:xfrm>
-            <a:off x="537840" y="4414680"/>
-            <a:ext cx="11116080" cy="581400"/>
-          </a:xfrm>
-          <a:custGeom>
-            <a:avLst/>
-            <a:gdLst/>
-            <a:ahLst/>
-            <a:rect l="0" t="0" r="r" b="b"/>
-            <a:pathLst>
-              <a:path w="30878" h="1615">
-                <a:moveTo>
-                  <a:pt x="0" y="1415"/>
-                </a:moveTo>
-                <a:lnTo>
-                  <a:pt x="0" y="198"/>
-                </a:lnTo>
-                <a:cubicBezTo>
-                  <a:pt x="0" y="185"/>
-                  <a:pt x="2" y="172"/>
-                  <a:pt x="4" y="160"/>
-                </a:cubicBezTo>
-                <a:cubicBezTo>
-                  <a:pt x="7" y="147"/>
-                  <a:pt x="11" y="134"/>
-                  <a:pt x="16" y="122"/>
-                </a:cubicBezTo>
-                <a:cubicBezTo>
-                  <a:pt x="20" y="110"/>
-                  <a:pt x="27" y="99"/>
-                  <a:pt x="34" y="88"/>
-                </a:cubicBezTo>
-                <a:cubicBezTo>
-                  <a:pt x="41" y="77"/>
-                  <a:pt x="49" y="67"/>
-                  <a:pt x="59" y="58"/>
-                </a:cubicBezTo>
-                <a:cubicBezTo>
-                  <a:pt x="68" y="49"/>
-                  <a:pt x="78" y="41"/>
-                  <a:pt x="89" y="33"/>
-                </a:cubicBezTo>
-                <a:cubicBezTo>
-                  <a:pt x="99" y="26"/>
-                  <a:pt x="111" y="20"/>
-                  <a:pt x="123" y="15"/>
-                </a:cubicBezTo>
-                <a:cubicBezTo>
-                  <a:pt x="135" y="10"/>
-                  <a:pt x="147" y="6"/>
-                  <a:pt x="160" y="4"/>
-                </a:cubicBezTo>
-                <a:cubicBezTo>
-                  <a:pt x="173" y="1"/>
-                  <a:pt x="186" y="0"/>
-                  <a:pt x="199" y="0"/>
-                </a:cubicBezTo>
-                <a:lnTo>
-                  <a:pt x="30680" y="0"/>
-                </a:lnTo>
-                <a:cubicBezTo>
-                  <a:pt x="30693" y="0"/>
-                  <a:pt x="30706" y="1"/>
-                  <a:pt x="30719" y="4"/>
-                </a:cubicBezTo>
-                <a:cubicBezTo>
-                  <a:pt x="30731" y="6"/>
-                  <a:pt x="30744" y="10"/>
-                  <a:pt x="30756" y="15"/>
-                </a:cubicBezTo>
-                <a:cubicBezTo>
-                  <a:pt x="30768" y="20"/>
-                  <a:pt x="30779" y="26"/>
-                  <a:pt x="30790" y="33"/>
-                </a:cubicBezTo>
-                <a:cubicBezTo>
-                  <a:pt x="30801" y="41"/>
-                  <a:pt x="30811" y="49"/>
-                  <a:pt x="30820" y="58"/>
-                </a:cubicBezTo>
-                <a:cubicBezTo>
-                  <a:pt x="30829" y="67"/>
-                  <a:pt x="30838" y="77"/>
-                  <a:pt x="30845" y="88"/>
-                </a:cubicBezTo>
-                <a:cubicBezTo>
-                  <a:pt x="30852" y="99"/>
-                  <a:pt x="30858" y="110"/>
-                  <a:pt x="30863" y="122"/>
-                </a:cubicBezTo>
-                <a:cubicBezTo>
-                  <a:pt x="30868" y="134"/>
-                  <a:pt x="30872" y="147"/>
-                  <a:pt x="30874" y="160"/>
-                </a:cubicBezTo>
-                <a:cubicBezTo>
-                  <a:pt x="30877" y="172"/>
-                  <a:pt x="30878" y="185"/>
-                  <a:pt x="30878" y="198"/>
-                </a:cubicBezTo>
-                <a:lnTo>
-                  <a:pt x="30878" y="1415"/>
-                </a:lnTo>
-                <a:cubicBezTo>
-                  <a:pt x="30878" y="1428"/>
-                  <a:pt x="30877" y="1441"/>
-                  <a:pt x="30874" y="1455"/>
-                </a:cubicBezTo>
-                <a:cubicBezTo>
-                  <a:pt x="30872" y="1468"/>
-                  <a:pt x="30868" y="1480"/>
-                  <a:pt x="30863" y="1492"/>
-                </a:cubicBezTo>
-                <a:cubicBezTo>
-                  <a:pt x="30858" y="1504"/>
-                  <a:pt x="30852" y="1516"/>
-                  <a:pt x="30845" y="1527"/>
-                </a:cubicBezTo>
-                <a:cubicBezTo>
-                  <a:pt x="30838" y="1538"/>
-                  <a:pt x="30829" y="1548"/>
-                  <a:pt x="30820" y="1557"/>
-                </a:cubicBezTo>
-                <a:cubicBezTo>
-                  <a:pt x="30811" y="1566"/>
-                  <a:pt x="30801" y="1574"/>
-                  <a:pt x="30790" y="1581"/>
-                </a:cubicBezTo>
-                <a:cubicBezTo>
-                  <a:pt x="30779" y="1589"/>
-                  <a:pt x="30768" y="1595"/>
-                  <a:pt x="30756" y="1600"/>
-                </a:cubicBezTo>
-                <a:cubicBezTo>
-                  <a:pt x="30744" y="1605"/>
-                  <a:pt x="30731" y="1609"/>
-                  <a:pt x="30719" y="1611"/>
-                </a:cubicBezTo>
-                <a:cubicBezTo>
-                  <a:pt x="30706" y="1614"/>
-                  <a:pt x="30693" y="1615"/>
-                  <a:pt x="30680" y="1615"/>
-                </a:cubicBezTo>
-                <a:lnTo>
-                  <a:pt x="199" y="1615"/>
-                </a:lnTo>
-                <a:cubicBezTo>
-                  <a:pt x="186" y="1615"/>
-                  <a:pt x="173" y="1614"/>
-                  <a:pt x="160" y="1611"/>
-                </a:cubicBezTo>
-                <a:cubicBezTo>
-                  <a:pt x="147" y="1609"/>
-                  <a:pt x="135" y="1605"/>
-                  <a:pt x="123" y="1600"/>
-                </a:cubicBezTo>
-                <a:cubicBezTo>
-                  <a:pt x="111" y="1595"/>
-                  <a:pt x="99" y="1589"/>
-                  <a:pt x="89" y="1581"/>
-                </a:cubicBezTo>
-                <a:cubicBezTo>
-                  <a:pt x="78" y="1574"/>
-                  <a:pt x="68" y="1566"/>
-                  <a:pt x="59" y="1557"/>
-                </a:cubicBezTo>
-                <a:cubicBezTo>
-                  <a:pt x="49" y="1548"/>
-                  <a:pt x="41" y="1538"/>
-                  <a:pt x="34" y="1527"/>
-                </a:cubicBezTo>
-                <a:cubicBezTo>
-                  <a:pt x="27" y="1516"/>
-                  <a:pt x="20" y="1504"/>
-                  <a:pt x="16" y="1492"/>
-                </a:cubicBezTo>
-                <a:cubicBezTo>
-                  <a:pt x="11" y="1480"/>
-                  <a:pt x="7" y="1468"/>
-                  <a:pt x="4" y="1455"/>
-                </a:cubicBezTo>
-                <a:cubicBezTo>
-                  <a:pt x="2" y="1441"/>
-                  <a:pt x="0" y="1428"/>
-                  <a:pt x="0" y="1415"/>
-                </a:cubicBezTo>
-                <a:close/>
-              </a:path>
-            </a:pathLst>
-          </a:custGeom>
-          <a:solidFill>
-            <a:srgbClr val="f5f7fa"/>
-          </a:solidFill>
-          <a:ln w="0">
-            <a:noFill/>
-          </a:ln>
-        </p:spPr>
-        <p:txBody>
-          <a:bodyPr lIns="0" rIns="0" tIns="0" bIns="0" anchor="t">
-            <a:noAutofit/>
-          </a:bodyPr>
-          <a:p>
-            <a:endParaRPr b="0" lang="en-US" sz="2400" spc="-1" strike="noStrike">
-              <a:solidFill>
-                <a:srgbClr val="000000"/>
-              </a:solidFill>
-              <a:latin typeface="Times New Roman"/>
-            </a:endParaRPr>
-          </a:p>
-        </p:txBody>
-      </p:sp>
-      <p:sp>
-        <p:nvSpPr>
-          <p:cNvPr id="230" name=""/>
-          <p:cNvSpPr/>
-          <p:nvPr/>
-        </p:nvSpPr>
-        <p:spPr>
-          <a:xfrm>
-            <a:off x="537840" y="4414680"/>
-            <a:ext cx="11116080" cy="581400"/>
-          </a:xfrm>
-          <a:custGeom>
-            <a:avLst/>
-            <a:gdLst/>
-            <a:ahLst/>
-            <a:rect l="0" t="0" r="r" b="b"/>
-            <a:pathLst>
-              <a:path w="30878" h="1615">
-                <a:moveTo>
-                  <a:pt x="0" y="1415"/>
-                </a:moveTo>
-                <a:lnTo>
-                  <a:pt x="0" y="198"/>
-                </a:lnTo>
-                <a:cubicBezTo>
-                  <a:pt x="0" y="185"/>
-                  <a:pt x="2" y="172"/>
-                  <a:pt x="4" y="160"/>
-                </a:cubicBezTo>
-                <a:cubicBezTo>
-                  <a:pt x="7" y="147"/>
-                  <a:pt x="11" y="134"/>
-                  <a:pt x="16" y="122"/>
-                </a:cubicBezTo>
-                <a:cubicBezTo>
-                  <a:pt x="20" y="110"/>
-                  <a:pt x="27" y="99"/>
-                  <a:pt x="34" y="88"/>
-                </a:cubicBezTo>
-                <a:cubicBezTo>
-                  <a:pt x="41" y="77"/>
-                  <a:pt x="49" y="67"/>
-                  <a:pt x="59" y="58"/>
-                </a:cubicBezTo>
-                <a:cubicBezTo>
-                  <a:pt x="68" y="49"/>
-                  <a:pt x="78" y="41"/>
-                  <a:pt x="89" y="33"/>
-                </a:cubicBezTo>
-                <a:cubicBezTo>
-                  <a:pt x="99" y="26"/>
-                  <a:pt x="111" y="20"/>
-                  <a:pt x="123" y="15"/>
-                </a:cubicBezTo>
-                <a:cubicBezTo>
-                  <a:pt x="135" y="10"/>
-                  <a:pt x="147" y="6"/>
-                  <a:pt x="160" y="4"/>
-                </a:cubicBezTo>
-                <a:cubicBezTo>
-                  <a:pt x="173" y="1"/>
-                  <a:pt x="186" y="0"/>
-                  <a:pt x="199" y="0"/>
-                </a:cubicBezTo>
-                <a:lnTo>
-                  <a:pt x="30680" y="0"/>
-                </a:lnTo>
-                <a:cubicBezTo>
-                  <a:pt x="30693" y="0"/>
-                  <a:pt x="30706" y="1"/>
-                  <a:pt x="30719" y="4"/>
-                </a:cubicBezTo>
-                <a:cubicBezTo>
-                  <a:pt x="30731" y="6"/>
-                  <a:pt x="30744" y="10"/>
-                  <a:pt x="30756" y="15"/>
-                </a:cubicBezTo>
-                <a:cubicBezTo>
-                  <a:pt x="30768" y="20"/>
-                  <a:pt x="30779" y="26"/>
-                  <a:pt x="30790" y="33"/>
-                </a:cubicBezTo>
-                <a:cubicBezTo>
-                  <a:pt x="30801" y="41"/>
-                  <a:pt x="30811" y="49"/>
-                  <a:pt x="30820" y="58"/>
-                </a:cubicBezTo>
-                <a:cubicBezTo>
-                  <a:pt x="30829" y="67"/>
-                  <a:pt x="30838" y="77"/>
-                  <a:pt x="30845" y="88"/>
-                </a:cubicBezTo>
-                <a:cubicBezTo>
-                  <a:pt x="30852" y="99"/>
-                  <a:pt x="30858" y="110"/>
-                  <a:pt x="30863" y="122"/>
-                </a:cubicBezTo>
-                <a:cubicBezTo>
-                  <a:pt x="30868" y="134"/>
-                  <a:pt x="30872" y="147"/>
-                  <a:pt x="30874" y="160"/>
-                </a:cubicBezTo>
-                <a:cubicBezTo>
-                  <a:pt x="30877" y="172"/>
-                  <a:pt x="30878" y="185"/>
-                  <a:pt x="30878" y="198"/>
-                </a:cubicBezTo>
-                <a:lnTo>
-                  <a:pt x="30878" y="1415"/>
-                </a:lnTo>
-                <a:cubicBezTo>
-                  <a:pt x="30878" y="1428"/>
-                  <a:pt x="30877" y="1441"/>
-                  <a:pt x="30874" y="1455"/>
-                </a:cubicBezTo>
-                <a:cubicBezTo>
-                  <a:pt x="30872" y="1468"/>
-                  <a:pt x="30868" y="1480"/>
-                  <a:pt x="30863" y="1492"/>
-                </a:cubicBezTo>
-                <a:cubicBezTo>
-                  <a:pt x="30858" y="1504"/>
-                  <a:pt x="30852" y="1516"/>
-                  <a:pt x="30845" y="1527"/>
-                </a:cubicBezTo>
-                <a:cubicBezTo>
-                  <a:pt x="30838" y="1538"/>
-                  <a:pt x="30829" y="1548"/>
-                  <a:pt x="30820" y="1557"/>
-                </a:cubicBezTo>
-                <a:cubicBezTo>
-                  <a:pt x="30811" y="1566"/>
-                  <a:pt x="30801" y="1574"/>
-                  <a:pt x="30790" y="1581"/>
-                </a:cubicBezTo>
-                <a:cubicBezTo>
-                  <a:pt x="30779" y="1589"/>
-                  <a:pt x="30768" y="1595"/>
-                  <a:pt x="30756" y="1600"/>
-                </a:cubicBezTo>
-                <a:cubicBezTo>
-                  <a:pt x="30744" y="1605"/>
-                  <a:pt x="30731" y="1609"/>
-                  <a:pt x="30719" y="1611"/>
-                </a:cubicBezTo>
-                <a:cubicBezTo>
-                  <a:pt x="30706" y="1614"/>
-                  <a:pt x="30693" y="1615"/>
-                  <a:pt x="30680" y="1615"/>
-                </a:cubicBezTo>
-                <a:lnTo>
-                  <a:pt x="199" y="1615"/>
-                </a:lnTo>
-                <a:cubicBezTo>
-                  <a:pt x="186" y="1615"/>
-                  <a:pt x="173" y="1614"/>
-                  <a:pt x="160" y="1611"/>
-                </a:cubicBezTo>
-                <a:cubicBezTo>
-                  <a:pt x="147" y="1609"/>
-                  <a:pt x="135" y="1605"/>
-                  <a:pt x="123" y="1600"/>
-                </a:cubicBezTo>
-                <a:cubicBezTo>
-                  <a:pt x="111" y="1595"/>
-                  <a:pt x="99" y="1589"/>
-                  <a:pt x="89" y="1581"/>
-                </a:cubicBezTo>
-                <a:cubicBezTo>
-                  <a:pt x="78" y="1574"/>
-                  <a:pt x="68" y="1566"/>
-                  <a:pt x="59" y="1557"/>
-                </a:cubicBezTo>
-                <a:cubicBezTo>
-                  <a:pt x="49" y="1548"/>
-                  <a:pt x="41" y="1538"/>
-                  <a:pt x="34" y="1527"/>
-                </a:cubicBezTo>
-                <a:cubicBezTo>
-                  <a:pt x="27" y="1516"/>
-                  <a:pt x="20" y="1504"/>
-                  <a:pt x="16" y="1492"/>
-                </a:cubicBezTo>
-                <a:cubicBezTo>
-                  <a:pt x="11" y="1480"/>
-                  <a:pt x="7" y="1468"/>
-                  <a:pt x="4" y="1455"/>
-                </a:cubicBezTo>
-                <a:cubicBezTo>
-                  <a:pt x="2" y="1441"/>
-                  <a:pt x="0" y="1428"/>
-                  <a:pt x="0" y="1415"/>
-                </a:cubicBezTo>
-                <a:close/>
-              </a:path>
-            </a:pathLst>
-          </a:custGeom>
-          <a:noFill/>
-          <a:ln w="9360">
-            <a:solidFill>
-              <a:srgbClr val="d7dde5"/>
-            </a:solidFill>
-            <a:miter/>
-          </a:ln>
-        </p:spPr>
-        <p:txBody>
-          <a:bodyPr lIns="4680" rIns="4680" tIns="4680" bIns="4680" anchor="t">
-            <a:noAutofit/>
-          </a:bodyPr>
-          <a:p>
-            <a:endParaRPr b="0" lang="en-US" sz="2400" spc="-1" strike="noStrike">
-              <a:solidFill>
-                <a:srgbClr val="000000"/>
-              </a:solidFill>
-              <a:latin typeface="Times New Roman"/>
-            </a:endParaRPr>
-          </a:p>
-        </p:txBody>
-      </p:sp>
-      <p:sp>
-        <p:nvSpPr>
-          <p:cNvPr id="231" name=""/>
-          <p:cNvSpPr txBox="1"/>
-          <p:nvPr/>
-        </p:nvSpPr>
-        <p:spPr>
-          <a:xfrm>
-            <a:off x="533520" y="3874320"/>
-            <a:ext cx="628560" cy="308160"/>
-          </a:xfrm>
-          <a:prstGeom prst="rect">
-            <a:avLst/>
-          </a:prstGeom>
-          <a:noFill/>
-          <a:ln w="0">
-            <a:noFill/>
-          </a:ln>
-        </p:spPr>
-        <p:txBody>
-          <a:bodyPr wrap="none" lIns="0" rIns="0" tIns="0" bIns="0" anchor="t">
-            <a:noAutofit/>
-          </a:bodyPr>
-          <a:p>
-            <a:r>
-              <a:rPr b="0" lang="en-US" sz="2170" spc="-1" strike="noStrike">
-                <a:solidFill>
-                  <a:srgbClr val="111111"/>
-                </a:solidFill>
-                <a:latin typeface="Arial"/>
-                <a:ea typeface="Arial"/>
-              </a:rPr>
-              <a:t>PDF:</a:t>
-            </a:r>
-            <a:endParaRPr b="0" lang="en-US" sz="2170" spc="-1" strike="noStrike">
-              <a:solidFill>
-                <a:srgbClr val="000000"/>
-              </a:solidFill>
-              <a:latin typeface="Times New Roman"/>
-            </a:endParaRPr>
-          </a:p>
-        </p:txBody>
-      </p:sp>
-      <p:sp>
-        <p:nvSpPr>
-          <p:cNvPr id="232" name=""/>
-          <p:cNvSpPr txBox="1"/>
-          <p:nvPr/>
-        </p:nvSpPr>
-        <p:spPr>
-          <a:xfrm>
-            <a:off x="714240" y="4593960"/>
-            <a:ext cx="7707600" cy="198360"/>
-          </a:xfrm>
-          <a:prstGeom prst="rect">
-            <a:avLst/>
-          </a:prstGeom>
-          <a:noFill/>
-          <a:ln w="0">
-            <a:noFill/>
-          </a:ln>
-        </p:spPr>
-        <p:txBody>
-          <a:bodyPr wrap="none" lIns="0" rIns="0" tIns="0" bIns="0" anchor="t">
-            <a:noAutofit/>
-          </a:bodyPr>
-          <a:p>
-            <a:r>
-              <a:rPr b="0" lang="en-US" sz="1350" spc="-1" strike="noStrike">
-                <a:solidFill>
-                  <a:srgbClr val="1b1b1b"/>
-                </a:solidFill>
-                <a:latin typeface="DejaVuSansMono"/>
-                <a:ea typeface="DejaVuSansMono"/>
-              </a:rPr>
-              <a:t>npx @marp-team/marp-cli ./slide.md --pdf --allow-local-files -o ./slide.pdf</a:t>
-            </a:r>
-            <a:endParaRPr b="0" lang="en-US" sz="1350" spc="-1" strike="noStrike">
-              <a:solidFill>
-                <a:srgbClr val="000000"/>
-              </a:solidFill>
-              <a:latin typeface="Times New Roman"/>
-            </a:endParaRPr>
-          </a:p>
-        </p:txBody>
-      </p:sp>
-      <p:sp>
-        <p:nvSpPr>
-          <p:cNvPr id="233" name=""/>
-          <p:cNvSpPr txBox="1"/>
-          <p:nvPr/>
-        </p:nvSpPr>
-        <p:spPr>
-          <a:xfrm>
-            <a:off x="914400" y="414000"/>
-            <a:ext cx="1063080" cy="279360"/>
-          </a:xfrm>
-          <a:prstGeom prst="rect">
-            <a:avLst/>
-          </a:prstGeom>
-          <a:noFill/>
-          <a:ln w="0">
-            <a:noFill/>
-          </a:ln>
-        </p:spPr>
-        <p:txBody>
-          <a:bodyPr wrap="none" lIns="0" rIns="0" tIns="0" bIns="0" anchor="t">
-            <a:noAutofit/>
-          </a:bodyPr>
-          <a:p>
-            <a:r>
-              <a:rPr b="1" lang="en-US" sz="1950" spc="-1" strike="noStrike">
-                <a:solidFill>
-                  <a:srgbClr val="111111"/>
-                </a:solidFill>
-                <a:latin typeface="Arial"/>
-                <a:ea typeface="Arial"/>
-              </a:rPr>
-              <a:t>Marp CLI</a:t>
-            </a:r>
-            <a:endParaRPr b="0" lang="en-US" sz="1950" spc="-1" strike="noStrike">
-              <a:solidFill>
-                <a:srgbClr val="000000"/>
-              </a:solidFill>
-              <a:latin typeface="Times New Roman"/>
-            </a:endParaRPr>
-          </a:p>
-        </p:txBody>
-      </p:sp>
-      <p:sp>
-        <p:nvSpPr>
-          <p:cNvPr id="234" name=""/>
-          <p:cNvSpPr/>
-          <p:nvPr/>
-        </p:nvSpPr>
-        <p:spPr>
-          <a:xfrm>
-            <a:off x="533160" y="561960"/>
-            <a:ext cx="267120" cy="57240"/>
-          </a:xfrm>
-          <a:custGeom>
-            <a:avLst/>
-            <a:gdLst/>
-            <a:ahLst/>
-            <a:rect l="0" t="0" r="r" b="b"/>
-            <a:pathLst>
-              <a:path w="742" h="159">
-                <a:moveTo>
-                  <a:pt x="0" y="106"/>
-                </a:moveTo>
-                <a:lnTo>
-                  <a:pt x="0" y="52"/>
-                </a:lnTo>
-                <a:cubicBezTo>
-                  <a:pt x="0" y="45"/>
-                  <a:pt x="2" y="39"/>
-                  <a:pt x="4" y="32"/>
-                </a:cubicBezTo>
-                <a:cubicBezTo>
-                  <a:pt x="7" y="26"/>
-                  <a:pt x="11" y="20"/>
-                  <a:pt x="16" y="15"/>
-                </a:cubicBezTo>
-                <a:cubicBezTo>
-                  <a:pt x="21" y="10"/>
-                  <a:pt x="26" y="6"/>
-                  <a:pt x="33" y="4"/>
-                </a:cubicBezTo>
-                <a:cubicBezTo>
-                  <a:pt x="39" y="1"/>
-                  <a:pt x="46" y="0"/>
-                  <a:pt x="53" y="0"/>
-                </a:cubicBezTo>
-                <a:lnTo>
-                  <a:pt x="689" y="0"/>
-                </a:lnTo>
-                <a:cubicBezTo>
-                  <a:pt x="696" y="0"/>
-                  <a:pt x="703" y="1"/>
-                  <a:pt x="709" y="4"/>
-                </a:cubicBezTo>
-                <a:cubicBezTo>
-                  <a:pt x="716" y="6"/>
-                  <a:pt x="722" y="10"/>
-                  <a:pt x="727" y="15"/>
-                </a:cubicBezTo>
-                <a:cubicBezTo>
-                  <a:pt x="731" y="20"/>
-                  <a:pt x="735" y="26"/>
-                  <a:pt x="738" y="32"/>
-                </a:cubicBezTo>
-                <a:cubicBezTo>
-                  <a:pt x="741" y="39"/>
-                  <a:pt x="742" y="45"/>
-                  <a:pt x="742" y="52"/>
-                </a:cubicBezTo>
-                <a:lnTo>
-                  <a:pt x="742" y="106"/>
-                </a:lnTo>
-                <a:cubicBezTo>
-                  <a:pt x="742" y="113"/>
-                  <a:pt x="741" y="120"/>
-                  <a:pt x="738" y="127"/>
-                </a:cubicBezTo>
-                <a:cubicBezTo>
-                  <a:pt x="735" y="133"/>
-                  <a:pt x="731" y="139"/>
-                  <a:pt x="727" y="144"/>
-                </a:cubicBezTo>
-                <a:cubicBezTo>
-                  <a:pt x="722" y="149"/>
-                  <a:pt x="716" y="153"/>
-                  <a:pt x="709" y="155"/>
-                </a:cubicBezTo>
-                <a:cubicBezTo>
-                  <a:pt x="703" y="158"/>
-                  <a:pt x="696" y="159"/>
-                  <a:pt x="689" y="159"/>
-                </a:cubicBezTo>
-                <a:lnTo>
-                  <a:pt x="53" y="159"/>
-                </a:lnTo>
-                <a:cubicBezTo>
-                  <a:pt x="46" y="159"/>
-                  <a:pt x="39" y="158"/>
-                  <a:pt x="33" y="155"/>
-                </a:cubicBezTo>
-                <a:cubicBezTo>
-                  <a:pt x="26" y="153"/>
-                  <a:pt x="21" y="149"/>
-                  <a:pt x="16" y="144"/>
-                </a:cubicBezTo>
-                <a:cubicBezTo>
-                  <a:pt x="11" y="139"/>
-                  <a:pt x="7" y="133"/>
-                  <a:pt x="4" y="127"/>
-                </a:cubicBezTo>
-                <a:cubicBezTo>
-                  <a:pt x="2" y="120"/>
-                  <a:pt x="0" y="113"/>
-                  <a:pt x="0" y="106"/>
-                </a:cubicBezTo>
-                <a:close/>
-              </a:path>
-            </a:pathLst>
-          </a:custGeom>
-          <a:solidFill>
-            <a:srgbClr val="0b4b78"/>
-          </a:solidFill>
-          <a:ln w="0">
-            <a:noFill/>
-          </a:ln>
-        </p:spPr>
-        <p:txBody>
-          <a:bodyPr lIns="0" rIns="0" tIns="0" bIns="0" anchor="t">
-            <a:noAutofit/>
-          </a:bodyPr>
-          <a:p>
-            <a:endParaRPr b="0" lang="en-US" sz="2400" spc="-1" strike="noStrike">
-              <a:solidFill>
-                <a:srgbClr val="ffffff"/>
-              </a:solidFill>
-              <a:latin typeface="Times New Roman"/>
-            </a:endParaRPr>
-          </a:p>
-        </p:txBody>
-      </p:sp>
-      <p:sp>
-        <p:nvSpPr>
-          <p:cNvPr id="235" name=""/>
-          <p:cNvSpPr txBox="1"/>
-          <p:nvPr/>
-        </p:nvSpPr>
-        <p:spPr>
-          <a:xfrm>
-            <a:off x="1973880" y="351000"/>
-            <a:ext cx="994320" cy="360000"/>
-          </a:xfrm>
-          <a:prstGeom prst="rect">
-            <a:avLst/>
-          </a:prstGeom>
-          <a:noFill/>
-          <a:ln w="0">
-            <a:noFill/>
-          </a:ln>
-        </p:spPr>
-        <p:txBody>
-          <a:bodyPr wrap="none" lIns="0" rIns="0" tIns="0" bIns="0" anchor="t">
-            <a:noAutofit/>
-          </a:bodyPr>
-          <a:p>
-            <a:r>
-              <a:rPr b="0" lang="zh-CN" sz="1950" spc="-1" strike="noStrike">
-                <a:solidFill>
-                  <a:srgbClr val="111111"/>
-                </a:solidFill>
-                <a:latin typeface="NotoSansCJKjp"/>
-                <a:ea typeface="NotoSansCJKjp"/>
-              </a:rPr>
-              <a:t>コマンド</a:t>
-            </a:r>
-            <a:endParaRPr b="0" lang="en-US" sz="1950" spc="-1" strike="noStrike">
-              <a:solidFill>
-                <a:srgbClr val="000000"/>
-              </a:solidFill>
-              <a:latin typeface="Times New Roman"/>
-            </a:endParaRPr>
-          </a:p>
-        </p:txBody>
-      </p:sp>
-      <p:sp>
-        <p:nvSpPr>
-          <p:cNvPr id="236" name=""/>
-          <p:cNvSpPr txBox="1"/>
-          <p:nvPr/>
-        </p:nvSpPr>
-        <p:spPr>
-          <a:xfrm>
-            <a:off x="11776680" y="6458400"/>
-            <a:ext cx="339120" cy="340200"/>
-          </a:xfrm>
-          <a:prstGeom prst="rect">
-            <a:avLst/>
-          </a:prstGeom>
-          <a:noFill/>
-          <a:ln w="0">
-            <a:noFill/>
-          </a:ln>
-        </p:spPr>
-        <p:txBody>
-          <a:bodyPr wrap="none" lIns="0" rIns="0" tIns="0" bIns="0" anchor="t">
-            <a:noAutofit/>
-          </a:bodyPr>
-          <a:p>
-            <a:r>
-              <a:rPr b="0" lang="en-US" sz="2400" spc="-1" strike="noStrike">
-                <a:solidFill>
-                  <a:srgbClr val="111111"/>
-                </a:solidFill>
-                <a:latin typeface="Arial"/>
-                <a:ea typeface="Arial"/>
-              </a:rPr>
-              <a:t>10</a:t>
             </a:r>
             <a:endParaRPr b="0" lang="en-US" sz="2400" spc="-1" strike="noStrike">
               <a:solidFill>
@@ -4435,32 +2213,9 @@
           </a:p>
         </p:txBody>
       </p:sp>
-      <p:pic>
-        <p:nvPicPr>
-          <p:cNvPr id="41" name="" descr=""/>
-          <p:cNvPicPr/>
-          <p:nvPr/>
-        </p:nvPicPr>
-        <p:blipFill>
-          <a:blip r:embed="rId1"/>
-          <a:stretch/>
-        </p:blipFill>
-        <p:spPr>
-          <a:xfrm>
-            <a:off x="10744200" y="-219240"/>
-            <a:ext cx="1256760" cy="1256760"/>
-          </a:xfrm>
-          <a:prstGeom prst="rect">
-            <a:avLst/>
-          </a:prstGeom>
-          <a:ln w="0">
-            <a:noFill/>
-          </a:ln>
-        </p:spPr>
-      </p:pic>
-      <p:sp>
-        <p:nvSpPr>
-          <p:cNvPr id="42" name=""/>
+      <p:sp>
+        <p:nvSpPr>
+          <p:cNvPr id="41" name=""/>
           <p:cNvSpPr/>
           <p:nvPr/>
         </p:nvSpPr>
@@ -4518,7 +2273,7 @@
       </p:sp>
       <p:sp>
         <p:nvSpPr>
-          <p:cNvPr id="43" name=""/>
+          <p:cNvPr id="42" name=""/>
           <p:cNvSpPr txBox="1"/>
           <p:nvPr/>
         </p:nvSpPr>
@@ -4561,7 +2316,7 @@
       </p:sp>
       <p:sp>
         <p:nvSpPr>
-          <p:cNvPr id="44" name=""/>
+          <p:cNvPr id="43" name=""/>
           <p:cNvSpPr txBox="1"/>
           <p:nvPr/>
         </p:nvSpPr>
@@ -4634,7 +2389,7 @@
       </p:grpSpPr>
       <p:sp>
         <p:nvSpPr>
-          <p:cNvPr id="45" name=""/>
+          <p:cNvPr id="44" name=""/>
           <p:cNvSpPr/>
           <p:nvPr/>
         </p:nvSpPr>
@@ -4692,7 +2447,7 @@
       </p:sp>
       <p:sp>
         <p:nvSpPr>
-          <p:cNvPr id="46" name=""/>
+          <p:cNvPr id="45" name=""/>
           <p:cNvSpPr/>
           <p:nvPr/>
         </p:nvSpPr>
@@ -4750,7 +2505,7 @@
       </p:sp>
       <p:sp>
         <p:nvSpPr>
-          <p:cNvPr id="47" name=""/>
+          <p:cNvPr id="46" name=""/>
           <p:cNvSpPr/>
           <p:nvPr/>
         </p:nvSpPr>
@@ -4808,7 +2563,7 @@
       </p:sp>
       <p:sp>
         <p:nvSpPr>
-          <p:cNvPr id="48" name=""/>
+          <p:cNvPr id="47" name=""/>
           <p:cNvSpPr/>
           <p:nvPr/>
         </p:nvSpPr>
@@ -5024,32 +2779,9 @@
           </a:p>
         </p:txBody>
       </p:sp>
-      <p:pic>
-        <p:nvPicPr>
-          <p:cNvPr id="49" name="" descr=""/>
-          <p:cNvPicPr/>
-          <p:nvPr/>
-        </p:nvPicPr>
-        <p:blipFill>
-          <a:blip r:embed="rId1"/>
-          <a:stretch/>
-        </p:blipFill>
-        <p:spPr>
-          <a:xfrm>
-            <a:off x="10515600" y="38160"/>
-            <a:ext cx="1142640" cy="1142640"/>
-          </a:xfrm>
-          <a:prstGeom prst="rect">
-            <a:avLst/>
-          </a:prstGeom>
-          <a:ln w="0">
-            <a:noFill/>
-          </a:ln>
-        </p:spPr>
-      </p:pic>
-      <p:sp>
-        <p:nvSpPr>
-          <p:cNvPr id="50" name=""/>
+      <p:sp>
+        <p:nvSpPr>
+          <p:cNvPr id="48" name=""/>
           <p:cNvSpPr txBox="1"/>
           <p:nvPr/>
         </p:nvSpPr>
@@ -5092,7 +2824,7 @@
       </p:sp>
       <p:sp>
         <p:nvSpPr>
-          <p:cNvPr id="51" name=""/>
+          <p:cNvPr id="49" name=""/>
           <p:cNvSpPr txBox="1"/>
           <p:nvPr/>
         </p:nvSpPr>
@@ -5135,7 +2867,7 @@
       </p:sp>
       <p:sp>
         <p:nvSpPr>
-          <p:cNvPr id="52" name=""/>
+          <p:cNvPr id="50" name=""/>
           <p:cNvSpPr txBox="1"/>
           <p:nvPr/>
         </p:nvSpPr>
@@ -5178,7 +2910,7 @@
       </p:sp>
       <p:sp>
         <p:nvSpPr>
-          <p:cNvPr id="53" name=""/>
+          <p:cNvPr id="51" name=""/>
           <p:cNvSpPr/>
           <p:nvPr/>
         </p:nvSpPr>
@@ -5316,7 +3048,7 @@
       </p:sp>
       <p:sp>
         <p:nvSpPr>
-          <p:cNvPr id="54" name=""/>
+          <p:cNvPr id="52" name=""/>
           <p:cNvSpPr txBox="1"/>
           <p:nvPr/>
         </p:nvSpPr>
@@ -5359,7 +3091,7 @@
       </p:sp>
       <p:sp>
         <p:nvSpPr>
-          <p:cNvPr id="55" name=""/>
+          <p:cNvPr id="53" name=""/>
           <p:cNvSpPr txBox="1"/>
           <p:nvPr/>
         </p:nvSpPr>
@@ -5432,7 +3164,7 @@
       </p:grpSpPr>
       <p:sp>
         <p:nvSpPr>
-          <p:cNvPr id="56" name=""/>
+          <p:cNvPr id="54" name=""/>
           <p:cNvSpPr/>
           <p:nvPr/>
         </p:nvSpPr>
@@ -5490,7 +3222,7 @@
       </p:sp>
       <p:sp>
         <p:nvSpPr>
-          <p:cNvPr id="57" name=""/>
+          <p:cNvPr id="55" name=""/>
           <p:cNvSpPr/>
           <p:nvPr/>
         </p:nvSpPr>
@@ -5548,7 +3280,7 @@
       </p:sp>
       <p:sp>
         <p:nvSpPr>
-          <p:cNvPr id="58" name=""/>
+          <p:cNvPr id="56" name=""/>
           <p:cNvSpPr/>
           <p:nvPr/>
         </p:nvSpPr>
@@ -5606,7 +3338,7 @@
       </p:sp>
       <p:sp>
         <p:nvSpPr>
-          <p:cNvPr id="59" name=""/>
+          <p:cNvPr id="57" name=""/>
           <p:cNvSpPr/>
           <p:nvPr/>
         </p:nvSpPr>
@@ -5822,55 +3554,9 @@
           </a:p>
         </p:txBody>
       </p:sp>
-      <p:pic>
-        <p:nvPicPr>
-          <p:cNvPr id="60" name="" descr=""/>
-          <p:cNvPicPr/>
-          <p:nvPr/>
-        </p:nvPicPr>
-        <p:blipFill>
-          <a:blip r:embed="rId1"/>
-          <a:stretch/>
-        </p:blipFill>
-        <p:spPr>
-          <a:xfrm>
-            <a:off x="10515600" y="38160"/>
-            <a:ext cx="1142640" cy="1142640"/>
-          </a:xfrm>
-          <a:prstGeom prst="rect">
-            <a:avLst/>
-          </a:prstGeom>
-          <a:ln w="0">
-            <a:noFill/>
-          </a:ln>
-        </p:spPr>
-      </p:pic>
-      <p:pic>
-        <p:nvPicPr>
-          <p:cNvPr id="61" name="" descr=""/>
-          <p:cNvPicPr/>
-          <p:nvPr/>
-        </p:nvPicPr>
-        <p:blipFill>
-          <a:blip r:embed="rId2"/>
-          <a:stretch/>
-        </p:blipFill>
-        <p:spPr>
-          <a:xfrm>
-            <a:off x="1343160" y="895320"/>
-            <a:ext cx="666360" cy="666360"/>
-          </a:xfrm>
-          <a:prstGeom prst="rect">
-            <a:avLst/>
-          </a:prstGeom>
-          <a:ln w="0">
-            <a:noFill/>
-          </a:ln>
-        </p:spPr>
-      </p:pic>
-      <p:sp>
-        <p:nvSpPr>
-          <p:cNvPr id="62" name=""/>
+      <p:sp>
+        <p:nvSpPr>
+          <p:cNvPr id="58" name=""/>
           <p:cNvSpPr/>
           <p:nvPr/>
         </p:nvSpPr>
@@ -6008,7 +3694,7 @@
       </p:sp>
       <p:sp>
         <p:nvSpPr>
-          <p:cNvPr id="63" name=""/>
+          <p:cNvPr id="59" name=""/>
           <p:cNvSpPr txBox="1"/>
           <p:nvPr/>
         </p:nvSpPr>
@@ -6051,7 +3737,7 @@
       </p:sp>
       <p:sp>
         <p:nvSpPr>
-          <p:cNvPr id="64" name=""/>
+          <p:cNvPr id="60" name=""/>
           <p:cNvSpPr txBox="1"/>
           <p:nvPr/>
         </p:nvSpPr>
@@ -6124,7 +3810,7 @@
       </p:grpSpPr>
       <p:sp>
         <p:nvSpPr>
-          <p:cNvPr id="65" name=""/>
+          <p:cNvPr id="61" name=""/>
           <p:cNvSpPr/>
           <p:nvPr/>
         </p:nvSpPr>
@@ -6182,7 +3868,7 @@
       </p:sp>
       <p:sp>
         <p:nvSpPr>
-          <p:cNvPr id="66" name=""/>
+          <p:cNvPr id="62" name=""/>
           <p:cNvSpPr/>
           <p:nvPr/>
         </p:nvSpPr>
@@ -6240,7 +3926,7 @@
       </p:sp>
       <p:sp>
         <p:nvSpPr>
-          <p:cNvPr id="67" name=""/>
+          <p:cNvPr id="63" name=""/>
           <p:cNvSpPr/>
           <p:nvPr/>
         </p:nvSpPr>
@@ -6298,7 +3984,7 @@
       </p:sp>
       <p:sp>
         <p:nvSpPr>
-          <p:cNvPr id="68" name=""/>
+          <p:cNvPr id="64" name=""/>
           <p:cNvSpPr/>
           <p:nvPr/>
         </p:nvSpPr>
@@ -6514,39 +4200,16 @@
           </a:p>
         </p:txBody>
       </p:sp>
-      <p:pic>
-        <p:nvPicPr>
-          <p:cNvPr id="69" name="" descr=""/>
-          <p:cNvPicPr/>
-          <p:nvPr/>
-        </p:nvPicPr>
-        <p:blipFill>
-          <a:blip r:embed="rId1"/>
-          <a:stretch/>
-        </p:blipFill>
-        <p:spPr>
-          <a:xfrm>
-            <a:off x="10515600" y="38160"/>
-            <a:ext cx="1142640" cy="1142640"/>
-          </a:xfrm>
-          <a:prstGeom prst="rect">
-            <a:avLst/>
-          </a:prstGeom>
-          <a:ln w="0">
-            <a:noFill/>
-          </a:ln>
-        </p:spPr>
-      </p:pic>
-      <p:sp>
-        <p:nvSpPr>
-          <p:cNvPr id="70" name=""/>
+      <p:sp>
+        <p:nvSpPr>
+          <p:cNvPr id="65" name=""/>
           <p:cNvSpPr/>
           <p:nvPr/>
         </p:nvSpPr>
         <p:spPr>
           <a:xfrm>
             <a:off x="537840" y="975960"/>
-            <a:ext cx="11116080" cy="1296000"/>
+            <a:ext cx="11116080" cy="1276920"/>
           </a:xfrm>
           <a:custGeom>
             <a:avLst/>
@@ -6554,9 +4217,9 @@
             <a:ahLst/>
             <a:rect l="0" t="0" r="r" b="b"/>
             <a:pathLst>
-              <a:path w="30878" h="3600">
+              <a:path w="30878" h="3547">
                 <a:moveTo>
-                  <a:pt x="0" y="3401"/>
+                  <a:pt x="0" y="3348"/>
                 </a:moveTo>
                 <a:lnTo>
                   <a:pt x="0" y="199"/>
@@ -6645,90 +4308,90 @@
                   <a:pt x="30878" y="199"/>
                 </a:cubicBezTo>
                 <a:lnTo>
-                  <a:pt x="30878" y="3401"/>
-                </a:lnTo>
-                <a:cubicBezTo>
-                  <a:pt x="30878" y="3414"/>
-                  <a:pt x="30877" y="3427"/>
-                  <a:pt x="30874" y="3440"/>
-                </a:cubicBezTo>
-                <a:cubicBezTo>
-                  <a:pt x="30872" y="3453"/>
-                  <a:pt x="30868" y="3465"/>
-                  <a:pt x="30863" y="3477"/>
-                </a:cubicBezTo>
-                <a:cubicBezTo>
-                  <a:pt x="30858" y="3489"/>
-                  <a:pt x="30852" y="3501"/>
-                  <a:pt x="30845" y="3512"/>
-                </a:cubicBezTo>
-                <a:cubicBezTo>
-                  <a:pt x="30838" y="3522"/>
-                  <a:pt x="30829" y="3532"/>
-                  <a:pt x="30820" y="3542"/>
-                </a:cubicBezTo>
-                <a:cubicBezTo>
-                  <a:pt x="30811" y="3551"/>
-                  <a:pt x="30801" y="3559"/>
-                  <a:pt x="30790" y="3566"/>
-                </a:cubicBezTo>
-                <a:cubicBezTo>
-                  <a:pt x="30779" y="3574"/>
-                  <a:pt x="30768" y="3580"/>
-                  <a:pt x="30756" y="3585"/>
-                </a:cubicBezTo>
-                <a:cubicBezTo>
-                  <a:pt x="30744" y="3590"/>
-                  <a:pt x="30731" y="3593"/>
-                  <a:pt x="30719" y="3596"/>
-                </a:cubicBezTo>
-                <a:cubicBezTo>
-                  <a:pt x="30706" y="3599"/>
-                  <a:pt x="30693" y="3600"/>
-                  <a:pt x="30680" y="3600"/>
-                </a:cubicBezTo>
-                <a:lnTo>
-                  <a:pt x="199" y="3600"/>
-                </a:lnTo>
-                <a:cubicBezTo>
-                  <a:pt x="186" y="3600"/>
-                  <a:pt x="173" y="3599"/>
-                  <a:pt x="160" y="3596"/>
-                </a:cubicBezTo>
-                <a:cubicBezTo>
-                  <a:pt x="147" y="3593"/>
-                  <a:pt x="135" y="3590"/>
-                  <a:pt x="123" y="3585"/>
-                </a:cubicBezTo>
-                <a:cubicBezTo>
-                  <a:pt x="111" y="3580"/>
-                  <a:pt x="99" y="3574"/>
-                  <a:pt x="89" y="3566"/>
-                </a:cubicBezTo>
-                <a:cubicBezTo>
-                  <a:pt x="78" y="3559"/>
-                  <a:pt x="68" y="3551"/>
-                  <a:pt x="59" y="3542"/>
-                </a:cubicBezTo>
-                <a:cubicBezTo>
-                  <a:pt x="49" y="3532"/>
-                  <a:pt x="41" y="3522"/>
-                  <a:pt x="34" y="3512"/>
-                </a:cubicBezTo>
-                <a:cubicBezTo>
-                  <a:pt x="27" y="3501"/>
-                  <a:pt x="20" y="3489"/>
-                  <a:pt x="16" y="3477"/>
-                </a:cubicBezTo>
-                <a:cubicBezTo>
-                  <a:pt x="11" y="3465"/>
-                  <a:pt x="7" y="3453"/>
-                  <a:pt x="4" y="3440"/>
-                </a:cubicBezTo>
-                <a:cubicBezTo>
-                  <a:pt x="2" y="3427"/>
-                  <a:pt x="0" y="3414"/>
-                  <a:pt x="0" y="3401"/>
+                  <a:pt x="30878" y="3348"/>
+                </a:lnTo>
+                <a:cubicBezTo>
+                  <a:pt x="30878" y="3361"/>
+                  <a:pt x="30877" y="3374"/>
+                  <a:pt x="30874" y="3387"/>
+                </a:cubicBezTo>
+                <a:cubicBezTo>
+                  <a:pt x="30872" y="3400"/>
+                  <a:pt x="30868" y="3412"/>
+                  <a:pt x="30863" y="3424"/>
+                </a:cubicBezTo>
+                <a:cubicBezTo>
+                  <a:pt x="30858" y="3436"/>
+                  <a:pt x="30852" y="3448"/>
+                  <a:pt x="30845" y="3459"/>
+                </a:cubicBezTo>
+                <a:cubicBezTo>
+                  <a:pt x="30838" y="3470"/>
+                  <a:pt x="30829" y="3480"/>
+                  <a:pt x="30820" y="3489"/>
+                </a:cubicBezTo>
+                <a:cubicBezTo>
+                  <a:pt x="30811" y="3498"/>
+                  <a:pt x="30801" y="3506"/>
+                  <a:pt x="30790" y="3513"/>
+                </a:cubicBezTo>
+                <a:cubicBezTo>
+                  <a:pt x="30779" y="3521"/>
+                  <a:pt x="30768" y="3527"/>
+                  <a:pt x="30756" y="3532"/>
+                </a:cubicBezTo>
+                <a:cubicBezTo>
+                  <a:pt x="30744" y="3537"/>
+                  <a:pt x="30731" y="3541"/>
+                  <a:pt x="30719" y="3543"/>
+                </a:cubicBezTo>
+                <a:cubicBezTo>
+                  <a:pt x="30706" y="3546"/>
+                  <a:pt x="30693" y="3547"/>
+                  <a:pt x="30680" y="3547"/>
+                </a:cubicBezTo>
+                <a:lnTo>
+                  <a:pt x="199" y="3547"/>
+                </a:lnTo>
+                <a:cubicBezTo>
+                  <a:pt x="186" y="3547"/>
+                  <a:pt x="173" y="3546"/>
+                  <a:pt x="160" y="3543"/>
+                </a:cubicBezTo>
+                <a:cubicBezTo>
+                  <a:pt x="147" y="3541"/>
+                  <a:pt x="135" y="3537"/>
+                  <a:pt x="123" y="3532"/>
+                </a:cubicBezTo>
+                <a:cubicBezTo>
+                  <a:pt x="111" y="3527"/>
+                  <a:pt x="99" y="3521"/>
+                  <a:pt x="89" y="3513"/>
+                </a:cubicBezTo>
+                <a:cubicBezTo>
+                  <a:pt x="78" y="3506"/>
+                  <a:pt x="68" y="3498"/>
+                  <a:pt x="59" y="3489"/>
+                </a:cubicBezTo>
+                <a:cubicBezTo>
+                  <a:pt x="49" y="3480"/>
+                  <a:pt x="41" y="3470"/>
+                  <a:pt x="34" y="3459"/>
+                </a:cubicBezTo>
+                <a:cubicBezTo>
+                  <a:pt x="27" y="3448"/>
+                  <a:pt x="20" y="3436"/>
+                  <a:pt x="16" y="3424"/>
+                </a:cubicBezTo>
+                <a:cubicBezTo>
+                  <a:pt x="11" y="3412"/>
+                  <a:pt x="7" y="3400"/>
+                  <a:pt x="4" y="3387"/>
+                </a:cubicBezTo>
+                <a:cubicBezTo>
+                  <a:pt x="2" y="3374"/>
+                  <a:pt x="0" y="3361"/>
+                  <a:pt x="0" y="3348"/>
                 </a:cubicBezTo>
                 <a:close/>
               </a:path>
@@ -6757,14 +4420,14 @@
       </p:sp>
       <p:sp>
         <p:nvSpPr>
-          <p:cNvPr id="71" name=""/>
+          <p:cNvPr id="66" name=""/>
           <p:cNvSpPr/>
           <p:nvPr/>
         </p:nvSpPr>
         <p:spPr>
           <a:xfrm>
             <a:off x="537840" y="975960"/>
-            <a:ext cx="11116080" cy="1296000"/>
+            <a:ext cx="11116080" cy="1276920"/>
           </a:xfrm>
           <a:custGeom>
             <a:avLst/>
@@ -6772,9 +4435,9 @@
             <a:ahLst/>
             <a:rect l="0" t="0" r="r" b="b"/>
             <a:pathLst>
-              <a:path w="30878" h="3600">
+              <a:path w="30878" h="3547">
                 <a:moveTo>
-                  <a:pt x="0" y="3401"/>
+                  <a:pt x="0" y="3348"/>
                 </a:moveTo>
                 <a:lnTo>
                   <a:pt x="0" y="199"/>
@@ -6863,90 +4526,90 @@
                   <a:pt x="30878" y="199"/>
                 </a:cubicBezTo>
                 <a:lnTo>
-                  <a:pt x="30878" y="3401"/>
-                </a:lnTo>
-                <a:cubicBezTo>
-                  <a:pt x="30878" y="3414"/>
-                  <a:pt x="30877" y="3427"/>
-                  <a:pt x="30874" y="3440"/>
-                </a:cubicBezTo>
-                <a:cubicBezTo>
-                  <a:pt x="30872" y="3453"/>
-                  <a:pt x="30868" y="3465"/>
-                  <a:pt x="30863" y="3477"/>
-                </a:cubicBezTo>
-                <a:cubicBezTo>
-                  <a:pt x="30858" y="3489"/>
-                  <a:pt x="30852" y="3501"/>
-                  <a:pt x="30845" y="3512"/>
-                </a:cubicBezTo>
-                <a:cubicBezTo>
-                  <a:pt x="30838" y="3522"/>
-                  <a:pt x="30829" y="3532"/>
-                  <a:pt x="30820" y="3542"/>
-                </a:cubicBezTo>
-                <a:cubicBezTo>
-                  <a:pt x="30811" y="3551"/>
-                  <a:pt x="30801" y="3559"/>
-                  <a:pt x="30790" y="3566"/>
-                </a:cubicBezTo>
-                <a:cubicBezTo>
-                  <a:pt x="30779" y="3574"/>
-                  <a:pt x="30768" y="3580"/>
-                  <a:pt x="30756" y="3585"/>
-                </a:cubicBezTo>
-                <a:cubicBezTo>
-                  <a:pt x="30744" y="3590"/>
-                  <a:pt x="30731" y="3593"/>
-                  <a:pt x="30719" y="3596"/>
-                </a:cubicBezTo>
-                <a:cubicBezTo>
-                  <a:pt x="30706" y="3599"/>
-                  <a:pt x="30693" y="3600"/>
-                  <a:pt x="30680" y="3600"/>
-                </a:cubicBezTo>
-                <a:lnTo>
-                  <a:pt x="199" y="3600"/>
-                </a:lnTo>
-                <a:cubicBezTo>
-                  <a:pt x="186" y="3600"/>
-                  <a:pt x="173" y="3599"/>
-                  <a:pt x="160" y="3596"/>
-                </a:cubicBezTo>
-                <a:cubicBezTo>
-                  <a:pt x="147" y="3593"/>
-                  <a:pt x="135" y="3590"/>
-                  <a:pt x="123" y="3585"/>
-                </a:cubicBezTo>
-                <a:cubicBezTo>
-                  <a:pt x="111" y="3580"/>
-                  <a:pt x="99" y="3574"/>
-                  <a:pt x="89" y="3566"/>
-                </a:cubicBezTo>
-                <a:cubicBezTo>
-                  <a:pt x="78" y="3559"/>
-                  <a:pt x="68" y="3551"/>
-                  <a:pt x="59" y="3542"/>
-                </a:cubicBezTo>
-                <a:cubicBezTo>
-                  <a:pt x="49" y="3532"/>
-                  <a:pt x="41" y="3522"/>
-                  <a:pt x="34" y="3512"/>
-                </a:cubicBezTo>
-                <a:cubicBezTo>
-                  <a:pt x="27" y="3501"/>
-                  <a:pt x="20" y="3489"/>
-                  <a:pt x="16" y="3477"/>
-                </a:cubicBezTo>
-                <a:cubicBezTo>
-                  <a:pt x="11" y="3465"/>
-                  <a:pt x="7" y="3453"/>
-                  <a:pt x="4" y="3440"/>
-                </a:cubicBezTo>
-                <a:cubicBezTo>
-                  <a:pt x="2" y="3427"/>
-                  <a:pt x="0" y="3414"/>
-                  <a:pt x="0" y="3401"/>
+                  <a:pt x="30878" y="3348"/>
+                </a:lnTo>
+                <a:cubicBezTo>
+                  <a:pt x="30878" y="3361"/>
+                  <a:pt x="30877" y="3374"/>
+                  <a:pt x="30874" y="3387"/>
+                </a:cubicBezTo>
+                <a:cubicBezTo>
+                  <a:pt x="30872" y="3400"/>
+                  <a:pt x="30868" y="3412"/>
+                  <a:pt x="30863" y="3424"/>
+                </a:cubicBezTo>
+                <a:cubicBezTo>
+                  <a:pt x="30858" y="3436"/>
+                  <a:pt x="30852" y="3448"/>
+                  <a:pt x="30845" y="3459"/>
+                </a:cubicBezTo>
+                <a:cubicBezTo>
+                  <a:pt x="30838" y="3470"/>
+                  <a:pt x="30829" y="3480"/>
+                  <a:pt x="30820" y="3489"/>
+                </a:cubicBezTo>
+                <a:cubicBezTo>
+                  <a:pt x="30811" y="3498"/>
+                  <a:pt x="30801" y="3506"/>
+                  <a:pt x="30790" y="3513"/>
+                </a:cubicBezTo>
+                <a:cubicBezTo>
+                  <a:pt x="30779" y="3521"/>
+                  <a:pt x="30768" y="3527"/>
+                  <a:pt x="30756" y="3532"/>
+                </a:cubicBezTo>
+                <a:cubicBezTo>
+                  <a:pt x="30744" y="3537"/>
+                  <a:pt x="30731" y="3541"/>
+                  <a:pt x="30719" y="3543"/>
+                </a:cubicBezTo>
+                <a:cubicBezTo>
+                  <a:pt x="30706" y="3546"/>
+                  <a:pt x="30693" y="3547"/>
+                  <a:pt x="30680" y="3547"/>
+                </a:cubicBezTo>
+                <a:lnTo>
+                  <a:pt x="199" y="3547"/>
+                </a:lnTo>
+                <a:cubicBezTo>
+                  <a:pt x="186" y="3547"/>
+                  <a:pt x="173" y="3546"/>
+                  <a:pt x="160" y="3543"/>
+                </a:cubicBezTo>
+                <a:cubicBezTo>
+                  <a:pt x="147" y="3541"/>
+                  <a:pt x="135" y="3537"/>
+                  <a:pt x="123" y="3532"/>
+                </a:cubicBezTo>
+                <a:cubicBezTo>
+                  <a:pt x="111" y="3527"/>
+                  <a:pt x="99" y="3521"/>
+                  <a:pt x="89" y="3513"/>
+                </a:cubicBezTo>
+                <a:cubicBezTo>
+                  <a:pt x="78" y="3506"/>
+                  <a:pt x="68" y="3498"/>
+                  <a:pt x="59" y="3489"/>
+                </a:cubicBezTo>
+                <a:cubicBezTo>
+                  <a:pt x="49" y="3480"/>
+                  <a:pt x="41" y="3470"/>
+                  <a:pt x="34" y="3459"/>
+                </a:cubicBezTo>
+                <a:cubicBezTo>
+                  <a:pt x="27" y="3448"/>
+                  <a:pt x="20" y="3436"/>
+                  <a:pt x="16" y="3424"/>
+                </a:cubicBezTo>
+                <a:cubicBezTo>
+                  <a:pt x="11" y="3412"/>
+                  <a:pt x="7" y="3400"/>
+                  <a:pt x="4" y="3387"/>
+                </a:cubicBezTo>
+                <a:cubicBezTo>
+                  <a:pt x="2" y="3374"/>
+                  <a:pt x="0" y="3361"/>
+                  <a:pt x="0" y="3348"/>
                 </a:cubicBezTo>
                 <a:close/>
               </a:path>
@@ -6976,7 +4639,7 @@
       </p:sp>
       <p:sp>
         <p:nvSpPr>
-          <p:cNvPr id="72" name=""/>
+          <p:cNvPr id="67" name=""/>
           <p:cNvSpPr txBox="1"/>
           <p:nvPr/>
         </p:nvSpPr>
@@ -7049,7 +4712,7 @@
       </p:sp>
       <p:sp>
         <p:nvSpPr>
-          <p:cNvPr id="73" name=""/>
+          <p:cNvPr id="68" name=""/>
           <p:cNvSpPr txBox="1"/>
           <p:nvPr/>
         </p:nvSpPr>
@@ -7142,7 +4805,7 @@
       </p:sp>
       <p:sp>
         <p:nvSpPr>
-          <p:cNvPr id="74" name=""/>
+          <p:cNvPr id="69" name=""/>
           <p:cNvSpPr txBox="1"/>
           <p:nvPr/>
         </p:nvSpPr>
@@ -7215,7 +4878,7 @@
       </p:sp>
       <p:sp>
         <p:nvSpPr>
-          <p:cNvPr id="75" name=""/>
+          <p:cNvPr id="70" name=""/>
           <p:cNvSpPr txBox="1"/>
           <p:nvPr/>
         </p:nvSpPr>
@@ -7258,7 +4921,7 @@
       </p:sp>
       <p:sp>
         <p:nvSpPr>
-          <p:cNvPr id="76" name=""/>
+          <p:cNvPr id="71" name=""/>
           <p:cNvSpPr/>
           <p:nvPr/>
         </p:nvSpPr>
@@ -7396,7 +5059,7 @@
       </p:sp>
       <p:sp>
         <p:nvSpPr>
-          <p:cNvPr id="77" name=""/>
+          <p:cNvPr id="72" name=""/>
           <p:cNvSpPr txBox="1"/>
           <p:nvPr/>
         </p:nvSpPr>
@@ -7439,7 +5102,7 @@
       </p:sp>
       <p:sp>
         <p:nvSpPr>
-          <p:cNvPr id="78" name=""/>
+          <p:cNvPr id="73" name=""/>
           <p:cNvSpPr txBox="1"/>
           <p:nvPr/>
         </p:nvSpPr>
@@ -7512,7 +5175,7 @@
       </p:grpSpPr>
       <p:sp>
         <p:nvSpPr>
-          <p:cNvPr id="79" name=""/>
+          <p:cNvPr id="74" name=""/>
           <p:cNvSpPr/>
           <p:nvPr/>
         </p:nvSpPr>
@@ -7570,7 +5233,7 @@
       </p:sp>
       <p:sp>
         <p:nvSpPr>
-          <p:cNvPr id="80" name=""/>
+          <p:cNvPr id="75" name=""/>
           <p:cNvSpPr/>
           <p:nvPr/>
         </p:nvSpPr>
@@ -7628,7 +5291,7 @@
       </p:sp>
       <p:sp>
         <p:nvSpPr>
-          <p:cNvPr id="81" name=""/>
+          <p:cNvPr id="76" name=""/>
           <p:cNvSpPr/>
           <p:nvPr/>
         </p:nvSpPr>
@@ -7686,7 +5349,7 @@
       </p:sp>
       <p:sp>
         <p:nvSpPr>
-          <p:cNvPr id="82" name=""/>
+          <p:cNvPr id="77" name=""/>
           <p:cNvSpPr/>
           <p:nvPr/>
         </p:nvSpPr>
@@ -7902,32 +5565,9 @@
           </a:p>
         </p:txBody>
       </p:sp>
-      <p:pic>
-        <p:nvPicPr>
-          <p:cNvPr id="83" name="" descr=""/>
-          <p:cNvPicPr/>
-          <p:nvPr/>
-        </p:nvPicPr>
-        <p:blipFill>
-          <a:blip r:embed="rId1"/>
-          <a:stretch/>
-        </p:blipFill>
-        <p:spPr>
-          <a:xfrm>
-            <a:off x="10515600" y="38160"/>
-            <a:ext cx="1142640" cy="1142640"/>
-          </a:xfrm>
-          <a:prstGeom prst="rect">
-            <a:avLst/>
-          </a:prstGeom>
-          <a:ln w="0">
-            <a:noFill/>
-          </a:ln>
-        </p:spPr>
-      </p:pic>
-      <p:sp>
-        <p:nvSpPr>
-          <p:cNvPr id="84" name=""/>
+      <p:sp>
+        <p:nvSpPr>
+          <p:cNvPr id="78" name=""/>
           <p:cNvSpPr txBox="1"/>
           <p:nvPr/>
         </p:nvSpPr>
@@ -7970,7 +5610,7 @@
       </p:sp>
       <p:sp>
         <p:nvSpPr>
-          <p:cNvPr id="85" name=""/>
+          <p:cNvPr id="79" name=""/>
           <p:cNvSpPr txBox="1"/>
           <p:nvPr/>
         </p:nvSpPr>
@@ -8013,7 +5653,7 @@
       </p:sp>
       <p:sp>
         <p:nvSpPr>
-          <p:cNvPr id="86" name=""/>
+          <p:cNvPr id="80" name=""/>
           <p:cNvSpPr txBox="1"/>
           <p:nvPr/>
         </p:nvSpPr>
@@ -8056,7 +5696,7 @@
       </p:sp>
       <p:sp>
         <p:nvSpPr>
-          <p:cNvPr id="87" name=""/>
+          <p:cNvPr id="81" name=""/>
           <p:cNvSpPr txBox="1"/>
           <p:nvPr/>
         </p:nvSpPr>
@@ -8099,7 +5739,7 @@
       </p:sp>
       <p:sp>
         <p:nvSpPr>
-          <p:cNvPr id="88" name=""/>
+          <p:cNvPr id="82" name=""/>
           <p:cNvSpPr txBox="1"/>
           <p:nvPr/>
         </p:nvSpPr>
@@ -8152,7 +5792,7 @@
       </p:sp>
       <p:sp>
         <p:nvSpPr>
-          <p:cNvPr id="89" name=""/>
+          <p:cNvPr id="83" name=""/>
           <p:cNvSpPr txBox="1"/>
           <p:nvPr/>
         </p:nvSpPr>
@@ -8195,7 +5835,7 @@
       </p:sp>
       <p:sp>
         <p:nvSpPr>
-          <p:cNvPr id="90" name=""/>
+          <p:cNvPr id="84" name=""/>
           <p:cNvSpPr txBox="1"/>
           <p:nvPr/>
         </p:nvSpPr>
@@ -8238,7 +5878,7 @@
       </p:sp>
       <p:sp>
         <p:nvSpPr>
-          <p:cNvPr id="91" name=""/>
+          <p:cNvPr id="85" name=""/>
           <p:cNvSpPr txBox="1"/>
           <p:nvPr/>
         </p:nvSpPr>
@@ -8291,7 +5931,7 @@
       </p:sp>
       <p:sp>
         <p:nvSpPr>
-          <p:cNvPr id="92" name=""/>
+          <p:cNvPr id="86" name=""/>
           <p:cNvSpPr txBox="1"/>
           <p:nvPr/>
         </p:nvSpPr>
@@ -8334,7 +5974,7 @@
       </p:sp>
       <p:sp>
         <p:nvSpPr>
-          <p:cNvPr id="93" name=""/>
+          <p:cNvPr id="87" name=""/>
           <p:cNvSpPr txBox="1"/>
           <p:nvPr/>
         </p:nvSpPr>
@@ -8377,7 +6017,7 @@
       </p:sp>
       <p:sp>
         <p:nvSpPr>
-          <p:cNvPr id="94" name=""/>
+          <p:cNvPr id="88" name=""/>
           <p:cNvSpPr/>
           <p:nvPr/>
         </p:nvSpPr>
@@ -8435,7 +6075,7 @@
       </p:sp>
       <p:sp>
         <p:nvSpPr>
-          <p:cNvPr id="95" name=""/>
+          <p:cNvPr id="89" name=""/>
           <p:cNvSpPr txBox="1"/>
           <p:nvPr/>
         </p:nvSpPr>
@@ -8478,7 +6118,7 @@
       </p:sp>
       <p:sp>
         <p:nvSpPr>
-          <p:cNvPr id="96" name=""/>
+          <p:cNvPr id="90" name=""/>
           <p:cNvSpPr txBox="1"/>
           <p:nvPr/>
         </p:nvSpPr>
@@ -8521,7 +6161,7 @@
       </p:sp>
       <p:sp>
         <p:nvSpPr>
-          <p:cNvPr id="97" name=""/>
+          <p:cNvPr id="91" name=""/>
           <p:cNvSpPr/>
           <p:nvPr/>
         </p:nvSpPr>
@@ -8741,7 +6381,7 @@
       </p:sp>
       <p:sp>
         <p:nvSpPr>
-          <p:cNvPr id="98" name=""/>
+          <p:cNvPr id="92" name=""/>
           <p:cNvSpPr txBox="1"/>
           <p:nvPr/>
         </p:nvSpPr>
@@ -8784,7 +6424,7 @@
       </p:sp>
       <p:sp>
         <p:nvSpPr>
-          <p:cNvPr id="99" name=""/>
+          <p:cNvPr id="93" name=""/>
           <p:cNvSpPr txBox="1"/>
           <p:nvPr/>
         </p:nvSpPr>
@@ -8827,7 +6467,7 @@
       </p:sp>
       <p:sp>
         <p:nvSpPr>
-          <p:cNvPr id="100" name=""/>
+          <p:cNvPr id="94" name=""/>
           <p:cNvSpPr txBox="1"/>
           <p:nvPr/>
         </p:nvSpPr>
@@ -8870,7 +6510,7 @@
       </p:sp>
       <p:sp>
         <p:nvSpPr>
-          <p:cNvPr id="101" name=""/>
+          <p:cNvPr id="95" name=""/>
           <p:cNvSpPr/>
           <p:nvPr/>
         </p:nvSpPr>
@@ -9008,7 +6648,7 @@
       </p:sp>
       <p:sp>
         <p:nvSpPr>
-          <p:cNvPr id="102" name=""/>
+          <p:cNvPr id="96" name=""/>
           <p:cNvSpPr txBox="1"/>
           <p:nvPr/>
         </p:nvSpPr>
@@ -9051,7 +6691,7 @@
       </p:sp>
       <p:sp>
         <p:nvSpPr>
-          <p:cNvPr id="103" name=""/>
+          <p:cNvPr id="97" name=""/>
           <p:cNvSpPr txBox="1"/>
           <p:nvPr/>
         </p:nvSpPr>
@@ -9124,7 +6764,7 @@
       </p:grpSpPr>
       <p:sp>
         <p:nvSpPr>
-          <p:cNvPr id="104" name=""/>
+          <p:cNvPr id="98" name=""/>
           <p:cNvSpPr/>
           <p:nvPr/>
         </p:nvSpPr>
@@ -9182,7 +6822,7 @@
       </p:sp>
       <p:sp>
         <p:nvSpPr>
-          <p:cNvPr id="105" name=""/>
+          <p:cNvPr id="99" name=""/>
           <p:cNvSpPr/>
           <p:nvPr/>
         </p:nvSpPr>
@@ -9240,7 +6880,7 @@
       </p:sp>
       <p:sp>
         <p:nvSpPr>
-          <p:cNvPr id="106" name=""/>
+          <p:cNvPr id="100" name=""/>
           <p:cNvSpPr/>
           <p:nvPr/>
         </p:nvSpPr>
@@ -9298,7 +6938,7 @@
       </p:sp>
       <p:sp>
         <p:nvSpPr>
-          <p:cNvPr id="107" name=""/>
+          <p:cNvPr id="101" name=""/>
           <p:cNvSpPr/>
           <p:nvPr/>
         </p:nvSpPr>
@@ -9514,32 +7154,9 @@
           </a:p>
         </p:txBody>
       </p:sp>
-      <p:pic>
-        <p:nvPicPr>
-          <p:cNvPr id="108" name="" descr=""/>
-          <p:cNvPicPr/>
-          <p:nvPr/>
-        </p:nvPicPr>
-        <p:blipFill>
-          <a:blip r:embed="rId1"/>
-          <a:stretch/>
-        </p:blipFill>
-        <p:spPr>
-          <a:xfrm>
-            <a:off x="10515600" y="38160"/>
-            <a:ext cx="1142640" cy="1142640"/>
-          </a:xfrm>
-          <a:prstGeom prst="rect">
-            <a:avLst/>
-          </a:prstGeom>
-          <a:ln w="0">
-            <a:noFill/>
-          </a:ln>
-        </p:spPr>
-      </p:pic>
-      <p:sp>
-        <p:nvSpPr>
-          <p:cNvPr id="109" name=""/>
+      <p:sp>
+        <p:nvSpPr>
+          <p:cNvPr id="102" name=""/>
           <p:cNvSpPr txBox="1"/>
           <p:nvPr/>
         </p:nvSpPr>
@@ -9582,7 +7199,7 @@
       </p:sp>
       <p:sp>
         <p:nvSpPr>
-          <p:cNvPr id="110" name=""/>
+          <p:cNvPr id="103" name=""/>
           <p:cNvSpPr txBox="1"/>
           <p:nvPr/>
         </p:nvSpPr>
@@ -9625,7 +7242,7 @@
       </p:sp>
       <p:sp>
         <p:nvSpPr>
-          <p:cNvPr id="111" name=""/>
+          <p:cNvPr id="104" name=""/>
           <p:cNvSpPr txBox="1"/>
           <p:nvPr/>
         </p:nvSpPr>
@@ -9668,7 +7285,7 @@
       </p:sp>
       <p:sp>
         <p:nvSpPr>
-          <p:cNvPr id="112" name=""/>
+          <p:cNvPr id="105" name=""/>
           <p:cNvSpPr txBox="1"/>
           <p:nvPr/>
         </p:nvSpPr>
@@ -9731,7 +7348,7 @@
       </p:sp>
       <p:sp>
         <p:nvSpPr>
-          <p:cNvPr id="113" name=""/>
+          <p:cNvPr id="106" name=""/>
           <p:cNvSpPr txBox="1"/>
           <p:nvPr/>
         </p:nvSpPr>
@@ -9774,7 +7391,7 @@
       </p:sp>
       <p:sp>
         <p:nvSpPr>
-          <p:cNvPr id="114" name=""/>
+          <p:cNvPr id="107" name=""/>
           <p:cNvSpPr txBox="1"/>
           <p:nvPr/>
         </p:nvSpPr>
@@ -9817,7 +7434,7 @@
       </p:sp>
       <p:sp>
         <p:nvSpPr>
-          <p:cNvPr id="115" name=""/>
+          <p:cNvPr id="108" name=""/>
           <p:cNvSpPr txBox="1"/>
           <p:nvPr/>
         </p:nvSpPr>
@@ -9860,7 +7477,7 @@
       </p:sp>
       <p:sp>
         <p:nvSpPr>
-          <p:cNvPr id="116" name=""/>
+          <p:cNvPr id="109" name=""/>
           <p:cNvSpPr txBox="1"/>
           <p:nvPr/>
         </p:nvSpPr>
@@ -9903,7 +7520,7 @@
       </p:sp>
       <p:sp>
         <p:nvSpPr>
-          <p:cNvPr id="117" name=""/>
+          <p:cNvPr id="110" name=""/>
           <p:cNvSpPr txBox="1"/>
           <p:nvPr/>
         </p:nvSpPr>
@@ -9946,7 +7563,7 @@
       </p:sp>
       <p:sp>
         <p:nvSpPr>
-          <p:cNvPr id="118" name=""/>
+          <p:cNvPr id="111" name=""/>
           <p:cNvSpPr txBox="1"/>
           <p:nvPr/>
         </p:nvSpPr>
@@ -9989,7 +7606,7 @@
       </p:sp>
       <p:sp>
         <p:nvSpPr>
-          <p:cNvPr id="119" name=""/>
+          <p:cNvPr id="112" name=""/>
           <p:cNvSpPr txBox="1"/>
           <p:nvPr/>
         </p:nvSpPr>
@@ -10032,7 +7649,7 @@
       </p:sp>
       <p:sp>
         <p:nvSpPr>
-          <p:cNvPr id="120" name=""/>
+          <p:cNvPr id="113" name=""/>
           <p:cNvSpPr txBox="1"/>
           <p:nvPr/>
         </p:nvSpPr>
@@ -10075,7 +7692,7 @@
       </p:sp>
       <p:sp>
         <p:nvSpPr>
-          <p:cNvPr id="121" name=""/>
+          <p:cNvPr id="114" name=""/>
           <p:cNvSpPr txBox="1"/>
           <p:nvPr/>
         </p:nvSpPr>
@@ -10118,7 +7735,7 @@
       </p:sp>
       <p:sp>
         <p:nvSpPr>
-          <p:cNvPr id="122" name=""/>
+          <p:cNvPr id="115" name=""/>
           <p:cNvSpPr txBox="1"/>
           <p:nvPr/>
         </p:nvSpPr>
@@ -10161,7 +7778,7 @@
       </p:sp>
       <p:sp>
         <p:nvSpPr>
-          <p:cNvPr id="123" name=""/>
+          <p:cNvPr id="116" name=""/>
           <p:cNvSpPr txBox="1"/>
           <p:nvPr/>
         </p:nvSpPr>
@@ -10204,7 +7821,7 @@
       </p:sp>
       <p:sp>
         <p:nvSpPr>
-          <p:cNvPr id="124" name=""/>
+          <p:cNvPr id="117" name=""/>
           <p:cNvSpPr txBox="1"/>
           <p:nvPr/>
         </p:nvSpPr>
@@ -10247,7 +7864,7 @@
       </p:sp>
       <p:sp>
         <p:nvSpPr>
-          <p:cNvPr id="125" name=""/>
+          <p:cNvPr id="118" name=""/>
           <p:cNvSpPr txBox="1"/>
           <p:nvPr/>
         </p:nvSpPr>
@@ -10290,7 +7907,7 @@
       </p:sp>
       <p:sp>
         <p:nvSpPr>
-          <p:cNvPr id="126" name=""/>
+          <p:cNvPr id="119" name=""/>
           <p:cNvSpPr txBox="1"/>
           <p:nvPr/>
         </p:nvSpPr>
@@ -10333,7 +7950,7 @@
       </p:sp>
       <p:sp>
         <p:nvSpPr>
-          <p:cNvPr id="127" name=""/>
+          <p:cNvPr id="120" name=""/>
           <p:cNvSpPr txBox="1"/>
           <p:nvPr/>
         </p:nvSpPr>
@@ -10376,7 +7993,7 @@
       </p:sp>
       <p:sp>
         <p:nvSpPr>
-          <p:cNvPr id="128" name=""/>
+          <p:cNvPr id="121" name=""/>
           <p:cNvSpPr txBox="1"/>
           <p:nvPr/>
         </p:nvSpPr>
@@ -10419,7 +8036,7 @@
       </p:sp>
       <p:sp>
         <p:nvSpPr>
-          <p:cNvPr id="129" name=""/>
+          <p:cNvPr id="122" name=""/>
           <p:cNvSpPr txBox="1"/>
           <p:nvPr/>
         </p:nvSpPr>
@@ -10462,7 +8079,7 @@
       </p:sp>
       <p:sp>
         <p:nvSpPr>
-          <p:cNvPr id="130" name=""/>
+          <p:cNvPr id="123" name=""/>
           <p:cNvSpPr txBox="1"/>
           <p:nvPr/>
         </p:nvSpPr>
@@ -10505,7 +8122,7 @@
       </p:sp>
       <p:sp>
         <p:nvSpPr>
-          <p:cNvPr id="131" name=""/>
+          <p:cNvPr id="124" name=""/>
           <p:cNvSpPr txBox="1"/>
           <p:nvPr/>
         </p:nvSpPr>
@@ -10548,7 +8165,7 @@
       </p:sp>
       <p:sp>
         <p:nvSpPr>
-          <p:cNvPr id="132" name=""/>
+          <p:cNvPr id="125" name=""/>
           <p:cNvSpPr/>
           <p:nvPr/>
         </p:nvSpPr>
@@ -10768,7 +8385,7 @@
       </p:sp>
       <p:sp>
         <p:nvSpPr>
-          <p:cNvPr id="133" name=""/>
+          <p:cNvPr id="126" name=""/>
           <p:cNvSpPr txBox="1"/>
           <p:nvPr/>
         </p:nvSpPr>
@@ -10811,7 +8428,7 @@
       </p:sp>
       <p:sp>
         <p:nvSpPr>
-          <p:cNvPr id="134" name=""/>
+          <p:cNvPr id="127" name=""/>
           <p:cNvSpPr txBox="1"/>
           <p:nvPr/>
         </p:nvSpPr>
@@ -10854,7 +8471,7 @@
       </p:sp>
       <p:sp>
         <p:nvSpPr>
-          <p:cNvPr id="135" name=""/>
+          <p:cNvPr id="128" name=""/>
           <p:cNvSpPr txBox="1"/>
           <p:nvPr/>
         </p:nvSpPr>
@@ -10897,7 +8514,7 @@
       </p:sp>
       <p:sp>
         <p:nvSpPr>
-          <p:cNvPr id="136" name=""/>
+          <p:cNvPr id="129" name=""/>
           <p:cNvSpPr txBox="1"/>
           <p:nvPr/>
         </p:nvSpPr>
@@ -10950,7 +8567,7 @@
       </p:sp>
       <p:sp>
         <p:nvSpPr>
-          <p:cNvPr id="137" name=""/>
+          <p:cNvPr id="130" name=""/>
           <p:cNvSpPr txBox="1"/>
           <p:nvPr/>
         </p:nvSpPr>
@@ -10993,7 +8610,7 @@
       </p:sp>
       <p:sp>
         <p:nvSpPr>
-          <p:cNvPr id="138" name=""/>
+          <p:cNvPr id="131" name=""/>
           <p:cNvSpPr txBox="1"/>
           <p:nvPr/>
         </p:nvSpPr>
@@ -11036,7 +8653,7 @@
       </p:sp>
       <p:sp>
         <p:nvSpPr>
-          <p:cNvPr id="139" name=""/>
+          <p:cNvPr id="132" name=""/>
           <p:cNvSpPr txBox="1"/>
           <p:nvPr/>
         </p:nvSpPr>
@@ -11079,7 +8696,7 @@
       </p:sp>
       <p:sp>
         <p:nvSpPr>
-          <p:cNvPr id="140" name=""/>
+          <p:cNvPr id="133" name=""/>
           <p:cNvSpPr txBox="1"/>
           <p:nvPr/>
         </p:nvSpPr>
@@ -11122,7 +8739,7 @@
       </p:sp>
       <p:sp>
         <p:nvSpPr>
-          <p:cNvPr id="141" name=""/>
+          <p:cNvPr id="134" name=""/>
           <p:cNvSpPr txBox="1"/>
           <p:nvPr/>
         </p:nvSpPr>
@@ -11165,7 +8782,7 @@
       </p:sp>
       <p:sp>
         <p:nvSpPr>
-          <p:cNvPr id="142" name=""/>
+          <p:cNvPr id="135" name=""/>
           <p:cNvSpPr txBox="1"/>
           <p:nvPr/>
         </p:nvSpPr>
@@ -11208,7 +8825,7 @@
       </p:sp>
       <p:sp>
         <p:nvSpPr>
-          <p:cNvPr id="143" name=""/>
+          <p:cNvPr id="136" name=""/>
           <p:cNvSpPr txBox="1"/>
           <p:nvPr/>
         </p:nvSpPr>
@@ -11251,7 +8868,7 @@
       </p:sp>
       <p:sp>
         <p:nvSpPr>
-          <p:cNvPr id="144" name=""/>
+          <p:cNvPr id="137" name=""/>
           <p:cNvSpPr txBox="1"/>
           <p:nvPr/>
         </p:nvSpPr>
@@ -11294,7 +8911,7 @@
       </p:sp>
       <p:sp>
         <p:nvSpPr>
-          <p:cNvPr id="145" name=""/>
+          <p:cNvPr id="138" name=""/>
           <p:cNvSpPr/>
           <p:nvPr/>
         </p:nvSpPr>
@@ -11432,7 +9049,7 @@
       </p:sp>
       <p:sp>
         <p:nvSpPr>
-          <p:cNvPr id="146" name=""/>
+          <p:cNvPr id="139" name=""/>
           <p:cNvSpPr txBox="1"/>
           <p:nvPr/>
         </p:nvSpPr>
@@ -11475,7 +9092,7 @@
       </p:sp>
       <p:sp>
         <p:nvSpPr>
-          <p:cNvPr id="147" name=""/>
+          <p:cNvPr id="140" name=""/>
           <p:cNvSpPr txBox="1"/>
           <p:nvPr/>
         </p:nvSpPr>
@@ -11538,7 +9155,7 @@
       </p:sp>
       <p:sp>
         <p:nvSpPr>
-          <p:cNvPr id="148" name=""/>
+          <p:cNvPr id="141" name=""/>
           <p:cNvSpPr txBox="1"/>
           <p:nvPr/>
         </p:nvSpPr>
@@ -11611,7 +9228,7 @@
       </p:grpSpPr>
       <p:sp>
         <p:nvSpPr>
-          <p:cNvPr id="149" name=""/>
+          <p:cNvPr id="142" name=""/>
           <p:cNvSpPr/>
           <p:nvPr/>
         </p:nvSpPr>
@@ -11669,7 +9286,7 @@
       </p:sp>
       <p:sp>
         <p:nvSpPr>
-          <p:cNvPr id="150" name=""/>
+          <p:cNvPr id="143" name=""/>
           <p:cNvSpPr/>
           <p:nvPr/>
         </p:nvSpPr>
@@ -11727,7 +9344,7 @@
       </p:sp>
       <p:sp>
         <p:nvSpPr>
-          <p:cNvPr id="151" name=""/>
+          <p:cNvPr id="144" name=""/>
           <p:cNvSpPr/>
           <p:nvPr/>
         </p:nvSpPr>
@@ -11785,7 +9402,7 @@
       </p:sp>
       <p:sp>
         <p:nvSpPr>
-          <p:cNvPr id="152" name=""/>
+          <p:cNvPr id="145" name=""/>
           <p:cNvSpPr/>
           <p:nvPr/>
         </p:nvSpPr>
@@ -12001,32 +9618,9 @@
           </a:p>
         </p:txBody>
       </p:sp>
-      <p:pic>
-        <p:nvPicPr>
-          <p:cNvPr id="153" name="" descr=""/>
-          <p:cNvPicPr/>
-          <p:nvPr/>
-        </p:nvPicPr>
-        <p:blipFill>
-          <a:blip r:embed="rId1"/>
-          <a:stretch/>
-        </p:blipFill>
-        <p:spPr>
-          <a:xfrm>
-            <a:off x="10515600" y="38160"/>
-            <a:ext cx="1142640" cy="1142640"/>
-          </a:xfrm>
-          <a:prstGeom prst="rect">
-            <a:avLst/>
-          </a:prstGeom>
-          <a:ln w="0">
-            <a:noFill/>
-          </a:ln>
-        </p:spPr>
-      </p:pic>
-      <p:sp>
-        <p:nvSpPr>
-          <p:cNvPr id="154" name=""/>
+      <p:sp>
+        <p:nvSpPr>
+          <p:cNvPr id="146" name=""/>
           <p:cNvSpPr/>
           <p:nvPr/>
         </p:nvSpPr>
@@ -12152,7 +9746,7 @@
       </p:sp>
       <p:sp>
         <p:nvSpPr>
-          <p:cNvPr id="155" name=""/>
+          <p:cNvPr id="147" name=""/>
           <p:cNvSpPr txBox="1"/>
           <p:nvPr/>
         </p:nvSpPr>
@@ -12195,7 +9789,7 @@
       </p:sp>
       <p:sp>
         <p:nvSpPr>
-          <p:cNvPr id="156" name=""/>
+          <p:cNvPr id="148" name=""/>
           <p:cNvSpPr txBox="1"/>
           <p:nvPr/>
         </p:nvSpPr>
@@ -12238,7 +9832,7 @@
       </p:sp>
       <p:sp>
         <p:nvSpPr>
-          <p:cNvPr id="157" name=""/>
+          <p:cNvPr id="149" name=""/>
           <p:cNvSpPr/>
           <p:nvPr/>
         </p:nvSpPr>
@@ -12364,7 +9958,7 @@
       </p:sp>
       <p:sp>
         <p:nvSpPr>
-          <p:cNvPr id="158" name=""/>
+          <p:cNvPr id="150" name=""/>
           <p:cNvSpPr txBox="1"/>
           <p:nvPr/>
         </p:nvSpPr>
@@ -12407,7 +10001,7 @@
       </p:sp>
       <p:sp>
         <p:nvSpPr>
-          <p:cNvPr id="159" name=""/>
+          <p:cNvPr id="151" name=""/>
           <p:cNvSpPr txBox="1"/>
           <p:nvPr/>
         </p:nvSpPr>
@@ -12450,7 +10044,7 @@
       </p:sp>
       <p:sp>
         <p:nvSpPr>
-          <p:cNvPr id="160" name=""/>
+          <p:cNvPr id="152" name=""/>
           <p:cNvSpPr txBox="1"/>
           <p:nvPr/>
         </p:nvSpPr>
@@ -12493,7 +10087,7 @@
       </p:sp>
       <p:sp>
         <p:nvSpPr>
-          <p:cNvPr id="161" name=""/>
+          <p:cNvPr id="153" name=""/>
           <p:cNvSpPr/>
           <p:nvPr/>
         </p:nvSpPr>
@@ -12619,7 +10213,7 @@
       </p:sp>
       <p:sp>
         <p:nvSpPr>
-          <p:cNvPr id="162" name=""/>
+          <p:cNvPr id="154" name=""/>
           <p:cNvSpPr txBox="1"/>
           <p:nvPr/>
         </p:nvSpPr>
@@ -12662,7 +10256,7 @@
       </p:sp>
       <p:sp>
         <p:nvSpPr>
-          <p:cNvPr id="163" name=""/>
+          <p:cNvPr id="155" name=""/>
           <p:cNvSpPr txBox="1"/>
           <p:nvPr/>
         </p:nvSpPr>
@@ -12705,7 +10299,7 @@
       </p:sp>
       <p:sp>
         <p:nvSpPr>
-          <p:cNvPr id="164" name=""/>
+          <p:cNvPr id="156" name=""/>
           <p:cNvSpPr/>
           <p:nvPr/>
         </p:nvSpPr>
@@ -12831,7 +10425,7 @@
       </p:sp>
       <p:sp>
         <p:nvSpPr>
-          <p:cNvPr id="165" name=""/>
+          <p:cNvPr id="157" name=""/>
           <p:cNvSpPr txBox="1"/>
           <p:nvPr/>
         </p:nvSpPr>
@@ -12874,7 +10468,7 @@
       </p:sp>
       <p:sp>
         <p:nvSpPr>
-          <p:cNvPr id="166" name=""/>
+          <p:cNvPr id="158" name=""/>
           <p:cNvSpPr txBox="1"/>
           <p:nvPr/>
         </p:nvSpPr>
@@ -12917,7 +10511,7 @@
       </p:sp>
       <p:sp>
         <p:nvSpPr>
-          <p:cNvPr id="167" name=""/>
+          <p:cNvPr id="159" name=""/>
           <p:cNvSpPr txBox="1"/>
           <p:nvPr/>
         </p:nvSpPr>
@@ -12960,7 +10554,7 @@
       </p:sp>
       <p:sp>
         <p:nvSpPr>
-          <p:cNvPr id="168" name=""/>
+          <p:cNvPr id="160" name=""/>
           <p:cNvSpPr txBox="1"/>
           <p:nvPr/>
         </p:nvSpPr>
@@ -13003,7 +10597,7 @@
       </p:sp>
       <p:sp>
         <p:nvSpPr>
-          <p:cNvPr id="169" name=""/>
+          <p:cNvPr id="161" name=""/>
           <p:cNvSpPr/>
           <p:nvPr/>
         </p:nvSpPr>
@@ -13141,7 +10735,7 @@
       </p:sp>
       <p:sp>
         <p:nvSpPr>
-          <p:cNvPr id="170" name=""/>
+          <p:cNvPr id="162" name=""/>
           <p:cNvSpPr txBox="1"/>
           <p:nvPr/>
         </p:nvSpPr>
@@ -13184,7 +10778,7 @@
       </p:sp>
       <p:sp>
         <p:nvSpPr>
-          <p:cNvPr id="171" name=""/>
+          <p:cNvPr id="163" name=""/>
           <p:cNvSpPr txBox="1"/>
           <p:nvPr/>
         </p:nvSpPr>
@@ -13257,7 +10851,7 @@
       </p:grpSpPr>
       <p:sp>
         <p:nvSpPr>
-          <p:cNvPr id="172" name=""/>
+          <p:cNvPr id="164" name=""/>
           <p:cNvSpPr/>
           <p:nvPr/>
         </p:nvSpPr>
@@ -13315,7 +10909,7 @@
       </p:sp>
       <p:sp>
         <p:nvSpPr>
-          <p:cNvPr id="173" name=""/>
+          <p:cNvPr id="165" name=""/>
           <p:cNvSpPr/>
           <p:nvPr/>
         </p:nvSpPr>
@@ -13373,7 +10967,7 @@
       </p:sp>
       <p:sp>
         <p:nvSpPr>
-          <p:cNvPr id="174" name=""/>
+          <p:cNvPr id="166" name=""/>
           <p:cNvSpPr/>
           <p:nvPr/>
         </p:nvSpPr>
@@ -13431,7 +11025,7 @@
       </p:sp>
       <p:sp>
         <p:nvSpPr>
-          <p:cNvPr id="175" name=""/>
+          <p:cNvPr id="167" name=""/>
           <p:cNvSpPr/>
           <p:nvPr/>
         </p:nvSpPr>
@@ -13647,32 +11241,9 @@
           </a:p>
         </p:txBody>
       </p:sp>
-      <p:pic>
-        <p:nvPicPr>
-          <p:cNvPr id="176" name="" descr=""/>
-          <p:cNvPicPr/>
-          <p:nvPr/>
-        </p:nvPicPr>
-        <p:blipFill>
-          <a:blip r:embed="rId1"/>
-          <a:stretch/>
-        </p:blipFill>
-        <p:spPr>
-          <a:xfrm>
-            <a:off x="10515600" y="38160"/>
-            <a:ext cx="1142640" cy="1142640"/>
-          </a:xfrm>
-          <a:prstGeom prst="rect">
-            <a:avLst/>
-          </a:prstGeom>
-          <a:ln w="0">
-            <a:noFill/>
-          </a:ln>
-        </p:spPr>
-      </p:pic>
-      <p:sp>
-        <p:nvSpPr>
-          <p:cNvPr id="177" name=""/>
+      <p:sp>
+        <p:nvSpPr>
+          <p:cNvPr id="168" name=""/>
           <p:cNvSpPr/>
           <p:nvPr/>
         </p:nvSpPr>
@@ -13798,7 +11369,7 @@
       </p:sp>
       <p:sp>
         <p:nvSpPr>
-          <p:cNvPr id="178" name=""/>
+          <p:cNvPr id="169" name=""/>
           <p:cNvSpPr txBox="1"/>
           <p:nvPr/>
         </p:nvSpPr>
@@ -13841,7 +11412,7 @@
       </p:sp>
       <p:sp>
         <p:nvSpPr>
-          <p:cNvPr id="179" name=""/>
+          <p:cNvPr id="170" name=""/>
           <p:cNvSpPr txBox="1"/>
           <p:nvPr/>
         </p:nvSpPr>
@@ -13884,7 +11455,7 @@
       </p:sp>
       <p:sp>
         <p:nvSpPr>
-          <p:cNvPr id="180" name=""/>
+          <p:cNvPr id="171" name=""/>
           <p:cNvSpPr/>
           <p:nvPr/>
         </p:nvSpPr>
@@ -14010,7 +11581,7 @@
       </p:sp>
       <p:sp>
         <p:nvSpPr>
-          <p:cNvPr id="181" name=""/>
+          <p:cNvPr id="172" name=""/>
           <p:cNvSpPr txBox="1"/>
           <p:nvPr/>
         </p:nvSpPr>
@@ -14053,7 +11624,7 @@
       </p:sp>
       <p:sp>
         <p:nvSpPr>
-          <p:cNvPr id="182" name=""/>
+          <p:cNvPr id="173" name=""/>
           <p:cNvSpPr txBox="1"/>
           <p:nvPr/>
         </p:nvSpPr>
@@ -14096,7 +11667,7 @@
       </p:sp>
       <p:sp>
         <p:nvSpPr>
-          <p:cNvPr id="183" name=""/>
+          <p:cNvPr id="174" name=""/>
           <p:cNvSpPr txBox="1"/>
           <p:nvPr/>
         </p:nvSpPr>
@@ -14139,13 +11710,225 @@
       </p:sp>
       <p:sp>
         <p:nvSpPr>
-          <p:cNvPr id="184" name=""/>
+          <p:cNvPr id="175" name=""/>
           <p:cNvSpPr/>
           <p:nvPr/>
         </p:nvSpPr>
         <p:spPr>
           <a:xfrm>
-            <a:off x="6553080" y="1581120"/>
+            <a:off x="857160" y="3143160"/>
+            <a:ext cx="86040" cy="86040"/>
+          </a:xfrm>
+          <a:custGeom>
+            <a:avLst/>
+            <a:gdLst/>
+            <a:ahLst/>
+            <a:rect l="0" t="0" r="r" b="b"/>
+            <a:pathLst>
+              <a:path w="239" h="239">
+                <a:moveTo>
+                  <a:pt x="239" y="119"/>
+                </a:moveTo>
+                <a:cubicBezTo>
+                  <a:pt x="239" y="135"/>
+                  <a:pt x="236" y="150"/>
+                  <a:pt x="230" y="164"/>
+                </a:cubicBezTo>
+                <a:cubicBezTo>
+                  <a:pt x="224" y="179"/>
+                  <a:pt x="215" y="192"/>
+                  <a:pt x="204" y="204"/>
+                </a:cubicBezTo>
+                <a:cubicBezTo>
+                  <a:pt x="193" y="215"/>
+                  <a:pt x="180" y="224"/>
+                  <a:pt x="165" y="230"/>
+                </a:cubicBezTo>
+                <a:cubicBezTo>
+                  <a:pt x="151" y="236"/>
+                  <a:pt x="136" y="239"/>
+                  <a:pt x="120" y="239"/>
+                </a:cubicBezTo>
+                <a:cubicBezTo>
+                  <a:pt x="103" y="239"/>
+                  <a:pt x="88" y="236"/>
+                  <a:pt x="73" y="230"/>
+                </a:cubicBezTo>
+                <a:cubicBezTo>
+                  <a:pt x="59" y="224"/>
+                  <a:pt x="46" y="215"/>
+                  <a:pt x="35" y="204"/>
+                </a:cubicBezTo>
+                <a:cubicBezTo>
+                  <a:pt x="23" y="192"/>
+                  <a:pt x="15" y="179"/>
+                  <a:pt x="9" y="164"/>
+                </a:cubicBezTo>
+                <a:cubicBezTo>
+                  <a:pt x="3" y="150"/>
+                  <a:pt x="0" y="135"/>
+                  <a:pt x="0" y="119"/>
+                </a:cubicBezTo>
+                <a:cubicBezTo>
+                  <a:pt x="0" y="103"/>
+                  <a:pt x="3" y="88"/>
+                  <a:pt x="9" y="73"/>
+                </a:cubicBezTo>
+                <a:cubicBezTo>
+                  <a:pt x="15" y="59"/>
+                  <a:pt x="23" y="46"/>
+                  <a:pt x="35" y="35"/>
+                </a:cubicBezTo>
+                <a:cubicBezTo>
+                  <a:pt x="46" y="23"/>
+                  <a:pt x="59" y="15"/>
+                  <a:pt x="73" y="9"/>
+                </a:cubicBezTo>
+                <a:cubicBezTo>
+                  <a:pt x="88" y="3"/>
+                  <a:pt x="103" y="0"/>
+                  <a:pt x="120" y="0"/>
+                </a:cubicBezTo>
+                <a:cubicBezTo>
+                  <a:pt x="136" y="0"/>
+                  <a:pt x="151" y="3"/>
+                  <a:pt x="165" y="9"/>
+                </a:cubicBezTo>
+                <a:cubicBezTo>
+                  <a:pt x="180" y="15"/>
+                  <a:pt x="193" y="23"/>
+                  <a:pt x="204" y="35"/>
+                </a:cubicBezTo>
+                <a:cubicBezTo>
+                  <a:pt x="215" y="46"/>
+                  <a:pt x="224" y="59"/>
+                  <a:pt x="230" y="73"/>
+                </a:cubicBezTo>
+                <a:cubicBezTo>
+                  <a:pt x="236" y="88"/>
+                  <a:pt x="239" y="103"/>
+                  <a:pt x="239" y="119"/>
+                </a:cubicBezTo>
+                <a:close/>
+              </a:path>
+            </a:pathLst>
+          </a:custGeom>
+          <a:solidFill>
+            <a:srgbClr val="111111"/>
+          </a:solidFill>
+          <a:ln w="0">
+            <a:noFill/>
+          </a:ln>
+        </p:spPr>
+        <p:txBody>
+          <a:bodyPr lIns="0" rIns="0" tIns="0" bIns="0" anchor="t">
+            <a:noAutofit/>
+          </a:bodyPr>
+          <a:p>
+            <a:endParaRPr b="0" lang="en-US" sz="2400" spc="-1" strike="noStrike">
+              <a:solidFill>
+                <a:srgbClr val="ffffff"/>
+              </a:solidFill>
+              <a:latin typeface="Times New Roman"/>
+            </a:endParaRPr>
+          </a:p>
+        </p:txBody>
+      </p:sp>
+      <p:sp>
+        <p:nvSpPr>
+          <p:cNvPr id="176" name=""/>
+          <p:cNvSpPr txBox="1"/>
+          <p:nvPr/>
+        </p:nvSpPr>
+        <p:spPr>
+          <a:xfrm>
+            <a:off x="533520" y="2432160"/>
+            <a:ext cx="1379880" cy="399600"/>
+          </a:xfrm>
+          <a:prstGeom prst="rect">
+            <a:avLst/>
+          </a:prstGeom>
+          <a:noFill/>
+          <a:ln w="0">
+            <a:noFill/>
+          </a:ln>
+        </p:spPr>
+        <p:txBody>
+          <a:bodyPr wrap="none" lIns="0" rIns="0" tIns="0" bIns="0" anchor="t">
+            <a:noAutofit/>
+          </a:bodyPr>
+          <a:p>
+            <a:r>
+              <a:rPr b="0" lang="zh-CN" sz="2170" spc="-1" strike="noStrike">
+                <a:solidFill>
+                  <a:srgbClr val="111111"/>
+                </a:solidFill>
+                <a:latin typeface="NotoSansCJKjp"/>
+                <a:ea typeface="NotoSansCJKjp"/>
+              </a:rPr>
+              <a:t>右上カラム</a:t>
+            </a:r>
+            <a:endParaRPr b="0" lang="en-US" sz="2170" spc="-1" strike="noStrike">
+              <a:solidFill>
+                <a:srgbClr val="000000"/>
+              </a:solidFill>
+              <a:latin typeface="Times New Roman"/>
+            </a:endParaRPr>
+          </a:p>
+        </p:txBody>
+      </p:sp>
+      <p:sp>
+        <p:nvSpPr>
+          <p:cNvPr id="177" name=""/>
+          <p:cNvSpPr txBox="1"/>
+          <p:nvPr/>
+        </p:nvSpPr>
+        <p:spPr>
+          <a:xfrm>
+            <a:off x="1085760" y="2946600"/>
+            <a:ext cx="1104120" cy="399600"/>
+          </a:xfrm>
+          <a:prstGeom prst="rect">
+            <a:avLst/>
+          </a:prstGeom>
+          <a:noFill/>
+          <a:ln w="0">
+            <a:noFill/>
+          </a:ln>
+        </p:spPr>
+        <p:txBody>
+          <a:bodyPr wrap="none" lIns="0" rIns="0" tIns="0" bIns="0" anchor="t">
+            <a:noAutofit/>
+          </a:bodyPr>
+          <a:p>
+            <a:r>
+              <a:rPr b="0" lang="zh-CN" sz="2170" spc="-1" strike="noStrike">
+                <a:solidFill>
+                  <a:srgbClr val="111111"/>
+                </a:solidFill>
+                <a:latin typeface="NotoSansCJKjp"/>
+                <a:ea typeface="NotoSansCJKjp"/>
+              </a:rPr>
+              <a:t>ポイント</a:t>
+            </a:r>
+            <a:endParaRPr b="0" lang="en-US" sz="2170" spc="-1" strike="noStrike">
+              <a:solidFill>
+                <a:srgbClr val="000000"/>
+              </a:solidFill>
+              <a:latin typeface="Times New Roman"/>
+            </a:endParaRPr>
+          </a:p>
+        </p:txBody>
+      </p:sp>
+      <p:sp>
+        <p:nvSpPr>
+          <p:cNvPr id="178" name=""/>
+          <p:cNvSpPr/>
+          <p:nvPr/>
+        </p:nvSpPr>
+        <p:spPr>
+          <a:xfrm>
+            <a:off x="857160" y="3619440"/>
             <a:ext cx="86040" cy="86040"/>
           </a:xfrm>
           <a:custGeom>
@@ -14159,7 +11942,7 @@
                   <a:pt x="239" y="120"/>
                 </a:moveTo>
                 <a:cubicBezTo>
-                  <a:pt x="239" y="135"/>
+                  <a:pt x="239" y="136"/>
                   <a:pt x="236" y="151"/>
                   <a:pt x="230" y="165"/>
                 </a:cubicBezTo>
@@ -14179,43 +11962,43 @@
                   <a:pt x="120" y="239"/>
                 </a:cubicBezTo>
                 <a:cubicBezTo>
-                  <a:pt x="104" y="239"/>
-                  <a:pt x="89" y="236"/>
-                  <a:pt x="74" y="230"/>
-                </a:cubicBezTo>
-                <a:cubicBezTo>
-                  <a:pt x="60" y="224"/>
-                  <a:pt x="47" y="215"/>
-                  <a:pt x="36" y="204"/>
-                </a:cubicBezTo>
-                <a:cubicBezTo>
-                  <a:pt x="25" y="193"/>
-                  <a:pt x="16" y="180"/>
-                  <a:pt x="10" y="165"/>
+                  <a:pt x="103" y="239"/>
+                  <a:pt x="88" y="236"/>
+                  <a:pt x="73" y="230"/>
+                </a:cubicBezTo>
+                <a:cubicBezTo>
+                  <a:pt x="59" y="224"/>
+                  <a:pt x="46" y="215"/>
+                  <a:pt x="35" y="204"/>
+                </a:cubicBezTo>
+                <a:cubicBezTo>
+                  <a:pt x="23" y="193"/>
+                  <a:pt x="15" y="180"/>
+                  <a:pt x="9" y="165"/>
                 </a:cubicBezTo>
                 <a:cubicBezTo>
                   <a:pt x="3" y="151"/>
-                  <a:pt x="0" y="135"/>
+                  <a:pt x="0" y="136"/>
                   <a:pt x="0" y="120"/>
                 </a:cubicBezTo>
                 <a:cubicBezTo>
                   <a:pt x="0" y="104"/>
                   <a:pt x="3" y="89"/>
-                  <a:pt x="10" y="74"/>
-                </a:cubicBezTo>
-                <a:cubicBezTo>
-                  <a:pt x="16" y="59"/>
-                  <a:pt x="25" y="47"/>
-                  <a:pt x="36" y="35"/>
-                </a:cubicBezTo>
-                <a:cubicBezTo>
-                  <a:pt x="47" y="24"/>
-                  <a:pt x="60" y="16"/>
-                  <a:pt x="74" y="9"/>
-                </a:cubicBezTo>
-                <a:cubicBezTo>
-                  <a:pt x="89" y="3"/>
-                  <a:pt x="104" y="0"/>
+                  <a:pt x="9" y="74"/>
+                </a:cubicBezTo>
+                <a:cubicBezTo>
+                  <a:pt x="15" y="59"/>
+                  <a:pt x="23" y="46"/>
+                  <a:pt x="35" y="35"/>
+                </a:cubicBezTo>
+                <a:cubicBezTo>
+                  <a:pt x="46" y="23"/>
+                  <a:pt x="59" y="15"/>
+                  <a:pt x="73" y="9"/>
+                </a:cubicBezTo>
+                <a:cubicBezTo>
+                  <a:pt x="88" y="3"/>
+                  <a:pt x="103" y="0"/>
                   <a:pt x="120" y="0"/>
                 </a:cubicBezTo>
                 <a:cubicBezTo>
@@ -14224,12 +12007,12 @@
                   <a:pt x="165" y="9"/>
                 </a:cubicBezTo>
                 <a:cubicBezTo>
-                  <a:pt x="180" y="16"/>
-                  <a:pt x="193" y="24"/>
+                  <a:pt x="180" y="15"/>
+                  <a:pt x="193" y="23"/>
                   <a:pt x="204" y="35"/>
                 </a:cubicBezTo>
                 <a:cubicBezTo>
-                  <a:pt x="215" y="47"/>
+                  <a:pt x="215" y="46"/>
                   <a:pt x="224" y="59"/>
                   <a:pt x="230" y="74"/>
                 </a:cubicBezTo>
@@ -14265,14 +12048,57 @@
       </p:sp>
       <p:sp>
         <p:nvSpPr>
-          <p:cNvPr id="185" name=""/>
-          <p:cNvSpPr txBox="1"/>
-          <p:nvPr/>
-        </p:nvSpPr>
-        <p:spPr>
-          <a:xfrm>
-            <a:off x="6229440" y="870120"/>
-            <a:ext cx="1379880" cy="399600"/>
+          <p:cNvPr id="179" name=""/>
+          <p:cNvSpPr txBox="1"/>
+          <p:nvPr/>
+        </p:nvSpPr>
+        <p:spPr>
+          <a:xfrm>
+            <a:off x="2190600" y="3017160"/>
+            <a:ext cx="275760" cy="308160"/>
+          </a:xfrm>
+          <a:prstGeom prst="rect">
+            <a:avLst/>
+          </a:prstGeom>
+          <a:noFill/>
+          <a:ln w="0">
+            <a:noFill/>
+          </a:ln>
+        </p:spPr>
+        <p:txBody>
+          <a:bodyPr wrap="none" lIns="0" rIns="0" tIns="0" bIns="0" anchor="t">
+            <a:noAutofit/>
+          </a:bodyPr>
+          <a:p>
+            <a:r>
+              <a:rPr b="0" lang="en-US" sz="2170" spc="-1" strike="noStrike">
+                <a:solidFill>
+                  <a:srgbClr val="111111"/>
+                </a:solidFill>
+                <a:latin typeface="Arial"/>
+                <a:ea typeface="Arial"/>
+              </a:rPr>
+              <a:t>3</a:t>
+            </a:r>
+            <a:endParaRPr b="0" lang="en-US" sz="2170" spc="-1" strike="noStrike">
+              <a:solidFill>
+                <a:srgbClr val="000000"/>
+              </a:solidFill>
+              <a:latin typeface="Times New Roman"/>
+            </a:endParaRPr>
+          </a:p>
+        </p:txBody>
+      </p:sp>
+      <p:sp>
+        <p:nvSpPr>
+          <p:cNvPr id="180" name=""/>
+          <p:cNvSpPr txBox="1"/>
+          <p:nvPr/>
+        </p:nvSpPr>
+        <p:spPr>
+          <a:xfrm>
+            <a:off x="1085760" y="3422880"/>
+            <a:ext cx="1104120" cy="399600"/>
           </a:xfrm>
           <a:prstGeom prst="rect">
             <a:avLst/>
@@ -14295,7 +12121,7 @@
                 <a:latin typeface="NotoSansCJKjp"/>
                 <a:ea typeface="NotoSansCJKjp"/>
               </a:rPr>
-              <a:t>右上カラム</a:t>
+              <a:t>ポイント</a:t>
             </a:r>
             <a:endParaRPr b="0" lang="en-US" sz="2170" spc="-1" strike="noStrike">
               <a:solidFill>
@@ -14308,14 +12134,57 @@
       </p:sp>
       <p:sp>
         <p:nvSpPr>
-          <p:cNvPr id="186" name=""/>
-          <p:cNvSpPr txBox="1"/>
-          <p:nvPr/>
-        </p:nvSpPr>
-        <p:spPr>
-          <a:xfrm>
-            <a:off x="6781680" y="1384560"/>
-            <a:ext cx="1104120" cy="399600"/>
+          <p:cNvPr id="181" name=""/>
+          <p:cNvSpPr txBox="1"/>
+          <p:nvPr/>
+        </p:nvSpPr>
+        <p:spPr>
+          <a:xfrm>
+            <a:off x="2190600" y="3493440"/>
+            <a:ext cx="275760" cy="308160"/>
+          </a:xfrm>
+          <a:prstGeom prst="rect">
+            <a:avLst/>
+          </a:prstGeom>
+          <a:noFill/>
+          <a:ln w="0">
+            <a:noFill/>
+          </a:ln>
+        </p:spPr>
+        <p:txBody>
+          <a:bodyPr wrap="none" lIns="0" rIns="0" tIns="0" bIns="0" anchor="t">
+            <a:noAutofit/>
+          </a:bodyPr>
+          <a:p>
+            <a:r>
+              <a:rPr b="0" lang="en-US" sz="2170" spc="-1" strike="noStrike">
+                <a:solidFill>
+                  <a:srgbClr val="111111"/>
+                </a:solidFill>
+                <a:latin typeface="Arial"/>
+                <a:ea typeface="Arial"/>
+              </a:rPr>
+              <a:t>4</a:t>
+            </a:r>
+            <a:endParaRPr b="0" lang="en-US" sz="2170" spc="-1" strike="noStrike">
+              <a:solidFill>
+                <a:srgbClr val="000000"/>
+              </a:solidFill>
+              <a:latin typeface="Times New Roman"/>
+            </a:endParaRPr>
+          </a:p>
+        </p:txBody>
+      </p:sp>
+      <p:sp>
+        <p:nvSpPr>
+          <p:cNvPr id="182" name=""/>
+          <p:cNvSpPr txBox="1"/>
+          <p:nvPr/>
+        </p:nvSpPr>
+        <p:spPr>
+          <a:xfrm>
+            <a:off x="533520" y="3994560"/>
+            <a:ext cx="2483280" cy="399600"/>
           </a:xfrm>
           <a:prstGeom prst="rect">
             <a:avLst/>
@@ -14338,7 +12207,7 @@
                 <a:latin typeface="NotoSansCJKjp"/>
                 <a:ea typeface="NotoSansCJKjp"/>
               </a:rPr>
-              <a:t>ポイント</a:t>
+              <a:t>下段の横⻑エリア（</a:t>
             </a:r>
             <a:endParaRPr b="0" lang="en-US" sz="2170" spc="-1" strike="noStrike">
               <a:solidFill>
@@ -14351,139 +12220,13 @@
       </p:sp>
       <p:sp>
         <p:nvSpPr>
-          <p:cNvPr id="187" name=""/>
-          <p:cNvSpPr/>
-          <p:nvPr/>
-        </p:nvSpPr>
-        <p:spPr>
-          <a:xfrm>
-            <a:off x="6553080" y="2066760"/>
-            <a:ext cx="86040" cy="86040"/>
-          </a:xfrm>
-          <a:custGeom>
-            <a:avLst/>
-            <a:gdLst/>
-            <a:ahLst/>
-            <a:rect l="0" t="0" r="r" b="b"/>
-            <a:pathLst>
-              <a:path w="239" h="239">
-                <a:moveTo>
-                  <a:pt x="239" y="120"/>
-                </a:moveTo>
-                <a:cubicBezTo>
-                  <a:pt x="239" y="136"/>
-                  <a:pt x="236" y="151"/>
-                  <a:pt x="230" y="166"/>
-                </a:cubicBezTo>
-                <a:cubicBezTo>
-                  <a:pt x="224" y="180"/>
-                  <a:pt x="215" y="193"/>
-                  <a:pt x="204" y="204"/>
-                </a:cubicBezTo>
-                <a:cubicBezTo>
-                  <a:pt x="193" y="215"/>
-                  <a:pt x="180" y="224"/>
-                  <a:pt x="165" y="230"/>
-                </a:cubicBezTo>
-                <a:cubicBezTo>
-                  <a:pt x="151" y="236"/>
-                  <a:pt x="136" y="239"/>
-                  <a:pt x="120" y="239"/>
-                </a:cubicBezTo>
-                <a:cubicBezTo>
-                  <a:pt x="104" y="239"/>
-                  <a:pt x="89" y="236"/>
-                  <a:pt x="74" y="230"/>
-                </a:cubicBezTo>
-                <a:cubicBezTo>
-                  <a:pt x="60" y="224"/>
-                  <a:pt x="47" y="215"/>
-                  <a:pt x="36" y="204"/>
-                </a:cubicBezTo>
-                <a:cubicBezTo>
-                  <a:pt x="25" y="193"/>
-                  <a:pt x="16" y="180"/>
-                  <a:pt x="10" y="166"/>
-                </a:cubicBezTo>
-                <a:cubicBezTo>
-                  <a:pt x="3" y="151"/>
-                  <a:pt x="0" y="136"/>
-                  <a:pt x="0" y="120"/>
-                </a:cubicBezTo>
-                <a:cubicBezTo>
-                  <a:pt x="0" y="104"/>
-                  <a:pt x="3" y="88"/>
-                  <a:pt x="10" y="73"/>
-                </a:cubicBezTo>
-                <a:cubicBezTo>
-                  <a:pt x="16" y="59"/>
-                  <a:pt x="25" y="46"/>
-                  <a:pt x="36" y="35"/>
-                </a:cubicBezTo>
-                <a:cubicBezTo>
-                  <a:pt x="47" y="24"/>
-                  <a:pt x="60" y="15"/>
-                  <a:pt x="74" y="9"/>
-                </a:cubicBezTo>
-                <a:cubicBezTo>
-                  <a:pt x="89" y="3"/>
-                  <a:pt x="104" y="0"/>
-                  <a:pt x="120" y="0"/>
-                </a:cubicBezTo>
-                <a:cubicBezTo>
-                  <a:pt x="136" y="0"/>
-                  <a:pt x="151" y="3"/>
-                  <a:pt x="165" y="9"/>
-                </a:cubicBezTo>
-                <a:cubicBezTo>
-                  <a:pt x="180" y="15"/>
-                  <a:pt x="193" y="24"/>
-                  <a:pt x="204" y="35"/>
-                </a:cubicBezTo>
-                <a:cubicBezTo>
-                  <a:pt x="215" y="46"/>
-                  <a:pt x="224" y="59"/>
-                  <a:pt x="230" y="73"/>
-                </a:cubicBezTo>
-                <a:cubicBezTo>
-                  <a:pt x="236" y="88"/>
-                  <a:pt x="239" y="104"/>
-                  <a:pt x="239" y="120"/>
-                </a:cubicBezTo>
-                <a:close/>
-              </a:path>
-            </a:pathLst>
-          </a:custGeom>
-          <a:solidFill>
-            <a:srgbClr val="111111"/>
-          </a:solidFill>
-          <a:ln w="0">
-            <a:noFill/>
-          </a:ln>
-        </p:spPr>
-        <p:txBody>
-          <a:bodyPr lIns="0" rIns="0" tIns="0" bIns="0" anchor="t">
-            <a:noAutofit/>
-          </a:bodyPr>
-          <a:p>
-            <a:endParaRPr b="0" lang="en-US" sz="2400" spc="-1" strike="noStrike">
-              <a:solidFill>
-                <a:srgbClr val="ffffff"/>
-              </a:solidFill>
-              <a:latin typeface="Times New Roman"/>
-            </a:endParaRPr>
-          </a:p>
-        </p:txBody>
-      </p:sp>
-      <p:sp>
-        <p:nvSpPr>
-          <p:cNvPr id="188" name=""/>
-          <p:cNvSpPr txBox="1"/>
-          <p:nvPr/>
-        </p:nvSpPr>
-        <p:spPr>
-          <a:xfrm>
-            <a:off x="7886880" y="1455120"/>
+          <p:cNvPr id="183" name=""/>
+          <p:cNvSpPr txBox="1"/>
+          <p:nvPr/>
+        </p:nvSpPr>
+        <p:spPr>
+          <a:xfrm>
+            <a:off x="3019320" y="4064760"/>
             <a:ext cx="275760" cy="308160"/>
           </a:xfrm>
           <a:prstGeom prst="rect">
@@ -14507,7 +12250,7 @@
                 <a:latin typeface="Arial"/>
                 <a:ea typeface="Arial"/>
               </a:rPr>
-              <a:t>3</a:t>
+              <a:t>1</a:t>
             </a:r>
             <a:endParaRPr b="0" lang="en-US" sz="2170" spc="-1" strike="noStrike">
               <a:solidFill>
@@ -14520,13 +12263,13 @@
       </p:sp>
       <p:sp>
         <p:nvSpPr>
-          <p:cNvPr id="189" name=""/>
-          <p:cNvSpPr txBox="1"/>
-          <p:nvPr/>
-        </p:nvSpPr>
-        <p:spPr>
-          <a:xfrm>
-            <a:off x="6781680" y="1870200"/>
+          <p:cNvPr id="184" name=""/>
+          <p:cNvSpPr txBox="1"/>
+          <p:nvPr/>
+        </p:nvSpPr>
+        <p:spPr>
+          <a:xfrm>
+            <a:off x="3173040" y="3994560"/>
             <a:ext cx="1104120" cy="399600"/>
           </a:xfrm>
           <a:prstGeom prst="rect">
@@ -14550,7 +12293,7 @@
                 <a:latin typeface="NotoSansCJKjp"/>
                 <a:ea typeface="NotoSansCJKjp"/>
               </a:rPr>
-              <a:t>ポイント</a:t>
+              <a:t>段組み）</a:t>
             </a:r>
             <a:endParaRPr b="0" lang="en-US" sz="2170" spc="-1" strike="noStrike">
               <a:solidFill>
@@ -14563,14 +12306,57 @@
       </p:sp>
       <p:sp>
         <p:nvSpPr>
-          <p:cNvPr id="190" name=""/>
-          <p:cNvSpPr txBox="1"/>
-          <p:nvPr/>
-        </p:nvSpPr>
-        <p:spPr>
-          <a:xfrm>
-            <a:off x="7886880" y="1940760"/>
-            <a:ext cx="275760" cy="308160"/>
+          <p:cNvPr id="185" name=""/>
+          <p:cNvSpPr txBox="1"/>
+          <p:nvPr/>
+        </p:nvSpPr>
+        <p:spPr>
+          <a:xfrm>
+            <a:off x="533520" y="4499280"/>
+            <a:ext cx="552240" cy="399600"/>
+          </a:xfrm>
+          <a:prstGeom prst="rect">
+            <a:avLst/>
+          </a:prstGeom>
+          <a:noFill/>
+          <a:ln w="0">
+            <a:noFill/>
+          </a:ln>
+        </p:spPr>
+        <p:txBody>
+          <a:bodyPr wrap="none" lIns="0" rIns="0" tIns="0" bIns="0" anchor="t">
+            <a:noAutofit/>
+          </a:bodyPr>
+          <a:p>
+            <a:r>
+              <a:rPr b="0" lang="zh-CN" sz="2170" spc="-1" strike="noStrike">
+                <a:solidFill>
+                  <a:srgbClr val="111111"/>
+                </a:solidFill>
+                <a:latin typeface="NotoSansCJKjp"/>
+                <a:ea typeface="NotoSansCJKjp"/>
+              </a:rPr>
+              <a:t>補⾜</a:t>
+            </a:r>
+            <a:endParaRPr b="0" lang="en-US" sz="2170" spc="-1" strike="noStrike">
+              <a:solidFill>
+                <a:srgbClr val="000000"/>
+              </a:solidFill>
+              <a:latin typeface="Times New Roman"/>
+            </a:endParaRPr>
+          </a:p>
+        </p:txBody>
+      </p:sp>
+      <p:sp>
+        <p:nvSpPr>
+          <p:cNvPr id="186" name=""/>
+          <p:cNvSpPr txBox="1"/>
+          <p:nvPr/>
+        </p:nvSpPr>
+        <p:spPr>
+          <a:xfrm>
+            <a:off x="533520" y="4988880"/>
+            <a:ext cx="750600" cy="308160"/>
           </a:xfrm>
           <a:prstGeom prst="rect">
             <a:avLst/>
@@ -14593,7 +12379,7 @@
                 <a:latin typeface="Arial"/>
                 <a:ea typeface="Arial"/>
               </a:rPr>
-              <a:t>4</a:t>
+              <a:t>HTML</a:t>
             </a:r>
             <a:endParaRPr b="0" lang="en-US" sz="2170" spc="-1" strike="noStrike">
               <a:solidFill>
@@ -14606,14 +12392,14 @@
       </p:sp>
       <p:sp>
         <p:nvSpPr>
-          <p:cNvPr id="191" name=""/>
-          <p:cNvSpPr txBox="1"/>
-          <p:nvPr/>
-        </p:nvSpPr>
-        <p:spPr>
-          <a:xfrm>
-            <a:off x="533520" y="2622960"/>
-            <a:ext cx="2483280" cy="399600"/>
+          <p:cNvPr id="187" name=""/>
+          <p:cNvSpPr txBox="1"/>
+          <p:nvPr/>
+        </p:nvSpPr>
+        <p:spPr>
+          <a:xfrm>
+            <a:off x="1285200" y="4918320"/>
+            <a:ext cx="10207080" cy="399600"/>
           </a:xfrm>
           <a:prstGeom prst="rect">
             <a:avLst/>
@@ -14636,7 +12422,7 @@
                 <a:latin typeface="NotoSansCJKjp"/>
                 <a:ea typeface="NotoSansCJKjp"/>
               </a:rPr>
-              <a:t>下段の横⻑エリア（</a:t>
+              <a:t>コードをいちいち毎回すべて⼊⼒するのが⼤変なので、コードスニペット機能を活</a:t>
             </a:r>
             <a:endParaRPr b="0" lang="en-US" sz="2170" spc="-1" strike="noStrike">
               <a:solidFill>
@@ -14649,14 +12435,57 @@
       </p:sp>
       <p:sp>
         <p:nvSpPr>
-          <p:cNvPr id="192" name=""/>
-          <p:cNvSpPr txBox="1"/>
-          <p:nvPr/>
-        </p:nvSpPr>
-        <p:spPr>
-          <a:xfrm>
-            <a:off x="3019320" y="2693160"/>
-            <a:ext cx="275760" cy="308160"/>
+          <p:cNvPr id="188" name=""/>
+          <p:cNvSpPr txBox="1"/>
+          <p:nvPr/>
+        </p:nvSpPr>
+        <p:spPr>
+          <a:xfrm>
+            <a:off x="533520" y="5328000"/>
+            <a:ext cx="3310920" cy="399600"/>
+          </a:xfrm>
+          <a:prstGeom prst="rect">
+            <a:avLst/>
+          </a:prstGeom>
+          <a:noFill/>
+          <a:ln w="0">
+            <a:noFill/>
+          </a:ln>
+        </p:spPr>
+        <p:txBody>
+          <a:bodyPr wrap="none" lIns="0" rIns="0" tIns="0" bIns="0" anchor="t">
+            <a:noAutofit/>
+          </a:bodyPr>
+          <a:p>
+            <a:r>
+              <a:rPr b="0" lang="zh-CN" sz="2170" spc="-1" strike="noStrike">
+                <a:solidFill>
+                  <a:srgbClr val="111111"/>
+                </a:solidFill>
+                <a:latin typeface="NotoSansCJKjp"/>
+                <a:ea typeface="NotoSansCJKjp"/>
+              </a:rPr>
+              <a:t>⽤するとよいと思います。</a:t>
+            </a:r>
+            <a:endParaRPr b="0" lang="en-US" sz="2170" spc="-1" strike="noStrike">
+              <a:solidFill>
+                <a:srgbClr val="000000"/>
+              </a:solidFill>
+              <a:latin typeface="Times New Roman"/>
+            </a:endParaRPr>
+          </a:p>
+        </p:txBody>
+      </p:sp>
+      <p:sp>
+        <p:nvSpPr>
+          <p:cNvPr id="189" name=""/>
+          <p:cNvSpPr txBox="1"/>
+          <p:nvPr/>
+        </p:nvSpPr>
+        <p:spPr>
+          <a:xfrm>
+            <a:off x="533520" y="5912640"/>
+            <a:ext cx="1027800" cy="308160"/>
           </a:xfrm>
           <a:prstGeom prst="rect">
             <a:avLst/>
@@ -14679,7 +12508,7 @@
                 <a:latin typeface="Arial"/>
                 <a:ea typeface="Arial"/>
               </a:rPr>
-              <a:t>1</a:t>
+              <a:t>VSCode</a:t>
             </a:r>
             <a:endParaRPr b="0" lang="en-US" sz="2170" spc="-1" strike="noStrike">
               <a:solidFill>
@@ -14692,14 +12521,14 @@
       </p:sp>
       <p:sp>
         <p:nvSpPr>
-          <p:cNvPr id="193" name=""/>
-          <p:cNvSpPr txBox="1"/>
-          <p:nvPr/>
-        </p:nvSpPr>
-        <p:spPr>
-          <a:xfrm>
-            <a:off x="3173040" y="2622960"/>
-            <a:ext cx="1104120" cy="399600"/>
+          <p:cNvPr id="190" name=""/>
+          <p:cNvSpPr txBox="1"/>
+          <p:nvPr/>
+        </p:nvSpPr>
+        <p:spPr>
+          <a:xfrm>
+            <a:off x="1562400" y="5842080"/>
+            <a:ext cx="7448400" cy="399600"/>
           </a:xfrm>
           <a:prstGeom prst="rect">
             <a:avLst/>
@@ -14722,7 +12551,7 @@
                 <a:latin typeface="NotoSansCJKjp"/>
                 <a:ea typeface="NotoSansCJKjp"/>
               </a:rPr>
-              <a:t>段組み）</a:t>
+              <a:t>のコードスニペットはこのテンプレートに含まれています。</a:t>
             </a:r>
             <a:endParaRPr b="0" lang="en-US" sz="2170" spc="-1" strike="noStrike">
               <a:solidFill>
@@ -14735,295 +12564,262 @@
       </p:sp>
       <p:sp>
         <p:nvSpPr>
-          <p:cNvPr id="194" name=""/>
-          <p:cNvSpPr txBox="1"/>
-          <p:nvPr/>
-        </p:nvSpPr>
-        <p:spPr>
-          <a:xfrm>
-            <a:off x="533520" y="3137040"/>
-            <a:ext cx="552240" cy="399600"/>
-          </a:xfrm>
-          <a:prstGeom prst="rect">
-            <a:avLst/>
-          </a:prstGeom>
-          <a:noFill/>
-          <a:ln w="0">
-            <a:noFill/>
-          </a:ln>
-        </p:spPr>
-        <p:txBody>
-          <a:bodyPr wrap="none" lIns="0" rIns="0" tIns="0" bIns="0" anchor="t">
-            <a:noAutofit/>
-          </a:bodyPr>
-          <a:p>
-            <a:r>
-              <a:rPr b="0" lang="zh-CN" sz="2170" spc="-1" strike="noStrike">
+          <p:cNvPr id="191" name=""/>
+          <p:cNvSpPr txBox="1"/>
+          <p:nvPr/>
+        </p:nvSpPr>
+        <p:spPr>
+          <a:xfrm>
+            <a:off x="914400" y="351000"/>
+            <a:ext cx="249120" cy="360000"/>
+          </a:xfrm>
+          <a:prstGeom prst="rect">
+            <a:avLst/>
+          </a:prstGeom>
+          <a:noFill/>
+          <a:ln w="0">
+            <a:noFill/>
+          </a:ln>
+        </p:spPr>
+        <p:txBody>
+          <a:bodyPr wrap="none" lIns="0" rIns="0" tIns="0" bIns="0" anchor="t">
+            <a:noAutofit/>
+          </a:bodyPr>
+          <a:p>
+            <a:r>
+              <a:rPr b="0" lang="zh-CN" sz="1950" spc="-1" strike="noStrike">
                 <a:solidFill>
                   <a:srgbClr val="111111"/>
                 </a:solidFill>
                 <a:latin typeface="NotoSansCJKjp"/>
                 <a:ea typeface="NotoSansCJKjp"/>
               </a:rPr>
-              <a:t>補⾜</a:t>
-            </a:r>
-            <a:endParaRPr b="0" lang="en-US" sz="2170" spc="-1" strike="noStrike">
-              <a:solidFill>
-                <a:srgbClr val="000000"/>
-              </a:solidFill>
-              <a:latin typeface="Times New Roman"/>
-            </a:endParaRPr>
-          </a:p>
-        </p:txBody>
-      </p:sp>
-      <p:sp>
-        <p:nvSpPr>
-          <p:cNvPr id="195" name=""/>
-          <p:cNvSpPr txBox="1"/>
-          <p:nvPr/>
-        </p:nvSpPr>
-        <p:spPr>
-          <a:xfrm>
-            <a:off x="533520" y="3617280"/>
-            <a:ext cx="750600" cy="308160"/>
-          </a:xfrm>
-          <a:prstGeom prst="rect">
-            <a:avLst/>
-          </a:prstGeom>
-          <a:noFill/>
-          <a:ln w="0">
-            <a:noFill/>
-          </a:ln>
-        </p:spPr>
-        <p:txBody>
-          <a:bodyPr wrap="none" lIns="0" rIns="0" tIns="0" bIns="0" anchor="t">
-            <a:noAutofit/>
-          </a:bodyPr>
-          <a:p>
-            <a:r>
-              <a:rPr b="0" lang="en-US" sz="2170" spc="-1" strike="noStrike">
+              <a:t>上</a:t>
+            </a:r>
+            <a:endParaRPr b="0" lang="en-US" sz="1950" spc="-1" strike="noStrike">
+              <a:solidFill>
+                <a:srgbClr val="000000"/>
+              </a:solidFill>
+              <a:latin typeface="Times New Roman"/>
+            </a:endParaRPr>
+          </a:p>
+        </p:txBody>
+      </p:sp>
+      <p:sp>
+        <p:nvSpPr>
+          <p:cNvPr id="192" name=""/>
+          <p:cNvSpPr txBox="1"/>
+          <p:nvPr/>
+        </p:nvSpPr>
+        <p:spPr>
+          <a:xfrm>
+            <a:off x="1162080" y="414000"/>
+            <a:ext cx="247320" cy="279360"/>
+          </a:xfrm>
+          <a:prstGeom prst="rect">
+            <a:avLst/>
+          </a:prstGeom>
+          <a:noFill/>
+          <a:ln w="0">
+            <a:noFill/>
+          </a:ln>
+        </p:spPr>
+        <p:txBody>
+          <a:bodyPr wrap="none" lIns="0" rIns="0" tIns="0" bIns="0" anchor="t">
+            <a:noAutofit/>
+          </a:bodyPr>
+          <a:p>
+            <a:r>
+              <a:rPr b="1" lang="en-US" sz="1950" spc="-1" strike="noStrike">
                 <a:solidFill>
                   <a:srgbClr val="111111"/>
                 </a:solidFill>
                 <a:latin typeface="Arial"/>
                 <a:ea typeface="Arial"/>
               </a:rPr>
-              <a:t>HTML</a:t>
-            </a:r>
-            <a:endParaRPr b="0" lang="en-US" sz="2170" spc="-1" strike="noStrike">
-              <a:solidFill>
-                <a:srgbClr val="000000"/>
-              </a:solidFill>
-              <a:latin typeface="Times New Roman"/>
-            </a:endParaRPr>
-          </a:p>
-        </p:txBody>
-      </p:sp>
-      <p:sp>
-        <p:nvSpPr>
-          <p:cNvPr id="196" name=""/>
-          <p:cNvSpPr txBox="1"/>
-          <p:nvPr/>
-        </p:nvSpPr>
-        <p:spPr>
-          <a:xfrm>
-            <a:off x="1285200" y="3546720"/>
-            <a:ext cx="10207080" cy="399600"/>
-          </a:xfrm>
-          <a:prstGeom prst="rect">
-            <a:avLst/>
-          </a:prstGeom>
-          <a:noFill/>
-          <a:ln w="0">
-            <a:noFill/>
-          </a:ln>
-        </p:spPr>
-        <p:txBody>
-          <a:bodyPr wrap="none" lIns="0" rIns="0" tIns="0" bIns="0" anchor="t">
-            <a:noAutofit/>
-          </a:bodyPr>
-          <a:p>
-            <a:r>
-              <a:rPr b="0" lang="zh-CN" sz="2170" spc="-1" strike="noStrike">
+              <a:t>2</a:t>
+            </a:r>
+            <a:endParaRPr b="0" lang="en-US" sz="1950" spc="-1" strike="noStrike">
+              <a:solidFill>
+                <a:srgbClr val="000000"/>
+              </a:solidFill>
+              <a:latin typeface="Times New Roman"/>
+            </a:endParaRPr>
+          </a:p>
+        </p:txBody>
+      </p:sp>
+      <p:sp>
+        <p:nvSpPr>
+          <p:cNvPr id="193" name=""/>
+          <p:cNvSpPr txBox="1"/>
+          <p:nvPr/>
+        </p:nvSpPr>
+        <p:spPr>
+          <a:xfrm>
+            <a:off x="1299960" y="351000"/>
+            <a:ext cx="249120" cy="360000"/>
+          </a:xfrm>
+          <a:prstGeom prst="rect">
+            <a:avLst/>
+          </a:prstGeom>
+          <a:noFill/>
+          <a:ln w="0">
+            <a:noFill/>
+          </a:ln>
+        </p:spPr>
+        <p:txBody>
+          <a:bodyPr wrap="none" lIns="0" rIns="0" tIns="0" bIns="0" anchor="t">
+            <a:noAutofit/>
+          </a:bodyPr>
+          <a:p>
+            <a:r>
+              <a:rPr b="0" lang="zh-CN" sz="1950" spc="-1" strike="noStrike">
                 <a:solidFill>
                   <a:srgbClr val="111111"/>
                 </a:solidFill>
                 <a:latin typeface="NotoSansCJKjp"/>
                 <a:ea typeface="NotoSansCJKjp"/>
               </a:rPr>
-              <a:t>コードをいちいち毎回すべて⼊⼒するのが⼤変なので、コードスニペット機能を活</a:t>
-            </a:r>
-            <a:endParaRPr b="0" lang="en-US" sz="2170" spc="-1" strike="noStrike">
-              <a:solidFill>
-                <a:srgbClr val="000000"/>
-              </a:solidFill>
-              <a:latin typeface="Times New Roman"/>
-            </a:endParaRPr>
-          </a:p>
-        </p:txBody>
-      </p:sp>
-      <p:sp>
-        <p:nvSpPr>
-          <p:cNvPr id="197" name=""/>
-          <p:cNvSpPr txBox="1"/>
-          <p:nvPr/>
-        </p:nvSpPr>
-        <p:spPr>
-          <a:xfrm>
-            <a:off x="533520" y="3965760"/>
-            <a:ext cx="3310920" cy="399600"/>
-          </a:xfrm>
-          <a:prstGeom prst="rect">
-            <a:avLst/>
-          </a:prstGeom>
-          <a:noFill/>
-          <a:ln w="0">
-            <a:noFill/>
-          </a:ln>
-        </p:spPr>
-        <p:txBody>
-          <a:bodyPr wrap="none" lIns="0" rIns="0" tIns="0" bIns="0" anchor="t">
-            <a:noAutofit/>
-          </a:bodyPr>
-          <a:p>
-            <a:r>
-              <a:rPr b="0" lang="zh-CN" sz="2170" spc="-1" strike="noStrike">
+              <a:t>段</a:t>
+            </a:r>
+            <a:endParaRPr b="0" lang="en-US" sz="1950" spc="-1" strike="noStrike">
+              <a:solidFill>
+                <a:srgbClr val="000000"/>
+              </a:solidFill>
+              <a:latin typeface="Times New Roman"/>
+            </a:endParaRPr>
+          </a:p>
+        </p:txBody>
+      </p:sp>
+      <p:sp>
+        <p:nvSpPr>
+          <p:cNvPr id="194" name=""/>
+          <p:cNvSpPr txBox="1"/>
+          <p:nvPr/>
+        </p:nvSpPr>
+        <p:spPr>
+          <a:xfrm>
+            <a:off x="1547280" y="414000"/>
+            <a:ext cx="282960" cy="279360"/>
+          </a:xfrm>
+          <a:prstGeom prst="rect">
+            <a:avLst/>
+          </a:prstGeom>
+          <a:noFill/>
+          <a:ln w="0">
+            <a:noFill/>
+          </a:ln>
+        </p:spPr>
+        <p:txBody>
+          <a:bodyPr wrap="none" lIns="0" rIns="0" tIns="0" bIns="0" anchor="t">
+            <a:noAutofit/>
+          </a:bodyPr>
+          <a:p>
+            <a:r>
+              <a:rPr b="1" lang="en-US" sz="1950" spc="-1" strike="noStrike">
+                <a:solidFill>
+                  <a:srgbClr val="111111"/>
+                </a:solidFill>
+                <a:latin typeface="Arial"/>
+                <a:ea typeface="Arial"/>
+              </a:rPr>
+              <a:t> </a:t>
+            </a:r>
+            <a:r>
+              <a:rPr b="1" lang="en-US" sz="1950" spc="-1" strike="noStrike">
+                <a:solidFill>
+                  <a:srgbClr val="111111"/>
+                </a:solidFill>
+                <a:latin typeface="Arial"/>
+                <a:ea typeface="Arial"/>
+              </a:rPr>
+              <a:t>+ </a:t>
+            </a:r>
+            <a:endParaRPr b="0" lang="en-US" sz="1950" spc="-1" strike="noStrike">
+              <a:solidFill>
+                <a:srgbClr val="000000"/>
+              </a:solidFill>
+              <a:latin typeface="Times New Roman"/>
+            </a:endParaRPr>
+          </a:p>
+        </p:txBody>
+      </p:sp>
+      <p:sp>
+        <p:nvSpPr>
+          <p:cNvPr id="195" name=""/>
+          <p:cNvSpPr txBox="1"/>
+          <p:nvPr/>
+        </p:nvSpPr>
+        <p:spPr>
+          <a:xfrm>
+            <a:off x="1829520" y="351000"/>
+            <a:ext cx="249120" cy="360000"/>
+          </a:xfrm>
+          <a:prstGeom prst="rect">
+            <a:avLst/>
+          </a:prstGeom>
+          <a:noFill/>
+          <a:ln w="0">
+            <a:noFill/>
+          </a:ln>
+        </p:spPr>
+        <p:txBody>
+          <a:bodyPr wrap="none" lIns="0" rIns="0" tIns="0" bIns="0" anchor="t">
+            <a:noAutofit/>
+          </a:bodyPr>
+          <a:p>
+            <a:r>
+              <a:rPr b="0" lang="zh-CN" sz="1950" spc="-1" strike="noStrike">
                 <a:solidFill>
                   <a:srgbClr val="111111"/>
                 </a:solidFill>
                 <a:latin typeface="NotoSansCJKjp"/>
                 <a:ea typeface="NotoSansCJKjp"/>
               </a:rPr>
-              <a:t>⽤するとよいと思います。</a:t>
-            </a:r>
-            <a:endParaRPr b="0" lang="en-US" sz="2170" spc="-1" strike="noStrike">
-              <a:solidFill>
-                <a:srgbClr val="000000"/>
-              </a:solidFill>
-              <a:latin typeface="Times New Roman"/>
-            </a:endParaRPr>
-          </a:p>
-        </p:txBody>
-      </p:sp>
-      <p:sp>
-        <p:nvSpPr>
-          <p:cNvPr id="198" name=""/>
-          <p:cNvSpPr txBox="1"/>
-          <p:nvPr/>
-        </p:nvSpPr>
-        <p:spPr>
-          <a:xfrm>
-            <a:off x="533520" y="4541040"/>
-            <a:ext cx="1027800" cy="308160"/>
-          </a:xfrm>
-          <a:prstGeom prst="rect">
-            <a:avLst/>
-          </a:prstGeom>
-          <a:noFill/>
-          <a:ln w="0">
-            <a:noFill/>
-          </a:ln>
-        </p:spPr>
-        <p:txBody>
-          <a:bodyPr wrap="none" lIns="0" rIns="0" tIns="0" bIns="0" anchor="t">
-            <a:noAutofit/>
-          </a:bodyPr>
-          <a:p>
-            <a:r>
-              <a:rPr b="0" lang="en-US" sz="2170" spc="-1" strike="noStrike">
+              <a:t>下</a:t>
+            </a:r>
+            <a:endParaRPr b="0" lang="en-US" sz="1950" spc="-1" strike="noStrike">
+              <a:solidFill>
+                <a:srgbClr val="000000"/>
+              </a:solidFill>
+              <a:latin typeface="Times New Roman"/>
+            </a:endParaRPr>
+          </a:p>
+        </p:txBody>
+      </p:sp>
+      <p:sp>
+        <p:nvSpPr>
+          <p:cNvPr id="196" name=""/>
+          <p:cNvSpPr txBox="1"/>
+          <p:nvPr/>
+        </p:nvSpPr>
+        <p:spPr>
+          <a:xfrm>
+            <a:off x="2077200" y="414000"/>
+            <a:ext cx="247320" cy="279360"/>
+          </a:xfrm>
+          <a:prstGeom prst="rect">
+            <a:avLst/>
+          </a:prstGeom>
+          <a:noFill/>
+          <a:ln w="0">
+            <a:noFill/>
+          </a:ln>
+        </p:spPr>
+        <p:txBody>
+          <a:bodyPr wrap="none" lIns="0" rIns="0" tIns="0" bIns="0" anchor="t">
+            <a:noAutofit/>
+          </a:bodyPr>
+          <a:p>
+            <a:r>
+              <a:rPr b="1" lang="en-US" sz="1950" spc="-1" strike="noStrike">
                 <a:solidFill>
                   <a:srgbClr val="111111"/>
                 </a:solidFill>
                 <a:latin typeface="Arial"/>
                 <a:ea typeface="Arial"/>
               </a:rPr>
-              <a:t>VSCode</a:t>
-            </a:r>
-            <a:endParaRPr b="0" lang="en-US" sz="2170" spc="-1" strike="noStrike">
-              <a:solidFill>
-                <a:srgbClr val="000000"/>
-              </a:solidFill>
-              <a:latin typeface="Times New Roman"/>
-            </a:endParaRPr>
-          </a:p>
-        </p:txBody>
-      </p:sp>
-      <p:sp>
-        <p:nvSpPr>
-          <p:cNvPr id="199" name=""/>
-          <p:cNvSpPr txBox="1"/>
-          <p:nvPr/>
-        </p:nvSpPr>
-        <p:spPr>
-          <a:xfrm>
-            <a:off x="1562400" y="4470480"/>
-            <a:ext cx="7448400" cy="399600"/>
-          </a:xfrm>
-          <a:prstGeom prst="rect">
-            <a:avLst/>
-          </a:prstGeom>
-          <a:noFill/>
-          <a:ln w="0">
-            <a:noFill/>
-          </a:ln>
-        </p:spPr>
-        <p:txBody>
-          <a:bodyPr wrap="none" lIns="0" rIns="0" tIns="0" bIns="0" anchor="t">
-            <a:noAutofit/>
-          </a:bodyPr>
-          <a:p>
-            <a:r>
-              <a:rPr b="0" lang="zh-CN" sz="2170" spc="-1" strike="noStrike">
-                <a:solidFill>
-                  <a:srgbClr val="111111"/>
-                </a:solidFill>
-                <a:latin typeface="NotoSansCJKjp"/>
-                <a:ea typeface="NotoSansCJKjp"/>
-              </a:rPr>
-              <a:t>のコードスニペットはこのテンプレートに含まれています。</a:t>
-            </a:r>
-            <a:endParaRPr b="0" lang="en-US" sz="2170" spc="-1" strike="noStrike">
-              <a:solidFill>
-                <a:srgbClr val="000000"/>
-              </a:solidFill>
-              <a:latin typeface="Times New Roman"/>
-            </a:endParaRPr>
-          </a:p>
-        </p:txBody>
-      </p:sp>
-      <p:sp>
-        <p:nvSpPr>
-          <p:cNvPr id="200" name=""/>
-          <p:cNvSpPr txBox="1"/>
-          <p:nvPr/>
-        </p:nvSpPr>
-        <p:spPr>
-          <a:xfrm>
-            <a:off x="914400" y="351000"/>
-            <a:ext cx="249120" cy="360000"/>
-          </a:xfrm>
-          <a:prstGeom prst="rect">
-            <a:avLst/>
-          </a:prstGeom>
-          <a:noFill/>
-          <a:ln w="0">
-            <a:noFill/>
-          </a:ln>
-        </p:spPr>
-        <p:txBody>
-          <a:bodyPr wrap="none" lIns="0" rIns="0" tIns="0" bIns="0" anchor="t">
-            <a:noAutofit/>
-          </a:bodyPr>
-          <a:p>
-            <a:r>
-              <a:rPr b="0" lang="zh-CN" sz="1950" spc="-1" strike="noStrike">
-                <a:solidFill>
-                  <a:srgbClr val="111111"/>
-                </a:solidFill>
-                <a:latin typeface="NotoSansCJKjp"/>
-                <a:ea typeface="NotoSansCJKjp"/>
-              </a:rPr>
-              <a:t>上</a:t>
+              <a:t>1</a:t>
             </a:r>
             <a:endParaRPr b="0" lang="en-US" sz="1950" spc="-1" strike="noStrike">
               <a:solidFill>
@@ -15036,232 +12832,7 @@
       </p:sp>
       <p:sp>
         <p:nvSpPr>
-          <p:cNvPr id="201" name=""/>
-          <p:cNvSpPr txBox="1"/>
-          <p:nvPr/>
-        </p:nvSpPr>
-        <p:spPr>
-          <a:xfrm>
-            <a:off x="1162080" y="414000"/>
-            <a:ext cx="247320" cy="279360"/>
-          </a:xfrm>
-          <a:prstGeom prst="rect">
-            <a:avLst/>
-          </a:prstGeom>
-          <a:noFill/>
-          <a:ln w="0">
-            <a:noFill/>
-          </a:ln>
-        </p:spPr>
-        <p:txBody>
-          <a:bodyPr wrap="none" lIns="0" rIns="0" tIns="0" bIns="0" anchor="t">
-            <a:noAutofit/>
-          </a:bodyPr>
-          <a:p>
-            <a:r>
-              <a:rPr b="1" lang="en-US" sz="1950" spc="-1" strike="noStrike">
-                <a:solidFill>
-                  <a:srgbClr val="111111"/>
-                </a:solidFill>
-                <a:latin typeface="Arial"/>
-                <a:ea typeface="Arial"/>
-              </a:rPr>
-              <a:t>2</a:t>
-            </a:r>
-            <a:endParaRPr b="0" lang="en-US" sz="1950" spc="-1" strike="noStrike">
-              <a:solidFill>
-                <a:srgbClr val="000000"/>
-              </a:solidFill>
-              <a:latin typeface="Times New Roman"/>
-            </a:endParaRPr>
-          </a:p>
-        </p:txBody>
-      </p:sp>
-      <p:sp>
-        <p:nvSpPr>
-          <p:cNvPr id="202" name=""/>
-          <p:cNvSpPr txBox="1"/>
-          <p:nvPr/>
-        </p:nvSpPr>
-        <p:spPr>
-          <a:xfrm>
-            <a:off x="1299960" y="351000"/>
-            <a:ext cx="249120" cy="360000"/>
-          </a:xfrm>
-          <a:prstGeom prst="rect">
-            <a:avLst/>
-          </a:prstGeom>
-          <a:noFill/>
-          <a:ln w="0">
-            <a:noFill/>
-          </a:ln>
-        </p:spPr>
-        <p:txBody>
-          <a:bodyPr wrap="none" lIns="0" rIns="0" tIns="0" bIns="0" anchor="t">
-            <a:noAutofit/>
-          </a:bodyPr>
-          <a:p>
-            <a:r>
-              <a:rPr b="0" lang="zh-CN" sz="1950" spc="-1" strike="noStrike">
-                <a:solidFill>
-                  <a:srgbClr val="111111"/>
-                </a:solidFill>
-                <a:latin typeface="NotoSansCJKjp"/>
-                <a:ea typeface="NotoSansCJKjp"/>
-              </a:rPr>
-              <a:t>段</a:t>
-            </a:r>
-            <a:endParaRPr b="0" lang="en-US" sz="1950" spc="-1" strike="noStrike">
-              <a:solidFill>
-                <a:srgbClr val="000000"/>
-              </a:solidFill>
-              <a:latin typeface="Times New Roman"/>
-            </a:endParaRPr>
-          </a:p>
-        </p:txBody>
-      </p:sp>
-      <p:sp>
-        <p:nvSpPr>
-          <p:cNvPr id="203" name=""/>
-          <p:cNvSpPr txBox="1"/>
-          <p:nvPr/>
-        </p:nvSpPr>
-        <p:spPr>
-          <a:xfrm>
-            <a:off x="1547280" y="414000"/>
-            <a:ext cx="282960" cy="279360"/>
-          </a:xfrm>
-          <a:prstGeom prst="rect">
-            <a:avLst/>
-          </a:prstGeom>
-          <a:noFill/>
-          <a:ln w="0">
-            <a:noFill/>
-          </a:ln>
-        </p:spPr>
-        <p:txBody>
-          <a:bodyPr wrap="none" lIns="0" rIns="0" tIns="0" bIns="0" anchor="t">
-            <a:noAutofit/>
-          </a:bodyPr>
-          <a:p>
-            <a:r>
-              <a:rPr b="1" lang="en-US" sz="1950" spc="-1" strike="noStrike">
-                <a:solidFill>
-                  <a:srgbClr val="111111"/>
-                </a:solidFill>
-                <a:latin typeface="Arial"/>
-                <a:ea typeface="Arial"/>
-              </a:rPr>
-              <a:t> </a:t>
-            </a:r>
-            <a:r>
-              <a:rPr b="1" lang="en-US" sz="1950" spc="-1" strike="noStrike">
-                <a:solidFill>
-                  <a:srgbClr val="111111"/>
-                </a:solidFill>
-                <a:latin typeface="Arial"/>
-                <a:ea typeface="Arial"/>
-              </a:rPr>
-              <a:t>+ </a:t>
-            </a:r>
-            <a:endParaRPr b="0" lang="en-US" sz="1950" spc="-1" strike="noStrike">
-              <a:solidFill>
-                <a:srgbClr val="000000"/>
-              </a:solidFill>
-              <a:latin typeface="Times New Roman"/>
-            </a:endParaRPr>
-          </a:p>
-        </p:txBody>
-      </p:sp>
-      <p:sp>
-        <p:nvSpPr>
-          <p:cNvPr id="204" name=""/>
-          <p:cNvSpPr txBox="1"/>
-          <p:nvPr/>
-        </p:nvSpPr>
-        <p:spPr>
-          <a:xfrm>
-            <a:off x="1829520" y="351000"/>
-            <a:ext cx="249120" cy="360000"/>
-          </a:xfrm>
-          <a:prstGeom prst="rect">
-            <a:avLst/>
-          </a:prstGeom>
-          <a:noFill/>
-          <a:ln w="0">
-            <a:noFill/>
-          </a:ln>
-        </p:spPr>
-        <p:txBody>
-          <a:bodyPr wrap="none" lIns="0" rIns="0" tIns="0" bIns="0" anchor="t">
-            <a:noAutofit/>
-          </a:bodyPr>
-          <a:p>
-            <a:r>
-              <a:rPr b="0" lang="zh-CN" sz="1950" spc="-1" strike="noStrike">
-                <a:solidFill>
-                  <a:srgbClr val="111111"/>
-                </a:solidFill>
-                <a:latin typeface="NotoSansCJKjp"/>
-                <a:ea typeface="NotoSansCJKjp"/>
-              </a:rPr>
-              <a:t>下</a:t>
-            </a:r>
-            <a:endParaRPr b="0" lang="en-US" sz="1950" spc="-1" strike="noStrike">
-              <a:solidFill>
-                <a:srgbClr val="000000"/>
-              </a:solidFill>
-              <a:latin typeface="Times New Roman"/>
-            </a:endParaRPr>
-          </a:p>
-        </p:txBody>
-      </p:sp>
-      <p:sp>
-        <p:nvSpPr>
-          <p:cNvPr id="205" name=""/>
-          <p:cNvSpPr txBox="1"/>
-          <p:nvPr/>
-        </p:nvSpPr>
-        <p:spPr>
-          <a:xfrm>
-            <a:off x="2077200" y="414000"/>
-            <a:ext cx="247320" cy="279360"/>
-          </a:xfrm>
-          <a:prstGeom prst="rect">
-            <a:avLst/>
-          </a:prstGeom>
-          <a:noFill/>
-          <a:ln w="0">
-            <a:noFill/>
-          </a:ln>
-        </p:spPr>
-        <p:txBody>
-          <a:bodyPr wrap="none" lIns="0" rIns="0" tIns="0" bIns="0" anchor="t">
-            <a:noAutofit/>
-          </a:bodyPr>
-          <a:p>
-            <a:r>
-              <a:rPr b="1" lang="en-US" sz="1950" spc="-1" strike="noStrike">
-                <a:solidFill>
-                  <a:srgbClr val="111111"/>
-                </a:solidFill>
-                <a:latin typeface="Arial"/>
-                <a:ea typeface="Arial"/>
-              </a:rPr>
-              <a:t>1</a:t>
-            </a:r>
-            <a:endParaRPr b="0" lang="en-US" sz="1950" spc="-1" strike="noStrike">
-              <a:solidFill>
-                <a:srgbClr val="000000"/>
-              </a:solidFill>
-              <a:latin typeface="Times New Roman"/>
-            </a:endParaRPr>
-          </a:p>
-        </p:txBody>
-      </p:sp>
-      <p:sp>
-        <p:nvSpPr>
-          <p:cNvPr id="206" name=""/>
+          <p:cNvPr id="197" name=""/>
           <p:cNvSpPr/>
           <p:nvPr/>
         </p:nvSpPr>
@@ -15399,7 +12970,7 @@
       </p:sp>
       <p:sp>
         <p:nvSpPr>
-          <p:cNvPr id="207" name=""/>
+          <p:cNvPr id="198" name=""/>
           <p:cNvSpPr txBox="1"/>
           <p:nvPr/>
         </p:nvSpPr>
@@ -15442,7 +13013,7 @@
       </p:sp>
       <p:sp>
         <p:nvSpPr>
-          <p:cNvPr id="208" name=""/>
+          <p:cNvPr id="199" name=""/>
           <p:cNvSpPr txBox="1"/>
           <p:nvPr/>
         </p:nvSpPr>

--- a/prompts/marp-template.pptx
+++ b/prompts/marp-template.pptx
@@ -644,8 +644,8 @@
         </p:nvSpPr>
         <p:spPr>
           <a:xfrm>
-            <a:off x="3956400" y="1808280"/>
-            <a:ext cx="1242720" cy="360000"/>
+            <a:off x="3969720" y="1859400"/>
+            <a:ext cx="4440600" cy="361440"/>
           </a:xfrm>
           <a:prstGeom prst="rect">
             <a:avLst/>
@@ -665,10 +665,40 @@
                 <a:solidFill>
                   <a:srgbClr val="0b4b78"/>
                 </a:solidFill>
-                <a:latin typeface="NotoSansCJKjp"/>
-                <a:ea typeface="NotoSansCJKjp"/>
-              </a:rPr>
-              <a:t>イベント名</a:t>
+                <a:latin typeface="NotoSansJP"/>
+                <a:ea typeface="NotoSansJP"/>
+              </a:rPr>
+              <a:t>イベント名 </a:t>
+            </a:r>
+            <a:r>
+              <a:rPr b="0" lang="en-US" sz="1950" spc="-1" strike="noStrike">
+                <a:solidFill>
+                  <a:srgbClr val="0b4b78"/>
+                </a:solidFill>
+                <a:latin typeface="NotoSansJP"/>
+                <a:ea typeface="NotoSansJP"/>
+              </a:rPr>
+              <a:t>20OO/OO/OO(</a:t>
+            </a:r>
+            <a:r>
+              <a:rPr b="0" lang="zh-CN" sz="1950" spc="-1" strike="noStrike">
+                <a:solidFill>
+                  <a:srgbClr val="0b4b78"/>
+                </a:solidFill>
+                <a:latin typeface="NotoSansJP"/>
+                <a:ea typeface="NotoSansJP"/>
+              </a:rPr>
+              <a:t>日付を入力</a:t>
+            </a:r>
+            <a:r>
+              <a:rPr b="0" lang="en-US" sz="1950" spc="-1" strike="noStrike">
+                <a:solidFill>
+                  <a:srgbClr val="0b4b78"/>
+                </a:solidFill>
+                <a:latin typeface="NotoSansJP"/>
+                <a:ea typeface="NotoSansJP"/>
+              </a:rPr>
+              <a:t>)</a:t>
             </a:r>
             <a:endParaRPr b="0" lang="en-US" sz="1950" spc="-1" strike="noStrike">
               <a:solidFill>
@@ -679,148 +709,32 @@
           </a:p>
         </p:txBody>
       </p:sp>
-      <p:sp>
-        <p:nvSpPr>
-          <p:cNvPr id="8" name=""/>
-          <p:cNvSpPr txBox="1"/>
-          <p:nvPr/>
-        </p:nvSpPr>
-        <p:spPr>
-          <a:xfrm>
-            <a:off x="5194800" y="1871280"/>
-            <a:ext cx="1724400" cy="279360"/>
+      <p:pic>
+        <p:nvPicPr>
+          <p:cNvPr id="8" name="" descr=""/>
+          <p:cNvPicPr/>
+          <p:nvPr/>
+        </p:nvPicPr>
+        <p:blipFill>
+          <a:blip r:embed="rId1"/>
+          <a:stretch/>
+        </p:blipFill>
+        <p:spPr>
+          <a:xfrm>
+            <a:off x="4809960" y="-190440"/>
+            <a:ext cx="2571480" cy="2571480"/>
           </a:xfrm>
           <a:prstGeom prst="rect">
             <a:avLst/>
           </a:prstGeom>
-          <a:noFill/>
-          <a:ln w="0">
-            <a:noFill/>
-          </a:ln>
-        </p:spPr>
-        <p:txBody>
-          <a:bodyPr wrap="none" lIns="0" rIns="0" tIns="0" bIns="0" anchor="t">
-            <a:noAutofit/>
-          </a:bodyPr>
-          <a:p>
-            <a:r>
-              <a:rPr b="0" lang="en-US" sz="1950" spc="-1" strike="noStrike">
-                <a:solidFill>
-                  <a:srgbClr val="0b4b78"/>
-                </a:solidFill>
-                <a:latin typeface="Arial"/>
-                <a:ea typeface="Arial"/>
-              </a:rPr>
-              <a:t> </a:t>
-            </a:r>
-            <a:r>
-              <a:rPr b="0" lang="en-US" sz="1950" spc="-1" strike="noStrike">
-                <a:solidFill>
-                  <a:srgbClr val="0b4b78"/>
-                </a:solidFill>
-                <a:latin typeface="Arial"/>
-                <a:ea typeface="Arial"/>
-              </a:rPr>
-              <a:t>20OO/OO/OO(</a:t>
-            </a:r>
-            <a:endParaRPr b="0" lang="en-US" sz="1950" spc="-1" strike="noStrike">
-              <a:solidFill>
-                <a:srgbClr val="000000"/>
-              </a:solidFill>
-              <a:latin typeface="Times New Roman"/>
-            </a:endParaRPr>
-          </a:p>
-        </p:txBody>
-      </p:sp>
+          <a:ln w="0">
+            <a:noFill/>
+          </a:ln>
+        </p:spPr>
+      </p:pic>
       <p:sp>
         <p:nvSpPr>
           <p:cNvPr id="9" name=""/>
-          <p:cNvSpPr txBox="1"/>
-          <p:nvPr/>
-        </p:nvSpPr>
-        <p:spPr>
-          <a:xfrm>
-            <a:off x="6914880" y="1808280"/>
-            <a:ext cx="1242720" cy="360000"/>
-          </a:xfrm>
-          <a:prstGeom prst="rect">
-            <a:avLst/>
-          </a:prstGeom>
-          <a:noFill/>
-          <a:ln w="0">
-            <a:noFill/>
-          </a:ln>
-        </p:spPr>
-        <p:txBody>
-          <a:bodyPr wrap="none" lIns="0" rIns="0" tIns="0" bIns="0" anchor="t">
-            <a:noAutofit/>
-          </a:bodyPr>
-          <a:p>
-            <a:r>
-              <a:rPr b="0" lang="zh-CN" sz="1950" spc="-1" strike="noStrike">
-                <a:solidFill>
-                  <a:srgbClr val="0b4b78"/>
-                </a:solidFill>
-                <a:latin typeface="NotoSansCJKjp"/>
-                <a:ea typeface="NotoSansCJKjp"/>
-              </a:rPr>
-              <a:t>⽇付を⼊⼒</a:t>
-            </a:r>
-            <a:endParaRPr b="0" lang="en-US" sz="1950" spc="-1" strike="noStrike">
-              <a:solidFill>
-                <a:srgbClr val="000000"/>
-              </a:solidFill>
-              <a:latin typeface="Times New Roman"/>
-            </a:endParaRPr>
-          </a:p>
-        </p:txBody>
-      </p:sp>
-      <p:sp>
-        <p:nvSpPr>
-          <p:cNvPr id="10" name=""/>
-          <p:cNvSpPr txBox="1"/>
-          <p:nvPr/>
-        </p:nvSpPr>
-        <p:spPr>
-          <a:xfrm>
-            <a:off x="8152920" y="1871280"/>
-            <a:ext cx="247320" cy="279360"/>
-          </a:xfrm>
-          <a:prstGeom prst="rect">
-            <a:avLst/>
-          </a:prstGeom>
-          <a:noFill/>
-          <a:ln w="0">
-            <a:noFill/>
-          </a:ln>
-        </p:spPr>
-        <p:txBody>
-          <a:bodyPr wrap="none" lIns="0" rIns="0" tIns="0" bIns="0" anchor="t">
-            <a:noAutofit/>
-          </a:bodyPr>
-          <a:p>
-            <a:r>
-              <a:rPr b="0" lang="en-US" sz="1950" spc="-1" strike="noStrike">
-                <a:solidFill>
-                  <a:srgbClr val="0b4b78"/>
-                </a:solidFill>
-                <a:latin typeface="Arial"/>
-                <a:ea typeface="Arial"/>
-              </a:rPr>
-              <a:t>)</a:t>
-            </a:r>
-            <a:endParaRPr b="0" lang="en-US" sz="1950" spc="-1" strike="noStrike">
-              <a:solidFill>
-                <a:srgbClr val="000000"/>
-              </a:solidFill>
-              <a:latin typeface="Times New Roman"/>
-            </a:endParaRPr>
-          </a:p>
-        </p:txBody>
-      </p:sp>
-      <p:sp>
-        <p:nvSpPr>
-          <p:cNvPr id="11" name=""/>
           <p:cNvSpPr/>
           <p:nvPr/>
         </p:nvSpPr>
@@ -878,14 +792,140 @@
       </p:sp>
       <p:sp>
         <p:nvSpPr>
+          <p:cNvPr id="10" name=""/>
+          <p:cNvSpPr txBox="1"/>
+          <p:nvPr/>
+        </p:nvSpPr>
+        <p:spPr>
+          <a:xfrm>
+            <a:off x="4905360" y="2500920"/>
+            <a:ext cx="2385720" cy="690840"/>
+          </a:xfrm>
+          <a:prstGeom prst="rect">
+            <a:avLst/>
+          </a:prstGeom>
+          <a:noFill/>
+          <a:ln w="0">
+            <a:noFill/>
+          </a:ln>
+        </p:spPr>
+        <p:txBody>
+          <a:bodyPr wrap="none" lIns="0" rIns="0" tIns="0" bIns="0" anchor="t">
+            <a:noAutofit/>
+          </a:bodyPr>
+          <a:p>
+            <a:r>
+              <a:rPr b="0" lang="zh-CN" sz="3750" spc="-1" strike="noStrike">
+                <a:solidFill>
+                  <a:srgbClr val="0b4b78"/>
+                </a:solidFill>
+                <a:latin typeface="NotoSansJP"/>
+                <a:ea typeface="NotoSansJP"/>
+              </a:rPr>
+              <a:t>タイトル名</a:t>
+            </a:r>
+            <a:endParaRPr b="0" lang="en-US" sz="3750" spc="-1" strike="noStrike">
+              <a:solidFill>
+                <a:srgbClr val="000000"/>
+              </a:solidFill>
+              <a:latin typeface="Times New Roman"/>
+            </a:endParaRPr>
+          </a:p>
+        </p:txBody>
+      </p:sp>
+      <p:sp>
+        <p:nvSpPr>
+          <p:cNvPr id="11" name=""/>
+          <p:cNvSpPr txBox="1"/>
+          <p:nvPr/>
+        </p:nvSpPr>
+        <p:spPr>
+          <a:xfrm>
+            <a:off x="3403440" y="4537080"/>
+            <a:ext cx="5316120" cy="332640"/>
+          </a:xfrm>
+          <a:prstGeom prst="rect">
+            <a:avLst/>
+          </a:prstGeom>
+          <a:noFill/>
+          <a:ln w="0">
+            <a:noFill/>
+          </a:ln>
+        </p:spPr>
+        <p:txBody>
+          <a:bodyPr wrap="none" lIns="0" rIns="0" tIns="0" bIns="0" anchor="t">
+            <a:noAutofit/>
+          </a:bodyPr>
+          <a:p>
+            <a:r>
+              <a:rPr b="0" lang="zh-CN" sz="1800" spc="-1" strike="noStrike">
+                <a:solidFill>
+                  <a:srgbClr val="ffffff"/>
+                </a:solidFill>
+                <a:latin typeface="NotoSansJP"/>
+                <a:ea typeface="NotoSansJP"/>
+              </a:rPr>
+              <a:t>所属</a:t>
+            </a:r>
+            <a:r>
+              <a:rPr b="0" lang="en-US" sz="1800" spc="-1" strike="noStrike">
+                <a:solidFill>
+                  <a:srgbClr val="ffffff"/>
+                </a:solidFill>
+                <a:latin typeface="NotoSansJP"/>
+                <a:ea typeface="NotoSansJP"/>
+              </a:rPr>
+              <a:t>(</a:t>
+            </a:r>
+            <a:r>
+              <a:rPr b="0" lang="zh-CN" sz="1800" spc="-1" strike="noStrike">
+                <a:solidFill>
+                  <a:srgbClr val="ffffff"/>
+                </a:solidFill>
+                <a:latin typeface="NotoSansJP"/>
+                <a:ea typeface="NotoSansJP"/>
+              </a:rPr>
+              <a:t>例</a:t>
+            </a:r>
+            <a:r>
+              <a:rPr b="0" lang="en-US" sz="1800" spc="-1" strike="noStrike">
+                <a:solidFill>
+                  <a:srgbClr val="ffffff"/>
+                </a:solidFill>
+                <a:latin typeface="NotoSansJP"/>
+                <a:ea typeface="NotoSansJP"/>
+              </a:rPr>
+              <a:t>:</a:t>
+            </a:r>
+            <a:r>
+              <a:rPr b="0" lang="zh-CN" sz="1800" spc="-1" strike="noStrike">
+                <a:solidFill>
+                  <a:srgbClr val="ffffff"/>
+                </a:solidFill>
+                <a:latin typeface="NotoSansJP"/>
+                <a:ea typeface="NotoSansJP"/>
+              </a:rPr>
+              <a:t>京都大学 工学部 情報学科 数理工学コース</a:t>
+            </a:r>
+            <a:endParaRPr b="0" lang="en-US" sz="1800" spc="-1" strike="noStrike">
+              <a:solidFill>
+                <a:srgbClr val="000000"/>
+              </a:solidFill>
+              <a:latin typeface="Times New Roman"/>
+            </a:endParaRPr>
+          </a:p>
+        </p:txBody>
+      </p:sp>
+      <p:sp>
+        <p:nvSpPr>
           <p:cNvPr id="12" name=""/>
           <p:cNvSpPr txBox="1"/>
           <p:nvPr/>
         </p:nvSpPr>
         <p:spPr>
           <a:xfrm>
-            <a:off x="4905360" y="2409840"/>
-            <a:ext cx="2385720" cy="690840"/>
+            <a:off x="5767920" y="4880160"/>
+            <a:ext cx="328320" cy="311400"/>
           </a:xfrm>
           <a:prstGeom prst="rect">
             <a:avLst/>
@@ -901,16 +941,16 @@
           </a:bodyPr>
           <a:p>
             <a:r>
-              <a:rPr b="0" lang="zh-CN" sz="3750" spc="-1" strike="noStrike">
-                <a:solidFill>
-                  <a:srgbClr val="0b4b78"/>
-                </a:solidFill>
-                <a:latin typeface="NotoSansCJKjp"/>
-                <a:ea typeface="NotoSansCJKjp"/>
-              </a:rPr>
-              <a:t>タイトル名</a:t>
-            </a:r>
-            <a:endParaRPr b="0" lang="en-US" sz="3750" spc="-1" strike="noStrike">
+              <a:rPr b="0" lang="en-US" sz="1800" spc="-1" strike="noStrike">
+                <a:solidFill>
+                  <a:srgbClr val="ffffff"/>
+                </a:solidFill>
+                <a:latin typeface="NotoSansJP"/>
+                <a:ea typeface="NotoSansJP"/>
+              </a:rPr>
+              <a:t>B4)</a:t>
+            </a:r>
+            <a:endParaRPr b="0" lang="en-US" sz="1800" spc="-1" strike="noStrike">
               <a:solidFill>
                 <a:srgbClr val="000000"/>
               </a:solidFill>
@@ -927,8 +967,8 @@
         </p:nvSpPr>
         <p:spPr>
           <a:xfrm>
-            <a:off x="3388680" y="4497480"/>
-            <a:ext cx="457920" cy="331200"/>
+            <a:off x="4769280" y="5457240"/>
+            <a:ext cx="2678760" cy="416520"/>
           </a:xfrm>
           <a:prstGeom prst="rect">
             <a:avLst/>
@@ -944,16 +984,66 @@
           </a:bodyPr>
           <a:p>
             <a:r>
-              <a:rPr b="0" lang="zh-CN" sz="1800" spc="-1" strike="noStrike">
+              <a:rPr b="0" lang="zh-CN" sz="2250" spc="-1" strike="noStrike">
                 <a:solidFill>
                   <a:srgbClr val="ffffff"/>
                 </a:solidFill>
-                <a:latin typeface="NotoSansCJKjp"/>
-                <a:ea typeface="NotoSansCJKjp"/>
-              </a:rPr>
-              <a:t>所属</a:t>
-            </a:r>
-            <a:endParaRPr b="0" lang="en-US" sz="1800" spc="-1" strike="noStrike">
+                <a:latin typeface="NotoSansJP"/>
+                <a:ea typeface="NotoSansJP"/>
+              </a:rPr>
+              <a:t>名前</a:t>
+            </a:r>
+            <a:r>
+              <a:rPr b="0" lang="en-US" sz="2250" spc="-1" strike="noStrike">
+                <a:solidFill>
+                  <a:srgbClr val="ffffff"/>
+                </a:solidFill>
+                <a:latin typeface="NotoSansJP"/>
+                <a:ea typeface="NotoSansJP"/>
+              </a:rPr>
+              <a:t>(</a:t>
+            </a:r>
+            <a:r>
+              <a:rPr b="0" lang="zh-CN" sz="2250" spc="-1" strike="noStrike">
+                <a:solidFill>
+                  <a:srgbClr val="ffffff"/>
+                </a:solidFill>
+                <a:latin typeface="NotoSansJP"/>
+                <a:ea typeface="NotoSansJP"/>
+              </a:rPr>
+              <a:t>例</a:t>
+            </a:r>
+            <a:r>
+              <a:rPr b="0" lang="en-US" sz="2250" spc="-1" strike="noStrike">
+                <a:solidFill>
+                  <a:srgbClr val="ffffff"/>
+                </a:solidFill>
+                <a:latin typeface="NotoSansJP"/>
+                <a:ea typeface="NotoSansJP"/>
+              </a:rPr>
+              <a:t>:</a:t>
+            </a:r>
+            <a:r>
+              <a:rPr b="0" lang="zh-CN" sz="2250" spc="-1" strike="noStrike">
+                <a:solidFill>
+                  <a:srgbClr val="ffffff"/>
+                </a:solidFill>
+                <a:latin typeface="NotoSansJP"/>
+                <a:ea typeface="NotoSansJP"/>
+              </a:rPr>
+              <a:t>知能 太郎</a:t>
+            </a:r>
+            <a:r>
+              <a:rPr b="0" lang="en-US" sz="2250" spc="-1" strike="noStrike">
+                <a:solidFill>
+                  <a:srgbClr val="ffffff"/>
+                </a:solidFill>
+                <a:latin typeface="NotoSansJP"/>
+                <a:ea typeface="NotoSansJP"/>
+              </a:rPr>
+              <a:t>)</a:t>
+            </a:r>
+            <a:endParaRPr b="0" lang="en-US" sz="2250" spc="-1" strike="noStrike">
               <a:solidFill>
                 <a:srgbClr val="000000"/>
               </a:solidFill>
@@ -970,8 +1060,8 @@
         </p:nvSpPr>
         <p:spPr>
           <a:xfrm>
-            <a:off x="3845880" y="4555440"/>
-            <a:ext cx="228240" cy="256320"/>
+            <a:off x="11946600" y="6436800"/>
+            <a:ext cx="304560" cy="416520"/>
           </a:xfrm>
           <a:prstGeom prst="rect">
             <a:avLst/>
@@ -987,872 +1077,12 @@
           </a:bodyPr>
           <a:p>
             <a:r>
-              <a:rPr b="1" lang="en-US" sz="1800" spc="-1" strike="noStrike">
-                <a:solidFill>
-                  <a:srgbClr val="ffffff"/>
-                </a:solidFill>
-                <a:latin typeface="Arial"/>
-                <a:ea typeface="Arial"/>
-              </a:rPr>
-              <a:t>(</a:t>
-            </a:r>
-            <a:endParaRPr b="0" lang="en-US" sz="1800" spc="-1" strike="noStrike">
-              <a:solidFill>
-                <a:srgbClr val="000000"/>
-              </a:solidFill>
-              <a:latin typeface="Times New Roman"/>
-            </a:endParaRPr>
-          </a:p>
-        </p:txBody>
-      </p:sp>
-      <p:sp>
-        <p:nvSpPr>
-          <p:cNvPr id="15" name=""/>
-          <p:cNvSpPr txBox="1"/>
-          <p:nvPr/>
-        </p:nvSpPr>
-        <p:spPr>
-          <a:xfrm>
-            <a:off x="3922200" y="4497480"/>
-            <a:ext cx="229320" cy="331200"/>
-          </a:xfrm>
-          <a:prstGeom prst="rect">
-            <a:avLst/>
-          </a:prstGeom>
-          <a:noFill/>
-          <a:ln w="0">
-            <a:noFill/>
-          </a:ln>
-        </p:spPr>
-        <p:txBody>
-          <a:bodyPr wrap="none" lIns="0" rIns="0" tIns="0" bIns="0" anchor="t">
-            <a:noAutofit/>
-          </a:bodyPr>
-          <a:p>
-            <a:r>
-              <a:rPr b="0" lang="zh-CN" sz="1800" spc="-1" strike="noStrike">
-                <a:solidFill>
-                  <a:srgbClr val="ffffff"/>
-                </a:solidFill>
-                <a:latin typeface="NotoSansCJKjp"/>
-                <a:ea typeface="NotoSansCJKjp"/>
-              </a:rPr>
-              <a:t>例</a:t>
-            </a:r>
-            <a:endParaRPr b="0" lang="en-US" sz="1800" spc="-1" strike="noStrike">
-              <a:solidFill>
-                <a:srgbClr val="000000"/>
-              </a:solidFill>
-              <a:latin typeface="Times New Roman"/>
-            </a:endParaRPr>
-          </a:p>
-        </p:txBody>
-      </p:sp>
-      <p:sp>
-        <p:nvSpPr>
-          <p:cNvPr id="16" name=""/>
-          <p:cNvSpPr txBox="1"/>
-          <p:nvPr/>
-        </p:nvSpPr>
-        <p:spPr>
-          <a:xfrm>
-            <a:off x="4150800" y="4555440"/>
-            <a:ext cx="228240" cy="256320"/>
-          </a:xfrm>
-          <a:prstGeom prst="rect">
-            <a:avLst/>
-          </a:prstGeom>
-          <a:noFill/>
-          <a:ln w="0">
-            <a:noFill/>
-          </a:ln>
-        </p:spPr>
-        <p:txBody>
-          <a:bodyPr wrap="none" lIns="0" rIns="0" tIns="0" bIns="0" anchor="t">
-            <a:noAutofit/>
-          </a:bodyPr>
-          <a:p>
-            <a:r>
-              <a:rPr b="1" lang="en-US" sz="1800" spc="-1" strike="noStrike">
-                <a:solidFill>
-                  <a:srgbClr val="ffffff"/>
-                </a:solidFill>
-                <a:latin typeface="Arial"/>
-                <a:ea typeface="Arial"/>
-              </a:rPr>
-              <a:t>:</a:t>
-            </a:r>
-            <a:endParaRPr b="0" lang="en-US" sz="1800" spc="-1" strike="noStrike">
-              <a:solidFill>
-                <a:srgbClr val="000000"/>
-              </a:solidFill>
-              <a:latin typeface="Times New Roman"/>
-            </a:endParaRPr>
-          </a:p>
-        </p:txBody>
-      </p:sp>
-      <p:sp>
-        <p:nvSpPr>
-          <p:cNvPr id="17" name=""/>
-          <p:cNvSpPr txBox="1"/>
-          <p:nvPr/>
-        </p:nvSpPr>
-        <p:spPr>
-          <a:xfrm>
-            <a:off x="4226760" y="4497480"/>
-            <a:ext cx="915120" cy="331200"/>
-          </a:xfrm>
-          <a:prstGeom prst="rect">
-            <a:avLst/>
-          </a:prstGeom>
-          <a:noFill/>
-          <a:ln w="0">
-            <a:noFill/>
-          </a:ln>
-        </p:spPr>
-        <p:txBody>
-          <a:bodyPr wrap="none" lIns="0" rIns="0" tIns="0" bIns="0" anchor="t">
-            <a:noAutofit/>
-          </a:bodyPr>
-          <a:p>
-            <a:r>
-              <a:rPr b="0" lang="zh-CN" sz="1800" spc="-1" strike="noStrike">
-                <a:solidFill>
-                  <a:srgbClr val="ffffff"/>
-                </a:solidFill>
-                <a:latin typeface="NotoSansCJKjp"/>
-                <a:ea typeface="NotoSansCJKjp"/>
-              </a:rPr>
-              <a:t>京都⼤学</a:t>
-            </a:r>
-            <a:endParaRPr b="0" lang="en-US" sz="1800" spc="-1" strike="noStrike">
-              <a:solidFill>
-                <a:srgbClr val="000000"/>
-              </a:solidFill>
-              <a:latin typeface="Times New Roman"/>
-            </a:endParaRPr>
-          </a:p>
-        </p:txBody>
-      </p:sp>
-      <p:sp>
-        <p:nvSpPr>
-          <p:cNvPr id="18" name=""/>
-          <p:cNvSpPr txBox="1"/>
-          <p:nvPr/>
-        </p:nvSpPr>
-        <p:spPr>
-          <a:xfrm>
-            <a:off x="5141160" y="4555440"/>
-            <a:ext cx="228240" cy="256320"/>
-          </a:xfrm>
-          <a:prstGeom prst="rect">
-            <a:avLst/>
-          </a:prstGeom>
-          <a:noFill/>
-          <a:ln w="0">
-            <a:noFill/>
-          </a:ln>
-        </p:spPr>
-        <p:txBody>
-          <a:bodyPr wrap="none" lIns="0" rIns="0" tIns="0" bIns="0" anchor="t">
-            <a:noAutofit/>
-          </a:bodyPr>
-          <a:p>
-            <a:r>
-              <a:rPr b="1" lang="en-US" sz="1800" spc="-1" strike="noStrike">
-                <a:solidFill>
-                  <a:srgbClr val="ffffff"/>
-                </a:solidFill>
-                <a:latin typeface="Arial"/>
-                <a:ea typeface="Arial"/>
-              </a:rPr>
-              <a:t> </a:t>
-            </a:r>
-            <a:endParaRPr b="0" lang="en-US" sz="1800" spc="-1" strike="noStrike">
-              <a:solidFill>
-                <a:srgbClr val="000000"/>
-              </a:solidFill>
-              <a:latin typeface="Times New Roman"/>
-            </a:endParaRPr>
-          </a:p>
-        </p:txBody>
-      </p:sp>
-      <p:sp>
-        <p:nvSpPr>
-          <p:cNvPr id="19" name=""/>
-          <p:cNvSpPr txBox="1"/>
-          <p:nvPr/>
-        </p:nvSpPr>
-        <p:spPr>
-          <a:xfrm>
-            <a:off x="5204880" y="4497480"/>
-            <a:ext cx="686520" cy="331200"/>
-          </a:xfrm>
-          <a:prstGeom prst="rect">
-            <a:avLst/>
-          </a:prstGeom>
-          <a:noFill/>
-          <a:ln w="0">
-            <a:noFill/>
-          </a:ln>
-        </p:spPr>
-        <p:txBody>
-          <a:bodyPr wrap="none" lIns="0" rIns="0" tIns="0" bIns="0" anchor="t">
-            <a:noAutofit/>
-          </a:bodyPr>
-          <a:p>
-            <a:r>
-              <a:rPr b="0" lang="zh-CN" sz="1800" spc="-1" strike="noStrike">
-                <a:solidFill>
-                  <a:srgbClr val="ffffff"/>
-                </a:solidFill>
-                <a:latin typeface="NotoSansCJKjp"/>
-                <a:ea typeface="NotoSansCJKjp"/>
-              </a:rPr>
-              <a:t>⼯学部</a:t>
-            </a:r>
-            <a:endParaRPr b="0" lang="en-US" sz="1800" spc="-1" strike="noStrike">
-              <a:solidFill>
-                <a:srgbClr val="000000"/>
-              </a:solidFill>
-              <a:latin typeface="Times New Roman"/>
-            </a:endParaRPr>
-          </a:p>
-        </p:txBody>
-      </p:sp>
-      <p:sp>
-        <p:nvSpPr>
-          <p:cNvPr id="20" name=""/>
-          <p:cNvSpPr txBox="1"/>
-          <p:nvPr/>
-        </p:nvSpPr>
-        <p:spPr>
-          <a:xfrm>
-            <a:off x="5890680" y="4555440"/>
-            <a:ext cx="228240" cy="256320"/>
-          </a:xfrm>
-          <a:prstGeom prst="rect">
-            <a:avLst/>
-          </a:prstGeom>
-          <a:noFill/>
-          <a:ln w="0">
-            <a:noFill/>
-          </a:ln>
-        </p:spPr>
-        <p:txBody>
-          <a:bodyPr wrap="none" lIns="0" rIns="0" tIns="0" bIns="0" anchor="t">
-            <a:noAutofit/>
-          </a:bodyPr>
-          <a:p>
-            <a:r>
-              <a:rPr b="1" lang="en-US" sz="1800" spc="-1" strike="noStrike">
-                <a:solidFill>
-                  <a:srgbClr val="ffffff"/>
-                </a:solidFill>
-                <a:latin typeface="Arial"/>
-                <a:ea typeface="Arial"/>
-              </a:rPr>
-              <a:t> </a:t>
-            </a:r>
-            <a:endParaRPr b="0" lang="en-US" sz="1800" spc="-1" strike="noStrike">
-              <a:solidFill>
-                <a:srgbClr val="000000"/>
-              </a:solidFill>
-              <a:latin typeface="Times New Roman"/>
-            </a:endParaRPr>
-          </a:p>
-        </p:txBody>
-      </p:sp>
-      <p:sp>
-        <p:nvSpPr>
-          <p:cNvPr id="21" name=""/>
-          <p:cNvSpPr txBox="1"/>
-          <p:nvPr/>
-        </p:nvSpPr>
-        <p:spPr>
-          <a:xfrm>
-            <a:off x="5954040" y="4497480"/>
-            <a:ext cx="915120" cy="331200"/>
-          </a:xfrm>
-          <a:prstGeom prst="rect">
-            <a:avLst/>
-          </a:prstGeom>
-          <a:noFill/>
-          <a:ln w="0">
-            <a:noFill/>
-          </a:ln>
-        </p:spPr>
-        <p:txBody>
-          <a:bodyPr wrap="none" lIns="0" rIns="0" tIns="0" bIns="0" anchor="t">
-            <a:noAutofit/>
-          </a:bodyPr>
-          <a:p>
-            <a:r>
-              <a:rPr b="0" lang="zh-CN" sz="1800" spc="-1" strike="noStrike">
-                <a:solidFill>
-                  <a:srgbClr val="ffffff"/>
-                </a:solidFill>
-                <a:latin typeface="NotoSansCJKjp"/>
-                <a:ea typeface="NotoSansCJKjp"/>
-              </a:rPr>
-              <a:t>情報学科</a:t>
-            </a:r>
-            <a:endParaRPr b="0" lang="en-US" sz="1800" spc="-1" strike="noStrike">
-              <a:solidFill>
-                <a:srgbClr val="000000"/>
-              </a:solidFill>
-              <a:latin typeface="Times New Roman"/>
-            </a:endParaRPr>
-          </a:p>
-        </p:txBody>
-      </p:sp>
-      <p:sp>
-        <p:nvSpPr>
-          <p:cNvPr id="22" name=""/>
-          <p:cNvSpPr txBox="1"/>
-          <p:nvPr/>
-        </p:nvSpPr>
-        <p:spPr>
-          <a:xfrm>
-            <a:off x="6868440" y="4555440"/>
-            <a:ext cx="228240" cy="256320"/>
-          </a:xfrm>
-          <a:prstGeom prst="rect">
-            <a:avLst/>
-          </a:prstGeom>
-          <a:noFill/>
-          <a:ln w="0">
-            <a:noFill/>
-          </a:ln>
-        </p:spPr>
-        <p:txBody>
-          <a:bodyPr wrap="none" lIns="0" rIns="0" tIns="0" bIns="0" anchor="t">
-            <a:noAutofit/>
-          </a:bodyPr>
-          <a:p>
-            <a:r>
-              <a:rPr b="1" lang="en-US" sz="1800" spc="-1" strike="noStrike">
-                <a:solidFill>
-                  <a:srgbClr val="ffffff"/>
-                </a:solidFill>
-                <a:latin typeface="Arial"/>
-                <a:ea typeface="Arial"/>
-              </a:rPr>
-              <a:t> </a:t>
-            </a:r>
-            <a:endParaRPr b="0" lang="en-US" sz="1800" spc="-1" strike="noStrike">
-              <a:solidFill>
-                <a:srgbClr val="000000"/>
-              </a:solidFill>
-              <a:latin typeface="Times New Roman"/>
-            </a:endParaRPr>
-          </a:p>
-        </p:txBody>
-      </p:sp>
-      <p:sp>
-        <p:nvSpPr>
-          <p:cNvPr id="23" name=""/>
-          <p:cNvSpPr txBox="1"/>
-          <p:nvPr/>
-        </p:nvSpPr>
-        <p:spPr>
-          <a:xfrm>
-            <a:off x="6932160" y="4497480"/>
-            <a:ext cx="1600920" cy="331200"/>
-          </a:xfrm>
-          <a:prstGeom prst="rect">
-            <a:avLst/>
-          </a:prstGeom>
-          <a:noFill/>
-          <a:ln w="0">
-            <a:noFill/>
-          </a:ln>
-        </p:spPr>
-        <p:txBody>
-          <a:bodyPr wrap="none" lIns="0" rIns="0" tIns="0" bIns="0" anchor="t">
-            <a:noAutofit/>
-          </a:bodyPr>
-          <a:p>
-            <a:r>
-              <a:rPr b="0" lang="zh-CN" sz="1800" spc="-1" strike="noStrike">
-                <a:solidFill>
-                  <a:srgbClr val="ffffff"/>
-                </a:solidFill>
-                <a:latin typeface="NotoSansCJKjp"/>
-                <a:ea typeface="NotoSansCJKjp"/>
-              </a:rPr>
-              <a:t>数理⼯学コース</a:t>
-            </a:r>
-            <a:endParaRPr b="0" lang="en-US" sz="1800" spc="-1" strike="noStrike">
-              <a:solidFill>
-                <a:srgbClr val="000000"/>
-              </a:solidFill>
-              <a:latin typeface="Times New Roman"/>
-            </a:endParaRPr>
-          </a:p>
-        </p:txBody>
-      </p:sp>
-      <p:sp>
-        <p:nvSpPr>
-          <p:cNvPr id="24" name=""/>
-          <p:cNvSpPr txBox="1"/>
-          <p:nvPr/>
-        </p:nvSpPr>
-        <p:spPr>
-          <a:xfrm>
-            <a:off x="8520840" y="4555440"/>
-            <a:ext cx="228240" cy="256320"/>
-          </a:xfrm>
-          <a:prstGeom prst="rect">
-            <a:avLst/>
-          </a:prstGeom>
-          <a:noFill/>
-          <a:ln w="0">
-            <a:noFill/>
-          </a:ln>
-        </p:spPr>
-        <p:txBody>
-          <a:bodyPr wrap="none" lIns="0" rIns="0" tIns="0" bIns="0" anchor="t">
-            <a:noAutofit/>
-          </a:bodyPr>
-          <a:p>
-            <a:r>
-              <a:rPr b="1" lang="en-US" sz="1800" spc="-1" strike="noStrike">
-                <a:solidFill>
-                  <a:srgbClr val="ffffff"/>
-                </a:solidFill>
-                <a:latin typeface="Arial"/>
-                <a:ea typeface="Arial"/>
-              </a:rPr>
-              <a:t> </a:t>
-            </a:r>
-            <a:endParaRPr b="0" lang="en-US" sz="1800" spc="-1" strike="noStrike">
-              <a:solidFill>
-                <a:srgbClr val="000000"/>
-              </a:solidFill>
-              <a:latin typeface="Times New Roman"/>
-            </a:endParaRPr>
-          </a:p>
-        </p:txBody>
-      </p:sp>
-      <p:sp>
-        <p:nvSpPr>
-          <p:cNvPr id="25" name=""/>
-          <p:cNvSpPr txBox="1"/>
-          <p:nvPr/>
-        </p:nvSpPr>
-        <p:spPr>
-          <a:xfrm>
-            <a:off x="5770800" y="4898520"/>
-            <a:ext cx="367920" cy="256320"/>
-          </a:xfrm>
-          <a:prstGeom prst="rect">
-            <a:avLst/>
-          </a:prstGeom>
-          <a:noFill/>
-          <a:ln w="0">
-            <a:noFill/>
-          </a:ln>
-        </p:spPr>
-        <p:txBody>
-          <a:bodyPr wrap="none" lIns="0" rIns="0" tIns="0" bIns="0" anchor="t">
-            <a:noAutofit/>
-          </a:bodyPr>
-          <a:p>
-            <a:r>
-              <a:rPr b="1" lang="en-US" sz="1800" spc="-1" strike="noStrike">
-                <a:solidFill>
-                  <a:srgbClr val="ffffff"/>
-                </a:solidFill>
-                <a:latin typeface="Arial"/>
-                <a:ea typeface="Arial"/>
-              </a:rPr>
-              <a:t>B4)</a:t>
-            </a:r>
-            <a:endParaRPr b="0" lang="en-US" sz="1800" spc="-1" strike="noStrike">
-              <a:solidFill>
-                <a:srgbClr val="000000"/>
-              </a:solidFill>
-              <a:latin typeface="Times New Roman"/>
-            </a:endParaRPr>
-          </a:p>
-        </p:txBody>
-      </p:sp>
-      <p:sp>
-        <p:nvSpPr>
-          <p:cNvPr id="26" name=""/>
-          <p:cNvSpPr txBox="1"/>
-          <p:nvPr/>
-        </p:nvSpPr>
-        <p:spPr>
-          <a:xfrm>
-            <a:off x="4772160" y="5412240"/>
-            <a:ext cx="573840" cy="415080"/>
-          </a:xfrm>
-          <a:prstGeom prst="rect">
-            <a:avLst/>
-          </a:prstGeom>
-          <a:noFill/>
-          <a:ln w="0">
-            <a:noFill/>
-          </a:ln>
-        </p:spPr>
-        <p:txBody>
-          <a:bodyPr wrap="none" lIns="0" rIns="0" tIns="0" bIns="0" anchor="t">
-            <a:noAutofit/>
-          </a:bodyPr>
-          <a:p>
-            <a:r>
-              <a:rPr b="0" lang="zh-CN" sz="2250" spc="-1" strike="noStrike">
-                <a:solidFill>
-                  <a:srgbClr val="ffffff"/>
-                </a:solidFill>
-                <a:latin typeface="NotoSansCJKjp"/>
-                <a:ea typeface="NotoSansCJKjp"/>
-              </a:rPr>
-              <a:t>名前</a:t>
-            </a:r>
-            <a:endParaRPr b="0" lang="en-US" sz="2250" spc="-1" strike="noStrike">
-              <a:solidFill>
-                <a:srgbClr val="000000"/>
-              </a:solidFill>
-              <a:latin typeface="Times New Roman"/>
-            </a:endParaRPr>
-          </a:p>
-        </p:txBody>
-      </p:sp>
-      <p:sp>
-        <p:nvSpPr>
-          <p:cNvPr id="27" name=""/>
-          <p:cNvSpPr txBox="1"/>
-          <p:nvPr/>
-        </p:nvSpPr>
-        <p:spPr>
-          <a:xfrm>
-            <a:off x="5343840" y="5484960"/>
-            <a:ext cx="285480" cy="320400"/>
-          </a:xfrm>
-          <a:prstGeom prst="rect">
-            <a:avLst/>
-          </a:prstGeom>
-          <a:noFill/>
-          <a:ln w="0">
-            <a:noFill/>
-          </a:ln>
-        </p:spPr>
-        <p:txBody>
-          <a:bodyPr wrap="none" lIns="0" rIns="0" tIns="0" bIns="0" anchor="t">
-            <a:noAutofit/>
-          </a:bodyPr>
-          <a:p>
-            <a:r>
-              <a:rPr b="1" lang="en-US" sz="2250" spc="-1" strike="noStrike">
-                <a:solidFill>
-                  <a:srgbClr val="ffffff"/>
-                </a:solidFill>
-                <a:latin typeface="Arial"/>
-                <a:ea typeface="Arial"/>
-              </a:rPr>
-              <a:t>(</a:t>
-            </a:r>
-            <a:endParaRPr b="0" lang="en-US" sz="2250" spc="-1" strike="noStrike">
-              <a:solidFill>
-                <a:srgbClr val="000000"/>
-              </a:solidFill>
-              <a:latin typeface="Times New Roman"/>
-            </a:endParaRPr>
-          </a:p>
-        </p:txBody>
-      </p:sp>
-      <p:sp>
-        <p:nvSpPr>
-          <p:cNvPr id="28" name=""/>
-          <p:cNvSpPr txBox="1"/>
-          <p:nvPr/>
-        </p:nvSpPr>
-        <p:spPr>
-          <a:xfrm>
-            <a:off x="5438880" y="5412240"/>
-            <a:ext cx="287280" cy="415080"/>
-          </a:xfrm>
-          <a:prstGeom prst="rect">
-            <a:avLst/>
-          </a:prstGeom>
-          <a:noFill/>
-          <a:ln w="0">
-            <a:noFill/>
-          </a:ln>
-        </p:spPr>
-        <p:txBody>
-          <a:bodyPr wrap="none" lIns="0" rIns="0" tIns="0" bIns="0" anchor="t">
-            <a:noAutofit/>
-          </a:bodyPr>
-          <a:p>
-            <a:r>
-              <a:rPr b="0" lang="zh-CN" sz="2250" spc="-1" strike="noStrike">
-                <a:solidFill>
-                  <a:srgbClr val="ffffff"/>
-                </a:solidFill>
-                <a:latin typeface="NotoSansCJKjp"/>
-                <a:ea typeface="NotoSansCJKjp"/>
-              </a:rPr>
-              <a:t>例</a:t>
-            </a:r>
-            <a:endParaRPr b="0" lang="en-US" sz="2250" spc="-1" strike="noStrike">
-              <a:solidFill>
-                <a:srgbClr val="000000"/>
-              </a:solidFill>
-              <a:latin typeface="Times New Roman"/>
-            </a:endParaRPr>
-          </a:p>
-        </p:txBody>
-      </p:sp>
-      <p:sp>
-        <p:nvSpPr>
-          <p:cNvPr id="29" name=""/>
-          <p:cNvSpPr txBox="1"/>
-          <p:nvPr/>
-        </p:nvSpPr>
-        <p:spPr>
-          <a:xfrm>
-            <a:off x="5724720" y="5484960"/>
-            <a:ext cx="285480" cy="320400"/>
-          </a:xfrm>
-          <a:prstGeom prst="rect">
-            <a:avLst/>
-          </a:prstGeom>
-          <a:noFill/>
-          <a:ln w="0">
-            <a:noFill/>
-          </a:ln>
-        </p:spPr>
-        <p:txBody>
-          <a:bodyPr wrap="none" lIns="0" rIns="0" tIns="0" bIns="0" anchor="t">
-            <a:noAutofit/>
-          </a:bodyPr>
-          <a:p>
-            <a:r>
-              <a:rPr b="1" lang="en-US" sz="2250" spc="-1" strike="noStrike">
-                <a:solidFill>
-                  <a:srgbClr val="ffffff"/>
-                </a:solidFill>
-                <a:latin typeface="Arial"/>
-                <a:ea typeface="Arial"/>
-              </a:rPr>
-              <a:t>:</a:t>
-            </a:r>
-            <a:endParaRPr b="0" lang="en-US" sz="2250" spc="-1" strike="noStrike">
-              <a:solidFill>
-                <a:srgbClr val="000000"/>
-              </a:solidFill>
-              <a:latin typeface="Times New Roman"/>
-            </a:endParaRPr>
-          </a:p>
-        </p:txBody>
-      </p:sp>
-      <p:sp>
-        <p:nvSpPr>
-          <p:cNvPr id="30" name=""/>
-          <p:cNvSpPr txBox="1"/>
-          <p:nvPr/>
-        </p:nvSpPr>
-        <p:spPr>
-          <a:xfrm>
-            <a:off x="5819760" y="5412240"/>
-            <a:ext cx="573840" cy="415080"/>
-          </a:xfrm>
-          <a:prstGeom prst="rect">
-            <a:avLst/>
-          </a:prstGeom>
-          <a:noFill/>
-          <a:ln w="0">
-            <a:noFill/>
-          </a:ln>
-        </p:spPr>
-        <p:txBody>
-          <a:bodyPr wrap="none" lIns="0" rIns="0" tIns="0" bIns="0" anchor="t">
-            <a:noAutofit/>
-          </a:bodyPr>
-          <a:p>
-            <a:r>
-              <a:rPr b="0" lang="zh-CN" sz="2250" spc="-1" strike="noStrike">
-                <a:solidFill>
-                  <a:srgbClr val="ffffff"/>
-                </a:solidFill>
-                <a:latin typeface="NotoSansCJKjp"/>
-                <a:ea typeface="NotoSansCJKjp"/>
-              </a:rPr>
-              <a:t>知能</a:t>
-            </a:r>
-            <a:endParaRPr b="0" lang="en-US" sz="2250" spc="-1" strike="noStrike">
-              <a:solidFill>
-                <a:srgbClr val="000000"/>
-              </a:solidFill>
-              <a:latin typeface="Times New Roman"/>
-            </a:endParaRPr>
-          </a:p>
-        </p:txBody>
-      </p:sp>
-      <p:sp>
-        <p:nvSpPr>
-          <p:cNvPr id="31" name=""/>
-          <p:cNvSpPr txBox="1"/>
-          <p:nvPr/>
-        </p:nvSpPr>
-        <p:spPr>
-          <a:xfrm>
-            <a:off x="6391080" y="5484960"/>
-            <a:ext cx="285480" cy="320400"/>
-          </a:xfrm>
-          <a:prstGeom prst="rect">
-            <a:avLst/>
-          </a:prstGeom>
-          <a:noFill/>
-          <a:ln w="0">
-            <a:noFill/>
-          </a:ln>
-        </p:spPr>
-        <p:txBody>
-          <a:bodyPr wrap="none" lIns="0" rIns="0" tIns="0" bIns="0" anchor="t">
-            <a:noAutofit/>
-          </a:bodyPr>
-          <a:p>
-            <a:r>
-              <a:rPr b="1" lang="en-US" sz="2250" spc="-1" strike="noStrike">
-                <a:solidFill>
-                  <a:srgbClr val="ffffff"/>
-                </a:solidFill>
-                <a:latin typeface="Arial"/>
-                <a:ea typeface="Arial"/>
-              </a:rPr>
-              <a:t> </a:t>
-            </a:r>
-            <a:endParaRPr b="0" lang="en-US" sz="2250" spc="-1" strike="noStrike">
-              <a:solidFill>
-                <a:srgbClr val="000000"/>
-              </a:solidFill>
-              <a:latin typeface="Times New Roman"/>
-            </a:endParaRPr>
-          </a:p>
-        </p:txBody>
-      </p:sp>
-      <p:sp>
-        <p:nvSpPr>
-          <p:cNvPr id="32" name=""/>
-          <p:cNvSpPr txBox="1"/>
-          <p:nvPr/>
-        </p:nvSpPr>
-        <p:spPr>
-          <a:xfrm>
-            <a:off x="6470640" y="5412240"/>
-            <a:ext cx="573840" cy="415080"/>
-          </a:xfrm>
-          <a:prstGeom prst="rect">
-            <a:avLst/>
-          </a:prstGeom>
-          <a:noFill/>
-          <a:ln w="0">
-            <a:noFill/>
-          </a:ln>
-        </p:spPr>
-        <p:txBody>
-          <a:bodyPr wrap="none" lIns="0" rIns="0" tIns="0" bIns="0" anchor="t">
-            <a:noAutofit/>
-          </a:bodyPr>
-          <a:p>
-            <a:r>
-              <a:rPr b="0" lang="zh-CN" sz="2250" spc="-1" strike="noStrike">
-                <a:solidFill>
-                  <a:srgbClr val="ffffff"/>
-                </a:solidFill>
-                <a:latin typeface="NotoSansCJKjp"/>
-                <a:ea typeface="NotoSansCJKjp"/>
-              </a:rPr>
-              <a:t>太郎</a:t>
-            </a:r>
-            <a:endParaRPr b="0" lang="en-US" sz="2250" spc="-1" strike="noStrike">
-              <a:solidFill>
-                <a:srgbClr val="000000"/>
-              </a:solidFill>
-              <a:latin typeface="Times New Roman"/>
-            </a:endParaRPr>
-          </a:p>
-        </p:txBody>
-      </p:sp>
-      <p:sp>
-        <p:nvSpPr>
-          <p:cNvPr id="33" name=""/>
-          <p:cNvSpPr txBox="1"/>
-          <p:nvPr/>
-        </p:nvSpPr>
-        <p:spPr>
-          <a:xfrm>
-            <a:off x="7041960" y="5484960"/>
-            <a:ext cx="285480" cy="320400"/>
-          </a:xfrm>
-          <a:prstGeom prst="rect">
-            <a:avLst/>
-          </a:prstGeom>
-          <a:noFill/>
-          <a:ln w="0">
-            <a:noFill/>
-          </a:ln>
-        </p:spPr>
-        <p:txBody>
-          <a:bodyPr wrap="none" lIns="0" rIns="0" tIns="0" bIns="0" anchor="t">
-            <a:noAutofit/>
-          </a:bodyPr>
-          <a:p>
-            <a:r>
-              <a:rPr b="1" lang="en-US" sz="2250" spc="-1" strike="noStrike">
-                <a:solidFill>
-                  <a:srgbClr val="ffffff"/>
-                </a:solidFill>
-                <a:latin typeface="Arial"/>
-                <a:ea typeface="Arial"/>
-              </a:rPr>
-              <a:t>)</a:t>
-            </a:r>
-            <a:endParaRPr b="0" lang="en-US" sz="2250" spc="-1" strike="noStrike">
-              <a:solidFill>
-                <a:srgbClr val="000000"/>
-              </a:solidFill>
-              <a:latin typeface="Times New Roman"/>
-            </a:endParaRPr>
-          </a:p>
-        </p:txBody>
-      </p:sp>
-      <p:sp>
-        <p:nvSpPr>
-          <p:cNvPr id="34" name=""/>
-          <p:cNvSpPr txBox="1"/>
-          <p:nvPr/>
-        </p:nvSpPr>
-        <p:spPr>
-          <a:xfrm>
-            <a:off x="11946240" y="6458400"/>
-            <a:ext cx="304560" cy="340200"/>
-          </a:xfrm>
-          <a:prstGeom prst="rect">
-            <a:avLst/>
-          </a:prstGeom>
-          <a:noFill/>
-          <a:ln w="0">
-            <a:noFill/>
-          </a:ln>
-        </p:spPr>
-        <p:txBody>
-          <a:bodyPr wrap="none" lIns="0" rIns="0" tIns="0" bIns="0" anchor="t">
-            <a:noAutofit/>
-          </a:bodyPr>
-          <a:p>
-            <a:r>
               <a:rPr b="0" lang="en-US" sz="2400" spc="-1" strike="noStrike">
                 <a:solidFill>
                   <a:srgbClr val="111111"/>
                 </a:solidFill>
-                <a:latin typeface="Arial"/>
-                <a:ea typeface="Arial"/>
+                <a:latin typeface="NotoSansJP"/>
+                <a:ea typeface="NotoSansJP"/>
               </a:rPr>
               <a:t>1</a:t>
             </a:r>
@@ -1897,7 +1127,7 @@
       </p:grpSpPr>
       <p:sp>
         <p:nvSpPr>
-          <p:cNvPr id="35" name=""/>
+          <p:cNvPr id="15" name=""/>
           <p:cNvSpPr/>
           <p:nvPr/>
         </p:nvSpPr>
@@ -1955,7 +1185,7 @@
       </p:sp>
       <p:sp>
         <p:nvSpPr>
-          <p:cNvPr id="36" name=""/>
+          <p:cNvPr id="16" name=""/>
           <p:cNvSpPr/>
           <p:nvPr/>
         </p:nvSpPr>
@@ -2013,7 +1243,7 @@
       </p:sp>
       <p:sp>
         <p:nvSpPr>
-          <p:cNvPr id="37" name=""/>
+          <p:cNvPr id="17" name=""/>
           <p:cNvSpPr/>
           <p:nvPr/>
         </p:nvSpPr>
@@ -2071,14 +1301,14 @@
       </p:sp>
       <p:sp>
         <p:nvSpPr>
-          <p:cNvPr id="38" name=""/>
+          <p:cNvPr id="18" name=""/>
           <p:cNvSpPr txBox="1"/>
           <p:nvPr/>
         </p:nvSpPr>
         <p:spPr>
           <a:xfrm>
-            <a:off x="3009960" y="3065760"/>
-            <a:ext cx="610200" cy="442440"/>
+            <a:off x="3009960" y="3122280"/>
+            <a:ext cx="872280" cy="443880"/>
           </a:xfrm>
           <a:prstGeom prst="rect">
             <a:avLst/>
@@ -2098,10 +1328,20 @@
                 <a:solidFill>
                   <a:srgbClr val="0b4b78"/>
                 </a:solidFill>
-                <a:latin typeface="NotoSansCJKjp"/>
-                <a:ea typeface="NotoSansCJKjp"/>
-              </a:rPr>
-              <a:t>⽬次</a:t>
+                <a:latin typeface="NotoSansJP"/>
+                <a:ea typeface="NotoSansJP"/>
+              </a:rPr>
+              <a:t>目次</a:t>
+            </a:r>
+            <a:r>
+              <a:rPr b="0" lang="en-US" sz="2400" spc="-1" strike="noStrike">
+                <a:solidFill>
+                  <a:srgbClr val="0b4b78"/>
+                </a:solidFill>
+                <a:latin typeface="NotoSansJP"/>
+                <a:ea typeface="NotoSansJP"/>
+              </a:rPr>
+              <a:t>1</a:t>
             </a:r>
             <a:endParaRPr b="0" lang="en-US" sz="2400" spc="-1" strike="noStrike">
               <a:solidFill>
@@ -2114,50 +1354,7 @@
       </p:sp>
       <p:sp>
         <p:nvSpPr>
-          <p:cNvPr id="39" name=""/>
-          <p:cNvSpPr txBox="1"/>
-          <p:nvPr/>
-        </p:nvSpPr>
-        <p:spPr>
-          <a:xfrm>
-            <a:off x="3619440" y="3143520"/>
-            <a:ext cx="304560" cy="340200"/>
-          </a:xfrm>
-          <a:prstGeom prst="rect">
-            <a:avLst/>
-          </a:prstGeom>
-          <a:noFill/>
-          <a:ln w="0">
-            <a:noFill/>
-          </a:ln>
-        </p:spPr>
-        <p:txBody>
-          <a:bodyPr wrap="none" lIns="0" rIns="0" tIns="0" bIns="0" anchor="t">
-            <a:noAutofit/>
-          </a:bodyPr>
-          <a:p>
-            <a:r>
-              <a:rPr b="1" lang="en-US" sz="2400" spc="-1" strike="noStrike">
-                <a:solidFill>
-                  <a:srgbClr val="0b4b78"/>
-                </a:solidFill>
-                <a:latin typeface="Arial"/>
-                <a:ea typeface="Arial"/>
-              </a:rPr>
-              <a:t>1</a:t>
-            </a:r>
-            <a:endParaRPr b="0" lang="en-US" sz="2400" spc="-1" strike="noStrike">
-              <a:solidFill>
-                <a:srgbClr val="000000"/>
-              </a:solidFill>
-              <a:latin typeface="Times New Roman"/>
-            </a:endParaRPr>
-          </a:p>
-        </p:txBody>
-      </p:sp>
-      <p:sp>
-        <p:nvSpPr>
-          <p:cNvPr id="40" name=""/>
+          <p:cNvPr id="19" name=""/>
           <p:cNvSpPr/>
           <p:nvPr/>
         </p:nvSpPr>
@@ -2213,9 +1410,32 @@
           </a:p>
         </p:txBody>
       </p:sp>
-      <p:sp>
-        <p:nvSpPr>
-          <p:cNvPr id="41" name=""/>
+      <p:pic>
+        <p:nvPicPr>
+          <p:cNvPr id="20" name="" descr=""/>
+          <p:cNvPicPr/>
+          <p:nvPr/>
+        </p:nvPicPr>
+        <p:blipFill>
+          <a:blip r:embed="rId1"/>
+          <a:stretch/>
+        </p:blipFill>
+        <p:spPr>
+          <a:xfrm>
+            <a:off x="10744200" y="-219240"/>
+            <a:ext cx="1256760" cy="1256760"/>
+          </a:xfrm>
+          <a:prstGeom prst="rect">
+            <a:avLst/>
+          </a:prstGeom>
+          <a:ln w="0">
+            <a:noFill/>
+          </a:ln>
+        </p:spPr>
+      </p:pic>
+      <p:sp>
+        <p:nvSpPr>
+          <p:cNvPr id="21" name=""/>
           <p:cNvSpPr/>
           <p:nvPr/>
         </p:nvSpPr>
@@ -2273,13 +1493,13 @@
       </p:sp>
       <p:sp>
         <p:nvSpPr>
-          <p:cNvPr id="42" name=""/>
+          <p:cNvPr id="22" name=""/>
           <p:cNvSpPr txBox="1"/>
           <p:nvPr/>
         </p:nvSpPr>
         <p:spPr>
           <a:xfrm>
-            <a:off x="495360" y="129240"/>
+            <a:off x="495360" y="187200"/>
             <a:ext cx="1623960" cy="469800"/>
           </a:xfrm>
           <a:prstGeom prst="rect">
@@ -2300,8 +1520,8 @@
                 <a:solidFill>
                   <a:srgbClr val="111111"/>
                 </a:solidFill>
-                <a:latin typeface="NotoSansCJKjp"/>
-                <a:ea typeface="NotoSansCJKjp"/>
+                <a:latin typeface="NotoSansJP"/>
+                <a:ea typeface="NotoSansJP"/>
               </a:rPr>
               <a:t>アジェンダ</a:t>
             </a:r>
@@ -2316,14 +1536,14 @@
       </p:sp>
       <p:sp>
         <p:nvSpPr>
-          <p:cNvPr id="43" name=""/>
+          <p:cNvPr id="23" name=""/>
           <p:cNvSpPr txBox="1"/>
           <p:nvPr/>
         </p:nvSpPr>
         <p:spPr>
           <a:xfrm>
-            <a:off x="11946240" y="6458400"/>
-            <a:ext cx="304560" cy="340200"/>
+            <a:off x="11946600" y="6436800"/>
+            <a:ext cx="304560" cy="416520"/>
           </a:xfrm>
           <a:prstGeom prst="rect">
             <a:avLst/>
@@ -2343,8 +1563,8 @@
                 <a:solidFill>
                   <a:srgbClr val="111111"/>
                 </a:solidFill>
-                <a:latin typeface="Arial"/>
-                <a:ea typeface="Arial"/>
+                <a:latin typeface="NotoSansJP"/>
+                <a:ea typeface="NotoSansJP"/>
               </a:rPr>
               <a:t>2</a:t>
             </a:r>
@@ -2389,7 +1609,7 @@
       </p:grpSpPr>
       <p:sp>
         <p:nvSpPr>
-          <p:cNvPr id="44" name=""/>
+          <p:cNvPr id="24" name=""/>
           <p:cNvSpPr/>
           <p:nvPr/>
         </p:nvSpPr>
@@ -2447,7 +1667,7 @@
       </p:sp>
       <p:sp>
         <p:nvSpPr>
-          <p:cNvPr id="45" name=""/>
+          <p:cNvPr id="25" name=""/>
           <p:cNvSpPr/>
           <p:nvPr/>
         </p:nvSpPr>
@@ -2505,7 +1725,7 @@
       </p:sp>
       <p:sp>
         <p:nvSpPr>
-          <p:cNvPr id="46" name=""/>
+          <p:cNvPr id="26" name=""/>
           <p:cNvSpPr/>
           <p:nvPr/>
         </p:nvSpPr>
@@ -2563,7 +1783,7 @@
       </p:sp>
       <p:sp>
         <p:nvSpPr>
-          <p:cNvPr id="47" name=""/>
+          <p:cNvPr id="27" name=""/>
           <p:cNvSpPr/>
           <p:nvPr/>
         </p:nvSpPr>
@@ -2779,16 +1999,39 @@
           </a:p>
         </p:txBody>
       </p:sp>
-      <p:sp>
-        <p:nvSpPr>
-          <p:cNvPr id="48" name=""/>
+      <p:pic>
+        <p:nvPicPr>
+          <p:cNvPr id="28" name="" descr=""/>
+          <p:cNvPicPr/>
+          <p:nvPr/>
+        </p:nvPicPr>
+        <p:blipFill>
+          <a:blip r:embed="rId1"/>
+          <a:stretch/>
+        </p:blipFill>
+        <p:spPr>
+          <a:xfrm>
+            <a:off x="10515600" y="38160"/>
+            <a:ext cx="1142640" cy="1142640"/>
+          </a:xfrm>
+          <a:prstGeom prst="rect">
+            <a:avLst/>
+          </a:prstGeom>
+          <a:ln w="0">
+            <a:noFill/>
+          </a:ln>
+        </p:spPr>
+      </p:pic>
+      <p:sp>
+        <p:nvSpPr>
+          <p:cNvPr id="29" name=""/>
           <p:cNvSpPr txBox="1"/>
           <p:nvPr/>
         </p:nvSpPr>
         <p:spPr>
           <a:xfrm>
-            <a:off x="533520" y="870120"/>
-            <a:ext cx="3862440" cy="399600"/>
+            <a:off x="533520" y="923760"/>
+            <a:ext cx="5277240" cy="401040"/>
           </a:xfrm>
           <a:prstGeom prst="rect">
             <a:avLst/>
@@ -2808,11 +2051,31 @@
                 <a:solidFill>
                   <a:srgbClr val="111111"/>
                 </a:solidFill>
-                <a:latin typeface="NotoSansCJKjp"/>
-                <a:ea typeface="NotoSansCJKjp"/>
+                <a:latin typeface="NotoSansJP"/>
+                <a:ea typeface="NotoSansJP"/>
               </a:rPr>
               <a:t>このスライドで伝えたい内容を</a:t>
             </a:r>
+            <a:r>
+              <a:rPr b="0" lang="en-US" sz="2170" spc="-1" strike="noStrike">
+                <a:solidFill>
+                  <a:srgbClr val="111111"/>
+                </a:solidFill>
+                <a:latin typeface="NotoSansJP"/>
+                <a:ea typeface="NotoSansJP"/>
+              </a:rPr>
+              <a:t>1</a:t>
+            </a:r>
+            <a:r>
+              <a:rPr b="0" lang="zh-CN" sz="2170" spc="-1" strike="noStrike">
+                <a:solidFill>
+                  <a:srgbClr val="111111"/>
+                </a:solidFill>
+                <a:latin typeface="NotoSansJP"/>
+                <a:ea typeface="NotoSansJP"/>
+              </a:rPr>
+              <a:t>行で説明</a:t>
+            </a:r>
             <a:endParaRPr b="0" lang="en-US" sz="2170" spc="-1" strike="noStrike">
               <a:solidFill>
                 <a:srgbClr val="000000"/>
@@ -2824,93 +2087,7 @@
       </p:sp>
       <p:sp>
         <p:nvSpPr>
-          <p:cNvPr id="49" name=""/>
-          <p:cNvSpPr txBox="1"/>
-          <p:nvPr/>
-        </p:nvSpPr>
-        <p:spPr>
-          <a:xfrm>
-            <a:off x="4400640" y="940680"/>
-            <a:ext cx="275760" cy="308160"/>
-          </a:xfrm>
-          <a:prstGeom prst="rect">
-            <a:avLst/>
-          </a:prstGeom>
-          <a:noFill/>
-          <a:ln w="0">
-            <a:noFill/>
-          </a:ln>
-        </p:spPr>
-        <p:txBody>
-          <a:bodyPr wrap="none" lIns="0" rIns="0" tIns="0" bIns="0" anchor="t">
-            <a:noAutofit/>
-          </a:bodyPr>
-          <a:p>
-            <a:r>
-              <a:rPr b="0" lang="en-US" sz="2170" spc="-1" strike="noStrike">
-                <a:solidFill>
-                  <a:srgbClr val="111111"/>
-                </a:solidFill>
-                <a:latin typeface="Arial"/>
-                <a:ea typeface="Arial"/>
-              </a:rPr>
-              <a:t>1</a:t>
-            </a:r>
-            <a:endParaRPr b="0" lang="en-US" sz="2170" spc="-1" strike="noStrike">
-              <a:solidFill>
-                <a:srgbClr val="000000"/>
-              </a:solidFill>
-              <a:latin typeface="Times New Roman"/>
-            </a:endParaRPr>
-          </a:p>
-        </p:txBody>
-      </p:sp>
-      <p:sp>
-        <p:nvSpPr>
-          <p:cNvPr id="50" name=""/>
-          <p:cNvSpPr txBox="1"/>
-          <p:nvPr/>
-        </p:nvSpPr>
-        <p:spPr>
-          <a:xfrm>
-            <a:off x="4554000" y="870120"/>
-            <a:ext cx="1104120" cy="399600"/>
-          </a:xfrm>
-          <a:prstGeom prst="rect">
-            <a:avLst/>
-          </a:prstGeom>
-          <a:noFill/>
-          <a:ln w="0">
-            <a:noFill/>
-          </a:ln>
-        </p:spPr>
-        <p:txBody>
-          <a:bodyPr wrap="none" lIns="0" rIns="0" tIns="0" bIns="0" anchor="t">
-            <a:noAutofit/>
-          </a:bodyPr>
-          <a:p>
-            <a:r>
-              <a:rPr b="0" lang="zh-CN" sz="2170" spc="-1" strike="noStrike">
-                <a:solidFill>
-                  <a:srgbClr val="111111"/>
-                </a:solidFill>
-                <a:latin typeface="NotoSansCJKjp"/>
-                <a:ea typeface="NotoSansCJKjp"/>
-              </a:rPr>
-              <a:t>⾏で説明</a:t>
-            </a:r>
-            <a:endParaRPr b="0" lang="en-US" sz="2170" spc="-1" strike="noStrike">
-              <a:solidFill>
-                <a:srgbClr val="000000"/>
-              </a:solidFill>
-              <a:latin typeface="Times New Roman"/>
-            </a:endParaRPr>
-          </a:p>
-        </p:txBody>
-      </p:sp>
-      <p:sp>
-        <p:nvSpPr>
-          <p:cNvPr id="51" name=""/>
+          <p:cNvPr id="30" name=""/>
           <p:cNvSpPr/>
           <p:nvPr/>
         </p:nvSpPr>
@@ -3048,13 +2225,13 @@
       </p:sp>
       <p:sp>
         <p:nvSpPr>
-          <p:cNvPr id="52" name=""/>
+          <p:cNvPr id="31" name=""/>
           <p:cNvSpPr txBox="1"/>
           <p:nvPr/>
         </p:nvSpPr>
         <p:spPr>
           <a:xfrm>
-            <a:off x="914400" y="351000"/>
+            <a:off x="914400" y="392400"/>
             <a:ext cx="1491120" cy="360000"/>
           </a:xfrm>
           <a:prstGeom prst="rect">
@@ -3075,10 +2252,10 @@
                 <a:solidFill>
                   <a:srgbClr val="111111"/>
                 </a:solidFill>
-                <a:latin typeface="NotoSansCJKjp"/>
-                <a:ea typeface="NotoSansCJKjp"/>
-              </a:rPr>
-              <a:t>⾒出しを⼊⼒</a:t>
+                <a:latin typeface="NotoSansJP"/>
+                <a:ea typeface="NotoSansJP"/>
+              </a:rPr>
+              <a:t>見出しを入力</a:t>
             </a:r>
             <a:endParaRPr b="0" lang="en-US" sz="1950" spc="-1" strike="noStrike">
               <a:solidFill>
@@ -3091,14 +2268,14 @@
       </p:sp>
       <p:sp>
         <p:nvSpPr>
-          <p:cNvPr id="53" name=""/>
+          <p:cNvPr id="32" name=""/>
           <p:cNvSpPr txBox="1"/>
           <p:nvPr/>
         </p:nvSpPr>
         <p:spPr>
           <a:xfrm>
-            <a:off x="11946240" y="6458400"/>
-            <a:ext cx="304560" cy="340200"/>
+            <a:off x="11946600" y="6436800"/>
+            <a:ext cx="304560" cy="416520"/>
           </a:xfrm>
           <a:prstGeom prst="rect">
             <a:avLst/>
@@ -3118,8 +2295,8 @@
                 <a:solidFill>
                   <a:srgbClr val="111111"/>
                 </a:solidFill>
-                <a:latin typeface="Arial"/>
-                <a:ea typeface="Arial"/>
+                <a:latin typeface="NotoSansJP"/>
+                <a:ea typeface="NotoSansJP"/>
               </a:rPr>
               <a:t>3</a:t>
             </a:r>
@@ -3164,7 +2341,7 @@
       </p:grpSpPr>
       <p:sp>
         <p:nvSpPr>
-          <p:cNvPr id="54" name=""/>
+          <p:cNvPr id="33" name=""/>
           <p:cNvSpPr/>
           <p:nvPr/>
         </p:nvSpPr>
@@ -3222,7 +2399,7 @@
       </p:sp>
       <p:sp>
         <p:nvSpPr>
-          <p:cNvPr id="55" name=""/>
+          <p:cNvPr id="34" name=""/>
           <p:cNvSpPr/>
           <p:nvPr/>
         </p:nvSpPr>
@@ -3280,7 +2457,7 @@
       </p:sp>
       <p:sp>
         <p:nvSpPr>
-          <p:cNvPr id="56" name=""/>
+          <p:cNvPr id="35" name=""/>
           <p:cNvSpPr/>
           <p:nvPr/>
         </p:nvSpPr>
@@ -3338,7 +2515,7 @@
       </p:sp>
       <p:sp>
         <p:nvSpPr>
-          <p:cNvPr id="57" name=""/>
+          <p:cNvPr id="36" name=""/>
           <p:cNvSpPr/>
           <p:nvPr/>
         </p:nvSpPr>
@@ -3554,9 +2731,55 @@
           </a:p>
         </p:txBody>
       </p:sp>
-      <p:sp>
-        <p:nvSpPr>
-          <p:cNvPr id="58" name=""/>
+      <p:pic>
+        <p:nvPicPr>
+          <p:cNvPr id="37" name="" descr=""/>
+          <p:cNvPicPr/>
+          <p:nvPr/>
+        </p:nvPicPr>
+        <p:blipFill>
+          <a:blip r:embed="rId1"/>
+          <a:stretch/>
+        </p:blipFill>
+        <p:spPr>
+          <a:xfrm>
+            <a:off x="10515600" y="38160"/>
+            <a:ext cx="1142640" cy="1142640"/>
+          </a:xfrm>
+          <a:prstGeom prst="rect">
+            <a:avLst/>
+          </a:prstGeom>
+          <a:ln w="0">
+            <a:noFill/>
+          </a:ln>
+        </p:spPr>
+      </p:pic>
+      <p:pic>
+        <p:nvPicPr>
+          <p:cNvPr id="38" name="" descr=""/>
+          <p:cNvPicPr/>
+          <p:nvPr/>
+        </p:nvPicPr>
+        <p:blipFill>
+          <a:blip r:embed="rId2"/>
+          <a:stretch/>
+        </p:blipFill>
+        <p:spPr>
+          <a:xfrm>
+            <a:off x="1343160" y="895320"/>
+            <a:ext cx="666360" cy="666360"/>
+          </a:xfrm>
+          <a:prstGeom prst="rect">
+            <a:avLst/>
+          </a:prstGeom>
+          <a:ln w="0">
+            <a:noFill/>
+          </a:ln>
+        </p:spPr>
+      </p:pic>
+      <p:sp>
+        <p:nvSpPr>
+          <p:cNvPr id="39" name=""/>
           <p:cNvSpPr/>
           <p:nvPr/>
         </p:nvSpPr>
@@ -3694,13 +2917,13 @@
       </p:sp>
       <p:sp>
         <p:nvSpPr>
-          <p:cNvPr id="59" name=""/>
+          <p:cNvPr id="40" name=""/>
           <p:cNvSpPr txBox="1"/>
           <p:nvPr/>
         </p:nvSpPr>
         <p:spPr>
           <a:xfrm>
-            <a:off x="914400" y="351000"/>
+            <a:off x="914400" y="392400"/>
             <a:ext cx="1491120" cy="360000"/>
           </a:xfrm>
           <a:prstGeom prst="rect">
@@ -3721,8 +2944,8 @@
                 <a:solidFill>
                   <a:srgbClr val="111111"/>
                 </a:solidFill>
-                <a:latin typeface="NotoSansCJKjp"/>
-                <a:ea typeface="NotoSansCJKjp"/>
+                <a:latin typeface="NotoSansJP"/>
+                <a:ea typeface="NotoSansJP"/>
               </a:rPr>
               <a:t>画像サンプル</a:t>
             </a:r>
@@ -3737,14 +2960,14 @@
       </p:sp>
       <p:sp>
         <p:nvSpPr>
-          <p:cNvPr id="60" name=""/>
+          <p:cNvPr id="41" name=""/>
           <p:cNvSpPr txBox="1"/>
           <p:nvPr/>
         </p:nvSpPr>
         <p:spPr>
           <a:xfrm>
-            <a:off x="11946240" y="6458400"/>
-            <a:ext cx="304560" cy="340200"/>
+            <a:off x="11946600" y="6436800"/>
+            <a:ext cx="304560" cy="416520"/>
           </a:xfrm>
           <a:prstGeom prst="rect">
             <a:avLst/>
@@ -3764,8 +2987,8 @@
                 <a:solidFill>
                   <a:srgbClr val="111111"/>
                 </a:solidFill>
-                <a:latin typeface="Arial"/>
-                <a:ea typeface="Arial"/>
+                <a:latin typeface="NotoSansJP"/>
+                <a:ea typeface="NotoSansJP"/>
               </a:rPr>
               <a:t>4</a:t>
             </a:r>
@@ -3810,7 +3033,7 @@
       </p:grpSpPr>
       <p:sp>
         <p:nvSpPr>
-          <p:cNvPr id="61" name=""/>
+          <p:cNvPr id="42" name=""/>
           <p:cNvSpPr/>
           <p:nvPr/>
         </p:nvSpPr>
@@ -3868,7 +3091,7 @@
       </p:sp>
       <p:sp>
         <p:nvSpPr>
-          <p:cNvPr id="62" name=""/>
+          <p:cNvPr id="43" name=""/>
           <p:cNvSpPr/>
           <p:nvPr/>
         </p:nvSpPr>
@@ -3926,7 +3149,7 @@
       </p:sp>
       <p:sp>
         <p:nvSpPr>
-          <p:cNvPr id="63" name=""/>
+          <p:cNvPr id="44" name=""/>
           <p:cNvSpPr/>
           <p:nvPr/>
         </p:nvSpPr>
@@ -3984,7 +3207,7 @@
       </p:sp>
       <p:sp>
         <p:nvSpPr>
-          <p:cNvPr id="64" name=""/>
+          <p:cNvPr id="45" name=""/>
           <p:cNvSpPr/>
           <p:nvPr/>
         </p:nvSpPr>
@@ -4200,9 +3423,32 @@
           </a:p>
         </p:txBody>
       </p:sp>
-      <p:sp>
-        <p:nvSpPr>
-          <p:cNvPr id="65" name=""/>
+      <p:pic>
+        <p:nvPicPr>
+          <p:cNvPr id="46" name="" descr=""/>
+          <p:cNvPicPr/>
+          <p:nvPr/>
+        </p:nvPicPr>
+        <p:blipFill>
+          <a:blip r:embed="rId1"/>
+          <a:stretch/>
+        </p:blipFill>
+        <p:spPr>
+          <a:xfrm>
+            <a:off x="10515600" y="38160"/>
+            <a:ext cx="1142640" cy="1142640"/>
+          </a:xfrm>
+          <a:prstGeom prst="rect">
+            <a:avLst/>
+          </a:prstGeom>
+          <a:ln w="0">
+            <a:noFill/>
+          </a:ln>
+        </p:spPr>
+      </p:pic>
+      <p:sp>
+        <p:nvSpPr>
+          <p:cNvPr id="47" name=""/>
           <p:cNvSpPr/>
           <p:nvPr/>
         </p:nvSpPr>
@@ -4420,7 +3666,7 @@
       </p:sp>
       <p:sp>
         <p:nvSpPr>
-          <p:cNvPr id="66" name=""/>
+          <p:cNvPr id="48" name=""/>
           <p:cNvSpPr/>
           <p:nvPr/>
         </p:nvSpPr>
@@ -4639,14 +3885,14 @@
       </p:sp>
       <p:sp>
         <p:nvSpPr>
-          <p:cNvPr id="67" name=""/>
+          <p:cNvPr id="49" name=""/>
           <p:cNvSpPr txBox="1"/>
           <p:nvPr/>
         </p:nvSpPr>
         <p:spPr>
           <a:xfrm>
-            <a:off x="714240" y="1155240"/>
-            <a:ext cx="1643760" cy="198360"/>
+            <a:off x="714240" y="1131120"/>
+            <a:ext cx="1231920" cy="233640"/>
           </a:xfrm>
           <a:prstGeom prst="rect">
             <a:avLst/>
@@ -4666,38 +3912,28 @@
                 <a:solidFill>
                   <a:srgbClr val="cf222e"/>
                 </a:solidFill>
-                <a:latin typeface="DejaVuSansMono"/>
-                <a:ea typeface="DejaVuSansMono"/>
+                <a:latin typeface="NotoSansJP"/>
+                <a:ea typeface="NotoSansJP"/>
               </a:rPr>
               <a:t>def</a:t>
             </a:r>
             <a:r>
               <a:rPr b="0" lang="en-US" sz="1350" spc="-1" strike="noStrike">
                 <a:solidFill>
+                  <a:srgbClr val="6639ba"/>
+                </a:solidFill>
+                <a:latin typeface="NotoSansJP"/>
+                <a:ea typeface="NotoSansJP"/>
+              </a:rPr>
+              <a:t> greet</a:t>
+            </a:r>
+            <a:r>
+              <a:rPr b="0" lang="en-US" sz="1350" spc="-1" strike="noStrike">
+                <a:solidFill>
                   <a:srgbClr val="1b1b1b"/>
                 </a:solidFill>
-                <a:latin typeface="DejaVuSansMono"/>
-                <a:ea typeface="DejaVuSansMono"/>
-              </a:rPr>
-              <a:t> </a:t>
-            </a:r>
-            <a:r>
-              <a:rPr b="0" lang="en-US" sz="1350" spc="-1" strike="noStrike">
-                <a:solidFill>
-                  <a:srgbClr val="6639ba"/>
-                </a:solidFill>
-                <a:latin typeface="DejaVuSansMono"/>
-                <a:ea typeface="DejaVuSansMono"/>
-              </a:rPr>
-              <a:t>greet</a:t>
-            </a:r>
-            <a:r>
-              <a:rPr b="0" lang="en-US" sz="1350" spc="-1" strike="noStrike">
-                <a:solidFill>
-                  <a:srgbClr val="1b1b1b"/>
-                </a:solidFill>
-                <a:latin typeface="DejaVuSansMono"/>
-                <a:ea typeface="DejaVuSansMono"/>
+                <a:latin typeface="NotoSansJP"/>
+                <a:ea typeface="NotoSansJP"/>
               </a:rPr>
               <a:t>(name):</a:t>
             </a:r>
@@ -4712,14 +3948,14 @@
       </p:sp>
       <p:sp>
         <p:nvSpPr>
-          <p:cNvPr id="68" name=""/>
+          <p:cNvPr id="50" name=""/>
           <p:cNvSpPr txBox="1"/>
           <p:nvPr/>
         </p:nvSpPr>
         <p:spPr>
           <a:xfrm>
-            <a:off x="714240" y="1393560"/>
-            <a:ext cx="2871720" cy="198360"/>
+            <a:off x="867960" y="1369440"/>
+            <a:ext cx="1699920" cy="233640"/>
           </a:xfrm>
           <a:prstGeom prst="rect">
             <a:avLst/>
@@ -4737,60 +3973,40 @@
             <a:r>
               <a:rPr b="0" lang="en-US" sz="1350" spc="-1" strike="noStrike">
                 <a:solidFill>
-                  <a:srgbClr val="1b1b1b"/>
-                </a:solidFill>
-                <a:latin typeface="DejaVuSansMono"/>
-                <a:ea typeface="DejaVuSansMono"/>
-              </a:rPr>
-              <a:t>    </a:t>
+                  <a:srgbClr val="cf222e"/>
+                </a:solidFill>
+                <a:latin typeface="NotoSansJP"/>
+                <a:ea typeface="NotoSansJP"/>
+              </a:rPr>
+              <a:t>return</a:t>
             </a:r>
             <a:r>
               <a:rPr b="0" lang="en-US" sz="1350" spc="-1" strike="noStrike">
                 <a:solidFill>
-                  <a:srgbClr val="cf222e"/>
-                </a:solidFill>
-                <a:latin typeface="DejaVuSansMono"/>
-                <a:ea typeface="DejaVuSansMono"/>
-              </a:rPr>
-              <a:t>return</a:t>
+                  <a:srgbClr val="0a3069"/>
+                </a:solidFill>
+                <a:latin typeface="NotoSansJP"/>
+                <a:ea typeface="NotoSansJP"/>
+              </a:rPr>
+              <a:t> f"Hello, </a:t>
             </a:r>
             <a:r>
               <a:rPr b="0" lang="en-US" sz="1350" spc="-1" strike="noStrike">
                 <a:solidFill>
-                  <a:srgbClr val="1b1b1b"/>
-                </a:solidFill>
-                <a:latin typeface="DejaVuSansMono"/>
-                <a:ea typeface="DejaVuSansMono"/>
-              </a:rPr>
-              <a:t> </a:t>
+                  <a:srgbClr val="1f2328"/>
+                </a:solidFill>
+                <a:latin typeface="NotoSansJP"/>
+                <a:ea typeface="NotoSansJP"/>
+              </a:rPr>
+              <a:t>{name}</a:t>
             </a:r>
             <a:r>
               <a:rPr b="0" lang="en-US" sz="1350" spc="-1" strike="noStrike">
                 <a:solidFill>
                   <a:srgbClr val="0a3069"/>
                 </a:solidFill>
-                <a:latin typeface="DejaVuSansMono"/>
-                <a:ea typeface="DejaVuSansMono"/>
-              </a:rPr>
-              <a:t>f"Hello, </a:t>
-            </a:r>
-            <a:r>
-              <a:rPr b="0" lang="en-US" sz="1350" spc="-1" strike="noStrike">
-                <a:solidFill>
-                  <a:srgbClr val="1f2328"/>
-                </a:solidFill>
-                <a:latin typeface="DejaVuSansMono"/>
-                <a:ea typeface="DejaVuSansMono"/>
-              </a:rPr>
-              <a:t>{name}</a:t>
-            </a:r>
-            <a:r>
-              <a:rPr b="0" lang="en-US" sz="1350" spc="-1" strike="noStrike">
-                <a:solidFill>
-                  <a:srgbClr val="0a3069"/>
-                </a:solidFill>
-                <a:latin typeface="DejaVuSansMono"/>
-                <a:ea typeface="DejaVuSansMono"/>
+                <a:latin typeface="NotoSansJP"/>
+                <a:ea typeface="NotoSansJP"/>
               </a:rPr>
               <a:t>!"</a:t>
             </a:r>
@@ -4805,14 +4021,14 @@
       </p:sp>
       <p:sp>
         <p:nvSpPr>
-          <p:cNvPr id="69" name=""/>
+          <p:cNvPr id="51" name=""/>
           <p:cNvSpPr txBox="1"/>
           <p:nvPr/>
         </p:nvSpPr>
         <p:spPr>
           <a:xfrm>
-            <a:off x="714240" y="1879200"/>
-            <a:ext cx="2157120" cy="198360"/>
+            <a:off x="714240" y="1855080"/>
+            <a:ext cx="1450080" cy="233640"/>
           </a:xfrm>
           <a:prstGeom prst="rect">
             <a:avLst/>
@@ -4832,8 +4048,8 @@
                 <a:solidFill>
                   <a:srgbClr val="953800"/>
                 </a:solidFill>
-                <a:latin typeface="DejaVuSansMono"/>
-                <a:ea typeface="DejaVuSansMono"/>
+                <a:latin typeface="NotoSansJP"/>
+                <a:ea typeface="NotoSansJP"/>
               </a:rPr>
               <a:t>print</a:t>
             </a:r>
@@ -4842,8 +4058,8 @@
                 <a:solidFill>
                   <a:srgbClr val="1b1b1b"/>
                 </a:solidFill>
-                <a:latin typeface="DejaVuSansMono"/>
-                <a:ea typeface="DejaVuSansMono"/>
+                <a:latin typeface="NotoSansJP"/>
+                <a:ea typeface="NotoSansJP"/>
               </a:rPr>
               <a:t>(greet(</a:t>
             </a:r>
@@ -4852,8 +4068,8 @@
                 <a:solidFill>
                   <a:srgbClr val="0a3069"/>
                 </a:solidFill>
-                <a:latin typeface="DejaVuSansMono"/>
-                <a:ea typeface="DejaVuSansMono"/>
+                <a:latin typeface="NotoSansJP"/>
+                <a:ea typeface="NotoSansJP"/>
               </a:rPr>
               <a:t>"KaiRA"</a:t>
             </a:r>
@@ -4862,8 +4078,8 @@
                 <a:solidFill>
                   <a:srgbClr val="1b1b1b"/>
                 </a:solidFill>
-                <a:latin typeface="DejaVuSansMono"/>
-                <a:ea typeface="DejaVuSansMono"/>
+                <a:latin typeface="NotoSansJP"/>
+                <a:ea typeface="NotoSansJP"/>
               </a:rPr>
               <a:t>))</a:t>
             </a:r>
@@ -4878,50 +4094,7 @@
       </p:sp>
       <p:sp>
         <p:nvSpPr>
-          <p:cNvPr id="70" name=""/>
-          <p:cNvSpPr txBox="1"/>
-          <p:nvPr/>
-        </p:nvSpPr>
-        <p:spPr>
-          <a:xfrm>
-            <a:off x="914400" y="414000"/>
-            <a:ext cx="842040" cy="279360"/>
-          </a:xfrm>
-          <a:prstGeom prst="rect">
-            <a:avLst/>
-          </a:prstGeom>
-          <a:noFill/>
-          <a:ln w="0">
-            <a:noFill/>
-          </a:ln>
-        </p:spPr>
-        <p:txBody>
-          <a:bodyPr wrap="none" lIns="0" rIns="0" tIns="0" bIns="0" anchor="t">
-            <a:noAutofit/>
-          </a:bodyPr>
-          <a:p>
-            <a:r>
-              <a:rPr b="1" lang="en-US" sz="1950" spc="-1" strike="noStrike">
-                <a:solidFill>
-                  <a:srgbClr val="111111"/>
-                </a:solidFill>
-                <a:latin typeface="Arial"/>
-                <a:ea typeface="Arial"/>
-              </a:rPr>
-              <a:t>Python</a:t>
-            </a:r>
-            <a:endParaRPr b="0" lang="en-US" sz="1950" spc="-1" strike="noStrike">
-              <a:solidFill>
-                <a:srgbClr val="000000"/>
-              </a:solidFill>
-              <a:latin typeface="Times New Roman"/>
-            </a:endParaRPr>
-          </a:p>
-        </p:txBody>
-      </p:sp>
-      <p:sp>
-        <p:nvSpPr>
-          <p:cNvPr id="71" name=""/>
+          <p:cNvPr id="52" name=""/>
           <p:cNvSpPr/>
           <p:nvPr/>
         </p:nvSpPr>
@@ -5059,14 +4232,14 @@
       </p:sp>
       <p:sp>
         <p:nvSpPr>
-          <p:cNvPr id="72" name=""/>
+          <p:cNvPr id="53" name=""/>
           <p:cNvSpPr txBox="1"/>
           <p:nvPr/>
         </p:nvSpPr>
         <p:spPr>
           <a:xfrm>
-            <a:off x="1753560" y="351000"/>
-            <a:ext cx="1739520" cy="360000"/>
+            <a:off x="914400" y="392400"/>
+            <a:ext cx="2561760" cy="361440"/>
           </a:xfrm>
           <a:prstGeom prst="rect">
             <a:avLst/>
@@ -5082,12 +4255,22 @@
           </a:bodyPr>
           <a:p>
             <a:r>
+              <a:rPr b="0" lang="en-US" sz="1950" spc="-1" strike="noStrike">
+                <a:solidFill>
+                  <a:srgbClr val="111111"/>
+                </a:solidFill>
+                <a:latin typeface="NotoSansJP"/>
+                <a:ea typeface="NotoSansJP"/>
+              </a:rPr>
+              <a:t>Python</a:t>
+            </a:r>
+            <a:r>
               <a:rPr b="0" lang="zh-CN" sz="1950" spc="-1" strike="noStrike">
                 <a:solidFill>
                   <a:srgbClr val="111111"/>
                 </a:solidFill>
-                <a:latin typeface="NotoSansCJKjp"/>
-                <a:ea typeface="NotoSansCJKjp"/>
+                <a:latin typeface="NotoSansJP"/>
+                <a:ea typeface="NotoSansJP"/>
               </a:rPr>
               <a:t>コードサンプル</a:t>
             </a:r>
@@ -5102,14 +4285,14 @@
       </p:sp>
       <p:sp>
         <p:nvSpPr>
-          <p:cNvPr id="73" name=""/>
+          <p:cNvPr id="54" name=""/>
           <p:cNvSpPr txBox="1"/>
           <p:nvPr/>
         </p:nvSpPr>
         <p:spPr>
           <a:xfrm>
-            <a:off x="11946240" y="6458400"/>
-            <a:ext cx="304560" cy="340200"/>
+            <a:off x="11946600" y="6436800"/>
+            <a:ext cx="304560" cy="416520"/>
           </a:xfrm>
           <a:prstGeom prst="rect">
             <a:avLst/>
@@ -5129,8 +4312,8 @@
                 <a:solidFill>
                   <a:srgbClr val="111111"/>
                 </a:solidFill>
-                <a:latin typeface="Arial"/>
-                <a:ea typeface="Arial"/>
+                <a:latin typeface="NotoSansJP"/>
+                <a:ea typeface="NotoSansJP"/>
               </a:rPr>
               <a:t>5</a:t>
             </a:r>
@@ -5175,7 +4358,7 @@
       </p:grpSpPr>
       <p:sp>
         <p:nvSpPr>
-          <p:cNvPr id="74" name=""/>
+          <p:cNvPr id="55" name=""/>
           <p:cNvSpPr/>
           <p:nvPr/>
         </p:nvSpPr>
@@ -5233,7 +4416,7 @@
       </p:sp>
       <p:sp>
         <p:nvSpPr>
-          <p:cNvPr id="75" name=""/>
+          <p:cNvPr id="56" name=""/>
           <p:cNvSpPr/>
           <p:nvPr/>
         </p:nvSpPr>
@@ -5291,7 +4474,7 @@
       </p:sp>
       <p:sp>
         <p:nvSpPr>
-          <p:cNvPr id="76" name=""/>
+          <p:cNvPr id="57" name=""/>
           <p:cNvSpPr/>
           <p:nvPr/>
         </p:nvSpPr>
@@ -5349,7 +4532,7 @@
       </p:sp>
       <p:sp>
         <p:nvSpPr>
-          <p:cNvPr id="77" name=""/>
+          <p:cNvPr id="58" name=""/>
           <p:cNvSpPr/>
           <p:nvPr/>
         </p:nvSpPr>
@@ -5565,15 +4748,38 @@
           </a:p>
         </p:txBody>
       </p:sp>
-      <p:sp>
-        <p:nvSpPr>
-          <p:cNvPr id="78" name=""/>
+      <p:pic>
+        <p:nvPicPr>
+          <p:cNvPr id="59" name="" descr=""/>
+          <p:cNvPicPr/>
+          <p:nvPr/>
+        </p:nvPicPr>
+        <p:blipFill>
+          <a:blip r:embed="rId1"/>
+          <a:stretch/>
+        </p:blipFill>
+        <p:spPr>
+          <a:xfrm>
+            <a:off x="10515600" y="38160"/>
+            <a:ext cx="1142640" cy="1142640"/>
+          </a:xfrm>
+          <a:prstGeom prst="rect">
+            <a:avLst/>
+          </a:prstGeom>
+          <a:ln w="0">
+            <a:noFill/>
+          </a:ln>
+        </p:spPr>
+      </p:pic>
+      <p:sp>
+        <p:nvSpPr>
+          <p:cNvPr id="60" name=""/>
           <p:cNvSpPr txBox="1"/>
           <p:nvPr/>
         </p:nvSpPr>
         <p:spPr>
           <a:xfrm>
-            <a:off x="533520" y="870120"/>
+            <a:off x="533520" y="923760"/>
             <a:ext cx="2759040" cy="399600"/>
           </a:xfrm>
           <a:prstGeom prst="rect">
@@ -5594,10 +4800,10 @@
                 <a:solidFill>
                   <a:srgbClr val="c9342f"/>
                 </a:solidFill>
-                <a:latin typeface="NotoSansCJKjp"/>
-                <a:ea typeface="NotoSansCJKjp"/>
-              </a:rPr>
-              <a:t>⾚⽂字の強調テキスト</a:t>
+                <a:latin typeface="NotoSansJP"/>
+                <a:ea typeface="NotoSansJP"/>
+              </a:rPr>
+              <a:t>赤文字の強調テキスト</a:t>
             </a:r>
             <a:endParaRPr b="0" lang="en-US" sz="2170" spc="-1" strike="noStrike">
               <a:solidFill>
@@ -5610,13 +4816,13 @@
       </p:sp>
       <p:sp>
         <p:nvSpPr>
-          <p:cNvPr id="79" name=""/>
+          <p:cNvPr id="61" name=""/>
           <p:cNvSpPr txBox="1"/>
           <p:nvPr/>
         </p:nvSpPr>
         <p:spPr>
           <a:xfrm>
-            <a:off x="533520" y="1384560"/>
+            <a:off x="533520" y="1438200"/>
             <a:ext cx="3310920" cy="399600"/>
           </a:xfrm>
           <a:prstGeom prst="rect">
@@ -5637,10 +4843,10 @@
                 <a:solidFill>
                   <a:srgbClr val="083a5e"/>
                 </a:solidFill>
-                <a:latin typeface="NotoSansCJKjp"/>
-                <a:ea typeface="NotoSansCJKjp"/>
-              </a:rPr>
-              <a:t>濃い⻘⽂字の強調テキスト</a:t>
+                <a:latin typeface="NotoSansJP"/>
+                <a:ea typeface="NotoSansJP"/>
+              </a:rPr>
+              <a:t>濃い青文字の強調テキスト</a:t>
             </a:r>
             <a:endParaRPr b="0" lang="en-US" sz="2170" spc="-1" strike="noStrike">
               <a:solidFill>
@@ -5653,13 +4859,13 @@
       </p:sp>
       <p:sp>
         <p:nvSpPr>
-          <p:cNvPr id="80" name=""/>
+          <p:cNvPr id="62" name=""/>
           <p:cNvSpPr txBox="1"/>
           <p:nvPr/>
         </p:nvSpPr>
         <p:spPr>
           <a:xfrm>
-            <a:off x="533520" y="1889280"/>
+            <a:off x="533520" y="1942920"/>
             <a:ext cx="2483280" cy="399600"/>
           </a:xfrm>
           <a:prstGeom prst="rect">
@@ -5680,8 +4886,8 @@
                 <a:solidFill>
                   <a:srgbClr val="111111"/>
                 </a:solidFill>
-                <a:latin typeface="NotoSansCJKjp"/>
-                <a:ea typeface="NotoSansCJKjp"/>
+                <a:latin typeface="NotoSansJP"/>
+                <a:ea typeface="NotoSansJP"/>
               </a:rPr>
               <a:t>太字の強調テキスト</a:t>
             </a:r>
@@ -5696,14 +4902,14 @@
       </p:sp>
       <p:sp>
         <p:nvSpPr>
-          <p:cNvPr id="81" name=""/>
+          <p:cNvPr id="63" name=""/>
           <p:cNvSpPr txBox="1"/>
           <p:nvPr/>
         </p:nvSpPr>
         <p:spPr>
           <a:xfrm>
-            <a:off x="533520" y="2403720"/>
-            <a:ext cx="552240" cy="399600"/>
+            <a:off x="533520" y="2457360"/>
+            <a:ext cx="1822680" cy="401040"/>
           </a:xfrm>
           <a:prstGeom prst="rect">
             <a:avLst/>
@@ -5723,10 +4929,30 @@
                 <a:solidFill>
                   <a:srgbClr val="c9342f"/>
                 </a:solidFill>
-                <a:latin typeface="NotoSansCJKjp"/>
-                <a:ea typeface="NotoSansCJKjp"/>
-              </a:rPr>
-              <a:t>太字</a:t>
+                <a:latin typeface="NotoSansJP"/>
+                <a:ea typeface="NotoSansJP"/>
+              </a:rPr>
+              <a:t>太字 </a:t>
+            </a:r>
+            <a:r>
+              <a:rPr b="0" lang="en-US" sz="2170" spc="-1" strike="noStrike">
+                <a:solidFill>
+                  <a:srgbClr val="c9342f"/>
+                </a:solidFill>
+                <a:latin typeface="NotoSansJP"/>
+                <a:ea typeface="NotoSansJP"/>
+              </a:rPr>
+              <a:t>+ </a:t>
+            </a:r>
+            <a:r>
+              <a:rPr b="0" lang="zh-CN" sz="2170" spc="-1" strike="noStrike">
+                <a:solidFill>
+                  <a:srgbClr val="c9342f"/>
+                </a:solidFill>
+                <a:latin typeface="NotoSansJP"/>
+                <a:ea typeface="NotoSansJP"/>
+              </a:rPr>
+              <a:t>赤文字</a:t>
             </a:r>
             <a:endParaRPr b="0" lang="en-US" sz="2170" spc="-1" strike="noStrike">
               <a:solidFill>
@@ -5739,14 +4965,14 @@
       </p:sp>
       <p:sp>
         <p:nvSpPr>
-          <p:cNvPr id="82" name=""/>
+          <p:cNvPr id="64" name=""/>
           <p:cNvSpPr txBox="1"/>
           <p:nvPr/>
         </p:nvSpPr>
         <p:spPr>
           <a:xfrm>
-            <a:off x="1085760" y="2474280"/>
-            <a:ext cx="313200" cy="308160"/>
+            <a:off x="533520" y="2962440"/>
+            <a:ext cx="2374200" cy="401040"/>
           </a:xfrm>
           <a:prstGeom prst="rect">
             <a:avLst/>
@@ -5762,25 +4988,35 @@
           </a:bodyPr>
           <a:p>
             <a:r>
-              <a:rPr b="1" lang="en-US" sz="2170" spc="-1" strike="noStrike">
-                <a:solidFill>
-                  <a:srgbClr val="c9342f"/>
-                </a:solidFill>
-                <a:latin typeface="Arial"/>
-                <a:ea typeface="Arial"/>
-              </a:rPr>
-              <a:t> </a:t>
-            </a:r>
-            <a:r>
-              <a:rPr b="1" lang="en-US" sz="2170" spc="-1" strike="noStrike">
-                <a:solidFill>
-                  <a:srgbClr val="c9342f"/>
-                </a:solidFill>
-                <a:latin typeface="Arial"/>
-                <a:ea typeface="Arial"/>
+              <a:rPr b="0" lang="zh-CN" sz="2170" spc="-1" strike="noStrike">
+                <a:solidFill>
+                  <a:srgbClr val="083a5e"/>
+                </a:solidFill>
+                <a:latin typeface="NotoSansJP"/>
+                <a:ea typeface="NotoSansJP"/>
+              </a:rPr>
+              <a:t>太字 </a:t>
+            </a:r>
+            <a:r>
+              <a:rPr b="0" lang="en-US" sz="2170" spc="-1" strike="noStrike">
+                <a:solidFill>
+                  <a:srgbClr val="083a5e"/>
+                </a:solidFill>
+                <a:latin typeface="NotoSansJP"/>
+                <a:ea typeface="NotoSansJP"/>
               </a:rPr>
               <a:t>+ </a:t>
             </a:r>
+            <a:r>
+              <a:rPr b="0" lang="zh-CN" sz="2170" spc="-1" strike="noStrike">
+                <a:solidFill>
+                  <a:srgbClr val="083a5e"/>
+                </a:solidFill>
+                <a:latin typeface="NotoSansJP"/>
+                <a:ea typeface="NotoSansJP"/>
+              </a:rPr>
+              <a:t>濃い青文字</a:t>
+            </a:r>
             <a:endParaRPr b="0" lang="en-US" sz="2170" spc="-1" strike="noStrike">
               <a:solidFill>
                 <a:srgbClr val="000000"/>
@@ -5792,14 +5028,14 @@
       </p:sp>
       <p:sp>
         <p:nvSpPr>
-          <p:cNvPr id="83" name=""/>
+          <p:cNvPr id="65" name=""/>
           <p:cNvSpPr txBox="1"/>
           <p:nvPr/>
         </p:nvSpPr>
         <p:spPr>
           <a:xfrm>
-            <a:off x="1400760" y="2403720"/>
-            <a:ext cx="828360" cy="399600"/>
+            <a:off x="4995000" y="3476520"/>
+            <a:ext cx="2207520" cy="399600"/>
           </a:xfrm>
           <a:prstGeom prst="rect">
             <a:avLst/>
@@ -5817,12 +5053,12 @@
             <a:r>
               <a:rPr b="0" lang="zh-CN" sz="2170" spc="-1" strike="noStrike">
                 <a:solidFill>
-                  <a:srgbClr val="c9342f"/>
-                </a:solidFill>
-                <a:latin typeface="NotoSansCJKjp"/>
-                <a:ea typeface="NotoSansCJKjp"/>
-              </a:rPr>
-              <a:t>⾚⽂字</a:t>
+                  <a:srgbClr val="111111"/>
+                </a:solidFill>
+                <a:latin typeface="NotoSansJP"/>
+                <a:ea typeface="NotoSansJP"/>
+              </a:rPr>
+              <a:t>中央揃えテキスト</a:t>
             </a:r>
             <a:endParaRPr b="0" lang="en-US" sz="2170" spc="-1" strike="noStrike">
               <a:solidFill>
@@ -5835,196 +5071,14 @@
       </p:sp>
       <p:sp>
         <p:nvSpPr>
-          <p:cNvPr id="84" name=""/>
-          <p:cNvSpPr txBox="1"/>
-          <p:nvPr/>
-        </p:nvSpPr>
-        <p:spPr>
-          <a:xfrm>
-            <a:off x="533520" y="2908440"/>
-            <a:ext cx="552240" cy="399600"/>
-          </a:xfrm>
-          <a:prstGeom prst="rect">
-            <a:avLst/>
-          </a:prstGeom>
-          <a:noFill/>
-          <a:ln w="0">
-            <a:noFill/>
-          </a:ln>
-        </p:spPr>
-        <p:txBody>
-          <a:bodyPr wrap="none" lIns="0" rIns="0" tIns="0" bIns="0" anchor="t">
-            <a:noAutofit/>
-          </a:bodyPr>
-          <a:p>
-            <a:r>
-              <a:rPr b="0" lang="zh-CN" sz="2170" spc="-1" strike="noStrike">
-                <a:solidFill>
-                  <a:srgbClr val="083a5e"/>
-                </a:solidFill>
-                <a:latin typeface="NotoSansCJKjp"/>
-                <a:ea typeface="NotoSansCJKjp"/>
-              </a:rPr>
-              <a:t>太字</a:t>
-            </a:r>
-            <a:endParaRPr b="0" lang="en-US" sz="2170" spc="-1" strike="noStrike">
-              <a:solidFill>
-                <a:srgbClr val="000000"/>
-              </a:solidFill>
-              <a:latin typeface="Times New Roman"/>
-            </a:endParaRPr>
-          </a:p>
-        </p:txBody>
-      </p:sp>
-      <p:sp>
-        <p:nvSpPr>
-          <p:cNvPr id="85" name=""/>
-          <p:cNvSpPr txBox="1"/>
-          <p:nvPr/>
-        </p:nvSpPr>
-        <p:spPr>
-          <a:xfrm>
-            <a:off x="1085760" y="2979000"/>
-            <a:ext cx="313200" cy="308160"/>
-          </a:xfrm>
-          <a:prstGeom prst="rect">
-            <a:avLst/>
-          </a:prstGeom>
-          <a:noFill/>
-          <a:ln w="0">
-            <a:noFill/>
-          </a:ln>
-        </p:spPr>
-        <p:txBody>
-          <a:bodyPr wrap="none" lIns="0" rIns="0" tIns="0" bIns="0" anchor="t">
-            <a:noAutofit/>
-          </a:bodyPr>
-          <a:p>
-            <a:r>
-              <a:rPr b="1" lang="en-US" sz="2170" spc="-1" strike="noStrike">
-                <a:solidFill>
-                  <a:srgbClr val="083a5e"/>
-                </a:solidFill>
-                <a:latin typeface="Arial"/>
-                <a:ea typeface="Arial"/>
-              </a:rPr>
-              <a:t> </a:t>
-            </a:r>
-            <a:r>
-              <a:rPr b="1" lang="en-US" sz="2170" spc="-1" strike="noStrike">
-                <a:solidFill>
-                  <a:srgbClr val="083a5e"/>
-                </a:solidFill>
-                <a:latin typeface="Arial"/>
-                <a:ea typeface="Arial"/>
-              </a:rPr>
-              <a:t>+ </a:t>
-            </a:r>
-            <a:endParaRPr b="0" lang="en-US" sz="2170" spc="-1" strike="noStrike">
-              <a:solidFill>
-                <a:srgbClr val="000000"/>
-              </a:solidFill>
-              <a:latin typeface="Times New Roman"/>
-            </a:endParaRPr>
-          </a:p>
-        </p:txBody>
-      </p:sp>
-      <p:sp>
-        <p:nvSpPr>
-          <p:cNvPr id="86" name=""/>
-          <p:cNvSpPr txBox="1"/>
-          <p:nvPr/>
-        </p:nvSpPr>
-        <p:spPr>
-          <a:xfrm>
-            <a:off x="1400760" y="2908440"/>
-            <a:ext cx="1379880" cy="399600"/>
-          </a:xfrm>
-          <a:prstGeom prst="rect">
-            <a:avLst/>
-          </a:prstGeom>
-          <a:noFill/>
-          <a:ln w="0">
-            <a:noFill/>
-          </a:ln>
-        </p:spPr>
-        <p:txBody>
-          <a:bodyPr wrap="none" lIns="0" rIns="0" tIns="0" bIns="0" anchor="t">
-            <a:noAutofit/>
-          </a:bodyPr>
-          <a:p>
-            <a:r>
-              <a:rPr b="0" lang="zh-CN" sz="2170" spc="-1" strike="noStrike">
-                <a:solidFill>
-                  <a:srgbClr val="083a5e"/>
-                </a:solidFill>
-                <a:latin typeface="NotoSansCJKjp"/>
-                <a:ea typeface="NotoSansCJKjp"/>
-              </a:rPr>
-              <a:t>濃い⻘⽂字</a:t>
-            </a:r>
-            <a:endParaRPr b="0" lang="en-US" sz="2170" spc="-1" strike="noStrike">
-              <a:solidFill>
-                <a:srgbClr val="000000"/>
-              </a:solidFill>
-              <a:latin typeface="Times New Roman"/>
-            </a:endParaRPr>
-          </a:p>
-        </p:txBody>
-      </p:sp>
-      <p:sp>
-        <p:nvSpPr>
-          <p:cNvPr id="87" name=""/>
-          <p:cNvSpPr txBox="1"/>
-          <p:nvPr/>
-        </p:nvSpPr>
-        <p:spPr>
-          <a:xfrm>
-            <a:off x="4995000" y="3422880"/>
-            <a:ext cx="2207520" cy="399600"/>
-          </a:xfrm>
-          <a:prstGeom prst="rect">
-            <a:avLst/>
-          </a:prstGeom>
-          <a:noFill/>
-          <a:ln w="0">
-            <a:noFill/>
-          </a:ln>
-        </p:spPr>
-        <p:txBody>
-          <a:bodyPr wrap="none" lIns="0" rIns="0" tIns="0" bIns="0" anchor="t">
-            <a:noAutofit/>
-          </a:bodyPr>
-          <a:p>
-            <a:r>
-              <a:rPr b="0" lang="zh-CN" sz="2170" spc="-1" strike="noStrike">
-                <a:solidFill>
-                  <a:srgbClr val="111111"/>
-                </a:solidFill>
-                <a:latin typeface="NotoSansCJKjp"/>
-                <a:ea typeface="NotoSansCJKjp"/>
-              </a:rPr>
-              <a:t>中央揃えテキスト</a:t>
-            </a:r>
-            <a:endParaRPr b="0" lang="en-US" sz="2170" spc="-1" strike="noStrike">
-              <a:solidFill>
-                <a:srgbClr val="000000"/>
-              </a:solidFill>
-              <a:latin typeface="Times New Roman"/>
-            </a:endParaRPr>
-          </a:p>
-        </p:txBody>
-      </p:sp>
-      <p:sp>
-        <p:nvSpPr>
-          <p:cNvPr id="88" name=""/>
+          <p:cNvPr id="66" name=""/>
           <p:cNvSpPr/>
           <p:nvPr/>
         </p:nvSpPr>
         <p:spPr>
           <a:xfrm>
-            <a:off x="533160" y="4819320"/>
-            <a:ext cx="2202120" cy="29160"/>
+            <a:off x="533160" y="4848120"/>
+            <a:ext cx="2202120" cy="28800"/>
           </a:xfrm>
           <a:custGeom>
             <a:avLst/>
@@ -6032,7 +5086,7 @@
             <a:ahLst/>
             <a:rect l="0" t="0" r="r" b="b"/>
             <a:pathLst>
-              <a:path w="6117" h="81">
+              <a:path w="6117" h="80">
                 <a:moveTo>
                   <a:pt x="0" y="0"/>
                 </a:moveTo>
@@ -6040,10 +5094,10 @@
                   <a:pt x="6117" y="0"/>
                 </a:lnTo>
                 <a:lnTo>
-                  <a:pt x="6117" y="81"/>
-                </a:lnTo>
-                <a:lnTo>
-                  <a:pt x="0" y="81"/>
+                  <a:pt x="6117" y="80"/>
+                </a:lnTo>
+                <a:lnTo>
+                  <a:pt x="0" y="80"/>
                 </a:lnTo>
                 <a:lnTo>
                   <a:pt x="0" y="0"/>
@@ -6075,13 +5129,13 @@
       </p:sp>
       <p:sp>
         <p:nvSpPr>
-          <p:cNvPr id="89" name=""/>
+          <p:cNvPr id="67" name=""/>
           <p:cNvSpPr txBox="1"/>
           <p:nvPr/>
         </p:nvSpPr>
         <p:spPr>
           <a:xfrm>
-            <a:off x="9733320" y="3927600"/>
+            <a:off x="9733320" y="3981600"/>
             <a:ext cx="1931760" cy="399600"/>
           </a:xfrm>
           <a:prstGeom prst="rect">
@@ -6102,8 +5156,8 @@
                 <a:solidFill>
                   <a:srgbClr val="111111"/>
                 </a:solidFill>
-                <a:latin typeface="NotoSansCJKjp"/>
-                <a:ea typeface="NotoSansCJKjp"/>
+                <a:latin typeface="NotoSansJP"/>
+                <a:ea typeface="NotoSansJP"/>
               </a:rPr>
               <a:t>右揃えテキスト</a:t>
             </a:r>
@@ -6118,13 +5172,13 @@
       </p:sp>
       <p:sp>
         <p:nvSpPr>
-          <p:cNvPr id="90" name=""/>
+          <p:cNvPr id="68" name=""/>
           <p:cNvSpPr txBox="1"/>
           <p:nvPr/>
         </p:nvSpPr>
         <p:spPr>
           <a:xfrm>
-            <a:off x="533520" y="4442040"/>
+            <a:off x="533520" y="4495680"/>
             <a:ext cx="2207520" cy="399600"/>
           </a:xfrm>
           <a:prstGeom prst="rect">
@@ -6145,8 +5199,8 @@
                 <a:solidFill>
                   <a:srgbClr val="111111"/>
                 </a:solidFill>
-                <a:latin typeface="NotoSansCJKjp"/>
-                <a:ea typeface="NotoSansCJKjp"/>
+                <a:latin typeface="NotoSansJP"/>
+                <a:ea typeface="NotoSansJP"/>
               </a:rPr>
               <a:t>下線付きテキスト</a:t>
             </a:r>
@@ -6161,14 +5215,14 @@
       </p:sp>
       <p:sp>
         <p:nvSpPr>
-          <p:cNvPr id="91" name=""/>
+          <p:cNvPr id="69" name=""/>
           <p:cNvSpPr/>
           <p:nvPr/>
         </p:nvSpPr>
         <p:spPr>
           <a:xfrm>
-            <a:off x="1361880" y="5438520"/>
-            <a:ext cx="752760" cy="362520"/>
+            <a:off x="1361880" y="5391000"/>
+            <a:ext cx="686160" cy="438480"/>
           </a:xfrm>
           <a:custGeom>
             <a:avLst/>
@@ -6176,36 +5230,36 @@
             <a:ahLst/>
             <a:rect l="0" t="0" r="r" b="b"/>
             <a:pathLst>
-              <a:path w="2091" h="1007">
+              <a:path w="1906" h="1218">
                 <a:moveTo>
-                  <a:pt x="0" y="848"/>
+                  <a:pt x="0" y="1059"/>
                 </a:moveTo>
                 <a:lnTo>
                   <a:pt x="0" y="159"/>
                 </a:lnTo>
                 <a:cubicBezTo>
-                  <a:pt x="0" y="149"/>
+                  <a:pt x="0" y="148"/>
                   <a:pt x="1" y="138"/>
                   <a:pt x="3" y="128"/>
                 </a:cubicBezTo>
                 <a:cubicBezTo>
-                  <a:pt x="5" y="118"/>
+                  <a:pt x="5" y="117"/>
                   <a:pt x="8" y="108"/>
                   <a:pt x="12" y="98"/>
                 </a:cubicBezTo>
                 <a:cubicBezTo>
-                  <a:pt x="16" y="89"/>
+                  <a:pt x="16" y="88"/>
                   <a:pt x="21" y="79"/>
-                  <a:pt x="27" y="71"/>
+                  <a:pt x="27" y="70"/>
                 </a:cubicBezTo>
                 <a:cubicBezTo>
                   <a:pt x="33" y="62"/>
                   <a:pt x="39" y="54"/>
-                  <a:pt x="47" y="47"/>
+                  <a:pt x="47" y="46"/>
                 </a:cubicBezTo>
                 <a:cubicBezTo>
                   <a:pt x="54" y="39"/>
-                  <a:pt x="62" y="33"/>
+                  <a:pt x="62" y="32"/>
                   <a:pt x="71" y="27"/>
                 </a:cubicBezTo>
                 <a:cubicBezTo>
@@ -6224,133 +5278,133 @@
                   <a:pt x="159" y="0"/>
                 </a:cubicBezTo>
                 <a:lnTo>
-                  <a:pt x="1932" y="0"/>
-                </a:lnTo>
-                <a:cubicBezTo>
-                  <a:pt x="1943" y="0"/>
-                  <a:pt x="1953" y="1"/>
-                  <a:pt x="1963" y="3"/>
-                </a:cubicBezTo>
-                <a:cubicBezTo>
-                  <a:pt x="1974" y="5"/>
-                  <a:pt x="1984" y="8"/>
-                  <a:pt x="1993" y="12"/>
-                </a:cubicBezTo>
-                <a:cubicBezTo>
-                  <a:pt x="2003" y="16"/>
-                  <a:pt x="2012" y="21"/>
-                  <a:pt x="2021" y="27"/>
-                </a:cubicBezTo>
-                <a:cubicBezTo>
-                  <a:pt x="2029" y="33"/>
-                  <a:pt x="2037" y="39"/>
-                  <a:pt x="2045" y="47"/>
-                </a:cubicBezTo>
-                <a:cubicBezTo>
-                  <a:pt x="2052" y="54"/>
-                  <a:pt x="2059" y="62"/>
-                  <a:pt x="2064" y="71"/>
-                </a:cubicBezTo>
-                <a:cubicBezTo>
-                  <a:pt x="2070" y="79"/>
-                  <a:pt x="2075" y="89"/>
-                  <a:pt x="2079" y="98"/>
-                </a:cubicBezTo>
-                <a:cubicBezTo>
-                  <a:pt x="2083" y="108"/>
-                  <a:pt x="2086" y="118"/>
-                  <a:pt x="2088" y="128"/>
-                </a:cubicBezTo>
-                <a:cubicBezTo>
-                  <a:pt x="2090" y="138"/>
-                  <a:pt x="2091" y="149"/>
-                  <a:pt x="2091" y="159"/>
-                </a:cubicBezTo>
-                <a:lnTo>
-                  <a:pt x="2091" y="848"/>
-                </a:lnTo>
-                <a:cubicBezTo>
-                  <a:pt x="2091" y="858"/>
-                  <a:pt x="2090" y="869"/>
-                  <a:pt x="2088" y="879"/>
-                </a:cubicBezTo>
-                <a:cubicBezTo>
-                  <a:pt x="2086" y="889"/>
-                  <a:pt x="2083" y="899"/>
-                  <a:pt x="2079" y="909"/>
-                </a:cubicBezTo>
-                <a:cubicBezTo>
-                  <a:pt x="2075" y="918"/>
-                  <a:pt x="2070" y="927"/>
-                  <a:pt x="2064" y="936"/>
-                </a:cubicBezTo>
-                <a:cubicBezTo>
-                  <a:pt x="2059" y="945"/>
-                  <a:pt x="2052" y="953"/>
-                  <a:pt x="2045" y="960"/>
-                </a:cubicBezTo>
-                <a:cubicBezTo>
-                  <a:pt x="2037" y="967"/>
-                  <a:pt x="2029" y="974"/>
-                  <a:pt x="2021" y="980"/>
-                </a:cubicBezTo>
-                <a:cubicBezTo>
-                  <a:pt x="2012" y="986"/>
-                  <a:pt x="2003" y="991"/>
-                  <a:pt x="1993" y="995"/>
-                </a:cubicBezTo>
-                <a:cubicBezTo>
-                  <a:pt x="1984" y="999"/>
-                  <a:pt x="1974" y="1002"/>
-                  <a:pt x="1963" y="1004"/>
-                </a:cubicBezTo>
-                <a:cubicBezTo>
-                  <a:pt x="1953" y="1006"/>
-                  <a:pt x="1943" y="1007"/>
-                  <a:pt x="1932" y="1007"/>
-                </a:cubicBezTo>
-                <a:lnTo>
-                  <a:pt x="159" y="1007"/>
-                </a:lnTo>
-                <a:cubicBezTo>
-                  <a:pt x="148" y="1007"/>
-                  <a:pt x="138" y="1006"/>
-                  <a:pt x="128" y="1004"/>
-                </a:cubicBezTo>
-                <a:cubicBezTo>
-                  <a:pt x="118" y="1002"/>
-                  <a:pt x="108" y="999"/>
-                  <a:pt x="98" y="995"/>
-                </a:cubicBezTo>
-                <a:cubicBezTo>
-                  <a:pt x="88" y="991"/>
-                  <a:pt x="79" y="986"/>
-                  <a:pt x="71" y="980"/>
-                </a:cubicBezTo>
-                <a:cubicBezTo>
-                  <a:pt x="62" y="974"/>
-                  <a:pt x="54" y="967"/>
-                  <a:pt x="47" y="960"/>
-                </a:cubicBezTo>
-                <a:cubicBezTo>
-                  <a:pt x="39" y="953"/>
-                  <a:pt x="33" y="945"/>
-                  <a:pt x="27" y="936"/>
-                </a:cubicBezTo>
-                <a:cubicBezTo>
-                  <a:pt x="21" y="927"/>
-                  <a:pt x="16" y="918"/>
-                  <a:pt x="12" y="909"/>
-                </a:cubicBezTo>
-                <a:cubicBezTo>
-                  <a:pt x="8" y="899"/>
-                  <a:pt x="5" y="889"/>
-                  <a:pt x="3" y="879"/>
-                </a:cubicBezTo>
-                <a:cubicBezTo>
-                  <a:pt x="1" y="869"/>
-                  <a:pt x="0" y="858"/>
-                  <a:pt x="0" y="848"/>
+                  <a:pt x="1747" y="0"/>
+                </a:lnTo>
+                <a:cubicBezTo>
+                  <a:pt x="1758" y="0"/>
+                  <a:pt x="1768" y="1"/>
+                  <a:pt x="1778" y="3"/>
+                </a:cubicBezTo>
+                <a:cubicBezTo>
+                  <a:pt x="1788" y="5"/>
+                  <a:pt x="1798" y="8"/>
+                  <a:pt x="1808" y="12"/>
+                </a:cubicBezTo>
+                <a:cubicBezTo>
+                  <a:pt x="1818" y="16"/>
+                  <a:pt x="1827" y="21"/>
+                  <a:pt x="1835" y="27"/>
+                </a:cubicBezTo>
+                <a:cubicBezTo>
+                  <a:pt x="1844" y="32"/>
+                  <a:pt x="1852" y="39"/>
+                  <a:pt x="1860" y="46"/>
+                </a:cubicBezTo>
+                <a:cubicBezTo>
+                  <a:pt x="1867" y="54"/>
+                  <a:pt x="1873" y="62"/>
+                  <a:pt x="1879" y="70"/>
+                </a:cubicBezTo>
+                <a:cubicBezTo>
+                  <a:pt x="1885" y="79"/>
+                  <a:pt x="1890" y="88"/>
+                  <a:pt x="1894" y="98"/>
+                </a:cubicBezTo>
+                <a:cubicBezTo>
+                  <a:pt x="1898" y="108"/>
+                  <a:pt x="1901" y="117"/>
+                  <a:pt x="1903" y="128"/>
+                </a:cubicBezTo>
+                <a:cubicBezTo>
+                  <a:pt x="1905" y="138"/>
+                  <a:pt x="1906" y="148"/>
+                  <a:pt x="1906" y="159"/>
+                </a:cubicBezTo>
+                <a:lnTo>
+                  <a:pt x="1906" y="1059"/>
+                </a:lnTo>
+                <a:cubicBezTo>
+                  <a:pt x="1906" y="1070"/>
+                  <a:pt x="1905" y="1080"/>
+                  <a:pt x="1903" y="1090"/>
+                </a:cubicBezTo>
+                <a:cubicBezTo>
+                  <a:pt x="1901" y="1100"/>
+                  <a:pt x="1898" y="1110"/>
+                  <a:pt x="1894" y="1120"/>
+                </a:cubicBezTo>
+                <a:cubicBezTo>
+                  <a:pt x="1890" y="1130"/>
+                  <a:pt x="1885" y="1139"/>
+                  <a:pt x="1879" y="1147"/>
+                </a:cubicBezTo>
+                <a:cubicBezTo>
+                  <a:pt x="1873" y="1156"/>
+                  <a:pt x="1867" y="1164"/>
+                  <a:pt x="1860" y="1172"/>
+                </a:cubicBezTo>
+                <a:cubicBezTo>
+                  <a:pt x="1852" y="1179"/>
+                  <a:pt x="1844" y="1185"/>
+                  <a:pt x="1835" y="1191"/>
+                </a:cubicBezTo>
+                <a:cubicBezTo>
+                  <a:pt x="1827" y="1197"/>
+                  <a:pt x="1818" y="1202"/>
+                  <a:pt x="1808" y="1206"/>
+                </a:cubicBezTo>
+                <a:cubicBezTo>
+                  <a:pt x="1798" y="1210"/>
+                  <a:pt x="1788" y="1213"/>
+                  <a:pt x="1778" y="1215"/>
+                </a:cubicBezTo>
+                <a:cubicBezTo>
+                  <a:pt x="1768" y="1217"/>
+                  <a:pt x="1758" y="1218"/>
+                  <a:pt x="1747" y="1218"/>
+                </a:cubicBezTo>
+                <a:lnTo>
+                  <a:pt x="159" y="1218"/>
+                </a:lnTo>
+                <a:cubicBezTo>
+                  <a:pt x="148" y="1218"/>
+                  <a:pt x="138" y="1217"/>
+                  <a:pt x="128" y="1215"/>
+                </a:cubicBezTo>
+                <a:cubicBezTo>
+                  <a:pt x="118" y="1213"/>
+                  <a:pt x="108" y="1210"/>
+                  <a:pt x="98" y="1206"/>
+                </a:cubicBezTo>
+                <a:cubicBezTo>
+                  <a:pt x="88" y="1202"/>
+                  <a:pt x="79" y="1197"/>
+                  <a:pt x="71" y="1191"/>
+                </a:cubicBezTo>
+                <a:cubicBezTo>
+                  <a:pt x="62" y="1185"/>
+                  <a:pt x="54" y="1179"/>
+                  <a:pt x="47" y="1172"/>
+                </a:cubicBezTo>
+                <a:cubicBezTo>
+                  <a:pt x="39" y="1164"/>
+                  <a:pt x="33" y="1156"/>
+                  <a:pt x="27" y="1147"/>
+                </a:cubicBezTo>
+                <a:cubicBezTo>
+                  <a:pt x="21" y="1139"/>
+                  <a:pt x="16" y="1130"/>
+                  <a:pt x="12" y="1120"/>
+                </a:cubicBezTo>
+                <a:cubicBezTo>
+                  <a:pt x="8" y="1110"/>
+                  <a:pt x="5" y="1100"/>
+                  <a:pt x="3" y="1090"/>
+                </a:cubicBezTo>
+                <a:cubicBezTo>
+                  <a:pt x="1" y="1080"/>
+                  <a:pt x="0" y="1070"/>
+                  <a:pt x="0" y="1059"/>
                 </a:cubicBezTo>
                 <a:close/>
               </a:path>
@@ -6381,13 +5435,13 @@
       </p:sp>
       <p:sp>
         <p:nvSpPr>
-          <p:cNvPr id="92" name=""/>
+          <p:cNvPr id="70" name=""/>
           <p:cNvSpPr txBox="1"/>
           <p:nvPr/>
         </p:nvSpPr>
         <p:spPr>
           <a:xfrm>
-            <a:off x="533520" y="5366160"/>
+            <a:off x="533520" y="5419800"/>
             <a:ext cx="828360" cy="399600"/>
           </a:xfrm>
           <a:prstGeom prst="rect">
@@ -6408,10 +5462,10 @@
                 <a:solidFill>
                   <a:srgbClr val="111111"/>
                 </a:solidFill>
-                <a:latin typeface="NotoSansCJKjp"/>
-                <a:ea typeface="NotoSansCJKjp"/>
-              </a:rPr>
-              <a:t>空⾏は</a:t>
+                <a:latin typeface="NotoSansJP"/>
+                <a:ea typeface="NotoSansJP"/>
+              </a:rPr>
+              <a:t>空行は</a:t>
             </a:r>
             <a:endParaRPr b="0" lang="en-US" sz="2170" spc="-1" strike="noStrike">
               <a:solidFill>
@@ -6424,14 +5478,14 @@
       </p:sp>
       <p:sp>
         <p:nvSpPr>
-          <p:cNvPr id="93" name=""/>
+          <p:cNvPr id="71" name=""/>
           <p:cNvSpPr txBox="1"/>
           <p:nvPr/>
         </p:nvSpPr>
         <p:spPr>
           <a:xfrm>
-            <a:off x="1456200" y="5490000"/>
-            <a:ext cx="563040" cy="265680"/>
+            <a:off x="1456200" y="5463360"/>
+            <a:ext cx="492840" cy="320760"/>
           </a:xfrm>
           <a:prstGeom prst="rect">
             <a:avLst/>
@@ -6451,8 +5505,8 @@
                 <a:solidFill>
                   <a:srgbClr val="111111"/>
                 </a:solidFill>
-                <a:latin typeface="Courier New"/>
-                <a:ea typeface="Courier New"/>
+                <a:latin typeface="NotoSansJP"/>
+                <a:ea typeface="NotoSansJP"/>
               </a:rPr>
               <a:t>&lt;br&gt;</a:t>
             </a:r>
@@ -6467,13 +5521,13 @@
       </p:sp>
       <p:sp>
         <p:nvSpPr>
-          <p:cNvPr id="94" name=""/>
+          <p:cNvPr id="72" name=""/>
           <p:cNvSpPr txBox="1"/>
           <p:nvPr/>
         </p:nvSpPr>
         <p:spPr>
           <a:xfrm>
-            <a:off x="2113560" y="5366160"/>
+            <a:off x="2046600" y="5419800"/>
             <a:ext cx="3862440" cy="399600"/>
           </a:xfrm>
           <a:prstGeom prst="rect">
@@ -6494,10 +5548,10 @@
                 <a:solidFill>
                   <a:srgbClr val="111111"/>
                 </a:solidFill>
-                <a:latin typeface="NotoSansCJKjp"/>
-                <a:ea typeface="NotoSansCJKjp"/>
-              </a:rPr>
-              <a:t>を使えば⼊れる事ができます。</a:t>
+                <a:latin typeface="NotoSansJP"/>
+                <a:ea typeface="NotoSansJP"/>
+              </a:rPr>
+              <a:t>を使えば入れる事ができます。</a:t>
             </a:r>
             <a:endParaRPr b="0" lang="en-US" sz="2170" spc="-1" strike="noStrike">
               <a:solidFill>
@@ -6510,7 +5564,7 @@
       </p:sp>
       <p:sp>
         <p:nvSpPr>
-          <p:cNvPr id="95" name=""/>
+          <p:cNvPr id="73" name=""/>
           <p:cNvSpPr/>
           <p:nvPr/>
         </p:nvSpPr>
@@ -6648,13 +5702,13 @@
       </p:sp>
       <p:sp>
         <p:nvSpPr>
-          <p:cNvPr id="96" name=""/>
+          <p:cNvPr id="74" name=""/>
           <p:cNvSpPr txBox="1"/>
           <p:nvPr/>
         </p:nvSpPr>
         <p:spPr>
           <a:xfrm>
-            <a:off x="914400" y="351000"/>
+            <a:off x="914400" y="392400"/>
             <a:ext cx="1987920" cy="360000"/>
           </a:xfrm>
           <a:prstGeom prst="rect">
@@ -6675,10 +5729,10 @@
                 <a:solidFill>
                   <a:srgbClr val="111111"/>
                 </a:solidFill>
-                <a:latin typeface="NotoSansCJKjp"/>
-                <a:ea typeface="NotoSansCJKjp"/>
-              </a:rPr>
-              <a:t>⽂字装飾サンプル</a:t>
+                <a:latin typeface="NotoSansJP"/>
+                <a:ea typeface="NotoSansJP"/>
+              </a:rPr>
+              <a:t>文字装飾サンプル</a:t>
             </a:r>
             <a:endParaRPr b="0" lang="en-US" sz="1950" spc="-1" strike="noStrike">
               <a:solidFill>
@@ -6691,14 +5745,14 @@
       </p:sp>
       <p:sp>
         <p:nvSpPr>
-          <p:cNvPr id="97" name=""/>
+          <p:cNvPr id="75" name=""/>
           <p:cNvSpPr txBox="1"/>
           <p:nvPr/>
         </p:nvSpPr>
         <p:spPr>
           <a:xfrm>
-            <a:off x="11946240" y="6458400"/>
-            <a:ext cx="304560" cy="340200"/>
+            <a:off x="11946600" y="6436800"/>
+            <a:ext cx="304560" cy="416520"/>
           </a:xfrm>
           <a:prstGeom prst="rect">
             <a:avLst/>
@@ -6718,8 +5772,8 @@
                 <a:solidFill>
                   <a:srgbClr val="111111"/>
                 </a:solidFill>
-                <a:latin typeface="Arial"/>
-                <a:ea typeface="Arial"/>
+                <a:latin typeface="NotoSansJP"/>
+                <a:ea typeface="NotoSansJP"/>
               </a:rPr>
               <a:t>6</a:t>
             </a:r>
@@ -6764,7 +5818,7 @@
       </p:grpSpPr>
       <p:sp>
         <p:nvSpPr>
-          <p:cNvPr id="98" name=""/>
+          <p:cNvPr id="76" name=""/>
           <p:cNvSpPr/>
           <p:nvPr/>
         </p:nvSpPr>
@@ -6822,7 +5876,7 @@
       </p:sp>
       <p:sp>
         <p:nvSpPr>
-          <p:cNvPr id="99" name=""/>
+          <p:cNvPr id="77" name=""/>
           <p:cNvSpPr/>
           <p:nvPr/>
         </p:nvSpPr>
@@ -6880,7 +5934,7 @@
       </p:sp>
       <p:sp>
         <p:nvSpPr>
-          <p:cNvPr id="100" name=""/>
+          <p:cNvPr id="78" name=""/>
           <p:cNvSpPr/>
           <p:nvPr/>
         </p:nvSpPr>
@@ -6938,7 +5992,7 @@
       </p:sp>
       <p:sp>
         <p:nvSpPr>
-          <p:cNvPr id="101" name=""/>
+          <p:cNvPr id="79" name=""/>
           <p:cNvSpPr/>
           <p:nvPr/>
         </p:nvSpPr>
@@ -7154,16 +6208,39 @@
           </a:p>
         </p:txBody>
       </p:sp>
-      <p:sp>
-        <p:nvSpPr>
-          <p:cNvPr id="102" name=""/>
+      <p:pic>
+        <p:nvPicPr>
+          <p:cNvPr id="80" name="" descr=""/>
+          <p:cNvPicPr/>
+          <p:nvPr/>
+        </p:nvPicPr>
+        <p:blipFill>
+          <a:blip r:embed="rId1"/>
+          <a:stretch/>
+        </p:blipFill>
+        <p:spPr>
+          <a:xfrm>
+            <a:off x="10515600" y="38160"/>
+            <a:ext cx="1142640" cy="1142640"/>
+          </a:xfrm>
+          <a:prstGeom prst="rect">
+            <a:avLst/>
+          </a:prstGeom>
+          <a:ln w="0">
+            <a:noFill/>
+          </a:ln>
+        </p:spPr>
+      </p:pic>
+      <p:sp>
+        <p:nvSpPr>
+          <p:cNvPr id="81" name=""/>
           <p:cNvSpPr txBox="1"/>
           <p:nvPr/>
         </p:nvSpPr>
         <p:spPr>
           <a:xfrm>
-            <a:off x="533520" y="940680"/>
-            <a:ext cx="275760" cy="308160"/>
+            <a:off x="533520" y="923760"/>
+            <a:ext cx="1199160" cy="401040"/>
           </a:xfrm>
           <a:prstGeom prst="rect">
             <a:avLst/>
@@ -7183,11 +6260,31 @@
                 <a:solidFill>
                   <a:srgbClr val="111111"/>
                 </a:solidFill>
-                <a:latin typeface="Arial"/>
-                <a:ea typeface="Arial"/>
+                <a:latin typeface="NotoSansJP"/>
+                <a:ea typeface="NotoSansJP"/>
               </a:rPr>
               <a:t>1</a:t>
             </a:r>
+            <a:r>
+              <a:rPr b="0" lang="zh-CN" sz="2170" spc="-1" strike="noStrike">
+                <a:solidFill>
+                  <a:srgbClr val="111111"/>
+                </a:solidFill>
+                <a:latin typeface="NotoSansJP"/>
+                <a:ea typeface="NotoSansJP"/>
+              </a:rPr>
+              <a:t>行数式</a:t>
+            </a:r>
+            <a:r>
+              <a:rPr b="0" lang="en-US" sz="2170" spc="-1" strike="noStrike">
+                <a:solidFill>
+                  <a:srgbClr val="111111"/>
+                </a:solidFill>
+                <a:latin typeface="NotoSansJP"/>
+                <a:ea typeface="NotoSansJP"/>
+              </a:rPr>
+              <a:t>:</a:t>
+            </a:r>
             <a:endParaRPr b="0" lang="en-US" sz="2170" spc="-1" strike="noStrike">
               <a:solidFill>
                 <a:srgbClr val="000000"/>
@@ -7199,14 +6296,14 @@
       </p:sp>
       <p:sp>
         <p:nvSpPr>
-          <p:cNvPr id="103" name=""/>
+          <p:cNvPr id="82" name=""/>
           <p:cNvSpPr txBox="1"/>
           <p:nvPr/>
         </p:nvSpPr>
         <p:spPr>
           <a:xfrm>
-            <a:off x="686880" y="870120"/>
-            <a:ext cx="828360" cy="399600"/>
+            <a:off x="5489280" y="1395360"/>
+            <a:ext cx="989640" cy="454680"/>
           </a:xfrm>
           <a:prstGeom prst="rect">
             <a:avLst/>
@@ -7222,34 +6319,34 @@
           </a:bodyPr>
           <a:p>
             <a:r>
-              <a:rPr b="0" lang="zh-CN" sz="2170" spc="-1" strike="noStrike">
+              <a:rPr b="0" lang="en-US" sz="2630" spc="-1" strike="noStrike">
                 <a:solidFill>
                   <a:srgbClr val="111111"/>
                 </a:solidFill>
-                <a:latin typeface="NotoSansCJKjp"/>
-                <a:ea typeface="NotoSansCJKjp"/>
-              </a:rPr>
-              <a:t>⾏数式</a:t>
-            </a:r>
-            <a:endParaRPr b="0" lang="en-US" sz="2170" spc="-1" strike="noStrike">
-              <a:solidFill>
-                <a:srgbClr val="000000"/>
-              </a:solidFill>
-              <a:latin typeface="Times New Roman"/>
-            </a:endParaRPr>
-          </a:p>
-        </p:txBody>
-      </p:sp>
-      <p:sp>
-        <p:nvSpPr>
-          <p:cNvPr id="104" name=""/>
+                <a:latin typeface="NotoSansJP"/>
+                <a:ea typeface="NotoSansJP"/>
+              </a:rPr>
+              <a:t>E = mc</a:t>
+            </a:r>
+            <a:endParaRPr b="0" lang="en-US" sz="2630" spc="-1" strike="noStrike">
+              <a:solidFill>
+                <a:srgbClr val="000000"/>
+              </a:solidFill>
+              <a:latin typeface="Times New Roman"/>
+            </a:endParaRPr>
+          </a:p>
+        </p:txBody>
+      </p:sp>
+      <p:sp>
+        <p:nvSpPr>
+          <p:cNvPr id="83" name=""/>
           <p:cNvSpPr txBox="1"/>
           <p:nvPr/>
         </p:nvSpPr>
         <p:spPr>
           <a:xfrm>
-            <a:off x="1515600" y="940680"/>
-            <a:ext cx="275760" cy="308160"/>
+            <a:off x="6556320" y="1369080"/>
+            <a:ext cx="233640" cy="318960"/>
           </a:xfrm>
           <a:prstGeom prst="rect">
             <a:avLst/>
@@ -7265,34 +6362,34 @@
           </a:bodyPr>
           <a:p>
             <a:r>
-              <a:rPr b="0" lang="en-US" sz="2170" spc="-1" strike="noStrike">
+              <a:rPr b="0" lang="en-US" sz="1840" spc="-1" strike="noStrike">
                 <a:solidFill>
                   <a:srgbClr val="111111"/>
                 </a:solidFill>
-                <a:latin typeface="Arial"/>
-                <a:ea typeface="Arial"/>
-              </a:rPr>
-              <a:t>:</a:t>
-            </a:r>
-            <a:endParaRPr b="0" lang="en-US" sz="2170" spc="-1" strike="noStrike">
-              <a:solidFill>
-                <a:srgbClr val="000000"/>
-              </a:solidFill>
-              <a:latin typeface="Times New Roman"/>
-            </a:endParaRPr>
-          </a:p>
-        </p:txBody>
-      </p:sp>
-      <p:sp>
-        <p:nvSpPr>
-          <p:cNvPr id="105" name=""/>
+                <a:latin typeface="NotoSansJP"/>
+                <a:ea typeface="NotoSansJP"/>
+              </a:rPr>
+              <a:t>2</a:t>
+            </a:r>
+            <a:endParaRPr b="0" lang="en-US" sz="1840" spc="-1" strike="noStrike">
+              <a:solidFill>
+                <a:srgbClr val="000000"/>
+              </a:solidFill>
+              <a:latin typeface="Times New Roman"/>
+            </a:endParaRPr>
+          </a:p>
+        </p:txBody>
+      </p:sp>
+      <p:sp>
+        <p:nvSpPr>
+          <p:cNvPr id="84" name=""/>
           <p:cNvSpPr txBox="1"/>
           <p:nvPr/>
         </p:nvSpPr>
         <p:spPr>
           <a:xfrm>
-            <a:off x="5454360" y="1357200"/>
-            <a:ext cx="977400" cy="454680"/>
+            <a:off x="533520" y="1962000"/>
+            <a:ext cx="3655800" cy="401040"/>
           </a:xfrm>
           <a:prstGeom prst="rect">
             <a:avLst/>
@@ -7308,54 +6405,54 @@
           </a:bodyPr>
           <a:p>
             <a:r>
-              <a:rPr b="0" i="1" lang="en-US" sz="2630" spc="-1" strike="noStrike">
+              <a:rPr b="0" lang="zh-CN" sz="2170" spc="-1" strike="noStrike">
                 <a:solidFill>
                   <a:srgbClr val="111111"/>
                 </a:solidFill>
-                <a:latin typeface="KaTeX_Math"/>
-                <a:ea typeface="KaTeX_Math"/>
-              </a:rPr>
-              <a:t>E</a:t>
-            </a:r>
-            <a:r>
-              <a:rPr b="0" lang="en-US" sz="2630" spc="-1" strike="noStrike">
+                <a:latin typeface="NotoSansJP"/>
+                <a:ea typeface="NotoSansJP"/>
+              </a:rPr>
+              <a:t>文章中の数式</a:t>
+            </a:r>
+            <a:r>
+              <a:rPr b="0" lang="en-US" sz="2170" spc="-1" strike="noStrike">
                 <a:solidFill>
                   <a:srgbClr val="111111"/>
                 </a:solidFill>
-                <a:latin typeface="KaTeX_Main"/>
-                <a:ea typeface="KaTeX_Main"/>
-              </a:rPr>
-              <a:t> =</a:t>
-            </a:r>
-            <a:r>
-              <a:rPr b="0" i="1" lang="en-US" sz="2630" spc="-1" strike="noStrike">
+                <a:latin typeface="NotoSansJP"/>
+                <a:ea typeface="NotoSansJP"/>
+              </a:rPr>
+              <a:t>: </a:t>
+            </a:r>
+            <a:r>
+              <a:rPr b="0" lang="zh-CN" sz="2170" spc="-1" strike="noStrike">
                 <a:solidFill>
                   <a:srgbClr val="111111"/>
                 </a:solidFill>
-                <a:latin typeface="KaTeX_Math"/>
-                <a:ea typeface="KaTeX_Math"/>
-              </a:rPr>
-              <a:t> mc</a:t>
-            </a:r>
-            <a:endParaRPr b="0" lang="en-US" sz="2630" spc="-1" strike="noStrike">
-              <a:solidFill>
-                <a:srgbClr val="000000"/>
-              </a:solidFill>
-              <a:latin typeface="Times New Roman"/>
-            </a:endParaRPr>
-          </a:p>
-        </p:txBody>
-      </p:sp>
-      <p:sp>
-        <p:nvSpPr>
-          <p:cNvPr id="106" name=""/>
+                <a:latin typeface="NotoSansJP"/>
+                <a:ea typeface="NotoSansJP"/>
+              </a:rPr>
+              <a:t>運動方程式は </a:t>
+            </a:r>
+            <a:endParaRPr b="0" lang="en-US" sz="2170" spc="-1" strike="noStrike">
+              <a:solidFill>
+                <a:srgbClr val="000000"/>
+              </a:solidFill>
+              <a:latin typeface="Times New Roman"/>
+            </a:endParaRPr>
+          </a:p>
+        </p:txBody>
+      </p:sp>
+      <p:sp>
+        <p:nvSpPr>
+          <p:cNvPr id="85" name=""/>
           <p:cNvSpPr txBox="1"/>
           <p:nvPr/>
         </p:nvSpPr>
         <p:spPr>
           <a:xfrm>
-            <a:off x="6603840" y="1330920"/>
-            <a:ext cx="233640" cy="318960"/>
+            <a:off x="5148000" y="1962000"/>
+            <a:ext cx="1243080" cy="399600"/>
           </a:xfrm>
           <a:prstGeom prst="rect">
             <a:avLst/>
@@ -7371,34 +6468,44 @@
           </a:bodyPr>
           <a:p>
             <a:r>
-              <a:rPr b="0" lang="en-US" sz="1840" spc="-1" strike="noStrike">
+              <a:rPr b="0" lang="en-US" sz="2170" spc="-1" strike="noStrike">
                 <a:solidFill>
                   <a:srgbClr val="111111"/>
                 </a:solidFill>
-                <a:latin typeface="KaTeX_Main"/>
-                <a:ea typeface="KaTeX_Main"/>
-              </a:rPr>
-              <a:t>2</a:t>
-            </a:r>
-            <a:endParaRPr b="0" lang="en-US" sz="1840" spc="-1" strike="noStrike">
-              <a:solidFill>
-                <a:srgbClr val="000000"/>
-              </a:solidFill>
-              <a:latin typeface="Times New Roman"/>
-            </a:endParaRPr>
-          </a:p>
-        </p:txBody>
-      </p:sp>
-      <p:sp>
-        <p:nvSpPr>
-          <p:cNvPr id="107" name=""/>
+                <a:latin typeface="NotoSansJP"/>
+                <a:ea typeface="NotoSansJP"/>
+              </a:rPr>
+              <a:t> </a:t>
+            </a:r>
+            <a:r>
+              <a:rPr b="0" lang="zh-CN" sz="2170" spc="-1" strike="noStrike">
+                <a:solidFill>
+                  <a:srgbClr val="111111"/>
+                </a:solidFill>
+                <a:latin typeface="NotoSansJP"/>
+                <a:ea typeface="NotoSansJP"/>
+              </a:rPr>
+              <a:t>で表せる</a:t>
+            </a:r>
+            <a:endParaRPr b="0" lang="en-US" sz="2170" spc="-1" strike="noStrike">
+              <a:solidFill>
+                <a:srgbClr val="000000"/>
+              </a:solidFill>
+              <a:latin typeface="Times New Roman"/>
+            </a:endParaRPr>
+          </a:p>
+        </p:txBody>
+      </p:sp>
+      <p:sp>
+        <p:nvSpPr>
+          <p:cNvPr id="86" name=""/>
           <p:cNvSpPr txBox="1"/>
           <p:nvPr/>
         </p:nvSpPr>
         <p:spPr>
           <a:xfrm>
-            <a:off x="533520" y="1927440"/>
-            <a:ext cx="1655640" cy="399600"/>
+            <a:off x="533520" y="2886120"/>
+            <a:ext cx="552240" cy="399600"/>
           </a:xfrm>
           <a:prstGeom prst="rect">
             <a:avLst/>
@@ -7418,10 +6525,10 @@
                 <a:solidFill>
                   <a:srgbClr val="111111"/>
                 </a:solidFill>
-                <a:latin typeface="NotoSansCJKjp"/>
-                <a:ea typeface="NotoSansCJKjp"/>
-              </a:rPr>
-              <a:t>⽂章中の数式</a:t>
+                <a:latin typeface="NotoSansJP"/>
+                <a:ea typeface="NotoSansJP"/>
+              </a:rPr>
+              <a:t>補足</a:t>
             </a:r>
             <a:endParaRPr b="0" lang="en-US" sz="2170" spc="-1" strike="noStrike">
               <a:solidFill>
@@ -7434,14 +6541,14 @@
       </p:sp>
       <p:sp>
         <p:nvSpPr>
-          <p:cNvPr id="108" name=""/>
+          <p:cNvPr id="87" name=""/>
           <p:cNvSpPr txBox="1"/>
           <p:nvPr/>
         </p:nvSpPr>
         <p:spPr>
           <a:xfrm>
-            <a:off x="2190600" y="1998000"/>
-            <a:ext cx="275760" cy="308160"/>
+            <a:off x="533520" y="3295800"/>
+            <a:ext cx="8779320" cy="401040"/>
           </a:xfrm>
           <a:prstGeom prst="rect">
             <a:avLst/>
@@ -7461,10 +6568,20 @@
                 <a:solidFill>
                   <a:srgbClr val="111111"/>
                 </a:solidFill>
-                <a:latin typeface="Arial"/>
-                <a:ea typeface="Arial"/>
-              </a:rPr>
-              <a:t>: </a:t>
+                <a:latin typeface="NotoSansJP"/>
+                <a:ea typeface="NotoSansJP"/>
+              </a:rPr>
+              <a:t>HTML</a:t>
+            </a:r>
+            <a:r>
+              <a:rPr b="0" lang="zh-CN" sz="2170" spc="-1" strike="noStrike">
+                <a:solidFill>
+                  <a:srgbClr val="111111"/>
+                </a:solidFill>
+                <a:latin typeface="NotoSansJP"/>
+                <a:ea typeface="NotoSansJP"/>
+              </a:rPr>
+              <a:t>ブロック内に数式を書くと数式表示が効かないことがあります。</a:t>
             </a:r>
             <a:endParaRPr b="0" lang="en-US" sz="2170" spc="-1" strike="noStrike">
               <a:solidFill>
@@ -7477,14 +6594,14 @@
       </p:sp>
       <p:sp>
         <p:nvSpPr>
-          <p:cNvPr id="109" name=""/>
+          <p:cNvPr id="88" name=""/>
           <p:cNvSpPr txBox="1"/>
           <p:nvPr/>
         </p:nvSpPr>
         <p:spPr>
           <a:xfrm>
-            <a:off x="2344320" y="1927440"/>
-            <a:ext cx="1655640" cy="399600"/>
+            <a:off x="533520" y="3714840"/>
+            <a:ext cx="11058840" cy="401040"/>
           </a:xfrm>
           <a:prstGeom prst="rect">
             <a:avLst/>
@@ -7500,14 +6617,64 @@
           </a:bodyPr>
           <a:p>
             <a:r>
+              <a:rPr b="0" lang="en-US" sz="2170" spc="-1" strike="noStrike">
+                <a:solidFill>
+                  <a:srgbClr val="111111"/>
+                </a:solidFill>
+                <a:latin typeface="NotoSansJP"/>
+                <a:ea typeface="NotoSansJP"/>
+              </a:rPr>
+              <a:t>HTML</a:t>
+            </a:r>
+            <a:r>
               <a:rPr b="0" lang="zh-CN" sz="2170" spc="-1" strike="noStrike">
                 <a:solidFill>
                   <a:srgbClr val="111111"/>
                 </a:solidFill>
-                <a:latin typeface="NotoSansCJKjp"/>
-                <a:ea typeface="NotoSansCJKjp"/>
-              </a:rPr>
-              <a:t>運動⽅程式は</a:t>
+                <a:latin typeface="NotoSansJP"/>
+                <a:ea typeface="NotoSansJP"/>
+              </a:rPr>
+              <a:t>内に</a:t>
+            </a:r>
+            <a:r>
+              <a:rPr b="0" lang="en-US" sz="2170" spc="-1" strike="noStrike">
+                <a:solidFill>
+                  <a:srgbClr val="111111"/>
+                </a:solidFill>
+                <a:latin typeface="NotoSansJP"/>
+                <a:ea typeface="NotoSansJP"/>
+              </a:rPr>
+              <a:t>Markdown</a:t>
+            </a:r>
+            <a:r>
+              <a:rPr b="0" lang="zh-CN" sz="2170" spc="-1" strike="noStrike">
+                <a:solidFill>
+                  <a:srgbClr val="111111"/>
+                </a:solidFill>
+                <a:latin typeface="NotoSansJP"/>
+                <a:ea typeface="NotoSansJP"/>
+              </a:rPr>
+              <a:t>（数式や箇条書き）を書く場合は、</a:t>
+            </a:r>
+            <a:r>
+              <a:rPr b="0" lang="en-US" sz="2170" spc="-1" strike="noStrike">
+                <a:solidFill>
+                  <a:srgbClr val="111111"/>
+                </a:solidFill>
+                <a:latin typeface="NotoSansJP"/>
+                <a:ea typeface="NotoSansJP"/>
+              </a:rPr>
+              <a:t>HTML</a:t>
+            </a:r>
+            <a:r>
+              <a:rPr b="0" lang="zh-CN" sz="2170" spc="-1" strike="noStrike">
+                <a:solidFill>
+                  <a:srgbClr val="111111"/>
+                </a:solidFill>
+                <a:latin typeface="NotoSansJP"/>
+                <a:ea typeface="NotoSansJP"/>
+              </a:rPr>
+              <a:t>タグ間に空行を入れると</a:t>
             </a:r>
             <a:endParaRPr b="0" lang="en-US" sz="2170" spc="-1" strike="noStrike">
               <a:solidFill>
@@ -7520,14 +6687,14 @@
       </p:sp>
       <p:sp>
         <p:nvSpPr>
-          <p:cNvPr id="110" name=""/>
+          <p:cNvPr id="89" name=""/>
           <p:cNvSpPr txBox="1"/>
           <p:nvPr/>
         </p:nvSpPr>
         <p:spPr>
           <a:xfrm>
-            <a:off x="4001760" y="1998000"/>
-            <a:ext cx="275760" cy="308160"/>
+            <a:off x="533520" y="4124160"/>
+            <a:ext cx="2759040" cy="399600"/>
           </a:xfrm>
           <a:prstGeom prst="rect">
             <a:avLst/>
@@ -7543,14 +6710,14 @@
           </a:bodyPr>
           <a:p>
             <a:r>
-              <a:rPr b="0" lang="en-US" sz="2170" spc="-1" strike="noStrike">
+              <a:rPr b="0" lang="zh-CN" sz="2170" spc="-1" strike="noStrike">
                 <a:solidFill>
                   <a:srgbClr val="111111"/>
                 </a:solidFill>
-                <a:latin typeface="Arial"/>
-                <a:ea typeface="Arial"/>
-              </a:rPr>
-              <a:t> </a:t>
+                <a:latin typeface="NotoSansJP"/>
+                <a:ea typeface="NotoSansJP"/>
+              </a:rPr>
+              <a:t>反映されやすいです。</a:t>
             </a:r>
             <a:endParaRPr b="0" lang="en-US" sz="2170" spc="-1" strike="noStrike">
               <a:solidFill>
@@ -7563,616 +6730,14 @@
       </p:sp>
       <p:sp>
         <p:nvSpPr>
-          <p:cNvPr id="111" name=""/>
-          <p:cNvSpPr txBox="1"/>
-          <p:nvPr/>
-        </p:nvSpPr>
-        <p:spPr>
-          <a:xfrm>
-            <a:off x="5255280" y="1998000"/>
-            <a:ext cx="275760" cy="308160"/>
-          </a:xfrm>
-          <a:prstGeom prst="rect">
-            <a:avLst/>
-          </a:prstGeom>
-          <a:noFill/>
-          <a:ln w="0">
-            <a:noFill/>
-          </a:ln>
-        </p:spPr>
-        <p:txBody>
-          <a:bodyPr wrap="none" lIns="0" rIns="0" tIns="0" bIns="0" anchor="t">
-            <a:noAutofit/>
-          </a:bodyPr>
-          <a:p>
-            <a:r>
-              <a:rPr b="0" lang="en-US" sz="2170" spc="-1" strike="noStrike">
-                <a:solidFill>
-                  <a:srgbClr val="111111"/>
-                </a:solidFill>
-                <a:latin typeface="Arial"/>
-                <a:ea typeface="Arial"/>
-              </a:rPr>
-              <a:t> </a:t>
-            </a:r>
-            <a:endParaRPr b="0" lang="en-US" sz="2170" spc="-1" strike="noStrike">
-              <a:solidFill>
-                <a:srgbClr val="000000"/>
-              </a:solidFill>
-              <a:latin typeface="Times New Roman"/>
-            </a:endParaRPr>
-          </a:p>
-        </p:txBody>
-      </p:sp>
-      <p:sp>
-        <p:nvSpPr>
-          <p:cNvPr id="112" name=""/>
-          <p:cNvSpPr txBox="1"/>
-          <p:nvPr/>
-        </p:nvSpPr>
-        <p:spPr>
-          <a:xfrm>
-            <a:off x="5331960" y="1927440"/>
-            <a:ext cx="1104120" cy="399600"/>
-          </a:xfrm>
-          <a:prstGeom prst="rect">
-            <a:avLst/>
-          </a:prstGeom>
-          <a:noFill/>
-          <a:ln w="0">
-            <a:noFill/>
-          </a:ln>
-        </p:spPr>
-        <p:txBody>
-          <a:bodyPr wrap="none" lIns="0" rIns="0" tIns="0" bIns="0" anchor="t">
-            <a:noAutofit/>
-          </a:bodyPr>
-          <a:p>
-            <a:r>
-              <a:rPr b="0" lang="zh-CN" sz="2170" spc="-1" strike="noStrike">
-                <a:solidFill>
-                  <a:srgbClr val="111111"/>
-                </a:solidFill>
-                <a:latin typeface="NotoSansCJKjp"/>
-                <a:ea typeface="NotoSansCJKjp"/>
-              </a:rPr>
-              <a:t>で表せる</a:t>
-            </a:r>
-            <a:endParaRPr b="0" lang="en-US" sz="2170" spc="-1" strike="noStrike">
-              <a:solidFill>
-                <a:srgbClr val="000000"/>
-              </a:solidFill>
-              <a:latin typeface="Times New Roman"/>
-            </a:endParaRPr>
-          </a:p>
-        </p:txBody>
-      </p:sp>
-      <p:sp>
-        <p:nvSpPr>
-          <p:cNvPr id="113" name=""/>
-          <p:cNvSpPr txBox="1"/>
-          <p:nvPr/>
-        </p:nvSpPr>
-        <p:spPr>
-          <a:xfrm>
-            <a:off x="533520" y="2851560"/>
-            <a:ext cx="552240" cy="399600"/>
-          </a:xfrm>
-          <a:prstGeom prst="rect">
-            <a:avLst/>
-          </a:prstGeom>
-          <a:noFill/>
-          <a:ln w="0">
-            <a:noFill/>
-          </a:ln>
-        </p:spPr>
-        <p:txBody>
-          <a:bodyPr wrap="none" lIns="0" rIns="0" tIns="0" bIns="0" anchor="t">
-            <a:noAutofit/>
-          </a:bodyPr>
-          <a:p>
-            <a:r>
-              <a:rPr b="0" lang="zh-CN" sz="2170" spc="-1" strike="noStrike">
-                <a:solidFill>
-                  <a:srgbClr val="111111"/>
-                </a:solidFill>
-                <a:latin typeface="NotoSansCJKjp"/>
-                <a:ea typeface="NotoSansCJKjp"/>
-              </a:rPr>
-              <a:t>補⾜</a:t>
-            </a:r>
-            <a:endParaRPr b="0" lang="en-US" sz="2170" spc="-1" strike="noStrike">
-              <a:solidFill>
-                <a:srgbClr val="000000"/>
-              </a:solidFill>
-              <a:latin typeface="Times New Roman"/>
-            </a:endParaRPr>
-          </a:p>
-        </p:txBody>
-      </p:sp>
-      <p:sp>
-        <p:nvSpPr>
-          <p:cNvPr id="114" name=""/>
-          <p:cNvSpPr txBox="1"/>
-          <p:nvPr/>
-        </p:nvSpPr>
-        <p:spPr>
-          <a:xfrm>
-            <a:off x="533520" y="3340800"/>
-            <a:ext cx="750600" cy="308160"/>
-          </a:xfrm>
-          <a:prstGeom prst="rect">
-            <a:avLst/>
-          </a:prstGeom>
-          <a:noFill/>
-          <a:ln w="0">
-            <a:noFill/>
-          </a:ln>
-        </p:spPr>
-        <p:txBody>
-          <a:bodyPr wrap="none" lIns="0" rIns="0" tIns="0" bIns="0" anchor="t">
-            <a:noAutofit/>
-          </a:bodyPr>
-          <a:p>
-            <a:r>
-              <a:rPr b="0" lang="en-US" sz="2170" spc="-1" strike="noStrike">
-                <a:solidFill>
-                  <a:srgbClr val="111111"/>
-                </a:solidFill>
-                <a:latin typeface="Arial"/>
-                <a:ea typeface="Arial"/>
-              </a:rPr>
-              <a:t>HTML</a:t>
-            </a:r>
-            <a:endParaRPr b="0" lang="en-US" sz="2170" spc="-1" strike="noStrike">
-              <a:solidFill>
-                <a:srgbClr val="000000"/>
-              </a:solidFill>
-              <a:latin typeface="Times New Roman"/>
-            </a:endParaRPr>
-          </a:p>
-        </p:txBody>
-      </p:sp>
-      <p:sp>
-        <p:nvSpPr>
-          <p:cNvPr id="115" name=""/>
-          <p:cNvSpPr txBox="1"/>
-          <p:nvPr/>
-        </p:nvSpPr>
-        <p:spPr>
-          <a:xfrm>
-            <a:off x="1285200" y="3270600"/>
-            <a:ext cx="8000280" cy="399600"/>
-          </a:xfrm>
-          <a:prstGeom prst="rect">
-            <a:avLst/>
-          </a:prstGeom>
-          <a:noFill/>
-          <a:ln w="0">
-            <a:noFill/>
-          </a:ln>
-        </p:spPr>
-        <p:txBody>
-          <a:bodyPr wrap="none" lIns="0" rIns="0" tIns="0" bIns="0" anchor="t">
-            <a:noAutofit/>
-          </a:bodyPr>
-          <a:p>
-            <a:r>
-              <a:rPr b="0" lang="zh-CN" sz="2170" spc="-1" strike="noStrike">
-                <a:solidFill>
-                  <a:srgbClr val="111111"/>
-                </a:solidFill>
-                <a:latin typeface="NotoSansCJKjp"/>
-                <a:ea typeface="NotoSansCJKjp"/>
-              </a:rPr>
-              <a:t>ブロック内に数式を書くと数式表⽰が効かないことがあります。</a:t>
-            </a:r>
-            <a:endParaRPr b="0" lang="en-US" sz="2170" spc="-1" strike="noStrike">
-              <a:solidFill>
-                <a:srgbClr val="000000"/>
-              </a:solidFill>
-              <a:latin typeface="Times New Roman"/>
-            </a:endParaRPr>
-          </a:p>
-        </p:txBody>
-      </p:sp>
-      <p:sp>
-        <p:nvSpPr>
-          <p:cNvPr id="116" name=""/>
-          <p:cNvSpPr txBox="1"/>
-          <p:nvPr/>
-        </p:nvSpPr>
-        <p:spPr>
-          <a:xfrm>
-            <a:off x="533520" y="3750480"/>
-            <a:ext cx="750600" cy="308160"/>
-          </a:xfrm>
-          <a:prstGeom prst="rect">
-            <a:avLst/>
-          </a:prstGeom>
-          <a:noFill/>
-          <a:ln w="0">
-            <a:noFill/>
-          </a:ln>
-        </p:spPr>
-        <p:txBody>
-          <a:bodyPr wrap="none" lIns="0" rIns="0" tIns="0" bIns="0" anchor="t">
-            <a:noAutofit/>
-          </a:bodyPr>
-          <a:p>
-            <a:r>
-              <a:rPr b="0" lang="en-US" sz="2170" spc="-1" strike="noStrike">
-                <a:solidFill>
-                  <a:srgbClr val="111111"/>
-                </a:solidFill>
-                <a:latin typeface="Arial"/>
-                <a:ea typeface="Arial"/>
-              </a:rPr>
-              <a:t>HTML</a:t>
-            </a:r>
-            <a:endParaRPr b="0" lang="en-US" sz="2170" spc="-1" strike="noStrike">
-              <a:solidFill>
-                <a:srgbClr val="000000"/>
-              </a:solidFill>
-              <a:latin typeface="Times New Roman"/>
-            </a:endParaRPr>
-          </a:p>
-        </p:txBody>
-      </p:sp>
-      <p:sp>
-        <p:nvSpPr>
-          <p:cNvPr id="117" name=""/>
-          <p:cNvSpPr txBox="1"/>
-          <p:nvPr/>
-        </p:nvSpPr>
-        <p:spPr>
-          <a:xfrm>
-            <a:off x="1285200" y="3679920"/>
-            <a:ext cx="552240" cy="399600"/>
-          </a:xfrm>
-          <a:prstGeom prst="rect">
-            <a:avLst/>
-          </a:prstGeom>
-          <a:noFill/>
-          <a:ln w="0">
-            <a:noFill/>
-          </a:ln>
-        </p:spPr>
-        <p:txBody>
-          <a:bodyPr wrap="none" lIns="0" rIns="0" tIns="0" bIns="0" anchor="t">
-            <a:noAutofit/>
-          </a:bodyPr>
-          <a:p>
-            <a:r>
-              <a:rPr b="0" lang="zh-CN" sz="2170" spc="-1" strike="noStrike">
-                <a:solidFill>
-                  <a:srgbClr val="111111"/>
-                </a:solidFill>
-                <a:latin typeface="NotoSansCJKjp"/>
-                <a:ea typeface="NotoSansCJKjp"/>
-              </a:rPr>
-              <a:t>内に</a:t>
-            </a:r>
-            <a:endParaRPr b="0" lang="en-US" sz="2170" spc="-1" strike="noStrike">
-              <a:solidFill>
-                <a:srgbClr val="000000"/>
-              </a:solidFill>
-              <a:latin typeface="Times New Roman"/>
-            </a:endParaRPr>
-          </a:p>
-        </p:txBody>
-      </p:sp>
-      <p:sp>
-        <p:nvSpPr>
-          <p:cNvPr id="118" name=""/>
-          <p:cNvSpPr txBox="1"/>
-          <p:nvPr/>
-        </p:nvSpPr>
-        <p:spPr>
-          <a:xfrm>
-            <a:off x="1837800" y="3750480"/>
-            <a:ext cx="1271880" cy="308160"/>
-          </a:xfrm>
-          <a:prstGeom prst="rect">
-            <a:avLst/>
-          </a:prstGeom>
-          <a:noFill/>
-          <a:ln w="0">
-            <a:noFill/>
-          </a:ln>
-        </p:spPr>
-        <p:txBody>
-          <a:bodyPr wrap="none" lIns="0" rIns="0" tIns="0" bIns="0" anchor="t">
-            <a:noAutofit/>
-          </a:bodyPr>
-          <a:p>
-            <a:r>
-              <a:rPr b="0" lang="en-US" sz="2170" spc="-1" strike="noStrike">
-                <a:solidFill>
-                  <a:srgbClr val="111111"/>
-                </a:solidFill>
-                <a:latin typeface="Arial"/>
-                <a:ea typeface="Arial"/>
-              </a:rPr>
-              <a:t>Markdown</a:t>
-            </a:r>
-            <a:endParaRPr b="0" lang="en-US" sz="2170" spc="-1" strike="noStrike">
-              <a:solidFill>
-                <a:srgbClr val="000000"/>
-              </a:solidFill>
-              <a:latin typeface="Times New Roman"/>
-            </a:endParaRPr>
-          </a:p>
-        </p:txBody>
-      </p:sp>
-      <p:sp>
-        <p:nvSpPr>
-          <p:cNvPr id="119" name=""/>
-          <p:cNvSpPr txBox="1"/>
-          <p:nvPr/>
-        </p:nvSpPr>
-        <p:spPr>
-          <a:xfrm>
-            <a:off x="3111840" y="3679920"/>
-            <a:ext cx="4414320" cy="399600"/>
-          </a:xfrm>
-          <a:prstGeom prst="rect">
-            <a:avLst/>
-          </a:prstGeom>
-          <a:noFill/>
-          <a:ln w="0">
-            <a:noFill/>
-          </a:ln>
-        </p:spPr>
-        <p:txBody>
-          <a:bodyPr wrap="none" lIns="0" rIns="0" tIns="0" bIns="0" anchor="t">
-            <a:noAutofit/>
-          </a:bodyPr>
-          <a:p>
-            <a:r>
-              <a:rPr b="0" lang="zh-CN" sz="2170" spc="-1" strike="noStrike">
-                <a:solidFill>
-                  <a:srgbClr val="111111"/>
-                </a:solidFill>
-                <a:latin typeface="NotoSansCJKjp"/>
-                <a:ea typeface="NotoSansCJKjp"/>
-              </a:rPr>
-              <a:t>（数式や箇条書き）を書く場合は、</a:t>
-            </a:r>
-            <a:endParaRPr b="0" lang="en-US" sz="2170" spc="-1" strike="noStrike">
-              <a:solidFill>
-                <a:srgbClr val="000000"/>
-              </a:solidFill>
-              <a:latin typeface="Times New Roman"/>
-            </a:endParaRPr>
-          </a:p>
-        </p:txBody>
-      </p:sp>
-      <p:sp>
-        <p:nvSpPr>
-          <p:cNvPr id="120" name=""/>
-          <p:cNvSpPr txBox="1"/>
-          <p:nvPr/>
-        </p:nvSpPr>
-        <p:spPr>
-          <a:xfrm>
-            <a:off x="7531560" y="3750480"/>
-            <a:ext cx="765720" cy="308160"/>
-          </a:xfrm>
-          <a:prstGeom prst="rect">
-            <a:avLst/>
-          </a:prstGeom>
-          <a:noFill/>
-          <a:ln w="0">
-            <a:noFill/>
-          </a:ln>
-        </p:spPr>
-        <p:txBody>
-          <a:bodyPr wrap="none" lIns="0" rIns="0" tIns="0" bIns="0" anchor="t">
-            <a:noAutofit/>
-          </a:bodyPr>
-          <a:p>
-            <a:r>
-              <a:rPr b="1" lang="en-US" sz="2170" spc="-1" strike="noStrike">
-                <a:solidFill>
-                  <a:srgbClr val="111111"/>
-                </a:solidFill>
-                <a:latin typeface="Arial"/>
-                <a:ea typeface="Arial"/>
-              </a:rPr>
-              <a:t>HTML</a:t>
-            </a:r>
-            <a:endParaRPr b="0" lang="en-US" sz="2170" spc="-1" strike="noStrike">
-              <a:solidFill>
-                <a:srgbClr val="000000"/>
-              </a:solidFill>
-              <a:latin typeface="Times New Roman"/>
-            </a:endParaRPr>
-          </a:p>
-        </p:txBody>
-      </p:sp>
-      <p:sp>
-        <p:nvSpPr>
-          <p:cNvPr id="121" name=""/>
-          <p:cNvSpPr txBox="1"/>
-          <p:nvPr/>
-        </p:nvSpPr>
-        <p:spPr>
-          <a:xfrm>
-            <a:off x="8298720" y="3679920"/>
-            <a:ext cx="3310920" cy="399600"/>
-          </a:xfrm>
-          <a:prstGeom prst="rect">
-            <a:avLst/>
-          </a:prstGeom>
-          <a:noFill/>
-          <a:ln w="0">
-            <a:noFill/>
-          </a:ln>
-        </p:spPr>
-        <p:txBody>
-          <a:bodyPr wrap="none" lIns="0" rIns="0" tIns="0" bIns="0" anchor="t">
-            <a:noAutofit/>
-          </a:bodyPr>
-          <a:p>
-            <a:r>
-              <a:rPr b="0" lang="zh-CN" sz="2170" spc="-1" strike="noStrike">
-                <a:solidFill>
-                  <a:srgbClr val="111111"/>
-                </a:solidFill>
-                <a:latin typeface="NotoSansCJKjp"/>
-                <a:ea typeface="NotoSansCJKjp"/>
-              </a:rPr>
-              <a:t>タグ間に空⾏を⼊れると反</a:t>
-            </a:r>
-            <a:endParaRPr b="0" lang="en-US" sz="2170" spc="-1" strike="noStrike">
-              <a:solidFill>
-                <a:srgbClr val="000000"/>
-              </a:solidFill>
-              <a:latin typeface="Times New Roman"/>
-            </a:endParaRPr>
-          </a:p>
-        </p:txBody>
-      </p:sp>
-      <p:sp>
-        <p:nvSpPr>
-          <p:cNvPr id="122" name=""/>
-          <p:cNvSpPr txBox="1"/>
-          <p:nvPr/>
-        </p:nvSpPr>
-        <p:spPr>
-          <a:xfrm>
-            <a:off x="533520" y="4099320"/>
-            <a:ext cx="2483280" cy="399600"/>
-          </a:xfrm>
-          <a:prstGeom prst="rect">
-            <a:avLst/>
-          </a:prstGeom>
-          <a:noFill/>
-          <a:ln w="0">
-            <a:noFill/>
-          </a:ln>
-        </p:spPr>
-        <p:txBody>
-          <a:bodyPr wrap="none" lIns="0" rIns="0" tIns="0" bIns="0" anchor="t">
-            <a:noAutofit/>
-          </a:bodyPr>
-          <a:p>
-            <a:r>
-              <a:rPr b="0" lang="zh-CN" sz="2170" spc="-1" strike="noStrike">
-                <a:solidFill>
-                  <a:srgbClr val="111111"/>
-                </a:solidFill>
-                <a:latin typeface="NotoSansCJKjp"/>
-                <a:ea typeface="NotoSansCJKjp"/>
-              </a:rPr>
-              <a:t>映されやすいです。</a:t>
-            </a:r>
-            <a:endParaRPr b="0" lang="en-US" sz="2170" spc="-1" strike="noStrike">
-              <a:solidFill>
-                <a:srgbClr val="000000"/>
-              </a:solidFill>
-              <a:latin typeface="Times New Roman"/>
-            </a:endParaRPr>
-          </a:p>
-        </p:txBody>
-      </p:sp>
-      <p:sp>
-        <p:nvSpPr>
-          <p:cNvPr id="123" name=""/>
-          <p:cNvSpPr txBox="1"/>
-          <p:nvPr/>
-        </p:nvSpPr>
-        <p:spPr>
-          <a:xfrm>
-            <a:off x="533520" y="4579200"/>
-            <a:ext cx="750600" cy="308160"/>
-          </a:xfrm>
-          <a:prstGeom prst="rect">
-            <a:avLst/>
-          </a:prstGeom>
-          <a:noFill/>
-          <a:ln w="0">
-            <a:noFill/>
-          </a:ln>
-        </p:spPr>
-        <p:txBody>
-          <a:bodyPr wrap="none" lIns="0" rIns="0" tIns="0" bIns="0" anchor="t">
-            <a:noAutofit/>
-          </a:bodyPr>
-          <a:p>
-            <a:r>
-              <a:rPr b="0" lang="en-US" sz="2170" spc="-1" strike="noStrike">
-                <a:solidFill>
-                  <a:srgbClr val="111111"/>
-                </a:solidFill>
-                <a:latin typeface="Arial"/>
-                <a:ea typeface="Arial"/>
-              </a:rPr>
-              <a:t>HTML</a:t>
-            </a:r>
-            <a:endParaRPr b="0" lang="en-US" sz="2170" spc="-1" strike="noStrike">
-              <a:solidFill>
-                <a:srgbClr val="000000"/>
-              </a:solidFill>
-              <a:latin typeface="Times New Roman"/>
-            </a:endParaRPr>
-          </a:p>
-        </p:txBody>
-      </p:sp>
-      <p:sp>
-        <p:nvSpPr>
-          <p:cNvPr id="124" name=""/>
-          <p:cNvSpPr txBox="1"/>
-          <p:nvPr/>
-        </p:nvSpPr>
-        <p:spPr>
-          <a:xfrm>
-            <a:off x="1285200" y="4508640"/>
-            <a:ext cx="4414320" cy="399600"/>
-          </a:xfrm>
-          <a:prstGeom prst="rect">
-            <a:avLst/>
-          </a:prstGeom>
-          <a:noFill/>
-          <a:ln w="0">
-            <a:noFill/>
-          </a:ln>
-        </p:spPr>
-        <p:txBody>
-          <a:bodyPr wrap="none" lIns="0" rIns="0" tIns="0" bIns="0" anchor="t">
-            <a:noAutofit/>
-          </a:bodyPr>
-          <a:p>
-            <a:r>
-              <a:rPr b="0" lang="zh-CN" sz="2170" spc="-1" strike="noStrike">
-                <a:solidFill>
-                  <a:srgbClr val="111111"/>
-                </a:solidFill>
-                <a:latin typeface="NotoSansCJKjp"/>
-                <a:ea typeface="NotoSansCJKjp"/>
-              </a:rPr>
-              <a:t>内に数式を含む場合は可能であれば</a:t>
-            </a:r>
-            <a:endParaRPr b="0" lang="en-US" sz="2170" spc="-1" strike="noStrike">
-              <a:solidFill>
-                <a:srgbClr val="000000"/>
-              </a:solidFill>
-              <a:latin typeface="Times New Roman"/>
-            </a:endParaRPr>
-          </a:p>
-        </p:txBody>
-      </p:sp>
-      <p:sp>
-        <p:nvSpPr>
-          <p:cNvPr id="125" name=""/>
+          <p:cNvPr id="90" name=""/>
           <p:cNvSpPr/>
           <p:nvPr/>
         </p:nvSpPr>
         <p:spPr>
           <a:xfrm>
-            <a:off x="5781600" y="4581360"/>
-            <a:ext cx="5534280" cy="362160"/>
+            <a:off x="5752800" y="4514760"/>
+            <a:ext cx="4248720" cy="438480"/>
           </a:xfrm>
           <a:custGeom>
             <a:avLst/>
@@ -8180,12 +6745,12 @@
             <a:ahLst/>
             <a:rect l="0" t="0" r="r" b="b"/>
             <a:pathLst>
-              <a:path w="15373" h="1006">
+              <a:path w="11802" h="1218">
                 <a:moveTo>
-                  <a:pt x="0" y="848"/>
+                  <a:pt x="0" y="1059"/>
                 </a:moveTo>
                 <a:lnTo>
-                  <a:pt x="0" y="159"/>
+                  <a:pt x="0" y="158"/>
                 </a:lnTo>
                 <a:cubicBezTo>
                   <a:pt x="0" y="148"/>
@@ -8193,168 +6758,168 @@
                   <a:pt x="3" y="128"/>
                 </a:cubicBezTo>
                 <a:cubicBezTo>
-                  <a:pt x="5" y="118"/>
-                  <a:pt x="8" y="108"/>
+                  <a:pt x="5" y="117"/>
+                  <a:pt x="8" y="107"/>
                   <a:pt x="12" y="98"/>
                 </a:cubicBezTo>
                 <a:cubicBezTo>
                   <a:pt x="16" y="88"/>
                   <a:pt x="21" y="79"/>
-                  <a:pt x="26" y="71"/>
-                </a:cubicBezTo>
-                <a:cubicBezTo>
-                  <a:pt x="32" y="62"/>
+                  <a:pt x="27" y="70"/>
+                </a:cubicBezTo>
+                <a:cubicBezTo>
+                  <a:pt x="33" y="62"/>
                   <a:pt x="39" y="54"/>
-                  <a:pt x="46" y="46"/>
+                  <a:pt x="47" y="46"/>
                 </a:cubicBezTo>
                 <a:cubicBezTo>
                   <a:pt x="54" y="39"/>
-                  <a:pt x="62" y="33"/>
-                  <a:pt x="70" y="27"/>
-                </a:cubicBezTo>
-                <a:cubicBezTo>
-                  <a:pt x="79" y="21"/>
-                  <a:pt x="88" y="16"/>
+                  <a:pt x="62" y="32"/>
+                  <a:pt x="71" y="27"/>
+                </a:cubicBezTo>
+                <a:cubicBezTo>
+                  <a:pt x="80" y="21"/>
+                  <a:pt x="89" y="16"/>
                   <a:pt x="98" y="12"/>
                 </a:cubicBezTo>
                 <a:cubicBezTo>
-                  <a:pt x="107" y="8"/>
-                  <a:pt x="117" y="5"/>
-                  <a:pt x="127" y="3"/>
+                  <a:pt x="108" y="8"/>
+                  <a:pt x="118" y="5"/>
+                  <a:pt x="128" y="3"/>
                 </a:cubicBezTo>
                 <a:cubicBezTo>
                   <a:pt x="138" y="1"/>
-                  <a:pt x="148" y="0"/>
-                  <a:pt x="158" y="0"/>
-                </a:cubicBezTo>
-                <a:lnTo>
-                  <a:pt x="15214" y="0"/>
-                </a:lnTo>
-                <a:cubicBezTo>
-                  <a:pt x="15225" y="0"/>
-                  <a:pt x="15235" y="1"/>
-                  <a:pt x="15245" y="3"/>
-                </a:cubicBezTo>
-                <a:cubicBezTo>
-                  <a:pt x="15255" y="5"/>
-                  <a:pt x="15265" y="8"/>
-                  <a:pt x="15275" y="12"/>
-                </a:cubicBezTo>
-                <a:cubicBezTo>
-                  <a:pt x="15285" y="16"/>
-                  <a:pt x="15294" y="21"/>
-                  <a:pt x="15302" y="27"/>
-                </a:cubicBezTo>
-                <a:cubicBezTo>
-                  <a:pt x="15311" y="33"/>
-                  <a:pt x="15319" y="39"/>
-                  <a:pt x="15326" y="46"/>
-                </a:cubicBezTo>
-                <a:cubicBezTo>
-                  <a:pt x="15334" y="54"/>
-                  <a:pt x="15340" y="62"/>
-                  <a:pt x="15346" y="71"/>
-                </a:cubicBezTo>
-                <a:cubicBezTo>
-                  <a:pt x="15352" y="79"/>
-                  <a:pt x="15357" y="88"/>
-                  <a:pt x="15361" y="98"/>
-                </a:cubicBezTo>
-                <a:cubicBezTo>
-                  <a:pt x="15365" y="108"/>
-                  <a:pt x="15368" y="118"/>
-                  <a:pt x="15370" y="128"/>
-                </a:cubicBezTo>
-                <a:cubicBezTo>
-                  <a:pt x="15372" y="138"/>
-                  <a:pt x="15373" y="148"/>
-                  <a:pt x="15373" y="159"/>
-                </a:cubicBezTo>
-                <a:lnTo>
-                  <a:pt x="15373" y="848"/>
-                </a:lnTo>
-                <a:cubicBezTo>
-                  <a:pt x="15373" y="858"/>
-                  <a:pt x="15372" y="868"/>
-                  <a:pt x="15370" y="879"/>
-                </a:cubicBezTo>
-                <a:cubicBezTo>
-                  <a:pt x="15368" y="889"/>
-                  <a:pt x="15365" y="899"/>
-                  <a:pt x="15361" y="908"/>
-                </a:cubicBezTo>
-                <a:cubicBezTo>
-                  <a:pt x="15357" y="918"/>
-                  <a:pt x="15352" y="927"/>
-                  <a:pt x="15346" y="936"/>
-                </a:cubicBezTo>
-                <a:cubicBezTo>
-                  <a:pt x="15340" y="944"/>
-                  <a:pt x="15334" y="953"/>
-                  <a:pt x="15326" y="960"/>
-                </a:cubicBezTo>
-                <a:cubicBezTo>
-                  <a:pt x="15319" y="967"/>
-                  <a:pt x="15311" y="974"/>
-                  <a:pt x="15302" y="980"/>
-                </a:cubicBezTo>
-                <a:cubicBezTo>
-                  <a:pt x="15294" y="985"/>
-                  <a:pt x="15285" y="990"/>
-                  <a:pt x="15275" y="994"/>
-                </a:cubicBezTo>
-                <a:cubicBezTo>
-                  <a:pt x="15265" y="998"/>
-                  <a:pt x="15255" y="1001"/>
-                  <a:pt x="15245" y="1003"/>
-                </a:cubicBezTo>
-                <a:cubicBezTo>
-                  <a:pt x="15235" y="1005"/>
-                  <a:pt x="15225" y="1006"/>
-                  <a:pt x="15214" y="1006"/>
-                </a:cubicBezTo>
-                <a:lnTo>
-                  <a:pt x="158" y="1006"/>
-                </a:lnTo>
-                <a:cubicBezTo>
-                  <a:pt x="148" y="1006"/>
-                  <a:pt x="138" y="1005"/>
-                  <a:pt x="127" y="1003"/>
-                </a:cubicBezTo>
-                <a:cubicBezTo>
-                  <a:pt x="117" y="1001"/>
-                  <a:pt x="107" y="998"/>
-                  <a:pt x="98" y="994"/>
-                </a:cubicBezTo>
-                <a:cubicBezTo>
-                  <a:pt x="88" y="990"/>
-                  <a:pt x="79" y="985"/>
-                  <a:pt x="70" y="980"/>
-                </a:cubicBezTo>
-                <a:cubicBezTo>
-                  <a:pt x="62" y="974"/>
-                  <a:pt x="54" y="967"/>
-                  <a:pt x="46" y="960"/>
-                </a:cubicBezTo>
-                <a:cubicBezTo>
-                  <a:pt x="39" y="953"/>
-                  <a:pt x="32" y="944"/>
-                  <a:pt x="26" y="936"/>
-                </a:cubicBezTo>
-                <a:cubicBezTo>
-                  <a:pt x="21" y="927"/>
-                  <a:pt x="16" y="918"/>
-                  <a:pt x="12" y="908"/>
-                </a:cubicBezTo>
-                <a:cubicBezTo>
-                  <a:pt x="8" y="899"/>
-                  <a:pt x="5" y="889"/>
-                  <a:pt x="3" y="879"/>
-                </a:cubicBezTo>
-                <a:cubicBezTo>
-                  <a:pt x="1" y="868"/>
-                  <a:pt x="0" y="858"/>
-                  <a:pt x="0" y="848"/>
+                  <a:pt x="149" y="0"/>
+                  <a:pt x="159" y="0"/>
+                </a:cubicBezTo>
+                <a:lnTo>
+                  <a:pt x="11643" y="0"/>
+                </a:lnTo>
+                <a:cubicBezTo>
+                  <a:pt x="11653" y="0"/>
+                  <a:pt x="11664" y="1"/>
+                  <a:pt x="11674" y="3"/>
+                </a:cubicBezTo>
+                <a:cubicBezTo>
+                  <a:pt x="11684" y="5"/>
+                  <a:pt x="11694" y="8"/>
+                  <a:pt x="11704" y="12"/>
+                </a:cubicBezTo>
+                <a:cubicBezTo>
+                  <a:pt x="11713" y="16"/>
+                  <a:pt x="11723" y="21"/>
+                  <a:pt x="11731" y="27"/>
+                </a:cubicBezTo>
+                <a:cubicBezTo>
+                  <a:pt x="11740" y="32"/>
+                  <a:pt x="11748" y="39"/>
+                  <a:pt x="11755" y="46"/>
+                </a:cubicBezTo>
+                <a:cubicBezTo>
+                  <a:pt x="11763" y="54"/>
+                  <a:pt x="11769" y="62"/>
+                  <a:pt x="11775" y="70"/>
+                </a:cubicBezTo>
+                <a:cubicBezTo>
+                  <a:pt x="11781" y="79"/>
+                  <a:pt x="11786" y="88"/>
+                  <a:pt x="11790" y="98"/>
+                </a:cubicBezTo>
+                <a:cubicBezTo>
+                  <a:pt x="11794" y="107"/>
+                  <a:pt x="11797" y="117"/>
+                  <a:pt x="11799" y="128"/>
+                </a:cubicBezTo>
+                <a:cubicBezTo>
+                  <a:pt x="11801" y="138"/>
+                  <a:pt x="11802" y="148"/>
+                  <a:pt x="11802" y="158"/>
+                </a:cubicBezTo>
+                <a:lnTo>
+                  <a:pt x="11802" y="1059"/>
+                </a:lnTo>
+                <a:cubicBezTo>
+                  <a:pt x="11802" y="1070"/>
+                  <a:pt x="11801" y="1080"/>
+                  <a:pt x="11799" y="1090"/>
+                </a:cubicBezTo>
+                <a:cubicBezTo>
+                  <a:pt x="11797" y="1100"/>
+                  <a:pt x="11794" y="1110"/>
+                  <a:pt x="11790" y="1120"/>
+                </a:cubicBezTo>
+                <a:cubicBezTo>
+                  <a:pt x="11786" y="1129"/>
+                  <a:pt x="11781" y="1139"/>
+                  <a:pt x="11775" y="1147"/>
+                </a:cubicBezTo>
+                <a:cubicBezTo>
+                  <a:pt x="11769" y="1156"/>
+                  <a:pt x="11763" y="1164"/>
+                  <a:pt x="11755" y="1171"/>
+                </a:cubicBezTo>
+                <a:cubicBezTo>
+                  <a:pt x="11748" y="1179"/>
+                  <a:pt x="11740" y="1185"/>
+                  <a:pt x="11731" y="1191"/>
+                </a:cubicBezTo>
+                <a:cubicBezTo>
+                  <a:pt x="11723" y="1197"/>
+                  <a:pt x="11713" y="1202"/>
+                  <a:pt x="11704" y="1206"/>
+                </a:cubicBezTo>
+                <a:cubicBezTo>
+                  <a:pt x="11694" y="1210"/>
+                  <a:pt x="11684" y="1213"/>
+                  <a:pt x="11674" y="1215"/>
+                </a:cubicBezTo>
+                <a:cubicBezTo>
+                  <a:pt x="11664" y="1217"/>
+                  <a:pt x="11653" y="1218"/>
+                  <a:pt x="11643" y="1218"/>
+                </a:cubicBezTo>
+                <a:lnTo>
+                  <a:pt x="159" y="1218"/>
+                </a:lnTo>
+                <a:cubicBezTo>
+                  <a:pt x="149" y="1218"/>
+                  <a:pt x="138" y="1217"/>
+                  <a:pt x="128" y="1215"/>
+                </a:cubicBezTo>
+                <a:cubicBezTo>
+                  <a:pt x="118" y="1213"/>
+                  <a:pt x="108" y="1210"/>
+                  <a:pt x="98" y="1206"/>
+                </a:cubicBezTo>
+                <a:cubicBezTo>
+                  <a:pt x="89" y="1202"/>
+                  <a:pt x="80" y="1197"/>
+                  <a:pt x="71" y="1191"/>
+                </a:cubicBezTo>
+                <a:cubicBezTo>
+                  <a:pt x="62" y="1185"/>
+                  <a:pt x="54" y="1179"/>
+                  <a:pt x="47" y="1171"/>
+                </a:cubicBezTo>
+                <a:cubicBezTo>
+                  <a:pt x="39" y="1164"/>
+                  <a:pt x="33" y="1156"/>
+                  <a:pt x="27" y="1147"/>
+                </a:cubicBezTo>
+                <a:cubicBezTo>
+                  <a:pt x="21" y="1139"/>
+                  <a:pt x="16" y="1129"/>
+                  <a:pt x="12" y="1120"/>
+                </a:cubicBezTo>
+                <a:cubicBezTo>
+                  <a:pt x="8" y="1110"/>
+                  <a:pt x="5" y="1100"/>
+                  <a:pt x="3" y="1090"/>
+                </a:cubicBezTo>
+                <a:cubicBezTo>
+                  <a:pt x="1" y="1080"/>
+                  <a:pt x="0" y="1070"/>
+                  <a:pt x="0" y="1059"/>
                 </a:cubicBezTo>
                 <a:close/>
               </a:path>
@@ -8385,14 +6950,14 @@
       </p:sp>
       <p:sp>
         <p:nvSpPr>
-          <p:cNvPr id="126" name=""/>
+          <p:cNvPr id="91" name=""/>
           <p:cNvSpPr txBox="1"/>
           <p:nvPr/>
         </p:nvSpPr>
         <p:spPr>
           <a:xfrm>
-            <a:off x="5702040" y="4579200"/>
-            <a:ext cx="275760" cy="308160"/>
+            <a:off x="533520" y="4543560"/>
+            <a:ext cx="5252760" cy="401040"/>
           </a:xfrm>
           <a:prstGeom prst="rect">
             <a:avLst/>
@@ -8412,10 +6977,20 @@
                 <a:solidFill>
                   <a:srgbClr val="111111"/>
                 </a:solidFill>
-                <a:latin typeface="Arial"/>
-                <a:ea typeface="Arial"/>
-              </a:rPr>
-              <a:t> </a:t>
+                <a:latin typeface="NotoSansJP"/>
+                <a:ea typeface="NotoSansJP"/>
+              </a:rPr>
+              <a:t>HTML</a:t>
+            </a:r>
+            <a:r>
+              <a:rPr b="0" lang="zh-CN" sz="2170" spc="-1" strike="noStrike">
+                <a:solidFill>
+                  <a:srgbClr val="111111"/>
+                </a:solidFill>
+                <a:latin typeface="NotoSansJP"/>
+                <a:ea typeface="NotoSansJP"/>
+              </a:rPr>
+              <a:t>内に数式を含む場合は可能であれば </a:t>
             </a:r>
             <a:endParaRPr b="0" lang="en-US" sz="2170" spc="-1" strike="noStrike">
               <a:solidFill>
@@ -8428,14 +7003,14 @@
       </p:sp>
       <p:sp>
         <p:nvSpPr>
-          <p:cNvPr id="127" name=""/>
+          <p:cNvPr id="92" name=""/>
           <p:cNvSpPr txBox="1"/>
           <p:nvPr/>
         </p:nvSpPr>
         <p:spPr>
           <a:xfrm>
-            <a:off x="5873040" y="4632840"/>
-            <a:ext cx="5351400" cy="265680"/>
+            <a:off x="5847120" y="4587120"/>
+            <a:ext cx="3858120" cy="320760"/>
           </a:xfrm>
           <a:prstGeom prst="rect">
             <a:avLst/>
@@ -8455,8 +7030,8 @@
                 <a:solidFill>
                   <a:srgbClr val="111111"/>
                 </a:solidFill>
-                <a:latin typeface="Courier New"/>
-                <a:ea typeface="Courier New"/>
+                <a:latin typeface="NotoSansJP"/>
+                <a:ea typeface="NotoSansJP"/>
               </a:rPr>
               <a:t>&lt;!-- class: content-gray show-page --&gt;</a:t>
             </a:r>
@@ -8471,14 +7046,14 @@
       </p:sp>
       <p:sp>
         <p:nvSpPr>
-          <p:cNvPr id="128" name=""/>
+          <p:cNvPr id="93" name=""/>
           <p:cNvSpPr txBox="1"/>
           <p:nvPr/>
         </p:nvSpPr>
         <p:spPr>
           <a:xfrm>
-            <a:off x="533520" y="4927680"/>
-            <a:ext cx="1104120" cy="399600"/>
+            <a:off x="10000440" y="4543560"/>
+            <a:ext cx="1243080" cy="399600"/>
           </a:xfrm>
           <a:prstGeom prst="rect">
             <a:avLst/>
@@ -8494,12 +7069,22 @@
           </a:bodyPr>
           <a:p>
             <a:r>
+              <a:rPr b="0" lang="en-US" sz="2170" spc="-1" strike="noStrike">
+                <a:solidFill>
+                  <a:srgbClr val="111111"/>
+                </a:solidFill>
+                <a:latin typeface="NotoSansJP"/>
+                <a:ea typeface="NotoSansJP"/>
+              </a:rPr>
+              <a:t> </a:t>
+            </a:r>
+            <a:r>
               <a:rPr b="0" lang="zh-CN" sz="2170" spc="-1" strike="noStrike">
                 <a:solidFill>
                   <a:srgbClr val="111111"/>
                 </a:solidFill>
-                <a:latin typeface="NotoSansCJKjp"/>
-                <a:ea typeface="NotoSansCJKjp"/>
+                <a:latin typeface="NotoSansJP"/>
+                <a:ea typeface="NotoSansJP"/>
               </a:rPr>
               <a:t>のように</a:t>
             </a:r>
@@ -8514,14 +7099,14 @@
       </p:sp>
       <p:sp>
         <p:nvSpPr>
-          <p:cNvPr id="129" name=""/>
+          <p:cNvPr id="94" name=""/>
           <p:cNvSpPr txBox="1"/>
           <p:nvPr/>
         </p:nvSpPr>
         <p:spPr>
           <a:xfrm>
-            <a:off x="1638360" y="4998240"/>
-            <a:ext cx="843480" cy="308160"/>
+            <a:off x="533520" y="4952880"/>
+            <a:ext cx="7103520" cy="401040"/>
           </a:xfrm>
           <a:prstGeom prst="rect">
             <a:avLst/>
@@ -8541,20 +7126,40 @@
                 <a:solidFill>
                   <a:srgbClr val="111111"/>
                 </a:solidFill>
-                <a:latin typeface="Arial"/>
-                <a:ea typeface="Arial"/>
-              </a:rPr>
-              <a:t> </a:t>
-            </a:r>
-            <a:r>
-              <a:rPr b="1" lang="en-US" sz="2170" spc="-1" strike="noStrike">
+                <a:latin typeface="NotoSansJP"/>
+                <a:ea typeface="NotoSansJP"/>
+              </a:rPr>
+              <a:t>class </a:t>
+            </a:r>
+            <a:r>
+              <a:rPr b="0" lang="zh-CN" sz="2170" spc="-1" strike="noStrike">
                 <a:solidFill>
                   <a:srgbClr val="111111"/>
                 </a:solidFill>
-                <a:latin typeface="Arial"/>
-                <a:ea typeface="Arial"/>
-              </a:rPr>
-              <a:t>class </a:t>
+                <a:latin typeface="NotoSansJP"/>
+                <a:ea typeface="NotoSansJP"/>
+              </a:rPr>
+              <a:t>指定で</a:t>
+            </a:r>
+            <a:r>
+              <a:rPr b="0" lang="en-US" sz="2170" spc="-1" strike="noStrike">
+                <a:solidFill>
+                  <a:srgbClr val="111111"/>
+                </a:solidFill>
+                <a:latin typeface="NotoSansJP"/>
+                <a:ea typeface="NotoSansJP"/>
+              </a:rPr>
+              <a:t>HTML</a:t>
+            </a:r>
+            <a:r>
+              <a:rPr b="0" lang="zh-CN" sz="2170" spc="-1" strike="noStrike">
+                <a:solidFill>
+                  <a:srgbClr val="111111"/>
+                </a:solidFill>
+                <a:latin typeface="NotoSansJP"/>
+                <a:ea typeface="NotoSansJP"/>
+              </a:rPr>
+              <a:t>ブロックを切り替える方が安全です。</a:t>
             </a:r>
             <a:endParaRPr b="0" lang="en-US" sz="2170" spc="-1" strike="noStrike">
               <a:solidFill>
@@ -8567,14 +7172,14 @@
       </p:sp>
       <p:sp>
         <p:nvSpPr>
-          <p:cNvPr id="130" name=""/>
+          <p:cNvPr id="95" name=""/>
           <p:cNvSpPr txBox="1"/>
           <p:nvPr/>
         </p:nvSpPr>
         <p:spPr>
           <a:xfrm>
-            <a:off x="2482920" y="4927680"/>
-            <a:ext cx="828360" cy="399600"/>
+            <a:off x="533520" y="5371920"/>
+            <a:ext cx="8083800" cy="401040"/>
           </a:xfrm>
           <a:prstGeom prst="rect">
             <a:avLst/>
@@ -8590,14 +7195,54 @@
           </a:bodyPr>
           <a:p>
             <a:r>
+              <a:rPr b="0" lang="en-US" sz="2170" spc="-1" strike="noStrike">
+                <a:solidFill>
+                  <a:srgbClr val="111111"/>
+                </a:solidFill>
+                <a:latin typeface="NotoSansJP"/>
+                <a:ea typeface="NotoSansJP"/>
+              </a:rPr>
+              <a:t>(2</a:t>
+            </a:r>
+            <a:r>
               <a:rPr b="0" lang="zh-CN" sz="2170" spc="-1" strike="noStrike">
                 <a:solidFill>
                   <a:srgbClr val="111111"/>
                 </a:solidFill>
-                <a:latin typeface="NotoSansCJKjp"/>
-                <a:ea typeface="NotoSansCJKjp"/>
-              </a:rPr>
-              <a:t>指定で</a:t>
+                <a:latin typeface="NotoSansJP"/>
+                <a:ea typeface="NotoSansJP"/>
+              </a:rPr>
+              <a:t>段組みのように</a:t>
+            </a:r>
+            <a:r>
+              <a:rPr b="0" lang="en-US" sz="2170" spc="-1" strike="noStrike">
+                <a:solidFill>
+                  <a:srgbClr val="111111"/>
+                </a:solidFill>
+                <a:latin typeface="NotoSansJP"/>
+                <a:ea typeface="NotoSansJP"/>
+              </a:rPr>
+              <a:t>class</a:t>
+            </a:r>
+            <a:r>
+              <a:rPr b="0" lang="zh-CN" sz="2170" spc="-1" strike="noStrike">
+                <a:solidFill>
+                  <a:srgbClr val="111111"/>
+                </a:solidFill>
+                <a:latin typeface="NotoSansJP"/>
+                <a:ea typeface="NotoSansJP"/>
+              </a:rPr>
+              <a:t>指定では実現できないものもあります。</a:t>
+            </a:r>
+            <a:r>
+              <a:rPr b="0" lang="en-US" sz="2170" spc="-1" strike="noStrike">
+                <a:solidFill>
+                  <a:srgbClr val="111111"/>
+                </a:solidFill>
+                <a:latin typeface="NotoSansJP"/>
+                <a:ea typeface="NotoSansJP"/>
+              </a:rPr>
+              <a:t>)</a:t>
             </a:r>
             <a:endParaRPr b="0" lang="en-US" sz="2170" spc="-1" strike="noStrike">
               <a:solidFill>
@@ -8610,308 +7255,7 @@
       </p:sp>
       <p:sp>
         <p:nvSpPr>
-          <p:cNvPr id="131" name=""/>
-          <p:cNvSpPr txBox="1"/>
-          <p:nvPr/>
-        </p:nvSpPr>
-        <p:spPr>
-          <a:xfrm>
-            <a:off x="3311640" y="4998240"/>
-            <a:ext cx="765720" cy="308160"/>
-          </a:xfrm>
-          <a:prstGeom prst="rect">
-            <a:avLst/>
-          </a:prstGeom>
-          <a:noFill/>
-          <a:ln w="0">
-            <a:noFill/>
-          </a:ln>
-        </p:spPr>
-        <p:txBody>
-          <a:bodyPr wrap="none" lIns="0" rIns="0" tIns="0" bIns="0" anchor="t">
-            <a:noAutofit/>
-          </a:bodyPr>
-          <a:p>
-            <a:r>
-              <a:rPr b="1" lang="en-US" sz="2170" spc="-1" strike="noStrike">
-                <a:solidFill>
-                  <a:srgbClr val="111111"/>
-                </a:solidFill>
-                <a:latin typeface="Arial"/>
-                <a:ea typeface="Arial"/>
-              </a:rPr>
-              <a:t>HTML</a:t>
-            </a:r>
-            <a:endParaRPr b="0" lang="en-US" sz="2170" spc="-1" strike="noStrike">
-              <a:solidFill>
-                <a:srgbClr val="000000"/>
-              </a:solidFill>
-              <a:latin typeface="Times New Roman"/>
-            </a:endParaRPr>
-          </a:p>
-        </p:txBody>
-      </p:sp>
-      <p:sp>
-        <p:nvSpPr>
-          <p:cNvPr id="132" name=""/>
-          <p:cNvSpPr txBox="1"/>
-          <p:nvPr/>
-        </p:nvSpPr>
-        <p:spPr>
-          <a:xfrm>
-            <a:off x="4078800" y="4927680"/>
-            <a:ext cx="4690080" cy="399600"/>
-          </a:xfrm>
-          <a:prstGeom prst="rect">
-            <a:avLst/>
-          </a:prstGeom>
-          <a:noFill/>
-          <a:ln w="0">
-            <a:noFill/>
-          </a:ln>
-        </p:spPr>
-        <p:txBody>
-          <a:bodyPr wrap="none" lIns="0" rIns="0" tIns="0" bIns="0" anchor="t">
-            <a:noAutofit/>
-          </a:bodyPr>
-          <a:p>
-            <a:r>
-              <a:rPr b="0" lang="zh-CN" sz="2170" spc="-1" strike="noStrike">
-                <a:solidFill>
-                  <a:srgbClr val="111111"/>
-                </a:solidFill>
-                <a:latin typeface="NotoSansCJKjp"/>
-                <a:ea typeface="NotoSansCJKjp"/>
-              </a:rPr>
-              <a:t>ブロックを切り替える⽅が安全です。</a:t>
-            </a:r>
-            <a:endParaRPr b="0" lang="en-US" sz="2170" spc="-1" strike="noStrike">
-              <a:solidFill>
-                <a:srgbClr val="000000"/>
-              </a:solidFill>
-              <a:latin typeface="Times New Roman"/>
-            </a:endParaRPr>
-          </a:p>
-        </p:txBody>
-      </p:sp>
-      <p:sp>
-        <p:nvSpPr>
-          <p:cNvPr id="133" name=""/>
-          <p:cNvSpPr txBox="1"/>
-          <p:nvPr/>
-        </p:nvSpPr>
-        <p:spPr>
-          <a:xfrm>
-            <a:off x="533520" y="5407920"/>
-            <a:ext cx="275760" cy="308160"/>
-          </a:xfrm>
-          <a:prstGeom prst="rect">
-            <a:avLst/>
-          </a:prstGeom>
-          <a:noFill/>
-          <a:ln w="0">
-            <a:noFill/>
-          </a:ln>
-        </p:spPr>
-        <p:txBody>
-          <a:bodyPr wrap="none" lIns="0" rIns="0" tIns="0" bIns="0" anchor="t">
-            <a:noAutofit/>
-          </a:bodyPr>
-          <a:p>
-            <a:r>
-              <a:rPr b="0" lang="en-US" sz="2170" spc="-1" strike="noStrike">
-                <a:solidFill>
-                  <a:srgbClr val="111111"/>
-                </a:solidFill>
-                <a:latin typeface="Arial"/>
-                <a:ea typeface="Arial"/>
-              </a:rPr>
-              <a:t>(2</a:t>
-            </a:r>
-            <a:endParaRPr b="0" lang="en-US" sz="2170" spc="-1" strike="noStrike">
-              <a:solidFill>
-                <a:srgbClr val="000000"/>
-              </a:solidFill>
-              <a:latin typeface="Times New Roman"/>
-            </a:endParaRPr>
-          </a:p>
-        </p:txBody>
-      </p:sp>
-      <p:sp>
-        <p:nvSpPr>
-          <p:cNvPr id="134" name=""/>
-          <p:cNvSpPr txBox="1"/>
-          <p:nvPr/>
-        </p:nvSpPr>
-        <p:spPr>
-          <a:xfrm>
-            <a:off x="779040" y="5337360"/>
-            <a:ext cx="1931760" cy="399600"/>
-          </a:xfrm>
-          <a:prstGeom prst="rect">
-            <a:avLst/>
-          </a:prstGeom>
-          <a:noFill/>
-          <a:ln w="0">
-            <a:noFill/>
-          </a:ln>
-        </p:spPr>
-        <p:txBody>
-          <a:bodyPr wrap="none" lIns="0" rIns="0" tIns="0" bIns="0" anchor="t">
-            <a:noAutofit/>
-          </a:bodyPr>
-          <a:p>
-            <a:r>
-              <a:rPr b="0" lang="zh-CN" sz="2170" spc="-1" strike="noStrike">
-                <a:solidFill>
-                  <a:srgbClr val="111111"/>
-                </a:solidFill>
-                <a:latin typeface="NotoSansCJKjp"/>
-                <a:ea typeface="NotoSansCJKjp"/>
-              </a:rPr>
-              <a:t>段組みのように</a:t>
-            </a:r>
-            <a:endParaRPr b="0" lang="en-US" sz="2170" spc="-1" strike="noStrike">
-              <a:solidFill>
-                <a:srgbClr val="000000"/>
-              </a:solidFill>
-              <a:latin typeface="Times New Roman"/>
-            </a:endParaRPr>
-          </a:p>
-        </p:txBody>
-      </p:sp>
-      <p:sp>
-        <p:nvSpPr>
-          <p:cNvPr id="135" name=""/>
-          <p:cNvSpPr txBox="1"/>
-          <p:nvPr/>
-        </p:nvSpPr>
-        <p:spPr>
-          <a:xfrm>
-            <a:off x="2712600" y="5407920"/>
-            <a:ext cx="628560" cy="308160"/>
-          </a:xfrm>
-          <a:prstGeom prst="rect">
-            <a:avLst/>
-          </a:prstGeom>
-          <a:noFill/>
-          <a:ln w="0">
-            <a:noFill/>
-          </a:ln>
-        </p:spPr>
-        <p:txBody>
-          <a:bodyPr wrap="none" lIns="0" rIns="0" tIns="0" bIns="0" anchor="t">
-            <a:noAutofit/>
-          </a:bodyPr>
-          <a:p>
-            <a:r>
-              <a:rPr b="0" lang="en-US" sz="2170" spc="-1" strike="noStrike">
-                <a:solidFill>
-                  <a:srgbClr val="111111"/>
-                </a:solidFill>
-                <a:latin typeface="Arial"/>
-                <a:ea typeface="Arial"/>
-              </a:rPr>
-              <a:t>class</a:t>
-            </a:r>
-            <a:endParaRPr b="0" lang="en-US" sz="2170" spc="-1" strike="noStrike">
-              <a:solidFill>
-                <a:srgbClr val="000000"/>
-              </a:solidFill>
-              <a:latin typeface="Times New Roman"/>
-            </a:endParaRPr>
-          </a:p>
-        </p:txBody>
-      </p:sp>
-      <p:sp>
-        <p:nvSpPr>
-          <p:cNvPr id="136" name=""/>
-          <p:cNvSpPr txBox="1"/>
-          <p:nvPr/>
-        </p:nvSpPr>
-        <p:spPr>
-          <a:xfrm>
-            <a:off x="3341880" y="5337360"/>
-            <a:ext cx="4965840" cy="399600"/>
-          </a:xfrm>
-          <a:prstGeom prst="rect">
-            <a:avLst/>
-          </a:prstGeom>
-          <a:noFill/>
-          <a:ln w="0">
-            <a:noFill/>
-          </a:ln>
-        </p:spPr>
-        <p:txBody>
-          <a:bodyPr wrap="none" lIns="0" rIns="0" tIns="0" bIns="0" anchor="t">
-            <a:noAutofit/>
-          </a:bodyPr>
-          <a:p>
-            <a:r>
-              <a:rPr b="0" lang="zh-CN" sz="2170" spc="-1" strike="noStrike">
-                <a:solidFill>
-                  <a:srgbClr val="111111"/>
-                </a:solidFill>
-                <a:latin typeface="NotoSansCJKjp"/>
-                <a:ea typeface="NotoSansCJKjp"/>
-              </a:rPr>
-              <a:t>指定では実現できないものもあります。</a:t>
-            </a:r>
-            <a:endParaRPr b="0" lang="en-US" sz="2170" spc="-1" strike="noStrike">
-              <a:solidFill>
-                <a:srgbClr val="000000"/>
-              </a:solidFill>
-              <a:latin typeface="Times New Roman"/>
-            </a:endParaRPr>
-          </a:p>
-        </p:txBody>
-      </p:sp>
-      <p:sp>
-        <p:nvSpPr>
-          <p:cNvPr id="137" name=""/>
-          <p:cNvSpPr txBox="1"/>
-          <p:nvPr/>
-        </p:nvSpPr>
-        <p:spPr>
-          <a:xfrm>
-            <a:off x="8148240" y="5407920"/>
-            <a:ext cx="275760" cy="308160"/>
-          </a:xfrm>
-          <a:prstGeom prst="rect">
-            <a:avLst/>
-          </a:prstGeom>
-          <a:noFill/>
-          <a:ln w="0">
-            <a:noFill/>
-          </a:ln>
-        </p:spPr>
-        <p:txBody>
-          <a:bodyPr wrap="none" lIns="0" rIns="0" tIns="0" bIns="0" anchor="t">
-            <a:noAutofit/>
-          </a:bodyPr>
-          <a:p>
-            <a:r>
-              <a:rPr b="0" lang="en-US" sz="2170" spc="-1" strike="noStrike">
-                <a:solidFill>
-                  <a:srgbClr val="111111"/>
-                </a:solidFill>
-                <a:latin typeface="Arial"/>
-                <a:ea typeface="Arial"/>
-              </a:rPr>
-              <a:t>)</a:t>
-            </a:r>
-            <a:endParaRPr b="0" lang="en-US" sz="2170" spc="-1" strike="noStrike">
-              <a:solidFill>
-                <a:srgbClr val="000000"/>
-              </a:solidFill>
-              <a:latin typeface="Times New Roman"/>
-            </a:endParaRPr>
-          </a:p>
-        </p:txBody>
-      </p:sp>
-      <p:sp>
-        <p:nvSpPr>
-          <p:cNvPr id="138" name=""/>
+          <p:cNvPr id="96" name=""/>
           <p:cNvSpPr/>
           <p:nvPr/>
         </p:nvSpPr>
@@ -9049,13 +7393,13 @@
       </p:sp>
       <p:sp>
         <p:nvSpPr>
-          <p:cNvPr id="139" name=""/>
+          <p:cNvPr id="97" name=""/>
           <p:cNvSpPr txBox="1"/>
           <p:nvPr/>
         </p:nvSpPr>
         <p:spPr>
           <a:xfrm>
-            <a:off x="914400" y="351000"/>
+            <a:off x="914400" y="392400"/>
             <a:ext cx="1491120" cy="360000"/>
           </a:xfrm>
           <a:prstGeom prst="rect">
@@ -9076,8 +7420,8 @@
                 <a:solidFill>
                   <a:srgbClr val="111111"/>
                 </a:solidFill>
-                <a:latin typeface="NotoSansCJKjp"/>
-                <a:ea typeface="NotoSansCJKjp"/>
+                <a:latin typeface="NotoSansJP"/>
+                <a:ea typeface="NotoSansJP"/>
               </a:rPr>
               <a:t>数式サンプル</a:t>
             </a:r>
@@ -9092,14 +7436,14 @@
       </p:sp>
       <p:sp>
         <p:nvSpPr>
-          <p:cNvPr id="140" name=""/>
+          <p:cNvPr id="98" name=""/>
           <p:cNvSpPr txBox="1"/>
           <p:nvPr/>
         </p:nvSpPr>
         <p:spPr>
           <a:xfrm>
-            <a:off x="4078440" y="1890720"/>
-            <a:ext cx="1003320" cy="454680"/>
+            <a:off x="4048560" y="1900080"/>
+            <a:ext cx="982080" cy="454680"/>
           </a:xfrm>
           <a:prstGeom prst="rect">
             <a:avLst/>
@@ -9115,34 +7459,14 @@
           </a:bodyPr>
           <a:p>
             <a:r>
-              <a:rPr b="0" i="1" lang="en-US" sz="2630" spc="-1" strike="noStrike">
+              <a:rPr b="0" lang="en-US" sz="2630" spc="-1" strike="noStrike">
                 <a:solidFill>
                   <a:srgbClr val="111111"/>
                 </a:solidFill>
-                <a:latin typeface="KaTeX_Math"/>
-                <a:ea typeface="KaTeX_Math"/>
-              </a:rPr>
-              <a:t>F</a:t>
-            </a:r>
-            <a:r>
-              <a:rPr b="0" lang="en-US" sz="2630" spc="-1" strike="noStrike">
-                <a:solidFill>
-                  <a:srgbClr val="111111"/>
-                </a:solidFill>
-                <a:latin typeface="KaTeX_Main"/>
-                <a:ea typeface="KaTeX_Main"/>
-              </a:rPr>
-              <a:t> =</a:t>
-            </a:r>
-            <a:r>
-              <a:rPr b="0" i="1" lang="en-US" sz="2630" spc="-1" strike="noStrike">
-                <a:solidFill>
-                  <a:srgbClr val="111111"/>
-                </a:solidFill>
-                <a:latin typeface="KaTeX_Math"/>
-                <a:ea typeface="KaTeX_Math"/>
-              </a:rPr>
-              <a:t> ma</a:t>
+                <a:latin typeface="NotoSansJP"/>
+                <a:ea typeface="NotoSansJP"/>
+              </a:rPr>
+              <a:t>F = ma</a:t>
             </a:r>
             <a:endParaRPr b="0" lang="en-US" sz="2630" spc="-1" strike="noStrike">
               <a:solidFill>
@@ -9155,14 +7479,14 @@
       </p:sp>
       <p:sp>
         <p:nvSpPr>
-          <p:cNvPr id="141" name=""/>
+          <p:cNvPr id="99" name=""/>
           <p:cNvSpPr txBox="1"/>
           <p:nvPr/>
         </p:nvSpPr>
         <p:spPr>
           <a:xfrm>
-            <a:off x="11946240" y="6458400"/>
-            <a:ext cx="304560" cy="340200"/>
+            <a:off x="11946600" y="6436800"/>
+            <a:ext cx="304560" cy="416520"/>
           </a:xfrm>
           <a:prstGeom prst="rect">
             <a:avLst/>
@@ -9182,8 +7506,8 @@
                 <a:solidFill>
                   <a:srgbClr val="111111"/>
                 </a:solidFill>
-                <a:latin typeface="Arial"/>
-                <a:ea typeface="Arial"/>
+                <a:latin typeface="NotoSansJP"/>
+                <a:ea typeface="NotoSansJP"/>
               </a:rPr>
               <a:t>7</a:t>
             </a:r>
@@ -9228,7 +7552,7 @@
       </p:grpSpPr>
       <p:sp>
         <p:nvSpPr>
-          <p:cNvPr id="142" name=""/>
+          <p:cNvPr id="100" name=""/>
           <p:cNvSpPr/>
           <p:nvPr/>
         </p:nvSpPr>
@@ -9286,7 +7610,7 @@
       </p:sp>
       <p:sp>
         <p:nvSpPr>
-          <p:cNvPr id="143" name=""/>
+          <p:cNvPr id="101" name=""/>
           <p:cNvSpPr/>
           <p:nvPr/>
         </p:nvSpPr>
@@ -9344,7 +7668,7 @@
       </p:sp>
       <p:sp>
         <p:nvSpPr>
-          <p:cNvPr id="144" name=""/>
+          <p:cNvPr id="102" name=""/>
           <p:cNvSpPr/>
           <p:nvPr/>
         </p:nvSpPr>
@@ -9402,7 +7726,7 @@
       </p:sp>
       <p:sp>
         <p:nvSpPr>
-          <p:cNvPr id="145" name=""/>
+          <p:cNvPr id="103" name=""/>
           <p:cNvSpPr/>
           <p:nvPr/>
         </p:nvSpPr>
@@ -9618,16 +7942,39 @@
           </a:p>
         </p:txBody>
       </p:sp>
-      <p:sp>
-        <p:nvSpPr>
-          <p:cNvPr id="146" name=""/>
+      <p:pic>
+        <p:nvPicPr>
+          <p:cNvPr id="104" name="" descr=""/>
+          <p:cNvPicPr/>
+          <p:nvPr/>
+        </p:nvPicPr>
+        <p:blipFill>
+          <a:blip r:embed="rId1"/>
+          <a:stretch/>
+        </p:blipFill>
+        <p:spPr>
+          <a:xfrm>
+            <a:off x="10515600" y="38160"/>
+            <a:ext cx="1142640" cy="1142640"/>
+          </a:xfrm>
+          <a:prstGeom prst="rect">
+            <a:avLst/>
+          </a:prstGeom>
+          <a:ln w="0">
+            <a:noFill/>
+          </a:ln>
+        </p:spPr>
+      </p:pic>
+      <p:sp>
+        <p:nvSpPr>
+          <p:cNvPr id="105" name=""/>
           <p:cNvSpPr/>
           <p:nvPr/>
         </p:nvSpPr>
         <p:spPr>
           <a:xfrm>
-            <a:off x="857160" y="1581120"/>
-            <a:ext cx="86040" cy="86040"/>
+            <a:off x="809280" y="1581120"/>
+            <a:ext cx="105120" cy="105120"/>
           </a:xfrm>
           <a:custGeom>
             <a:avLst/>
@@ -9635,89 +7982,169 @@
             <a:ahLst/>
             <a:rect l="0" t="0" r="r" b="b"/>
             <a:pathLst>
-              <a:path w="239" h="239">
+              <a:path w="292" h="292">
                 <a:moveTo>
-                  <a:pt x="239" y="120"/>
+                  <a:pt x="292" y="146"/>
                 </a:moveTo>
                 <a:cubicBezTo>
-                  <a:pt x="239" y="135"/>
-                  <a:pt x="236" y="151"/>
-                  <a:pt x="230" y="165"/>
-                </a:cubicBezTo>
-                <a:cubicBezTo>
-                  <a:pt x="224" y="180"/>
-                  <a:pt x="215" y="193"/>
-                  <a:pt x="204" y="204"/>
-                </a:cubicBezTo>
-                <a:cubicBezTo>
-                  <a:pt x="193" y="215"/>
-                  <a:pt x="180" y="224"/>
-                  <a:pt x="165" y="230"/>
-                </a:cubicBezTo>
-                <a:cubicBezTo>
-                  <a:pt x="151" y="236"/>
-                  <a:pt x="136" y="239"/>
-                  <a:pt x="120" y="239"/>
-                </a:cubicBezTo>
-                <a:cubicBezTo>
-                  <a:pt x="103" y="239"/>
-                  <a:pt x="88" y="236"/>
-                  <a:pt x="73" y="230"/>
-                </a:cubicBezTo>
-                <a:cubicBezTo>
-                  <a:pt x="59" y="224"/>
-                  <a:pt x="46" y="215"/>
-                  <a:pt x="35" y="204"/>
-                </a:cubicBezTo>
-                <a:cubicBezTo>
-                  <a:pt x="23" y="193"/>
-                  <a:pt x="15" y="180"/>
-                  <a:pt x="9" y="165"/>
-                </a:cubicBezTo>
-                <a:cubicBezTo>
-                  <a:pt x="3" y="151"/>
-                  <a:pt x="0" y="135"/>
-                  <a:pt x="0" y="120"/>
-                </a:cubicBezTo>
-                <a:cubicBezTo>
-                  <a:pt x="0" y="104"/>
-                  <a:pt x="3" y="89"/>
-                  <a:pt x="9" y="74"/>
-                </a:cubicBezTo>
-                <a:cubicBezTo>
-                  <a:pt x="15" y="59"/>
-                  <a:pt x="23" y="47"/>
-                  <a:pt x="35" y="35"/>
-                </a:cubicBezTo>
-                <a:cubicBezTo>
-                  <a:pt x="46" y="24"/>
-                  <a:pt x="59" y="16"/>
-                  <a:pt x="73" y="9"/>
-                </a:cubicBezTo>
-                <a:cubicBezTo>
-                  <a:pt x="88" y="3"/>
-                  <a:pt x="103" y="0"/>
-                  <a:pt x="120" y="0"/>
-                </a:cubicBezTo>
-                <a:cubicBezTo>
+                  <a:pt x="292" y="156"/>
+                  <a:pt x="292" y="165"/>
+                  <a:pt x="290" y="174"/>
+                </a:cubicBezTo>
+                <a:cubicBezTo>
+                  <a:pt x="288" y="184"/>
+                  <a:pt x="285" y="193"/>
+                  <a:pt x="281" y="202"/>
+                </a:cubicBezTo>
+                <a:cubicBezTo>
+                  <a:pt x="278" y="211"/>
+                  <a:pt x="273" y="219"/>
+                  <a:pt x="268" y="227"/>
+                </a:cubicBezTo>
+                <a:cubicBezTo>
+                  <a:pt x="263" y="235"/>
+                  <a:pt x="257" y="242"/>
+                  <a:pt x="250" y="249"/>
+                </a:cubicBezTo>
+                <a:cubicBezTo>
+                  <a:pt x="243" y="256"/>
+                  <a:pt x="236" y="262"/>
+                  <a:pt x="228" y="267"/>
+                </a:cubicBezTo>
+                <a:cubicBezTo>
+                  <a:pt x="219" y="272"/>
+                  <a:pt x="210" y="277"/>
+                  <a:pt x="202" y="281"/>
+                </a:cubicBezTo>
+                <a:cubicBezTo>
+                  <a:pt x="193" y="284"/>
+                  <a:pt x="184" y="287"/>
+                  <a:pt x="174" y="289"/>
+                </a:cubicBezTo>
+                <a:cubicBezTo>
+                  <a:pt x="165" y="291"/>
+                  <a:pt x="156" y="292"/>
+                  <a:pt x="146" y="292"/>
+                </a:cubicBezTo>
+                <a:cubicBezTo>
+                  <a:pt x="136" y="292"/>
+                  <a:pt x="127" y="291"/>
+                  <a:pt x="118" y="289"/>
+                </a:cubicBezTo>
+                <a:cubicBezTo>
+                  <a:pt x="108" y="287"/>
+                  <a:pt x="99" y="284"/>
+                  <a:pt x="90" y="281"/>
+                </a:cubicBezTo>
+                <a:cubicBezTo>
+                  <a:pt x="81" y="277"/>
+                  <a:pt x="73" y="272"/>
+                  <a:pt x="65" y="267"/>
+                </a:cubicBezTo>
+                <a:cubicBezTo>
+                  <a:pt x="57" y="262"/>
+                  <a:pt x="50" y="256"/>
+                  <a:pt x="43" y="249"/>
+                </a:cubicBezTo>
+                <a:cubicBezTo>
+                  <a:pt x="36" y="242"/>
+                  <a:pt x="30" y="235"/>
+                  <a:pt x="25" y="227"/>
+                </a:cubicBezTo>
+                <a:cubicBezTo>
+                  <a:pt x="20" y="219"/>
+                  <a:pt x="15" y="211"/>
+                  <a:pt x="12" y="202"/>
+                </a:cubicBezTo>
+                <a:cubicBezTo>
+                  <a:pt x="8" y="193"/>
+                  <a:pt x="5" y="184"/>
+                  <a:pt x="3" y="174"/>
+                </a:cubicBezTo>
+                <a:cubicBezTo>
+                  <a:pt x="1" y="165"/>
+                  <a:pt x="0" y="156"/>
+                  <a:pt x="0" y="146"/>
+                </a:cubicBezTo>
+                <a:cubicBezTo>
+                  <a:pt x="0" y="137"/>
+                  <a:pt x="1" y="127"/>
+                  <a:pt x="3" y="117"/>
+                </a:cubicBezTo>
+                <a:cubicBezTo>
+                  <a:pt x="5" y="107"/>
+                  <a:pt x="8" y="98"/>
+                  <a:pt x="12" y="89"/>
+                </a:cubicBezTo>
+                <a:cubicBezTo>
+                  <a:pt x="15" y="81"/>
+                  <a:pt x="20" y="72"/>
+                  <a:pt x="25" y="64"/>
+                </a:cubicBezTo>
+                <a:cubicBezTo>
+                  <a:pt x="30" y="56"/>
+                  <a:pt x="36" y="49"/>
+                  <a:pt x="43" y="42"/>
+                </a:cubicBezTo>
+                <a:cubicBezTo>
+                  <a:pt x="50" y="35"/>
+                  <a:pt x="57" y="29"/>
+                  <a:pt x="65" y="24"/>
+                </a:cubicBezTo>
+                <a:cubicBezTo>
+                  <a:pt x="73" y="19"/>
+                  <a:pt x="81" y="14"/>
+                  <a:pt x="90" y="11"/>
+                </a:cubicBezTo>
+                <a:cubicBezTo>
+                  <a:pt x="99" y="7"/>
+                  <a:pt x="108" y="4"/>
+                  <a:pt x="118" y="2"/>
+                </a:cubicBezTo>
+                <a:cubicBezTo>
+                  <a:pt x="127" y="1"/>
                   <a:pt x="136" y="0"/>
-                  <a:pt x="151" y="3"/>
-                  <a:pt x="165" y="9"/>
-                </a:cubicBezTo>
-                <a:cubicBezTo>
-                  <a:pt x="180" y="16"/>
-                  <a:pt x="193" y="24"/>
-                  <a:pt x="204" y="35"/>
-                </a:cubicBezTo>
-                <a:cubicBezTo>
-                  <a:pt x="215" y="47"/>
-                  <a:pt x="224" y="59"/>
-                  <a:pt x="230" y="74"/>
-                </a:cubicBezTo>
-                <a:cubicBezTo>
-                  <a:pt x="236" y="89"/>
-                  <a:pt x="239" y="104"/>
-                  <a:pt x="239" y="120"/>
+                  <a:pt x="146" y="0"/>
+                </a:cubicBezTo>
+                <a:cubicBezTo>
+                  <a:pt x="156" y="0"/>
+                  <a:pt x="165" y="1"/>
+                  <a:pt x="174" y="2"/>
+                </a:cubicBezTo>
+                <a:cubicBezTo>
+                  <a:pt x="184" y="4"/>
+                  <a:pt x="193" y="7"/>
+                  <a:pt x="202" y="11"/>
+                </a:cubicBezTo>
+                <a:cubicBezTo>
+                  <a:pt x="210" y="14"/>
+                  <a:pt x="219" y="19"/>
+                  <a:pt x="228" y="24"/>
+                </a:cubicBezTo>
+                <a:cubicBezTo>
+                  <a:pt x="236" y="29"/>
+                  <a:pt x="243" y="35"/>
+                  <a:pt x="250" y="42"/>
+                </a:cubicBezTo>
+                <a:cubicBezTo>
+                  <a:pt x="257" y="49"/>
+                  <a:pt x="263" y="56"/>
+                  <a:pt x="268" y="64"/>
+                </a:cubicBezTo>
+                <a:cubicBezTo>
+                  <a:pt x="273" y="72"/>
+                  <a:pt x="278" y="81"/>
+                  <a:pt x="281" y="89"/>
+                </a:cubicBezTo>
+                <a:cubicBezTo>
+                  <a:pt x="285" y="98"/>
+                  <a:pt x="288" y="107"/>
+                  <a:pt x="290" y="117"/>
+                </a:cubicBezTo>
+                <a:cubicBezTo>
+                  <a:pt x="292" y="127"/>
+                  <a:pt x="292" y="137"/>
+                  <a:pt x="292" y="146"/>
                 </a:cubicBezTo>
                 <a:close/>
               </a:path>
@@ -9746,13 +8173,13 @@
       </p:sp>
       <p:sp>
         <p:nvSpPr>
-          <p:cNvPr id="147" name=""/>
+          <p:cNvPr id="106" name=""/>
           <p:cNvSpPr txBox="1"/>
           <p:nvPr/>
         </p:nvSpPr>
         <p:spPr>
           <a:xfrm>
-            <a:off x="533520" y="870120"/>
+            <a:off x="533520" y="923760"/>
             <a:ext cx="1931760" cy="399600"/>
           </a:xfrm>
           <a:prstGeom prst="rect">
@@ -9773,8 +8200,8 @@
                 <a:solidFill>
                   <a:srgbClr val="111111"/>
                 </a:solidFill>
-                <a:latin typeface="NotoSansCJKjp"/>
-                <a:ea typeface="NotoSansCJKjp"/>
+                <a:latin typeface="NotoSansJP"/>
+                <a:ea typeface="NotoSansJP"/>
               </a:rPr>
               <a:t>左カラムの内容</a:t>
             </a:r>
@@ -9789,57 +8216,14 @@
       </p:sp>
       <p:sp>
         <p:nvSpPr>
-          <p:cNvPr id="148" name=""/>
-          <p:cNvSpPr txBox="1"/>
-          <p:nvPr/>
-        </p:nvSpPr>
-        <p:spPr>
-          <a:xfrm>
-            <a:off x="1085760" y="1384560"/>
-            <a:ext cx="1104120" cy="399600"/>
-          </a:xfrm>
-          <a:prstGeom prst="rect">
-            <a:avLst/>
-          </a:prstGeom>
-          <a:noFill/>
-          <a:ln w="0">
-            <a:noFill/>
-          </a:ln>
-        </p:spPr>
-        <p:txBody>
-          <a:bodyPr wrap="none" lIns="0" rIns="0" tIns="0" bIns="0" anchor="t">
-            <a:noAutofit/>
-          </a:bodyPr>
-          <a:p>
-            <a:r>
-              <a:rPr b="0" lang="zh-CN" sz="2170" spc="-1" strike="noStrike">
-                <a:solidFill>
-                  <a:srgbClr val="111111"/>
-                </a:solidFill>
-                <a:latin typeface="NotoSansCJKjp"/>
-                <a:ea typeface="NotoSansCJKjp"/>
-              </a:rPr>
-              <a:t>ポイント</a:t>
-            </a:r>
-            <a:endParaRPr b="0" lang="en-US" sz="2170" spc="-1" strike="noStrike">
-              <a:solidFill>
-                <a:srgbClr val="000000"/>
-              </a:solidFill>
-              <a:latin typeface="Times New Roman"/>
-            </a:endParaRPr>
-          </a:p>
-        </p:txBody>
-      </p:sp>
-      <p:sp>
-        <p:nvSpPr>
-          <p:cNvPr id="149" name=""/>
+          <p:cNvPr id="107" name=""/>
           <p:cNvSpPr/>
           <p:nvPr/>
         </p:nvSpPr>
         <p:spPr>
           <a:xfrm>
-            <a:off x="857160" y="2066760"/>
-            <a:ext cx="86040" cy="86040"/>
+            <a:off x="809280" y="2066760"/>
+            <a:ext cx="105120" cy="105120"/>
           </a:xfrm>
           <a:custGeom>
             <a:avLst/>
@@ -9847,89 +8231,169 @@
             <a:ahLst/>
             <a:rect l="0" t="0" r="r" b="b"/>
             <a:pathLst>
-              <a:path w="239" h="239">
+              <a:path w="292" h="292">
                 <a:moveTo>
-                  <a:pt x="239" y="120"/>
+                  <a:pt x="292" y="145"/>
                 </a:moveTo>
                 <a:cubicBezTo>
-                  <a:pt x="239" y="136"/>
-                  <a:pt x="236" y="151"/>
-                  <a:pt x="230" y="166"/>
-                </a:cubicBezTo>
-                <a:cubicBezTo>
-                  <a:pt x="224" y="180"/>
-                  <a:pt x="215" y="193"/>
-                  <a:pt x="204" y="204"/>
-                </a:cubicBezTo>
-                <a:cubicBezTo>
-                  <a:pt x="193" y="215"/>
-                  <a:pt x="180" y="224"/>
-                  <a:pt x="165" y="230"/>
-                </a:cubicBezTo>
-                <a:cubicBezTo>
-                  <a:pt x="151" y="236"/>
-                  <a:pt x="136" y="239"/>
-                  <a:pt x="120" y="239"/>
-                </a:cubicBezTo>
-                <a:cubicBezTo>
-                  <a:pt x="103" y="239"/>
-                  <a:pt x="88" y="236"/>
-                  <a:pt x="73" y="230"/>
-                </a:cubicBezTo>
-                <a:cubicBezTo>
-                  <a:pt x="59" y="224"/>
-                  <a:pt x="46" y="215"/>
-                  <a:pt x="35" y="204"/>
-                </a:cubicBezTo>
-                <a:cubicBezTo>
-                  <a:pt x="23" y="193"/>
-                  <a:pt x="15" y="180"/>
-                  <a:pt x="9" y="166"/>
-                </a:cubicBezTo>
-                <a:cubicBezTo>
-                  <a:pt x="3" y="151"/>
+                  <a:pt x="292" y="155"/>
+                  <a:pt x="292" y="164"/>
+                  <a:pt x="290" y="174"/>
+                </a:cubicBezTo>
+                <a:cubicBezTo>
+                  <a:pt x="288" y="183"/>
+                  <a:pt x="285" y="192"/>
+                  <a:pt x="281" y="201"/>
+                </a:cubicBezTo>
+                <a:cubicBezTo>
+                  <a:pt x="278" y="210"/>
+                  <a:pt x="273" y="218"/>
+                  <a:pt x="268" y="227"/>
+                </a:cubicBezTo>
+                <a:cubicBezTo>
+                  <a:pt x="263" y="235"/>
+                  <a:pt x="257" y="243"/>
+                  <a:pt x="250" y="249"/>
+                </a:cubicBezTo>
+                <a:cubicBezTo>
+                  <a:pt x="243" y="256"/>
+                  <a:pt x="236" y="262"/>
+                  <a:pt x="228" y="267"/>
+                </a:cubicBezTo>
+                <a:cubicBezTo>
+                  <a:pt x="219" y="273"/>
+                  <a:pt x="210" y="277"/>
+                  <a:pt x="202" y="281"/>
+                </a:cubicBezTo>
+                <a:cubicBezTo>
+                  <a:pt x="193" y="285"/>
+                  <a:pt x="184" y="287"/>
+                  <a:pt x="174" y="289"/>
+                </a:cubicBezTo>
+                <a:cubicBezTo>
+                  <a:pt x="165" y="291"/>
+                  <a:pt x="156" y="292"/>
+                  <a:pt x="146" y="292"/>
+                </a:cubicBezTo>
+                <a:cubicBezTo>
+                  <a:pt x="136" y="292"/>
+                  <a:pt x="127" y="291"/>
+                  <a:pt x="118" y="289"/>
+                </a:cubicBezTo>
+                <a:cubicBezTo>
+                  <a:pt x="108" y="287"/>
+                  <a:pt x="99" y="285"/>
+                  <a:pt x="90" y="281"/>
+                </a:cubicBezTo>
+                <a:cubicBezTo>
+                  <a:pt x="81" y="277"/>
+                  <a:pt x="73" y="273"/>
+                  <a:pt x="65" y="267"/>
+                </a:cubicBezTo>
+                <a:cubicBezTo>
+                  <a:pt x="57" y="262"/>
+                  <a:pt x="50" y="256"/>
+                  <a:pt x="43" y="249"/>
+                </a:cubicBezTo>
+                <a:cubicBezTo>
+                  <a:pt x="36" y="243"/>
+                  <a:pt x="30" y="235"/>
+                  <a:pt x="25" y="227"/>
+                </a:cubicBezTo>
+                <a:cubicBezTo>
+                  <a:pt x="20" y="218"/>
+                  <a:pt x="15" y="210"/>
+                  <a:pt x="12" y="201"/>
+                </a:cubicBezTo>
+                <a:cubicBezTo>
+                  <a:pt x="8" y="192"/>
+                  <a:pt x="5" y="183"/>
+                  <a:pt x="3" y="174"/>
+                </a:cubicBezTo>
+                <a:cubicBezTo>
+                  <a:pt x="1" y="164"/>
+                  <a:pt x="0" y="155"/>
+                  <a:pt x="0" y="145"/>
+                </a:cubicBezTo>
+                <a:cubicBezTo>
                   <a:pt x="0" y="136"/>
-                  <a:pt x="0" y="120"/>
-                </a:cubicBezTo>
-                <a:cubicBezTo>
-                  <a:pt x="0" y="104"/>
-                  <a:pt x="3" y="88"/>
-                  <a:pt x="9" y="73"/>
-                </a:cubicBezTo>
-                <a:cubicBezTo>
-                  <a:pt x="15" y="59"/>
-                  <a:pt x="23" y="46"/>
-                  <a:pt x="35" y="35"/>
-                </a:cubicBezTo>
-                <a:cubicBezTo>
-                  <a:pt x="46" y="24"/>
-                  <a:pt x="59" y="15"/>
-                  <a:pt x="73" y="9"/>
-                </a:cubicBezTo>
-                <a:cubicBezTo>
-                  <a:pt x="88" y="3"/>
-                  <a:pt x="103" y="0"/>
-                  <a:pt x="120" y="0"/>
-                </a:cubicBezTo>
-                <a:cubicBezTo>
+                  <a:pt x="1" y="126"/>
+                  <a:pt x="3" y="117"/>
+                </a:cubicBezTo>
+                <a:cubicBezTo>
+                  <a:pt x="5" y="108"/>
+                  <a:pt x="8" y="99"/>
+                  <a:pt x="12" y="90"/>
+                </a:cubicBezTo>
+                <a:cubicBezTo>
+                  <a:pt x="15" y="81"/>
+                  <a:pt x="20" y="73"/>
+                  <a:pt x="25" y="65"/>
+                </a:cubicBezTo>
+                <a:cubicBezTo>
+                  <a:pt x="30" y="57"/>
+                  <a:pt x="36" y="49"/>
+                  <a:pt x="43" y="43"/>
+                </a:cubicBezTo>
+                <a:cubicBezTo>
+                  <a:pt x="50" y="36"/>
+                  <a:pt x="57" y="30"/>
+                  <a:pt x="65" y="24"/>
+                </a:cubicBezTo>
+                <a:cubicBezTo>
+                  <a:pt x="73" y="19"/>
+                  <a:pt x="81" y="15"/>
+                  <a:pt x="90" y="11"/>
+                </a:cubicBezTo>
+                <a:cubicBezTo>
+                  <a:pt x="99" y="7"/>
+                  <a:pt x="108" y="5"/>
+                  <a:pt x="118" y="3"/>
+                </a:cubicBezTo>
+                <a:cubicBezTo>
+                  <a:pt x="127" y="1"/>
                   <a:pt x="136" y="0"/>
-                  <a:pt x="151" y="3"/>
-                  <a:pt x="165" y="9"/>
-                </a:cubicBezTo>
-                <a:cubicBezTo>
-                  <a:pt x="180" y="15"/>
-                  <a:pt x="193" y="24"/>
-                  <a:pt x="204" y="35"/>
-                </a:cubicBezTo>
-                <a:cubicBezTo>
-                  <a:pt x="215" y="46"/>
-                  <a:pt x="224" y="59"/>
-                  <a:pt x="230" y="73"/>
-                </a:cubicBezTo>
-                <a:cubicBezTo>
-                  <a:pt x="236" y="88"/>
-                  <a:pt x="239" y="104"/>
-                  <a:pt x="239" y="120"/>
+                  <a:pt x="146" y="0"/>
+                </a:cubicBezTo>
+                <a:cubicBezTo>
+                  <a:pt x="156" y="0"/>
+                  <a:pt x="165" y="1"/>
+                  <a:pt x="174" y="3"/>
+                </a:cubicBezTo>
+                <a:cubicBezTo>
+                  <a:pt x="184" y="5"/>
+                  <a:pt x="193" y="7"/>
+                  <a:pt x="202" y="11"/>
+                </a:cubicBezTo>
+                <a:cubicBezTo>
+                  <a:pt x="210" y="15"/>
+                  <a:pt x="219" y="19"/>
+                  <a:pt x="228" y="24"/>
+                </a:cubicBezTo>
+                <a:cubicBezTo>
+                  <a:pt x="236" y="30"/>
+                  <a:pt x="243" y="36"/>
+                  <a:pt x="250" y="43"/>
+                </a:cubicBezTo>
+                <a:cubicBezTo>
+                  <a:pt x="257" y="49"/>
+                  <a:pt x="263" y="57"/>
+                  <a:pt x="268" y="65"/>
+                </a:cubicBezTo>
+                <a:cubicBezTo>
+                  <a:pt x="273" y="73"/>
+                  <a:pt x="278" y="81"/>
+                  <a:pt x="281" y="90"/>
+                </a:cubicBezTo>
+                <a:cubicBezTo>
+                  <a:pt x="285" y="99"/>
+                  <a:pt x="288" y="108"/>
+                  <a:pt x="290" y="117"/>
+                </a:cubicBezTo>
+                <a:cubicBezTo>
+                  <a:pt x="292" y="126"/>
+                  <a:pt x="292" y="136"/>
+                  <a:pt x="292" y="145"/>
                 </a:cubicBezTo>
                 <a:close/>
               </a:path>
@@ -9958,14 +8422,14 @@
       </p:sp>
       <p:sp>
         <p:nvSpPr>
-          <p:cNvPr id="150" name=""/>
+          <p:cNvPr id="108" name=""/>
           <p:cNvSpPr txBox="1"/>
           <p:nvPr/>
         </p:nvSpPr>
         <p:spPr>
           <a:xfrm>
-            <a:off x="2190600" y="1455120"/>
-            <a:ext cx="275760" cy="308160"/>
+            <a:off x="1085760" y="1438200"/>
+            <a:ext cx="1342080" cy="401040"/>
           </a:xfrm>
           <a:prstGeom prst="rect">
             <a:avLst/>
@@ -9981,12 +8445,22 @@
           </a:bodyPr>
           <a:p>
             <a:r>
+              <a:rPr b="0" lang="zh-CN" sz="2170" spc="-1" strike="noStrike">
+                <a:solidFill>
+                  <a:srgbClr val="111111"/>
+                </a:solidFill>
+                <a:latin typeface="NotoSansJP"/>
+                <a:ea typeface="NotoSansJP"/>
+              </a:rPr>
+              <a:t>ポイント</a:t>
+            </a:r>
+            <a:r>
               <a:rPr b="0" lang="en-US" sz="2170" spc="-1" strike="noStrike">
                 <a:solidFill>
                   <a:srgbClr val="111111"/>
                 </a:solidFill>
-                <a:latin typeface="Arial"/>
-                <a:ea typeface="Arial"/>
+                <a:latin typeface="NotoSansJP"/>
+                <a:ea typeface="NotoSansJP"/>
               </a:rPr>
               <a:t>A</a:t>
             </a:r>
@@ -10001,14 +8475,14 @@
       </p:sp>
       <p:sp>
         <p:nvSpPr>
-          <p:cNvPr id="151" name=""/>
+          <p:cNvPr id="109" name=""/>
           <p:cNvSpPr txBox="1"/>
           <p:nvPr/>
         </p:nvSpPr>
         <p:spPr>
           <a:xfrm>
-            <a:off x="1085760" y="1870200"/>
-            <a:ext cx="1104120" cy="399600"/>
+            <a:off x="1085760" y="1924200"/>
+            <a:ext cx="1351440" cy="401040"/>
           </a:xfrm>
           <a:prstGeom prst="rect">
             <a:avLst/>
@@ -10028,11 +8502,21 @@
                 <a:solidFill>
                   <a:srgbClr val="111111"/>
                 </a:solidFill>
-                <a:latin typeface="NotoSansCJKjp"/>
-                <a:ea typeface="NotoSansCJKjp"/>
+                <a:latin typeface="NotoSansJP"/>
+                <a:ea typeface="NotoSansJP"/>
               </a:rPr>
               <a:t>ポイント</a:t>
             </a:r>
+            <a:r>
+              <a:rPr b="0" lang="en-US" sz="2170" spc="-1" strike="noStrike">
+                <a:solidFill>
+                  <a:srgbClr val="111111"/>
+                </a:solidFill>
+                <a:latin typeface="NotoSansJP"/>
+                <a:ea typeface="NotoSansJP"/>
+              </a:rPr>
+              <a:t>B</a:t>
+            </a:r>
             <a:endParaRPr b="0" lang="en-US" sz="2170" spc="-1" strike="noStrike">
               <a:solidFill>
                 <a:srgbClr val="000000"/>
@@ -10044,57 +8528,14 @@
       </p:sp>
       <p:sp>
         <p:nvSpPr>
-          <p:cNvPr id="152" name=""/>
-          <p:cNvSpPr txBox="1"/>
-          <p:nvPr/>
-        </p:nvSpPr>
-        <p:spPr>
-          <a:xfrm>
-            <a:off x="2190600" y="1940760"/>
-            <a:ext cx="275760" cy="308160"/>
-          </a:xfrm>
-          <a:prstGeom prst="rect">
-            <a:avLst/>
-          </a:prstGeom>
-          <a:noFill/>
-          <a:ln w="0">
-            <a:noFill/>
-          </a:ln>
-        </p:spPr>
-        <p:txBody>
-          <a:bodyPr wrap="none" lIns="0" rIns="0" tIns="0" bIns="0" anchor="t">
-            <a:noAutofit/>
-          </a:bodyPr>
-          <a:p>
-            <a:r>
-              <a:rPr b="0" lang="en-US" sz="2170" spc="-1" strike="noStrike">
-                <a:solidFill>
-                  <a:srgbClr val="111111"/>
-                </a:solidFill>
-                <a:latin typeface="Arial"/>
-                <a:ea typeface="Arial"/>
-              </a:rPr>
-              <a:t>B</a:t>
-            </a:r>
-            <a:endParaRPr b="0" lang="en-US" sz="2170" spc="-1" strike="noStrike">
-              <a:solidFill>
-                <a:srgbClr val="000000"/>
-              </a:solidFill>
-              <a:latin typeface="Times New Roman"/>
-            </a:endParaRPr>
-          </a:p>
-        </p:txBody>
-      </p:sp>
-      <p:sp>
-        <p:nvSpPr>
-          <p:cNvPr id="153" name=""/>
+          <p:cNvPr id="110" name=""/>
           <p:cNvSpPr/>
           <p:nvPr/>
         </p:nvSpPr>
         <p:spPr>
           <a:xfrm>
-            <a:off x="6553080" y="1581120"/>
-            <a:ext cx="86040" cy="86040"/>
+            <a:off x="6505560" y="1581120"/>
+            <a:ext cx="105120" cy="105120"/>
           </a:xfrm>
           <a:custGeom>
             <a:avLst/>
@@ -10102,89 +8543,169 @@
             <a:ahLst/>
             <a:rect l="0" t="0" r="r" b="b"/>
             <a:pathLst>
-              <a:path w="239" h="239">
+              <a:path w="292" h="292">
                 <a:moveTo>
-                  <a:pt x="239" y="120"/>
+                  <a:pt x="292" y="146"/>
                 </a:moveTo>
                 <a:cubicBezTo>
-                  <a:pt x="239" y="135"/>
-                  <a:pt x="236" y="151"/>
-                  <a:pt x="230" y="165"/>
-                </a:cubicBezTo>
-                <a:cubicBezTo>
-                  <a:pt x="224" y="180"/>
-                  <a:pt x="215" y="193"/>
-                  <a:pt x="204" y="204"/>
-                </a:cubicBezTo>
-                <a:cubicBezTo>
-                  <a:pt x="193" y="215"/>
-                  <a:pt x="180" y="224"/>
-                  <a:pt x="165" y="230"/>
-                </a:cubicBezTo>
-                <a:cubicBezTo>
-                  <a:pt x="151" y="236"/>
-                  <a:pt x="136" y="239"/>
-                  <a:pt x="120" y="239"/>
-                </a:cubicBezTo>
-                <a:cubicBezTo>
-                  <a:pt x="104" y="239"/>
-                  <a:pt x="89" y="236"/>
-                  <a:pt x="74" y="230"/>
-                </a:cubicBezTo>
-                <a:cubicBezTo>
-                  <a:pt x="60" y="224"/>
-                  <a:pt x="47" y="215"/>
-                  <a:pt x="36" y="204"/>
-                </a:cubicBezTo>
-                <a:cubicBezTo>
-                  <a:pt x="25" y="193"/>
-                  <a:pt x="16" y="180"/>
-                  <a:pt x="10" y="165"/>
-                </a:cubicBezTo>
-                <a:cubicBezTo>
-                  <a:pt x="3" y="151"/>
-                  <a:pt x="0" y="135"/>
-                  <a:pt x="0" y="120"/>
-                </a:cubicBezTo>
-                <a:cubicBezTo>
-                  <a:pt x="0" y="104"/>
-                  <a:pt x="3" y="89"/>
-                  <a:pt x="10" y="74"/>
-                </a:cubicBezTo>
-                <a:cubicBezTo>
-                  <a:pt x="16" y="59"/>
-                  <a:pt x="25" y="47"/>
-                  <a:pt x="36" y="35"/>
-                </a:cubicBezTo>
-                <a:cubicBezTo>
-                  <a:pt x="47" y="24"/>
-                  <a:pt x="60" y="16"/>
-                  <a:pt x="74" y="9"/>
-                </a:cubicBezTo>
-                <a:cubicBezTo>
-                  <a:pt x="89" y="3"/>
-                  <a:pt x="104" y="0"/>
-                  <a:pt x="120" y="0"/>
-                </a:cubicBezTo>
-                <a:cubicBezTo>
-                  <a:pt x="136" y="0"/>
-                  <a:pt x="151" y="3"/>
-                  <a:pt x="165" y="9"/>
-                </a:cubicBezTo>
-                <a:cubicBezTo>
-                  <a:pt x="180" y="16"/>
-                  <a:pt x="193" y="24"/>
-                  <a:pt x="204" y="35"/>
-                </a:cubicBezTo>
-                <a:cubicBezTo>
-                  <a:pt x="215" y="47"/>
-                  <a:pt x="224" y="59"/>
-                  <a:pt x="230" y="74"/>
-                </a:cubicBezTo>
-                <a:cubicBezTo>
-                  <a:pt x="236" y="89"/>
-                  <a:pt x="239" y="104"/>
-                  <a:pt x="239" y="120"/>
+                  <a:pt x="292" y="156"/>
+                  <a:pt x="291" y="165"/>
+                  <a:pt x="289" y="174"/>
+                </a:cubicBezTo>
+                <a:cubicBezTo>
+                  <a:pt x="287" y="184"/>
+                  <a:pt x="284" y="193"/>
+                  <a:pt x="281" y="202"/>
+                </a:cubicBezTo>
+                <a:cubicBezTo>
+                  <a:pt x="277" y="211"/>
+                  <a:pt x="272" y="219"/>
+                  <a:pt x="267" y="227"/>
+                </a:cubicBezTo>
+                <a:cubicBezTo>
+                  <a:pt x="262" y="235"/>
+                  <a:pt x="256" y="242"/>
+                  <a:pt x="249" y="249"/>
+                </a:cubicBezTo>
+                <a:cubicBezTo>
+                  <a:pt x="242" y="256"/>
+                  <a:pt x="235" y="262"/>
+                  <a:pt x="227" y="267"/>
+                </a:cubicBezTo>
+                <a:cubicBezTo>
+                  <a:pt x="219" y="272"/>
+                  <a:pt x="211" y="277"/>
+                  <a:pt x="202" y="281"/>
+                </a:cubicBezTo>
+                <a:cubicBezTo>
+                  <a:pt x="193" y="284"/>
+                  <a:pt x="184" y="287"/>
+                  <a:pt x="174" y="289"/>
+                </a:cubicBezTo>
+                <a:cubicBezTo>
+                  <a:pt x="165" y="291"/>
+                  <a:pt x="156" y="292"/>
+                  <a:pt x="146" y="292"/>
+                </a:cubicBezTo>
+                <a:cubicBezTo>
+                  <a:pt x="137" y="292"/>
+                  <a:pt x="127" y="291"/>
+                  <a:pt x="118" y="289"/>
+                </a:cubicBezTo>
+                <a:cubicBezTo>
+                  <a:pt x="107" y="287"/>
+                  <a:pt x="98" y="284"/>
+                  <a:pt x="89" y="281"/>
+                </a:cubicBezTo>
+                <a:cubicBezTo>
+                  <a:pt x="81" y="277"/>
+                  <a:pt x="72" y="272"/>
+                  <a:pt x="64" y="267"/>
+                </a:cubicBezTo>
+                <a:cubicBezTo>
+                  <a:pt x="56" y="262"/>
+                  <a:pt x="49" y="256"/>
+                  <a:pt x="42" y="249"/>
+                </a:cubicBezTo>
+                <a:cubicBezTo>
+                  <a:pt x="35" y="242"/>
+                  <a:pt x="29" y="235"/>
+                  <a:pt x="24" y="227"/>
+                </a:cubicBezTo>
+                <a:cubicBezTo>
+                  <a:pt x="19" y="219"/>
+                  <a:pt x="14" y="211"/>
+                  <a:pt x="11" y="202"/>
+                </a:cubicBezTo>
+                <a:cubicBezTo>
+                  <a:pt x="7" y="193"/>
+                  <a:pt x="4" y="184"/>
+                  <a:pt x="2" y="174"/>
+                </a:cubicBezTo>
+                <a:cubicBezTo>
+                  <a:pt x="0" y="165"/>
+                  <a:pt x="0" y="156"/>
+                  <a:pt x="0" y="146"/>
+                </a:cubicBezTo>
+                <a:cubicBezTo>
+                  <a:pt x="0" y="137"/>
+                  <a:pt x="0" y="127"/>
+                  <a:pt x="2" y="117"/>
+                </a:cubicBezTo>
+                <a:cubicBezTo>
+                  <a:pt x="4" y="107"/>
+                  <a:pt x="7" y="98"/>
+                  <a:pt x="11" y="89"/>
+                </a:cubicBezTo>
+                <a:cubicBezTo>
+                  <a:pt x="14" y="81"/>
+                  <a:pt x="19" y="72"/>
+                  <a:pt x="24" y="64"/>
+                </a:cubicBezTo>
+                <a:cubicBezTo>
+                  <a:pt x="29" y="56"/>
+                  <a:pt x="35" y="49"/>
+                  <a:pt x="42" y="42"/>
+                </a:cubicBezTo>
+                <a:cubicBezTo>
+                  <a:pt x="49" y="35"/>
+                  <a:pt x="56" y="29"/>
+                  <a:pt x="64" y="24"/>
+                </a:cubicBezTo>
+                <a:cubicBezTo>
+                  <a:pt x="72" y="19"/>
+                  <a:pt x="81" y="14"/>
+                  <a:pt x="89" y="11"/>
+                </a:cubicBezTo>
+                <a:cubicBezTo>
+                  <a:pt x="98" y="7"/>
+                  <a:pt x="107" y="4"/>
+                  <a:pt x="118" y="2"/>
+                </a:cubicBezTo>
+                <a:cubicBezTo>
+                  <a:pt x="127" y="1"/>
+                  <a:pt x="137" y="0"/>
+                  <a:pt x="146" y="0"/>
+                </a:cubicBezTo>
+                <a:cubicBezTo>
+                  <a:pt x="156" y="0"/>
+                  <a:pt x="165" y="1"/>
+                  <a:pt x="174" y="2"/>
+                </a:cubicBezTo>
+                <a:cubicBezTo>
+                  <a:pt x="184" y="4"/>
+                  <a:pt x="193" y="7"/>
+                  <a:pt x="202" y="11"/>
+                </a:cubicBezTo>
+                <a:cubicBezTo>
+                  <a:pt x="211" y="14"/>
+                  <a:pt x="219" y="19"/>
+                  <a:pt x="227" y="24"/>
+                </a:cubicBezTo>
+                <a:cubicBezTo>
+                  <a:pt x="235" y="29"/>
+                  <a:pt x="242" y="35"/>
+                  <a:pt x="249" y="42"/>
+                </a:cubicBezTo>
+                <a:cubicBezTo>
+                  <a:pt x="256" y="49"/>
+                  <a:pt x="262" y="56"/>
+                  <a:pt x="267" y="64"/>
+                </a:cubicBezTo>
+                <a:cubicBezTo>
+                  <a:pt x="272" y="72"/>
+                  <a:pt x="277" y="81"/>
+                  <a:pt x="281" y="89"/>
+                </a:cubicBezTo>
+                <a:cubicBezTo>
+                  <a:pt x="284" y="98"/>
+                  <a:pt x="287" y="107"/>
+                  <a:pt x="289" y="117"/>
+                </a:cubicBezTo>
+                <a:cubicBezTo>
+                  <a:pt x="291" y="127"/>
+                  <a:pt x="292" y="137"/>
+                  <a:pt x="292" y="146"/>
                 </a:cubicBezTo>
                 <a:close/>
               </a:path>
@@ -10213,13 +8734,13 @@
       </p:sp>
       <p:sp>
         <p:nvSpPr>
-          <p:cNvPr id="154" name=""/>
+          <p:cNvPr id="111" name=""/>
           <p:cNvSpPr txBox="1"/>
           <p:nvPr/>
         </p:nvSpPr>
         <p:spPr>
           <a:xfrm>
-            <a:off x="6229440" y="870120"/>
+            <a:off x="6229440" y="923760"/>
             <a:ext cx="1931760" cy="399600"/>
           </a:xfrm>
           <a:prstGeom prst="rect">
@@ -10240,8 +8761,8 @@
                 <a:solidFill>
                   <a:srgbClr val="111111"/>
                 </a:solidFill>
-                <a:latin typeface="NotoSansCJKjp"/>
-                <a:ea typeface="NotoSansCJKjp"/>
+                <a:latin typeface="NotoSansJP"/>
+                <a:ea typeface="NotoSansJP"/>
               </a:rPr>
               <a:t>右カラムの内容</a:t>
             </a:r>
@@ -10256,57 +8777,14 @@
       </p:sp>
       <p:sp>
         <p:nvSpPr>
-          <p:cNvPr id="155" name=""/>
-          <p:cNvSpPr txBox="1"/>
-          <p:nvPr/>
-        </p:nvSpPr>
-        <p:spPr>
-          <a:xfrm>
-            <a:off x="6781680" y="1384560"/>
-            <a:ext cx="1104120" cy="399600"/>
-          </a:xfrm>
-          <a:prstGeom prst="rect">
-            <a:avLst/>
-          </a:prstGeom>
-          <a:noFill/>
-          <a:ln w="0">
-            <a:noFill/>
-          </a:ln>
-        </p:spPr>
-        <p:txBody>
-          <a:bodyPr wrap="none" lIns="0" rIns="0" tIns="0" bIns="0" anchor="t">
-            <a:noAutofit/>
-          </a:bodyPr>
-          <a:p>
-            <a:r>
-              <a:rPr b="0" lang="zh-CN" sz="2170" spc="-1" strike="noStrike">
-                <a:solidFill>
-                  <a:srgbClr val="111111"/>
-                </a:solidFill>
-                <a:latin typeface="NotoSansCJKjp"/>
-                <a:ea typeface="NotoSansCJKjp"/>
-              </a:rPr>
-              <a:t>ポイント</a:t>
-            </a:r>
-            <a:endParaRPr b="0" lang="en-US" sz="2170" spc="-1" strike="noStrike">
-              <a:solidFill>
-                <a:srgbClr val="000000"/>
-              </a:solidFill>
-              <a:latin typeface="Times New Roman"/>
-            </a:endParaRPr>
-          </a:p>
-        </p:txBody>
-      </p:sp>
-      <p:sp>
-        <p:nvSpPr>
-          <p:cNvPr id="156" name=""/>
+          <p:cNvPr id="112" name=""/>
           <p:cNvSpPr/>
           <p:nvPr/>
         </p:nvSpPr>
         <p:spPr>
           <a:xfrm>
-            <a:off x="6553080" y="2066760"/>
-            <a:ext cx="86040" cy="86040"/>
+            <a:off x="6505560" y="2066760"/>
+            <a:ext cx="105120" cy="105120"/>
           </a:xfrm>
           <a:custGeom>
             <a:avLst/>
@@ -10314,89 +8792,169 @@
             <a:ahLst/>
             <a:rect l="0" t="0" r="r" b="b"/>
             <a:pathLst>
-              <a:path w="239" h="239">
+              <a:path w="292" h="292">
                 <a:moveTo>
-                  <a:pt x="239" y="120"/>
+                  <a:pt x="292" y="145"/>
                 </a:moveTo>
                 <a:cubicBezTo>
-                  <a:pt x="239" y="136"/>
-                  <a:pt x="236" y="151"/>
-                  <a:pt x="230" y="166"/>
-                </a:cubicBezTo>
-                <a:cubicBezTo>
-                  <a:pt x="224" y="180"/>
-                  <a:pt x="215" y="193"/>
-                  <a:pt x="204" y="204"/>
-                </a:cubicBezTo>
-                <a:cubicBezTo>
-                  <a:pt x="193" y="215"/>
-                  <a:pt x="180" y="224"/>
-                  <a:pt x="165" y="230"/>
-                </a:cubicBezTo>
-                <a:cubicBezTo>
-                  <a:pt x="151" y="236"/>
-                  <a:pt x="136" y="239"/>
-                  <a:pt x="120" y="239"/>
-                </a:cubicBezTo>
-                <a:cubicBezTo>
-                  <a:pt x="104" y="239"/>
-                  <a:pt x="89" y="236"/>
-                  <a:pt x="74" y="230"/>
-                </a:cubicBezTo>
-                <a:cubicBezTo>
-                  <a:pt x="60" y="224"/>
-                  <a:pt x="47" y="215"/>
-                  <a:pt x="36" y="204"/>
-                </a:cubicBezTo>
-                <a:cubicBezTo>
-                  <a:pt x="25" y="193"/>
-                  <a:pt x="16" y="180"/>
-                  <a:pt x="10" y="166"/>
-                </a:cubicBezTo>
-                <a:cubicBezTo>
-                  <a:pt x="3" y="151"/>
+                  <a:pt x="292" y="155"/>
+                  <a:pt x="291" y="164"/>
+                  <a:pt x="289" y="174"/>
+                </a:cubicBezTo>
+                <a:cubicBezTo>
+                  <a:pt x="287" y="183"/>
+                  <a:pt x="284" y="192"/>
+                  <a:pt x="281" y="201"/>
+                </a:cubicBezTo>
+                <a:cubicBezTo>
+                  <a:pt x="277" y="210"/>
+                  <a:pt x="272" y="218"/>
+                  <a:pt x="267" y="227"/>
+                </a:cubicBezTo>
+                <a:cubicBezTo>
+                  <a:pt x="262" y="235"/>
+                  <a:pt x="256" y="243"/>
+                  <a:pt x="249" y="249"/>
+                </a:cubicBezTo>
+                <a:cubicBezTo>
+                  <a:pt x="242" y="256"/>
+                  <a:pt x="235" y="262"/>
+                  <a:pt x="227" y="267"/>
+                </a:cubicBezTo>
+                <a:cubicBezTo>
+                  <a:pt x="219" y="273"/>
+                  <a:pt x="211" y="277"/>
+                  <a:pt x="202" y="281"/>
+                </a:cubicBezTo>
+                <a:cubicBezTo>
+                  <a:pt x="193" y="285"/>
+                  <a:pt x="184" y="287"/>
+                  <a:pt x="174" y="289"/>
+                </a:cubicBezTo>
+                <a:cubicBezTo>
+                  <a:pt x="165" y="291"/>
+                  <a:pt x="156" y="292"/>
+                  <a:pt x="146" y="292"/>
+                </a:cubicBezTo>
+                <a:cubicBezTo>
+                  <a:pt x="137" y="292"/>
+                  <a:pt x="127" y="291"/>
+                  <a:pt x="118" y="289"/>
+                </a:cubicBezTo>
+                <a:cubicBezTo>
+                  <a:pt x="107" y="287"/>
+                  <a:pt x="98" y="285"/>
+                  <a:pt x="89" y="281"/>
+                </a:cubicBezTo>
+                <a:cubicBezTo>
+                  <a:pt x="81" y="277"/>
+                  <a:pt x="72" y="273"/>
+                  <a:pt x="64" y="267"/>
+                </a:cubicBezTo>
+                <a:cubicBezTo>
+                  <a:pt x="56" y="262"/>
+                  <a:pt x="49" y="256"/>
+                  <a:pt x="42" y="249"/>
+                </a:cubicBezTo>
+                <a:cubicBezTo>
+                  <a:pt x="35" y="243"/>
+                  <a:pt x="29" y="235"/>
+                  <a:pt x="24" y="227"/>
+                </a:cubicBezTo>
+                <a:cubicBezTo>
+                  <a:pt x="19" y="218"/>
+                  <a:pt x="14" y="210"/>
+                  <a:pt x="11" y="201"/>
+                </a:cubicBezTo>
+                <a:cubicBezTo>
+                  <a:pt x="7" y="192"/>
+                  <a:pt x="4" y="183"/>
+                  <a:pt x="2" y="174"/>
+                </a:cubicBezTo>
+                <a:cubicBezTo>
+                  <a:pt x="0" y="164"/>
+                  <a:pt x="0" y="155"/>
+                  <a:pt x="0" y="145"/>
+                </a:cubicBezTo>
+                <a:cubicBezTo>
                   <a:pt x="0" y="136"/>
-                  <a:pt x="0" y="120"/>
-                </a:cubicBezTo>
-                <a:cubicBezTo>
-                  <a:pt x="0" y="104"/>
-                  <a:pt x="3" y="88"/>
-                  <a:pt x="10" y="73"/>
-                </a:cubicBezTo>
-                <a:cubicBezTo>
-                  <a:pt x="16" y="59"/>
-                  <a:pt x="25" y="46"/>
-                  <a:pt x="36" y="35"/>
-                </a:cubicBezTo>
-                <a:cubicBezTo>
-                  <a:pt x="47" y="24"/>
-                  <a:pt x="60" y="15"/>
-                  <a:pt x="74" y="9"/>
-                </a:cubicBezTo>
-                <a:cubicBezTo>
-                  <a:pt x="89" y="3"/>
-                  <a:pt x="104" y="0"/>
-                  <a:pt x="120" y="0"/>
-                </a:cubicBezTo>
-                <a:cubicBezTo>
-                  <a:pt x="136" y="0"/>
-                  <a:pt x="151" y="3"/>
-                  <a:pt x="165" y="9"/>
-                </a:cubicBezTo>
-                <a:cubicBezTo>
-                  <a:pt x="180" y="15"/>
-                  <a:pt x="193" y="24"/>
-                  <a:pt x="204" y="35"/>
-                </a:cubicBezTo>
-                <a:cubicBezTo>
-                  <a:pt x="215" y="46"/>
-                  <a:pt x="224" y="59"/>
-                  <a:pt x="230" y="73"/>
-                </a:cubicBezTo>
-                <a:cubicBezTo>
-                  <a:pt x="236" y="88"/>
-                  <a:pt x="239" y="104"/>
-                  <a:pt x="239" y="120"/>
+                  <a:pt x="0" y="126"/>
+                  <a:pt x="2" y="117"/>
+                </a:cubicBezTo>
+                <a:cubicBezTo>
+                  <a:pt x="4" y="108"/>
+                  <a:pt x="7" y="99"/>
+                  <a:pt x="11" y="90"/>
+                </a:cubicBezTo>
+                <a:cubicBezTo>
+                  <a:pt x="14" y="81"/>
+                  <a:pt x="19" y="73"/>
+                  <a:pt x="24" y="65"/>
+                </a:cubicBezTo>
+                <a:cubicBezTo>
+                  <a:pt x="29" y="57"/>
+                  <a:pt x="35" y="49"/>
+                  <a:pt x="42" y="43"/>
+                </a:cubicBezTo>
+                <a:cubicBezTo>
+                  <a:pt x="49" y="36"/>
+                  <a:pt x="56" y="30"/>
+                  <a:pt x="64" y="24"/>
+                </a:cubicBezTo>
+                <a:cubicBezTo>
+                  <a:pt x="72" y="19"/>
+                  <a:pt x="81" y="15"/>
+                  <a:pt x="89" y="11"/>
+                </a:cubicBezTo>
+                <a:cubicBezTo>
+                  <a:pt x="98" y="7"/>
+                  <a:pt x="107" y="5"/>
+                  <a:pt x="118" y="3"/>
+                </a:cubicBezTo>
+                <a:cubicBezTo>
+                  <a:pt x="127" y="1"/>
+                  <a:pt x="137" y="0"/>
+                  <a:pt x="146" y="0"/>
+                </a:cubicBezTo>
+                <a:cubicBezTo>
+                  <a:pt x="156" y="0"/>
+                  <a:pt x="165" y="1"/>
+                  <a:pt x="174" y="3"/>
+                </a:cubicBezTo>
+                <a:cubicBezTo>
+                  <a:pt x="184" y="5"/>
+                  <a:pt x="193" y="7"/>
+                  <a:pt x="202" y="11"/>
+                </a:cubicBezTo>
+                <a:cubicBezTo>
+                  <a:pt x="211" y="15"/>
+                  <a:pt x="219" y="19"/>
+                  <a:pt x="227" y="24"/>
+                </a:cubicBezTo>
+                <a:cubicBezTo>
+                  <a:pt x="235" y="30"/>
+                  <a:pt x="242" y="36"/>
+                  <a:pt x="249" y="43"/>
+                </a:cubicBezTo>
+                <a:cubicBezTo>
+                  <a:pt x="256" y="49"/>
+                  <a:pt x="262" y="57"/>
+                  <a:pt x="267" y="65"/>
+                </a:cubicBezTo>
+                <a:cubicBezTo>
+                  <a:pt x="272" y="73"/>
+                  <a:pt x="277" y="81"/>
+                  <a:pt x="281" y="90"/>
+                </a:cubicBezTo>
+                <a:cubicBezTo>
+                  <a:pt x="284" y="99"/>
+                  <a:pt x="287" y="108"/>
+                  <a:pt x="289" y="117"/>
+                </a:cubicBezTo>
+                <a:cubicBezTo>
+                  <a:pt x="291" y="126"/>
+                  <a:pt x="292" y="136"/>
+                  <a:pt x="292" y="145"/>
                 </a:cubicBezTo>
                 <a:close/>
               </a:path>
@@ -10425,14 +8983,14 @@
       </p:sp>
       <p:sp>
         <p:nvSpPr>
-          <p:cNvPr id="157" name=""/>
+          <p:cNvPr id="113" name=""/>
           <p:cNvSpPr txBox="1"/>
           <p:nvPr/>
         </p:nvSpPr>
         <p:spPr>
           <a:xfrm>
-            <a:off x="7886880" y="1455120"/>
-            <a:ext cx="275760" cy="308160"/>
+            <a:off x="6781680" y="1438200"/>
+            <a:ext cx="1352880" cy="401040"/>
           </a:xfrm>
           <a:prstGeom prst="rect">
             <a:avLst/>
@@ -10448,12 +9006,22 @@
           </a:bodyPr>
           <a:p>
             <a:r>
+              <a:rPr b="0" lang="zh-CN" sz="2170" spc="-1" strike="noStrike">
+                <a:solidFill>
+                  <a:srgbClr val="111111"/>
+                </a:solidFill>
+                <a:latin typeface="NotoSansJP"/>
+                <a:ea typeface="NotoSansJP"/>
+              </a:rPr>
+              <a:t>ポイント</a:t>
+            </a:r>
+            <a:r>
               <a:rPr b="0" lang="en-US" sz="2170" spc="-1" strike="noStrike">
                 <a:solidFill>
                   <a:srgbClr val="111111"/>
                 </a:solidFill>
-                <a:latin typeface="Arial"/>
-                <a:ea typeface="Arial"/>
+                <a:latin typeface="NotoSansJP"/>
+                <a:ea typeface="NotoSansJP"/>
               </a:rPr>
               <a:t>C</a:t>
             </a:r>
@@ -10468,14 +9036,14 @@
       </p:sp>
       <p:sp>
         <p:nvSpPr>
-          <p:cNvPr id="158" name=""/>
+          <p:cNvPr id="114" name=""/>
           <p:cNvSpPr txBox="1"/>
           <p:nvPr/>
         </p:nvSpPr>
         <p:spPr>
           <a:xfrm>
-            <a:off x="6781680" y="1870200"/>
-            <a:ext cx="1104120" cy="399600"/>
+            <a:off x="6781680" y="1924200"/>
+            <a:ext cx="1374120" cy="401040"/>
           </a:xfrm>
           <a:prstGeom prst="rect">
             <a:avLst/>
@@ -10495,11 +9063,21 @@
                 <a:solidFill>
                   <a:srgbClr val="111111"/>
                 </a:solidFill>
-                <a:latin typeface="NotoSansCJKjp"/>
-                <a:ea typeface="NotoSansCJKjp"/>
+                <a:latin typeface="NotoSansJP"/>
+                <a:ea typeface="NotoSansJP"/>
               </a:rPr>
               <a:t>ポイント</a:t>
             </a:r>
+            <a:r>
+              <a:rPr b="0" lang="en-US" sz="2170" spc="-1" strike="noStrike">
+                <a:solidFill>
+                  <a:srgbClr val="111111"/>
+                </a:solidFill>
+                <a:latin typeface="NotoSansJP"/>
+                <a:ea typeface="NotoSansJP"/>
+              </a:rPr>
+              <a:t>D</a:t>
+            </a:r>
             <a:endParaRPr b="0" lang="en-US" sz="2170" spc="-1" strike="noStrike">
               <a:solidFill>
                 <a:srgbClr val="000000"/>
@@ -10511,93 +9089,7 @@
       </p:sp>
       <p:sp>
         <p:nvSpPr>
-          <p:cNvPr id="159" name=""/>
-          <p:cNvSpPr txBox="1"/>
-          <p:nvPr/>
-        </p:nvSpPr>
-        <p:spPr>
-          <a:xfrm>
-            <a:off x="7886880" y="1940760"/>
-            <a:ext cx="275760" cy="308160"/>
-          </a:xfrm>
-          <a:prstGeom prst="rect">
-            <a:avLst/>
-          </a:prstGeom>
-          <a:noFill/>
-          <a:ln w="0">
-            <a:noFill/>
-          </a:ln>
-        </p:spPr>
-        <p:txBody>
-          <a:bodyPr wrap="none" lIns="0" rIns="0" tIns="0" bIns="0" anchor="t">
-            <a:noAutofit/>
-          </a:bodyPr>
-          <a:p>
-            <a:r>
-              <a:rPr b="0" lang="en-US" sz="2170" spc="-1" strike="noStrike">
-                <a:solidFill>
-                  <a:srgbClr val="111111"/>
-                </a:solidFill>
-                <a:latin typeface="Arial"/>
-                <a:ea typeface="Arial"/>
-              </a:rPr>
-              <a:t>D</a:t>
-            </a:r>
-            <a:endParaRPr b="0" lang="en-US" sz="2170" spc="-1" strike="noStrike">
-              <a:solidFill>
-                <a:srgbClr val="000000"/>
-              </a:solidFill>
-              <a:latin typeface="Times New Roman"/>
-            </a:endParaRPr>
-          </a:p>
-        </p:txBody>
-      </p:sp>
-      <p:sp>
-        <p:nvSpPr>
-          <p:cNvPr id="160" name=""/>
-          <p:cNvSpPr txBox="1"/>
-          <p:nvPr/>
-        </p:nvSpPr>
-        <p:spPr>
-          <a:xfrm>
-            <a:off x="914400" y="414000"/>
-            <a:ext cx="247320" cy="279360"/>
-          </a:xfrm>
-          <a:prstGeom prst="rect">
-            <a:avLst/>
-          </a:prstGeom>
-          <a:noFill/>
-          <a:ln w="0">
-            <a:noFill/>
-          </a:ln>
-        </p:spPr>
-        <p:txBody>
-          <a:bodyPr wrap="none" lIns="0" rIns="0" tIns="0" bIns="0" anchor="t">
-            <a:noAutofit/>
-          </a:bodyPr>
-          <a:p>
-            <a:r>
-              <a:rPr b="1" lang="en-US" sz="1950" spc="-1" strike="noStrike">
-                <a:solidFill>
-                  <a:srgbClr val="111111"/>
-                </a:solidFill>
-                <a:latin typeface="Arial"/>
-                <a:ea typeface="Arial"/>
-              </a:rPr>
-              <a:t>2</a:t>
-            </a:r>
-            <a:endParaRPr b="0" lang="en-US" sz="1950" spc="-1" strike="noStrike">
-              <a:solidFill>
-                <a:srgbClr val="000000"/>
-              </a:solidFill>
-              <a:latin typeface="Times New Roman"/>
-            </a:endParaRPr>
-          </a:p>
-        </p:txBody>
-      </p:sp>
-      <p:sp>
-        <p:nvSpPr>
-          <p:cNvPr id="161" name=""/>
+          <p:cNvPr id="115" name=""/>
           <p:cNvSpPr/>
           <p:nvPr/>
         </p:nvSpPr>
@@ -10735,14 +9227,14 @@
       </p:sp>
       <p:sp>
         <p:nvSpPr>
-          <p:cNvPr id="162" name=""/>
+          <p:cNvPr id="116" name=""/>
           <p:cNvSpPr txBox="1"/>
           <p:nvPr/>
         </p:nvSpPr>
         <p:spPr>
           <a:xfrm>
-            <a:off x="1052280" y="351000"/>
-            <a:ext cx="1739520" cy="360000"/>
+            <a:off x="914400" y="392400"/>
+            <a:ext cx="1947240" cy="361440"/>
           </a:xfrm>
           <a:prstGeom prst="rect">
             <a:avLst/>
@@ -10758,12 +9250,22 @@
           </a:bodyPr>
           <a:p>
             <a:r>
+              <a:rPr b="0" lang="en-US" sz="1950" spc="-1" strike="noStrike">
+                <a:solidFill>
+                  <a:srgbClr val="111111"/>
+                </a:solidFill>
+                <a:latin typeface="NotoSansJP"/>
+                <a:ea typeface="NotoSansJP"/>
+              </a:rPr>
+              <a:t>2</a:t>
+            </a:r>
+            <a:r>
               <a:rPr b="0" lang="zh-CN" sz="1950" spc="-1" strike="noStrike">
                 <a:solidFill>
                   <a:srgbClr val="111111"/>
                 </a:solidFill>
-                <a:latin typeface="NotoSansCJKjp"/>
-                <a:ea typeface="NotoSansCJKjp"/>
+                <a:latin typeface="NotoSansJP"/>
+                <a:ea typeface="NotoSansJP"/>
               </a:rPr>
               <a:t>段組みサンプル</a:t>
             </a:r>
@@ -10778,14 +9280,14 @@
       </p:sp>
       <p:sp>
         <p:nvSpPr>
-          <p:cNvPr id="163" name=""/>
+          <p:cNvPr id="117" name=""/>
           <p:cNvSpPr txBox="1"/>
           <p:nvPr/>
         </p:nvSpPr>
         <p:spPr>
           <a:xfrm>
-            <a:off x="11946240" y="6458400"/>
-            <a:ext cx="304560" cy="340200"/>
+            <a:off x="11946600" y="6436800"/>
+            <a:ext cx="304560" cy="416520"/>
           </a:xfrm>
           <a:prstGeom prst="rect">
             <a:avLst/>
@@ -10805,8 +9307,8 @@
                 <a:solidFill>
                   <a:srgbClr val="111111"/>
                 </a:solidFill>
-                <a:latin typeface="Arial"/>
-                <a:ea typeface="Arial"/>
+                <a:latin typeface="NotoSansJP"/>
+                <a:ea typeface="NotoSansJP"/>
               </a:rPr>
               <a:t>8</a:t>
             </a:r>
@@ -10851,7 +9353,7 @@
       </p:grpSpPr>
       <p:sp>
         <p:nvSpPr>
-          <p:cNvPr id="164" name=""/>
+          <p:cNvPr id="118" name=""/>
           <p:cNvSpPr/>
           <p:nvPr/>
         </p:nvSpPr>
@@ -10909,7 +9411,7 @@
       </p:sp>
       <p:sp>
         <p:nvSpPr>
-          <p:cNvPr id="165" name=""/>
+          <p:cNvPr id="119" name=""/>
           <p:cNvSpPr/>
           <p:nvPr/>
         </p:nvSpPr>
@@ -10967,7 +9469,7 @@
       </p:sp>
       <p:sp>
         <p:nvSpPr>
-          <p:cNvPr id="166" name=""/>
+          <p:cNvPr id="120" name=""/>
           <p:cNvSpPr/>
           <p:nvPr/>
         </p:nvSpPr>
@@ -11025,7 +9527,7 @@
       </p:sp>
       <p:sp>
         <p:nvSpPr>
-          <p:cNvPr id="167" name=""/>
+          <p:cNvPr id="121" name=""/>
           <p:cNvSpPr/>
           <p:nvPr/>
         </p:nvSpPr>
@@ -11241,16 +9743,39 @@
           </a:p>
         </p:txBody>
       </p:sp>
-      <p:sp>
-        <p:nvSpPr>
-          <p:cNvPr id="168" name=""/>
+      <p:pic>
+        <p:nvPicPr>
+          <p:cNvPr id="122" name="" descr=""/>
+          <p:cNvPicPr/>
+          <p:nvPr/>
+        </p:nvPicPr>
+        <p:blipFill>
+          <a:blip r:embed="rId1"/>
+          <a:stretch/>
+        </p:blipFill>
+        <p:spPr>
+          <a:xfrm>
+            <a:off x="10515600" y="38160"/>
+            <a:ext cx="1142640" cy="1142640"/>
+          </a:xfrm>
+          <a:prstGeom prst="rect">
+            <a:avLst/>
+          </a:prstGeom>
+          <a:ln w="0">
+            <a:noFill/>
+          </a:ln>
+        </p:spPr>
+      </p:pic>
+      <p:sp>
+        <p:nvSpPr>
+          <p:cNvPr id="123" name=""/>
           <p:cNvSpPr/>
           <p:nvPr/>
         </p:nvSpPr>
         <p:spPr>
           <a:xfrm>
-            <a:off x="857160" y="1581120"/>
-            <a:ext cx="86040" cy="86040"/>
+            <a:off x="809280" y="1581120"/>
+            <a:ext cx="105120" cy="105120"/>
           </a:xfrm>
           <a:custGeom>
             <a:avLst/>
@@ -11258,89 +9783,169 @@
             <a:ahLst/>
             <a:rect l="0" t="0" r="r" b="b"/>
             <a:pathLst>
-              <a:path w="239" h="239">
+              <a:path w="292" h="292">
                 <a:moveTo>
-                  <a:pt x="239" y="120"/>
+                  <a:pt x="292" y="146"/>
                 </a:moveTo>
                 <a:cubicBezTo>
-                  <a:pt x="239" y="135"/>
-                  <a:pt x="236" y="151"/>
-                  <a:pt x="230" y="165"/>
-                </a:cubicBezTo>
-                <a:cubicBezTo>
-                  <a:pt x="224" y="180"/>
-                  <a:pt x="215" y="193"/>
-                  <a:pt x="204" y="204"/>
-                </a:cubicBezTo>
-                <a:cubicBezTo>
-                  <a:pt x="193" y="215"/>
-                  <a:pt x="180" y="224"/>
-                  <a:pt x="165" y="230"/>
-                </a:cubicBezTo>
-                <a:cubicBezTo>
-                  <a:pt x="151" y="236"/>
-                  <a:pt x="136" y="239"/>
-                  <a:pt x="120" y="239"/>
-                </a:cubicBezTo>
-                <a:cubicBezTo>
-                  <a:pt x="103" y="239"/>
-                  <a:pt x="88" y="236"/>
-                  <a:pt x="73" y="230"/>
-                </a:cubicBezTo>
-                <a:cubicBezTo>
-                  <a:pt x="59" y="224"/>
-                  <a:pt x="46" y="215"/>
-                  <a:pt x="35" y="204"/>
-                </a:cubicBezTo>
-                <a:cubicBezTo>
-                  <a:pt x="23" y="193"/>
-                  <a:pt x="15" y="180"/>
-                  <a:pt x="9" y="165"/>
-                </a:cubicBezTo>
-                <a:cubicBezTo>
-                  <a:pt x="3" y="151"/>
-                  <a:pt x="0" y="135"/>
-                  <a:pt x="0" y="120"/>
-                </a:cubicBezTo>
-                <a:cubicBezTo>
-                  <a:pt x="0" y="104"/>
-                  <a:pt x="3" y="89"/>
-                  <a:pt x="9" y="74"/>
-                </a:cubicBezTo>
-                <a:cubicBezTo>
-                  <a:pt x="15" y="59"/>
-                  <a:pt x="23" y="47"/>
-                  <a:pt x="35" y="35"/>
-                </a:cubicBezTo>
-                <a:cubicBezTo>
-                  <a:pt x="46" y="24"/>
-                  <a:pt x="59" y="16"/>
-                  <a:pt x="73" y="9"/>
-                </a:cubicBezTo>
-                <a:cubicBezTo>
-                  <a:pt x="88" y="3"/>
-                  <a:pt x="103" y="0"/>
-                  <a:pt x="120" y="0"/>
-                </a:cubicBezTo>
-                <a:cubicBezTo>
+                  <a:pt x="292" y="156"/>
+                  <a:pt x="292" y="165"/>
+                  <a:pt x="290" y="174"/>
+                </a:cubicBezTo>
+                <a:cubicBezTo>
+                  <a:pt x="288" y="184"/>
+                  <a:pt x="285" y="193"/>
+                  <a:pt x="281" y="202"/>
+                </a:cubicBezTo>
+                <a:cubicBezTo>
+                  <a:pt x="278" y="211"/>
+                  <a:pt x="273" y="219"/>
+                  <a:pt x="268" y="227"/>
+                </a:cubicBezTo>
+                <a:cubicBezTo>
+                  <a:pt x="263" y="235"/>
+                  <a:pt x="257" y="242"/>
+                  <a:pt x="250" y="249"/>
+                </a:cubicBezTo>
+                <a:cubicBezTo>
+                  <a:pt x="243" y="256"/>
+                  <a:pt x="236" y="262"/>
+                  <a:pt x="228" y="267"/>
+                </a:cubicBezTo>
+                <a:cubicBezTo>
+                  <a:pt x="219" y="272"/>
+                  <a:pt x="210" y="277"/>
+                  <a:pt x="202" y="281"/>
+                </a:cubicBezTo>
+                <a:cubicBezTo>
+                  <a:pt x="193" y="284"/>
+                  <a:pt x="184" y="287"/>
+                  <a:pt x="174" y="289"/>
+                </a:cubicBezTo>
+                <a:cubicBezTo>
+                  <a:pt x="165" y="291"/>
+                  <a:pt x="156" y="292"/>
+                  <a:pt x="146" y="292"/>
+                </a:cubicBezTo>
+                <a:cubicBezTo>
+                  <a:pt x="136" y="292"/>
+                  <a:pt x="127" y="291"/>
+                  <a:pt x="118" y="289"/>
+                </a:cubicBezTo>
+                <a:cubicBezTo>
+                  <a:pt x="108" y="287"/>
+                  <a:pt x="99" y="284"/>
+                  <a:pt x="90" y="281"/>
+                </a:cubicBezTo>
+                <a:cubicBezTo>
+                  <a:pt x="81" y="277"/>
+                  <a:pt x="73" y="272"/>
+                  <a:pt x="65" y="267"/>
+                </a:cubicBezTo>
+                <a:cubicBezTo>
+                  <a:pt x="57" y="262"/>
+                  <a:pt x="50" y="256"/>
+                  <a:pt x="43" y="249"/>
+                </a:cubicBezTo>
+                <a:cubicBezTo>
+                  <a:pt x="36" y="242"/>
+                  <a:pt x="30" y="235"/>
+                  <a:pt x="25" y="227"/>
+                </a:cubicBezTo>
+                <a:cubicBezTo>
+                  <a:pt x="20" y="219"/>
+                  <a:pt x="15" y="211"/>
+                  <a:pt x="12" y="202"/>
+                </a:cubicBezTo>
+                <a:cubicBezTo>
+                  <a:pt x="8" y="193"/>
+                  <a:pt x="5" y="184"/>
+                  <a:pt x="3" y="174"/>
+                </a:cubicBezTo>
+                <a:cubicBezTo>
+                  <a:pt x="1" y="165"/>
+                  <a:pt x="0" y="156"/>
+                  <a:pt x="0" y="146"/>
+                </a:cubicBezTo>
+                <a:cubicBezTo>
+                  <a:pt x="0" y="137"/>
+                  <a:pt x="1" y="127"/>
+                  <a:pt x="3" y="117"/>
+                </a:cubicBezTo>
+                <a:cubicBezTo>
+                  <a:pt x="5" y="107"/>
+                  <a:pt x="8" y="98"/>
+                  <a:pt x="12" y="89"/>
+                </a:cubicBezTo>
+                <a:cubicBezTo>
+                  <a:pt x="15" y="81"/>
+                  <a:pt x="20" y="72"/>
+                  <a:pt x="25" y="64"/>
+                </a:cubicBezTo>
+                <a:cubicBezTo>
+                  <a:pt x="30" y="56"/>
+                  <a:pt x="36" y="49"/>
+                  <a:pt x="43" y="42"/>
+                </a:cubicBezTo>
+                <a:cubicBezTo>
+                  <a:pt x="50" y="35"/>
+                  <a:pt x="57" y="29"/>
+                  <a:pt x="65" y="24"/>
+                </a:cubicBezTo>
+                <a:cubicBezTo>
+                  <a:pt x="73" y="19"/>
+                  <a:pt x="81" y="14"/>
+                  <a:pt x="90" y="11"/>
+                </a:cubicBezTo>
+                <a:cubicBezTo>
+                  <a:pt x="99" y="7"/>
+                  <a:pt x="108" y="4"/>
+                  <a:pt x="118" y="2"/>
+                </a:cubicBezTo>
+                <a:cubicBezTo>
+                  <a:pt x="127" y="1"/>
                   <a:pt x="136" y="0"/>
-                  <a:pt x="151" y="3"/>
-                  <a:pt x="165" y="9"/>
-                </a:cubicBezTo>
-                <a:cubicBezTo>
-                  <a:pt x="180" y="16"/>
-                  <a:pt x="193" y="24"/>
-                  <a:pt x="204" y="35"/>
-                </a:cubicBezTo>
-                <a:cubicBezTo>
-                  <a:pt x="215" y="47"/>
-                  <a:pt x="224" y="59"/>
-                  <a:pt x="230" y="74"/>
-                </a:cubicBezTo>
-                <a:cubicBezTo>
-                  <a:pt x="236" y="89"/>
-                  <a:pt x="239" y="104"/>
-                  <a:pt x="239" y="120"/>
+                  <a:pt x="146" y="0"/>
+                </a:cubicBezTo>
+                <a:cubicBezTo>
+                  <a:pt x="156" y="0"/>
+                  <a:pt x="165" y="1"/>
+                  <a:pt x="174" y="2"/>
+                </a:cubicBezTo>
+                <a:cubicBezTo>
+                  <a:pt x="184" y="4"/>
+                  <a:pt x="193" y="7"/>
+                  <a:pt x="202" y="11"/>
+                </a:cubicBezTo>
+                <a:cubicBezTo>
+                  <a:pt x="210" y="14"/>
+                  <a:pt x="219" y="19"/>
+                  <a:pt x="228" y="24"/>
+                </a:cubicBezTo>
+                <a:cubicBezTo>
+                  <a:pt x="236" y="29"/>
+                  <a:pt x="243" y="35"/>
+                  <a:pt x="250" y="42"/>
+                </a:cubicBezTo>
+                <a:cubicBezTo>
+                  <a:pt x="257" y="49"/>
+                  <a:pt x="263" y="56"/>
+                  <a:pt x="268" y="64"/>
+                </a:cubicBezTo>
+                <a:cubicBezTo>
+                  <a:pt x="273" y="72"/>
+                  <a:pt x="278" y="81"/>
+                  <a:pt x="281" y="89"/>
+                </a:cubicBezTo>
+                <a:cubicBezTo>
+                  <a:pt x="285" y="98"/>
+                  <a:pt x="288" y="107"/>
+                  <a:pt x="290" y="117"/>
+                </a:cubicBezTo>
+                <a:cubicBezTo>
+                  <a:pt x="292" y="127"/>
+                  <a:pt x="292" y="137"/>
+                  <a:pt x="292" y="146"/>
                 </a:cubicBezTo>
                 <a:close/>
               </a:path>
@@ -11369,13 +9974,13 @@
       </p:sp>
       <p:sp>
         <p:nvSpPr>
-          <p:cNvPr id="169" name=""/>
+          <p:cNvPr id="124" name=""/>
           <p:cNvSpPr txBox="1"/>
           <p:nvPr/>
         </p:nvSpPr>
         <p:spPr>
           <a:xfrm>
-            <a:off x="533520" y="870120"/>
+            <a:off x="533520" y="923760"/>
             <a:ext cx="1379880" cy="399600"/>
           </a:xfrm>
           <a:prstGeom prst="rect">
@@ -11396,8 +10001,8 @@
                 <a:solidFill>
                   <a:srgbClr val="111111"/>
                 </a:solidFill>
-                <a:latin typeface="NotoSansCJKjp"/>
-                <a:ea typeface="NotoSansCJKjp"/>
+                <a:latin typeface="NotoSansJP"/>
+                <a:ea typeface="NotoSansJP"/>
               </a:rPr>
               <a:t>左上カラム</a:t>
             </a:r>
@@ -11412,57 +10017,14 @@
       </p:sp>
       <p:sp>
         <p:nvSpPr>
-          <p:cNvPr id="170" name=""/>
-          <p:cNvSpPr txBox="1"/>
-          <p:nvPr/>
-        </p:nvSpPr>
-        <p:spPr>
-          <a:xfrm>
-            <a:off x="1085760" y="1384560"/>
-            <a:ext cx="1104120" cy="399600"/>
-          </a:xfrm>
-          <a:prstGeom prst="rect">
-            <a:avLst/>
-          </a:prstGeom>
-          <a:noFill/>
-          <a:ln w="0">
-            <a:noFill/>
-          </a:ln>
-        </p:spPr>
-        <p:txBody>
-          <a:bodyPr wrap="none" lIns="0" rIns="0" tIns="0" bIns="0" anchor="t">
-            <a:noAutofit/>
-          </a:bodyPr>
-          <a:p>
-            <a:r>
-              <a:rPr b="0" lang="zh-CN" sz="2170" spc="-1" strike="noStrike">
-                <a:solidFill>
-                  <a:srgbClr val="111111"/>
-                </a:solidFill>
-                <a:latin typeface="NotoSansCJKjp"/>
-                <a:ea typeface="NotoSansCJKjp"/>
-              </a:rPr>
-              <a:t>ポイント</a:t>
-            </a:r>
-            <a:endParaRPr b="0" lang="en-US" sz="2170" spc="-1" strike="noStrike">
-              <a:solidFill>
-                <a:srgbClr val="000000"/>
-              </a:solidFill>
-              <a:latin typeface="Times New Roman"/>
-            </a:endParaRPr>
-          </a:p>
-        </p:txBody>
-      </p:sp>
-      <p:sp>
-        <p:nvSpPr>
-          <p:cNvPr id="171" name=""/>
+          <p:cNvPr id="125" name=""/>
           <p:cNvSpPr/>
           <p:nvPr/>
         </p:nvSpPr>
         <p:spPr>
           <a:xfrm>
-            <a:off x="857160" y="2066760"/>
-            <a:ext cx="86040" cy="86040"/>
+            <a:off x="809280" y="2066760"/>
+            <a:ext cx="105120" cy="105120"/>
           </a:xfrm>
           <a:custGeom>
             <a:avLst/>
@@ -11470,89 +10032,169 @@
             <a:ahLst/>
             <a:rect l="0" t="0" r="r" b="b"/>
             <a:pathLst>
-              <a:path w="239" h="239">
+              <a:path w="292" h="292">
                 <a:moveTo>
-                  <a:pt x="239" y="120"/>
+                  <a:pt x="292" y="145"/>
                 </a:moveTo>
                 <a:cubicBezTo>
-                  <a:pt x="239" y="136"/>
-                  <a:pt x="236" y="151"/>
-                  <a:pt x="230" y="166"/>
-                </a:cubicBezTo>
-                <a:cubicBezTo>
-                  <a:pt x="224" y="180"/>
-                  <a:pt x="215" y="193"/>
-                  <a:pt x="204" y="204"/>
-                </a:cubicBezTo>
-                <a:cubicBezTo>
-                  <a:pt x="193" y="215"/>
-                  <a:pt x="180" y="224"/>
-                  <a:pt x="165" y="230"/>
-                </a:cubicBezTo>
-                <a:cubicBezTo>
-                  <a:pt x="151" y="236"/>
-                  <a:pt x="136" y="239"/>
-                  <a:pt x="120" y="239"/>
-                </a:cubicBezTo>
-                <a:cubicBezTo>
-                  <a:pt x="103" y="239"/>
-                  <a:pt x="88" y="236"/>
-                  <a:pt x="73" y="230"/>
-                </a:cubicBezTo>
-                <a:cubicBezTo>
-                  <a:pt x="59" y="224"/>
-                  <a:pt x="46" y="215"/>
-                  <a:pt x="35" y="204"/>
-                </a:cubicBezTo>
-                <a:cubicBezTo>
-                  <a:pt x="23" y="193"/>
-                  <a:pt x="15" y="180"/>
-                  <a:pt x="9" y="166"/>
-                </a:cubicBezTo>
-                <a:cubicBezTo>
-                  <a:pt x="3" y="151"/>
+                  <a:pt x="292" y="155"/>
+                  <a:pt x="292" y="164"/>
+                  <a:pt x="290" y="174"/>
+                </a:cubicBezTo>
+                <a:cubicBezTo>
+                  <a:pt x="288" y="183"/>
+                  <a:pt x="285" y="192"/>
+                  <a:pt x="281" y="201"/>
+                </a:cubicBezTo>
+                <a:cubicBezTo>
+                  <a:pt x="278" y="210"/>
+                  <a:pt x="273" y="218"/>
+                  <a:pt x="268" y="227"/>
+                </a:cubicBezTo>
+                <a:cubicBezTo>
+                  <a:pt x="263" y="235"/>
+                  <a:pt x="257" y="243"/>
+                  <a:pt x="250" y="249"/>
+                </a:cubicBezTo>
+                <a:cubicBezTo>
+                  <a:pt x="243" y="256"/>
+                  <a:pt x="236" y="262"/>
+                  <a:pt x="228" y="267"/>
+                </a:cubicBezTo>
+                <a:cubicBezTo>
+                  <a:pt x="219" y="273"/>
+                  <a:pt x="210" y="277"/>
+                  <a:pt x="202" y="281"/>
+                </a:cubicBezTo>
+                <a:cubicBezTo>
+                  <a:pt x="193" y="285"/>
+                  <a:pt x="184" y="287"/>
+                  <a:pt x="174" y="289"/>
+                </a:cubicBezTo>
+                <a:cubicBezTo>
+                  <a:pt x="165" y="291"/>
+                  <a:pt x="156" y="292"/>
+                  <a:pt x="146" y="292"/>
+                </a:cubicBezTo>
+                <a:cubicBezTo>
+                  <a:pt x="136" y="292"/>
+                  <a:pt x="127" y="291"/>
+                  <a:pt x="118" y="289"/>
+                </a:cubicBezTo>
+                <a:cubicBezTo>
+                  <a:pt x="108" y="287"/>
+                  <a:pt x="99" y="285"/>
+                  <a:pt x="90" y="281"/>
+                </a:cubicBezTo>
+                <a:cubicBezTo>
+                  <a:pt x="81" y="277"/>
+                  <a:pt x="73" y="273"/>
+                  <a:pt x="65" y="267"/>
+                </a:cubicBezTo>
+                <a:cubicBezTo>
+                  <a:pt x="57" y="262"/>
+                  <a:pt x="50" y="256"/>
+                  <a:pt x="43" y="249"/>
+                </a:cubicBezTo>
+                <a:cubicBezTo>
+                  <a:pt x="36" y="243"/>
+                  <a:pt x="30" y="235"/>
+                  <a:pt x="25" y="227"/>
+                </a:cubicBezTo>
+                <a:cubicBezTo>
+                  <a:pt x="20" y="218"/>
+                  <a:pt x="15" y="210"/>
+                  <a:pt x="12" y="201"/>
+                </a:cubicBezTo>
+                <a:cubicBezTo>
+                  <a:pt x="8" y="192"/>
+                  <a:pt x="5" y="183"/>
+                  <a:pt x="3" y="174"/>
+                </a:cubicBezTo>
+                <a:cubicBezTo>
+                  <a:pt x="1" y="164"/>
+                  <a:pt x="0" y="155"/>
+                  <a:pt x="0" y="145"/>
+                </a:cubicBezTo>
+                <a:cubicBezTo>
                   <a:pt x="0" y="136"/>
-                  <a:pt x="0" y="120"/>
-                </a:cubicBezTo>
-                <a:cubicBezTo>
-                  <a:pt x="0" y="104"/>
-                  <a:pt x="3" y="88"/>
-                  <a:pt x="9" y="73"/>
-                </a:cubicBezTo>
-                <a:cubicBezTo>
-                  <a:pt x="15" y="59"/>
-                  <a:pt x="23" y="46"/>
-                  <a:pt x="35" y="35"/>
-                </a:cubicBezTo>
-                <a:cubicBezTo>
-                  <a:pt x="46" y="24"/>
-                  <a:pt x="59" y="15"/>
-                  <a:pt x="73" y="9"/>
-                </a:cubicBezTo>
-                <a:cubicBezTo>
-                  <a:pt x="88" y="3"/>
-                  <a:pt x="103" y="0"/>
-                  <a:pt x="120" y="0"/>
-                </a:cubicBezTo>
-                <a:cubicBezTo>
+                  <a:pt x="1" y="126"/>
+                  <a:pt x="3" y="117"/>
+                </a:cubicBezTo>
+                <a:cubicBezTo>
+                  <a:pt x="5" y="108"/>
+                  <a:pt x="8" y="99"/>
+                  <a:pt x="12" y="90"/>
+                </a:cubicBezTo>
+                <a:cubicBezTo>
+                  <a:pt x="15" y="81"/>
+                  <a:pt x="20" y="73"/>
+                  <a:pt x="25" y="65"/>
+                </a:cubicBezTo>
+                <a:cubicBezTo>
+                  <a:pt x="30" y="57"/>
+                  <a:pt x="36" y="49"/>
+                  <a:pt x="43" y="43"/>
+                </a:cubicBezTo>
+                <a:cubicBezTo>
+                  <a:pt x="50" y="36"/>
+                  <a:pt x="57" y="30"/>
+                  <a:pt x="65" y="24"/>
+                </a:cubicBezTo>
+                <a:cubicBezTo>
+                  <a:pt x="73" y="19"/>
+                  <a:pt x="81" y="15"/>
+                  <a:pt x="90" y="11"/>
+                </a:cubicBezTo>
+                <a:cubicBezTo>
+                  <a:pt x="99" y="7"/>
+                  <a:pt x="108" y="5"/>
+                  <a:pt x="118" y="3"/>
+                </a:cubicBezTo>
+                <a:cubicBezTo>
+                  <a:pt x="127" y="1"/>
                   <a:pt x="136" y="0"/>
-                  <a:pt x="151" y="3"/>
-                  <a:pt x="165" y="9"/>
-                </a:cubicBezTo>
-                <a:cubicBezTo>
-                  <a:pt x="180" y="15"/>
-                  <a:pt x="193" y="24"/>
-                  <a:pt x="204" y="35"/>
-                </a:cubicBezTo>
-                <a:cubicBezTo>
-                  <a:pt x="215" y="46"/>
-                  <a:pt x="224" y="59"/>
-                  <a:pt x="230" y="73"/>
-                </a:cubicBezTo>
-                <a:cubicBezTo>
-                  <a:pt x="236" y="88"/>
-                  <a:pt x="239" y="104"/>
-                  <a:pt x="239" y="120"/>
+                  <a:pt x="146" y="0"/>
+                </a:cubicBezTo>
+                <a:cubicBezTo>
+                  <a:pt x="156" y="0"/>
+                  <a:pt x="165" y="1"/>
+                  <a:pt x="174" y="3"/>
+                </a:cubicBezTo>
+                <a:cubicBezTo>
+                  <a:pt x="184" y="5"/>
+                  <a:pt x="193" y="7"/>
+                  <a:pt x="202" y="11"/>
+                </a:cubicBezTo>
+                <a:cubicBezTo>
+                  <a:pt x="210" y="15"/>
+                  <a:pt x="219" y="19"/>
+                  <a:pt x="228" y="24"/>
+                </a:cubicBezTo>
+                <a:cubicBezTo>
+                  <a:pt x="236" y="30"/>
+                  <a:pt x="243" y="36"/>
+                  <a:pt x="250" y="43"/>
+                </a:cubicBezTo>
+                <a:cubicBezTo>
+                  <a:pt x="257" y="49"/>
+                  <a:pt x="263" y="57"/>
+                  <a:pt x="268" y="65"/>
+                </a:cubicBezTo>
+                <a:cubicBezTo>
+                  <a:pt x="273" y="73"/>
+                  <a:pt x="278" y="81"/>
+                  <a:pt x="281" y="90"/>
+                </a:cubicBezTo>
+                <a:cubicBezTo>
+                  <a:pt x="285" y="99"/>
+                  <a:pt x="288" y="108"/>
+                  <a:pt x="290" y="117"/>
+                </a:cubicBezTo>
+                <a:cubicBezTo>
+                  <a:pt x="292" y="126"/>
+                  <a:pt x="292" y="136"/>
+                  <a:pt x="292" y="145"/>
                 </a:cubicBezTo>
                 <a:close/>
               </a:path>
@@ -11581,14 +10223,14 @@
       </p:sp>
       <p:sp>
         <p:nvSpPr>
-          <p:cNvPr id="172" name=""/>
+          <p:cNvPr id="126" name=""/>
           <p:cNvSpPr txBox="1"/>
           <p:nvPr/>
         </p:nvSpPr>
         <p:spPr>
           <a:xfrm>
-            <a:off x="2190600" y="1455120"/>
-            <a:ext cx="275760" cy="308160"/>
+            <a:off x="1085760" y="1438200"/>
+            <a:ext cx="1340640" cy="401040"/>
           </a:xfrm>
           <a:prstGeom prst="rect">
             <a:avLst/>
@@ -11604,12 +10246,22 @@
           </a:bodyPr>
           <a:p>
             <a:r>
+              <a:rPr b="0" lang="zh-CN" sz="2170" spc="-1" strike="noStrike">
+                <a:solidFill>
+                  <a:srgbClr val="111111"/>
+                </a:solidFill>
+                <a:latin typeface="NotoSansJP"/>
+                <a:ea typeface="NotoSansJP"/>
+              </a:rPr>
+              <a:t>ポイント</a:t>
+            </a:r>
+            <a:r>
               <a:rPr b="0" lang="en-US" sz="2170" spc="-1" strike="noStrike">
                 <a:solidFill>
                   <a:srgbClr val="111111"/>
                 </a:solidFill>
-                <a:latin typeface="Arial"/>
-                <a:ea typeface="Arial"/>
+                <a:latin typeface="NotoSansJP"/>
+                <a:ea typeface="NotoSansJP"/>
               </a:rPr>
               <a:t>1</a:t>
             </a:r>
@@ -11624,14 +10276,14 @@
       </p:sp>
       <p:sp>
         <p:nvSpPr>
-          <p:cNvPr id="173" name=""/>
+          <p:cNvPr id="127" name=""/>
           <p:cNvSpPr txBox="1"/>
           <p:nvPr/>
         </p:nvSpPr>
         <p:spPr>
           <a:xfrm>
-            <a:off x="1085760" y="1870200"/>
-            <a:ext cx="1104120" cy="399600"/>
+            <a:off x="1085760" y="1924200"/>
+            <a:ext cx="1340640" cy="401040"/>
           </a:xfrm>
           <a:prstGeom prst="rect">
             <a:avLst/>
@@ -11651,11 +10303,21 @@
                 <a:solidFill>
                   <a:srgbClr val="111111"/>
                 </a:solidFill>
-                <a:latin typeface="NotoSansCJKjp"/>
-                <a:ea typeface="NotoSansCJKjp"/>
+                <a:latin typeface="NotoSansJP"/>
+                <a:ea typeface="NotoSansJP"/>
               </a:rPr>
               <a:t>ポイント</a:t>
             </a:r>
+            <a:r>
+              <a:rPr b="0" lang="en-US" sz="2170" spc="-1" strike="noStrike">
+                <a:solidFill>
+                  <a:srgbClr val="111111"/>
+                </a:solidFill>
+                <a:latin typeface="NotoSansJP"/>
+                <a:ea typeface="NotoSansJP"/>
+              </a:rPr>
+              <a:t>2</a:t>
+            </a:r>
             <a:endParaRPr b="0" lang="en-US" sz="2170" spc="-1" strike="noStrike">
               <a:solidFill>
                 <a:srgbClr val="000000"/>
@@ -11667,57 +10329,14 @@
       </p:sp>
       <p:sp>
         <p:nvSpPr>
-          <p:cNvPr id="174" name=""/>
-          <p:cNvSpPr txBox="1"/>
-          <p:nvPr/>
-        </p:nvSpPr>
-        <p:spPr>
-          <a:xfrm>
-            <a:off x="2190600" y="1940760"/>
-            <a:ext cx="275760" cy="308160"/>
-          </a:xfrm>
-          <a:prstGeom prst="rect">
-            <a:avLst/>
-          </a:prstGeom>
-          <a:noFill/>
-          <a:ln w="0">
-            <a:noFill/>
-          </a:ln>
-        </p:spPr>
-        <p:txBody>
-          <a:bodyPr wrap="none" lIns="0" rIns="0" tIns="0" bIns="0" anchor="t">
-            <a:noAutofit/>
-          </a:bodyPr>
-          <a:p>
-            <a:r>
-              <a:rPr b="0" lang="en-US" sz="2170" spc="-1" strike="noStrike">
-                <a:solidFill>
-                  <a:srgbClr val="111111"/>
-                </a:solidFill>
-                <a:latin typeface="Arial"/>
-                <a:ea typeface="Arial"/>
-              </a:rPr>
-              <a:t>2</a:t>
-            </a:r>
-            <a:endParaRPr b="0" lang="en-US" sz="2170" spc="-1" strike="noStrike">
-              <a:solidFill>
-                <a:srgbClr val="000000"/>
-              </a:solidFill>
-              <a:latin typeface="Times New Roman"/>
-            </a:endParaRPr>
-          </a:p>
-        </p:txBody>
-      </p:sp>
-      <p:sp>
-        <p:nvSpPr>
-          <p:cNvPr id="175" name=""/>
+          <p:cNvPr id="128" name=""/>
           <p:cNvSpPr/>
           <p:nvPr/>
         </p:nvSpPr>
         <p:spPr>
           <a:xfrm>
-            <a:off x="857160" y="3143160"/>
-            <a:ext cx="86040" cy="86040"/>
+            <a:off x="809280" y="3143160"/>
+            <a:ext cx="105120" cy="105120"/>
           </a:xfrm>
           <a:custGeom>
             <a:avLst/>
@@ -11725,89 +10344,169 @@
             <a:ahLst/>
             <a:rect l="0" t="0" r="r" b="b"/>
             <a:pathLst>
-              <a:path w="239" h="239">
+              <a:path w="292" h="292">
                 <a:moveTo>
-                  <a:pt x="239" y="119"/>
+                  <a:pt x="292" y="146"/>
                 </a:moveTo>
                 <a:cubicBezTo>
-                  <a:pt x="239" y="135"/>
-                  <a:pt x="236" y="150"/>
-                  <a:pt x="230" y="164"/>
-                </a:cubicBezTo>
-                <a:cubicBezTo>
-                  <a:pt x="224" y="179"/>
-                  <a:pt x="215" y="192"/>
-                  <a:pt x="204" y="204"/>
-                </a:cubicBezTo>
-                <a:cubicBezTo>
-                  <a:pt x="193" y="215"/>
-                  <a:pt x="180" y="224"/>
-                  <a:pt x="165" y="230"/>
-                </a:cubicBezTo>
-                <a:cubicBezTo>
-                  <a:pt x="151" y="236"/>
-                  <a:pt x="136" y="239"/>
-                  <a:pt x="120" y="239"/>
-                </a:cubicBezTo>
-                <a:cubicBezTo>
-                  <a:pt x="103" y="239"/>
-                  <a:pt x="88" y="236"/>
-                  <a:pt x="73" y="230"/>
-                </a:cubicBezTo>
-                <a:cubicBezTo>
-                  <a:pt x="59" y="224"/>
-                  <a:pt x="46" y="215"/>
-                  <a:pt x="35" y="204"/>
-                </a:cubicBezTo>
-                <a:cubicBezTo>
-                  <a:pt x="23" y="192"/>
-                  <a:pt x="15" y="179"/>
-                  <a:pt x="9" y="164"/>
-                </a:cubicBezTo>
-                <a:cubicBezTo>
-                  <a:pt x="3" y="150"/>
-                  <a:pt x="0" y="135"/>
-                  <a:pt x="0" y="119"/>
-                </a:cubicBezTo>
-                <a:cubicBezTo>
-                  <a:pt x="0" y="103"/>
-                  <a:pt x="3" y="88"/>
-                  <a:pt x="9" y="73"/>
-                </a:cubicBezTo>
-                <a:cubicBezTo>
-                  <a:pt x="15" y="59"/>
-                  <a:pt x="23" y="46"/>
-                  <a:pt x="35" y="35"/>
-                </a:cubicBezTo>
-                <a:cubicBezTo>
-                  <a:pt x="46" y="23"/>
-                  <a:pt x="59" y="15"/>
-                  <a:pt x="73" y="9"/>
-                </a:cubicBezTo>
-                <a:cubicBezTo>
-                  <a:pt x="88" y="3"/>
-                  <a:pt x="103" y="0"/>
-                  <a:pt x="120" y="0"/>
-                </a:cubicBezTo>
-                <a:cubicBezTo>
+                  <a:pt x="292" y="156"/>
+                  <a:pt x="292" y="165"/>
+                  <a:pt x="290" y="175"/>
+                </a:cubicBezTo>
+                <a:cubicBezTo>
+                  <a:pt x="288" y="184"/>
+                  <a:pt x="285" y="193"/>
+                  <a:pt x="281" y="202"/>
+                </a:cubicBezTo>
+                <a:cubicBezTo>
+                  <a:pt x="278" y="211"/>
+                  <a:pt x="273" y="219"/>
+                  <a:pt x="268" y="227"/>
+                </a:cubicBezTo>
+                <a:cubicBezTo>
+                  <a:pt x="263" y="235"/>
+                  <a:pt x="257" y="242"/>
+                  <a:pt x="250" y="249"/>
+                </a:cubicBezTo>
+                <a:cubicBezTo>
+                  <a:pt x="243" y="256"/>
+                  <a:pt x="236" y="262"/>
+                  <a:pt x="228" y="267"/>
+                </a:cubicBezTo>
+                <a:cubicBezTo>
+                  <a:pt x="219" y="273"/>
+                  <a:pt x="210" y="277"/>
+                  <a:pt x="202" y="281"/>
+                </a:cubicBezTo>
+                <a:cubicBezTo>
+                  <a:pt x="193" y="284"/>
+                  <a:pt x="184" y="287"/>
+                  <a:pt x="174" y="289"/>
+                </a:cubicBezTo>
+                <a:cubicBezTo>
+                  <a:pt x="165" y="291"/>
+                  <a:pt x="156" y="292"/>
+                  <a:pt x="146" y="292"/>
+                </a:cubicBezTo>
+                <a:cubicBezTo>
+                  <a:pt x="136" y="292"/>
+                  <a:pt x="127" y="291"/>
+                  <a:pt x="118" y="289"/>
+                </a:cubicBezTo>
+                <a:cubicBezTo>
+                  <a:pt x="108" y="287"/>
+                  <a:pt x="99" y="284"/>
+                  <a:pt x="90" y="281"/>
+                </a:cubicBezTo>
+                <a:cubicBezTo>
+                  <a:pt x="81" y="277"/>
+                  <a:pt x="73" y="273"/>
+                  <a:pt x="65" y="267"/>
+                </a:cubicBezTo>
+                <a:cubicBezTo>
+                  <a:pt x="57" y="262"/>
+                  <a:pt x="50" y="256"/>
+                  <a:pt x="43" y="249"/>
+                </a:cubicBezTo>
+                <a:cubicBezTo>
+                  <a:pt x="36" y="242"/>
+                  <a:pt x="30" y="235"/>
+                  <a:pt x="25" y="227"/>
+                </a:cubicBezTo>
+                <a:cubicBezTo>
+                  <a:pt x="20" y="219"/>
+                  <a:pt x="15" y="211"/>
+                  <a:pt x="12" y="202"/>
+                </a:cubicBezTo>
+                <a:cubicBezTo>
+                  <a:pt x="8" y="193"/>
+                  <a:pt x="5" y="184"/>
+                  <a:pt x="3" y="175"/>
+                </a:cubicBezTo>
+                <a:cubicBezTo>
+                  <a:pt x="1" y="165"/>
+                  <a:pt x="0" y="156"/>
+                  <a:pt x="0" y="146"/>
+                </a:cubicBezTo>
+                <a:cubicBezTo>
+                  <a:pt x="0" y="136"/>
+                  <a:pt x="1" y="126"/>
+                  <a:pt x="3" y="117"/>
+                </a:cubicBezTo>
+                <a:cubicBezTo>
+                  <a:pt x="5" y="108"/>
+                  <a:pt x="8" y="98"/>
+                  <a:pt x="12" y="90"/>
+                </a:cubicBezTo>
+                <a:cubicBezTo>
+                  <a:pt x="15" y="81"/>
+                  <a:pt x="20" y="72"/>
+                  <a:pt x="25" y="64"/>
+                </a:cubicBezTo>
+                <a:cubicBezTo>
+                  <a:pt x="30" y="56"/>
+                  <a:pt x="36" y="49"/>
+                  <a:pt x="43" y="42"/>
+                </a:cubicBezTo>
+                <a:cubicBezTo>
+                  <a:pt x="50" y="36"/>
+                  <a:pt x="57" y="30"/>
+                  <a:pt x="65" y="24"/>
+                </a:cubicBezTo>
+                <a:cubicBezTo>
+                  <a:pt x="73" y="19"/>
+                  <a:pt x="81" y="14"/>
+                  <a:pt x="90" y="11"/>
+                </a:cubicBezTo>
+                <a:cubicBezTo>
+                  <a:pt x="99" y="7"/>
+                  <a:pt x="108" y="4"/>
+                  <a:pt x="118" y="3"/>
+                </a:cubicBezTo>
+                <a:cubicBezTo>
+                  <a:pt x="127" y="1"/>
                   <a:pt x="136" y="0"/>
-                  <a:pt x="151" y="3"/>
-                  <a:pt x="165" y="9"/>
-                </a:cubicBezTo>
-                <a:cubicBezTo>
-                  <a:pt x="180" y="15"/>
-                  <a:pt x="193" y="23"/>
-                  <a:pt x="204" y="35"/>
-                </a:cubicBezTo>
-                <a:cubicBezTo>
-                  <a:pt x="215" y="46"/>
-                  <a:pt x="224" y="59"/>
-                  <a:pt x="230" y="73"/>
-                </a:cubicBezTo>
-                <a:cubicBezTo>
-                  <a:pt x="236" y="88"/>
-                  <a:pt x="239" y="103"/>
-                  <a:pt x="239" y="119"/>
+                  <a:pt x="146" y="0"/>
+                </a:cubicBezTo>
+                <a:cubicBezTo>
+                  <a:pt x="156" y="0"/>
+                  <a:pt x="165" y="1"/>
+                  <a:pt x="174" y="3"/>
+                </a:cubicBezTo>
+                <a:cubicBezTo>
+                  <a:pt x="184" y="4"/>
+                  <a:pt x="193" y="7"/>
+                  <a:pt x="202" y="11"/>
+                </a:cubicBezTo>
+                <a:cubicBezTo>
+                  <a:pt x="210" y="14"/>
+                  <a:pt x="219" y="19"/>
+                  <a:pt x="228" y="24"/>
+                </a:cubicBezTo>
+                <a:cubicBezTo>
+                  <a:pt x="236" y="30"/>
+                  <a:pt x="243" y="36"/>
+                  <a:pt x="250" y="42"/>
+                </a:cubicBezTo>
+                <a:cubicBezTo>
+                  <a:pt x="257" y="49"/>
+                  <a:pt x="263" y="56"/>
+                  <a:pt x="268" y="64"/>
+                </a:cubicBezTo>
+                <a:cubicBezTo>
+                  <a:pt x="273" y="72"/>
+                  <a:pt x="278" y="81"/>
+                  <a:pt x="281" y="90"/>
+                </a:cubicBezTo>
+                <a:cubicBezTo>
+                  <a:pt x="285" y="98"/>
+                  <a:pt x="288" y="108"/>
+                  <a:pt x="290" y="117"/>
+                </a:cubicBezTo>
+                <a:cubicBezTo>
+                  <a:pt x="292" y="126"/>
+                  <a:pt x="292" y="136"/>
+                  <a:pt x="292" y="146"/>
                 </a:cubicBezTo>
                 <a:close/>
               </a:path>
@@ -11836,13 +10535,13 @@
       </p:sp>
       <p:sp>
         <p:nvSpPr>
-          <p:cNvPr id="176" name=""/>
+          <p:cNvPr id="129" name=""/>
           <p:cNvSpPr txBox="1"/>
           <p:nvPr/>
         </p:nvSpPr>
         <p:spPr>
           <a:xfrm>
-            <a:off x="533520" y="2432160"/>
+            <a:off x="533520" y="2486160"/>
             <a:ext cx="1379880" cy="399600"/>
           </a:xfrm>
           <a:prstGeom prst="rect">
@@ -11863,8 +10562,8 @@
                 <a:solidFill>
                   <a:srgbClr val="111111"/>
                 </a:solidFill>
-                <a:latin typeface="NotoSansCJKjp"/>
-                <a:ea typeface="NotoSansCJKjp"/>
+                <a:latin typeface="NotoSansJP"/>
+                <a:ea typeface="NotoSansJP"/>
               </a:rPr>
               <a:t>右上カラム</a:t>
             </a:r>
@@ -11879,57 +10578,14 @@
       </p:sp>
       <p:sp>
         <p:nvSpPr>
-          <p:cNvPr id="177" name=""/>
-          <p:cNvSpPr txBox="1"/>
-          <p:nvPr/>
-        </p:nvSpPr>
-        <p:spPr>
-          <a:xfrm>
-            <a:off x="1085760" y="2946600"/>
-            <a:ext cx="1104120" cy="399600"/>
-          </a:xfrm>
-          <a:prstGeom prst="rect">
-            <a:avLst/>
-          </a:prstGeom>
-          <a:noFill/>
-          <a:ln w="0">
-            <a:noFill/>
-          </a:ln>
-        </p:spPr>
-        <p:txBody>
-          <a:bodyPr wrap="none" lIns="0" rIns="0" tIns="0" bIns="0" anchor="t">
-            <a:noAutofit/>
-          </a:bodyPr>
-          <a:p>
-            <a:r>
-              <a:rPr b="0" lang="zh-CN" sz="2170" spc="-1" strike="noStrike">
-                <a:solidFill>
-                  <a:srgbClr val="111111"/>
-                </a:solidFill>
-                <a:latin typeface="NotoSansCJKjp"/>
-                <a:ea typeface="NotoSansCJKjp"/>
-              </a:rPr>
-              <a:t>ポイント</a:t>
-            </a:r>
-            <a:endParaRPr b="0" lang="en-US" sz="2170" spc="-1" strike="noStrike">
-              <a:solidFill>
-                <a:srgbClr val="000000"/>
-              </a:solidFill>
-              <a:latin typeface="Times New Roman"/>
-            </a:endParaRPr>
-          </a:p>
-        </p:txBody>
-      </p:sp>
-      <p:sp>
-        <p:nvSpPr>
-          <p:cNvPr id="178" name=""/>
+          <p:cNvPr id="130" name=""/>
           <p:cNvSpPr/>
           <p:nvPr/>
         </p:nvSpPr>
         <p:spPr>
           <a:xfrm>
-            <a:off x="857160" y="3619440"/>
-            <a:ext cx="86040" cy="86040"/>
+            <a:off x="809280" y="3619440"/>
+            <a:ext cx="105120" cy="105120"/>
           </a:xfrm>
           <a:custGeom>
             <a:avLst/>
@@ -11937,89 +10593,169 @@
             <a:ahLst/>
             <a:rect l="0" t="0" r="r" b="b"/>
             <a:pathLst>
-              <a:path w="239" h="239">
+              <a:path w="292" h="292">
                 <a:moveTo>
-                  <a:pt x="239" y="120"/>
+                  <a:pt x="292" y="145"/>
                 </a:moveTo>
                 <a:cubicBezTo>
-                  <a:pt x="239" y="136"/>
-                  <a:pt x="236" y="151"/>
-                  <a:pt x="230" y="165"/>
-                </a:cubicBezTo>
-                <a:cubicBezTo>
-                  <a:pt x="224" y="180"/>
-                  <a:pt x="215" y="193"/>
-                  <a:pt x="204" y="204"/>
-                </a:cubicBezTo>
-                <a:cubicBezTo>
-                  <a:pt x="193" y="215"/>
-                  <a:pt x="180" y="224"/>
-                  <a:pt x="165" y="230"/>
-                </a:cubicBezTo>
-                <a:cubicBezTo>
-                  <a:pt x="151" y="236"/>
-                  <a:pt x="136" y="239"/>
-                  <a:pt x="120" y="239"/>
-                </a:cubicBezTo>
-                <a:cubicBezTo>
-                  <a:pt x="103" y="239"/>
-                  <a:pt x="88" y="236"/>
-                  <a:pt x="73" y="230"/>
-                </a:cubicBezTo>
-                <a:cubicBezTo>
-                  <a:pt x="59" y="224"/>
-                  <a:pt x="46" y="215"/>
-                  <a:pt x="35" y="204"/>
-                </a:cubicBezTo>
-                <a:cubicBezTo>
-                  <a:pt x="23" y="193"/>
-                  <a:pt x="15" y="180"/>
-                  <a:pt x="9" y="165"/>
-                </a:cubicBezTo>
-                <a:cubicBezTo>
-                  <a:pt x="3" y="151"/>
+                  <a:pt x="292" y="155"/>
+                  <a:pt x="292" y="164"/>
+                  <a:pt x="290" y="174"/>
+                </a:cubicBezTo>
+                <a:cubicBezTo>
+                  <a:pt x="288" y="183"/>
+                  <a:pt x="285" y="192"/>
+                  <a:pt x="281" y="201"/>
+                </a:cubicBezTo>
+                <a:cubicBezTo>
+                  <a:pt x="278" y="210"/>
+                  <a:pt x="273" y="218"/>
+                  <a:pt x="268" y="226"/>
+                </a:cubicBezTo>
+                <a:cubicBezTo>
+                  <a:pt x="263" y="234"/>
+                  <a:pt x="257" y="241"/>
+                  <a:pt x="250" y="248"/>
+                </a:cubicBezTo>
+                <a:cubicBezTo>
+                  <a:pt x="243" y="255"/>
+                  <a:pt x="236" y="261"/>
+                  <a:pt x="228" y="266"/>
+                </a:cubicBezTo>
+                <a:cubicBezTo>
+                  <a:pt x="219" y="271"/>
+                  <a:pt x="210" y="276"/>
+                  <a:pt x="202" y="281"/>
+                </a:cubicBezTo>
+                <a:cubicBezTo>
+                  <a:pt x="193" y="284"/>
+                  <a:pt x="184" y="287"/>
+                  <a:pt x="174" y="289"/>
+                </a:cubicBezTo>
+                <a:cubicBezTo>
+                  <a:pt x="165" y="291"/>
+                  <a:pt x="156" y="292"/>
+                  <a:pt x="146" y="292"/>
+                </a:cubicBezTo>
+                <a:cubicBezTo>
+                  <a:pt x="136" y="292"/>
+                  <a:pt x="127" y="291"/>
+                  <a:pt x="118" y="289"/>
+                </a:cubicBezTo>
+                <a:cubicBezTo>
+                  <a:pt x="108" y="287"/>
+                  <a:pt x="99" y="284"/>
+                  <a:pt x="90" y="281"/>
+                </a:cubicBezTo>
+                <a:cubicBezTo>
+                  <a:pt x="81" y="276"/>
+                  <a:pt x="73" y="271"/>
+                  <a:pt x="65" y="266"/>
+                </a:cubicBezTo>
+                <a:cubicBezTo>
+                  <a:pt x="57" y="261"/>
+                  <a:pt x="50" y="255"/>
+                  <a:pt x="43" y="248"/>
+                </a:cubicBezTo>
+                <a:cubicBezTo>
+                  <a:pt x="36" y="241"/>
+                  <a:pt x="30" y="234"/>
+                  <a:pt x="25" y="226"/>
+                </a:cubicBezTo>
+                <a:cubicBezTo>
+                  <a:pt x="20" y="218"/>
+                  <a:pt x="15" y="210"/>
+                  <a:pt x="12" y="201"/>
+                </a:cubicBezTo>
+                <a:cubicBezTo>
+                  <a:pt x="8" y="192"/>
+                  <a:pt x="5" y="183"/>
+                  <a:pt x="3" y="174"/>
+                </a:cubicBezTo>
+                <a:cubicBezTo>
+                  <a:pt x="1" y="164"/>
+                  <a:pt x="0" y="155"/>
+                  <a:pt x="0" y="145"/>
+                </a:cubicBezTo>
+                <a:cubicBezTo>
                   <a:pt x="0" y="136"/>
-                  <a:pt x="0" y="120"/>
-                </a:cubicBezTo>
-                <a:cubicBezTo>
-                  <a:pt x="0" y="104"/>
-                  <a:pt x="3" y="89"/>
-                  <a:pt x="9" y="74"/>
-                </a:cubicBezTo>
-                <a:cubicBezTo>
-                  <a:pt x="15" y="59"/>
-                  <a:pt x="23" y="46"/>
-                  <a:pt x="35" y="35"/>
-                </a:cubicBezTo>
-                <a:cubicBezTo>
-                  <a:pt x="46" y="23"/>
-                  <a:pt x="59" y="15"/>
-                  <a:pt x="73" y="9"/>
-                </a:cubicBezTo>
-                <a:cubicBezTo>
-                  <a:pt x="88" y="3"/>
-                  <a:pt x="103" y="0"/>
-                  <a:pt x="120" y="0"/>
-                </a:cubicBezTo>
-                <a:cubicBezTo>
+                  <a:pt x="1" y="126"/>
+                  <a:pt x="3" y="117"/>
+                </a:cubicBezTo>
+                <a:cubicBezTo>
+                  <a:pt x="5" y="107"/>
+                  <a:pt x="8" y="98"/>
+                  <a:pt x="12" y="89"/>
+                </a:cubicBezTo>
+                <a:cubicBezTo>
+                  <a:pt x="15" y="81"/>
+                  <a:pt x="20" y="72"/>
+                  <a:pt x="25" y="64"/>
+                </a:cubicBezTo>
+                <a:cubicBezTo>
+                  <a:pt x="30" y="56"/>
+                  <a:pt x="36" y="49"/>
+                  <a:pt x="43" y="42"/>
+                </a:cubicBezTo>
+                <a:cubicBezTo>
+                  <a:pt x="50" y="36"/>
+                  <a:pt x="57" y="29"/>
+                  <a:pt x="65" y="24"/>
+                </a:cubicBezTo>
+                <a:cubicBezTo>
+                  <a:pt x="73" y="19"/>
+                  <a:pt x="81" y="14"/>
+                  <a:pt x="90" y="11"/>
+                </a:cubicBezTo>
+                <a:cubicBezTo>
+                  <a:pt x="99" y="7"/>
+                  <a:pt x="108" y="4"/>
+                  <a:pt x="118" y="2"/>
+                </a:cubicBezTo>
+                <a:cubicBezTo>
+                  <a:pt x="127" y="1"/>
                   <a:pt x="136" y="0"/>
-                  <a:pt x="151" y="3"/>
-                  <a:pt x="165" y="9"/>
-                </a:cubicBezTo>
-                <a:cubicBezTo>
-                  <a:pt x="180" y="15"/>
-                  <a:pt x="193" y="23"/>
-                  <a:pt x="204" y="35"/>
-                </a:cubicBezTo>
-                <a:cubicBezTo>
-                  <a:pt x="215" y="46"/>
-                  <a:pt x="224" y="59"/>
-                  <a:pt x="230" y="74"/>
-                </a:cubicBezTo>
-                <a:cubicBezTo>
-                  <a:pt x="236" y="89"/>
-                  <a:pt x="239" y="104"/>
-                  <a:pt x="239" y="120"/>
+                  <a:pt x="146" y="0"/>
+                </a:cubicBezTo>
+                <a:cubicBezTo>
+                  <a:pt x="156" y="0"/>
+                  <a:pt x="165" y="1"/>
+                  <a:pt x="174" y="2"/>
+                </a:cubicBezTo>
+                <a:cubicBezTo>
+                  <a:pt x="184" y="4"/>
+                  <a:pt x="193" y="7"/>
+                  <a:pt x="202" y="11"/>
+                </a:cubicBezTo>
+                <a:cubicBezTo>
+                  <a:pt x="210" y="14"/>
+                  <a:pt x="219" y="19"/>
+                  <a:pt x="228" y="24"/>
+                </a:cubicBezTo>
+                <a:cubicBezTo>
+                  <a:pt x="236" y="29"/>
+                  <a:pt x="243" y="36"/>
+                  <a:pt x="250" y="42"/>
+                </a:cubicBezTo>
+                <a:cubicBezTo>
+                  <a:pt x="257" y="49"/>
+                  <a:pt x="263" y="56"/>
+                  <a:pt x="268" y="64"/>
+                </a:cubicBezTo>
+                <a:cubicBezTo>
+                  <a:pt x="273" y="72"/>
+                  <a:pt x="278" y="81"/>
+                  <a:pt x="281" y="89"/>
+                </a:cubicBezTo>
+                <a:cubicBezTo>
+                  <a:pt x="285" y="98"/>
+                  <a:pt x="288" y="107"/>
+                  <a:pt x="290" y="117"/>
+                </a:cubicBezTo>
+                <a:cubicBezTo>
+                  <a:pt x="292" y="126"/>
+                  <a:pt x="292" y="136"/>
+                  <a:pt x="292" y="145"/>
                 </a:cubicBezTo>
                 <a:close/>
               </a:path>
@@ -12048,14 +10784,14 @@
       </p:sp>
       <p:sp>
         <p:nvSpPr>
-          <p:cNvPr id="179" name=""/>
+          <p:cNvPr id="131" name=""/>
           <p:cNvSpPr txBox="1"/>
           <p:nvPr/>
         </p:nvSpPr>
         <p:spPr>
           <a:xfrm>
-            <a:off x="2190600" y="3017160"/>
-            <a:ext cx="275760" cy="308160"/>
+            <a:off x="1085760" y="3000240"/>
+            <a:ext cx="1340640" cy="401040"/>
           </a:xfrm>
           <a:prstGeom prst="rect">
             <a:avLst/>
@@ -12071,12 +10807,22 @@
           </a:bodyPr>
           <a:p>
             <a:r>
+              <a:rPr b="0" lang="zh-CN" sz="2170" spc="-1" strike="noStrike">
+                <a:solidFill>
+                  <a:srgbClr val="111111"/>
+                </a:solidFill>
+                <a:latin typeface="NotoSansJP"/>
+                <a:ea typeface="NotoSansJP"/>
+              </a:rPr>
+              <a:t>ポイント</a:t>
+            </a:r>
+            <a:r>
               <a:rPr b="0" lang="en-US" sz="2170" spc="-1" strike="noStrike">
                 <a:solidFill>
                   <a:srgbClr val="111111"/>
                 </a:solidFill>
-                <a:latin typeface="Arial"/>
-                <a:ea typeface="Arial"/>
+                <a:latin typeface="NotoSansJP"/>
+                <a:ea typeface="NotoSansJP"/>
               </a:rPr>
               <a:t>3</a:t>
             </a:r>
@@ -12091,14 +10837,14 @@
       </p:sp>
       <p:sp>
         <p:nvSpPr>
-          <p:cNvPr id="180" name=""/>
+          <p:cNvPr id="132" name=""/>
           <p:cNvSpPr txBox="1"/>
           <p:nvPr/>
         </p:nvSpPr>
         <p:spPr>
           <a:xfrm>
-            <a:off x="1085760" y="3422880"/>
-            <a:ext cx="1104120" cy="399600"/>
+            <a:off x="1085760" y="3476520"/>
+            <a:ext cx="1340640" cy="401040"/>
           </a:xfrm>
           <a:prstGeom prst="rect">
             <a:avLst/>
@@ -12118,11 +10864,21 @@
                 <a:solidFill>
                   <a:srgbClr val="111111"/>
                 </a:solidFill>
-                <a:latin typeface="NotoSansCJKjp"/>
-                <a:ea typeface="NotoSansCJKjp"/>
+                <a:latin typeface="NotoSansJP"/>
+                <a:ea typeface="NotoSansJP"/>
               </a:rPr>
               <a:t>ポイント</a:t>
             </a:r>
+            <a:r>
+              <a:rPr b="0" lang="en-US" sz="2170" spc="-1" strike="noStrike">
+                <a:solidFill>
+                  <a:srgbClr val="111111"/>
+                </a:solidFill>
+                <a:latin typeface="NotoSansJP"/>
+                <a:ea typeface="NotoSansJP"/>
+              </a:rPr>
+              <a:t>4</a:t>
+            </a:r>
             <a:endParaRPr b="0" lang="en-US" sz="2170" spc="-1" strike="noStrike">
               <a:solidFill>
                 <a:srgbClr val="000000"/>
@@ -12134,14 +10890,14 @@
       </p:sp>
       <p:sp>
         <p:nvSpPr>
-          <p:cNvPr id="181" name=""/>
+          <p:cNvPr id="133" name=""/>
           <p:cNvSpPr txBox="1"/>
           <p:nvPr/>
         </p:nvSpPr>
         <p:spPr>
           <a:xfrm>
-            <a:off x="2190600" y="3493440"/>
-            <a:ext cx="275760" cy="308160"/>
+            <a:off x="533520" y="4048200"/>
+            <a:ext cx="3898080" cy="401040"/>
           </a:xfrm>
           <a:prstGeom prst="rect">
             <a:avLst/>
@@ -12157,14 +10913,34 @@
           </a:bodyPr>
           <a:p>
             <a:r>
+              <a:rPr b="0" lang="zh-CN" sz="2170" spc="-1" strike="noStrike">
+                <a:solidFill>
+                  <a:srgbClr val="111111"/>
+                </a:solidFill>
+                <a:latin typeface="NotoSansJP"/>
+                <a:ea typeface="NotoSansJP"/>
+              </a:rPr>
+              <a:t>下段の横長エリア（</a:t>
+            </a:r>
+            <a:r>
               <a:rPr b="0" lang="en-US" sz="2170" spc="-1" strike="noStrike">
                 <a:solidFill>
                   <a:srgbClr val="111111"/>
                 </a:solidFill>
-                <a:latin typeface="Arial"/>
-                <a:ea typeface="Arial"/>
-              </a:rPr>
-              <a:t>4</a:t>
+                <a:latin typeface="NotoSansJP"/>
+                <a:ea typeface="NotoSansJP"/>
+              </a:rPr>
+              <a:t>1</a:t>
+            </a:r>
+            <a:r>
+              <a:rPr b="0" lang="zh-CN" sz="2170" spc="-1" strike="noStrike">
+                <a:solidFill>
+                  <a:srgbClr val="111111"/>
+                </a:solidFill>
+                <a:latin typeface="NotoSansJP"/>
+                <a:ea typeface="NotoSansJP"/>
+              </a:rPr>
+              <a:t>段組み）</a:t>
             </a:r>
             <a:endParaRPr b="0" lang="en-US" sz="2170" spc="-1" strike="noStrike">
               <a:solidFill>
@@ -12177,14 +10953,14 @@
       </p:sp>
       <p:sp>
         <p:nvSpPr>
-          <p:cNvPr id="182" name=""/>
+          <p:cNvPr id="134" name=""/>
           <p:cNvSpPr txBox="1"/>
           <p:nvPr/>
         </p:nvSpPr>
         <p:spPr>
           <a:xfrm>
-            <a:off x="533520" y="3994560"/>
-            <a:ext cx="2483280" cy="399600"/>
+            <a:off x="533520" y="4552920"/>
+            <a:ext cx="552240" cy="399600"/>
           </a:xfrm>
           <a:prstGeom prst="rect">
             <a:avLst/>
@@ -12204,10 +10980,10 @@
                 <a:solidFill>
                   <a:srgbClr val="111111"/>
                 </a:solidFill>
-                <a:latin typeface="NotoSansCJKjp"/>
-                <a:ea typeface="NotoSansCJKjp"/>
-              </a:rPr>
-              <a:t>下段の横⻑エリア（</a:t>
+                <a:latin typeface="NotoSansJP"/>
+                <a:ea typeface="NotoSansJP"/>
+              </a:rPr>
+              <a:t>補足</a:t>
             </a:r>
             <a:endParaRPr b="0" lang="en-US" sz="2170" spc="-1" strike="noStrike">
               <a:solidFill>
@@ -12220,14 +10996,14 @@
       </p:sp>
       <p:sp>
         <p:nvSpPr>
-          <p:cNvPr id="183" name=""/>
+          <p:cNvPr id="135" name=""/>
           <p:cNvSpPr txBox="1"/>
           <p:nvPr/>
         </p:nvSpPr>
         <p:spPr>
           <a:xfrm>
-            <a:off x="3019320" y="4064760"/>
-            <a:ext cx="275760" cy="308160"/>
+            <a:off x="533520" y="4971960"/>
+            <a:ext cx="10986120" cy="401040"/>
           </a:xfrm>
           <a:prstGeom prst="rect">
             <a:avLst/>
@@ -12247,10 +11023,20 @@
                 <a:solidFill>
                   <a:srgbClr val="111111"/>
                 </a:solidFill>
-                <a:latin typeface="Arial"/>
-                <a:ea typeface="Arial"/>
-              </a:rPr>
-              <a:t>1</a:t>
+                <a:latin typeface="NotoSansJP"/>
+                <a:ea typeface="NotoSansJP"/>
+              </a:rPr>
+              <a:t>HTML</a:t>
+            </a:r>
+            <a:r>
+              <a:rPr b="0" lang="zh-CN" sz="2170" spc="-1" strike="noStrike">
+                <a:solidFill>
+                  <a:srgbClr val="111111"/>
+                </a:solidFill>
+                <a:latin typeface="NotoSansJP"/>
+                <a:ea typeface="NotoSansJP"/>
+              </a:rPr>
+              <a:t>コードをいちいち毎回すべて入力するのが大変なので、コードスニペット機能を活</a:t>
             </a:r>
             <a:endParaRPr b="0" lang="en-US" sz="2170" spc="-1" strike="noStrike">
               <a:solidFill>
@@ -12263,14 +11049,14 @@
       </p:sp>
       <p:sp>
         <p:nvSpPr>
-          <p:cNvPr id="184" name=""/>
+          <p:cNvPr id="136" name=""/>
           <p:cNvSpPr txBox="1"/>
           <p:nvPr/>
         </p:nvSpPr>
         <p:spPr>
           <a:xfrm>
-            <a:off x="3173040" y="3994560"/>
-            <a:ext cx="1104120" cy="399600"/>
+            <a:off x="533520" y="5381640"/>
+            <a:ext cx="3310920" cy="399600"/>
           </a:xfrm>
           <a:prstGeom prst="rect">
             <a:avLst/>
@@ -12290,10 +11076,10 @@
                 <a:solidFill>
                   <a:srgbClr val="111111"/>
                 </a:solidFill>
-                <a:latin typeface="NotoSansCJKjp"/>
-                <a:ea typeface="NotoSansCJKjp"/>
-              </a:rPr>
-              <a:t>段組み）</a:t>
+                <a:latin typeface="NotoSansJP"/>
+                <a:ea typeface="NotoSansJP"/>
+              </a:rPr>
+              <a:t>用するとよいと思います。</a:t>
             </a:r>
             <a:endParaRPr b="0" lang="en-US" sz="2170" spc="-1" strike="noStrike">
               <a:solidFill>
@@ -12306,14 +11092,14 @@
       </p:sp>
       <p:sp>
         <p:nvSpPr>
-          <p:cNvPr id="185" name=""/>
+          <p:cNvPr id="137" name=""/>
           <p:cNvSpPr txBox="1"/>
           <p:nvPr/>
         </p:nvSpPr>
         <p:spPr>
           <a:xfrm>
-            <a:off x="533520" y="4499280"/>
-            <a:ext cx="552240" cy="399600"/>
+            <a:off x="533520" y="5896080"/>
+            <a:ext cx="8465040" cy="401040"/>
           </a:xfrm>
           <a:prstGeom prst="rect">
             <a:avLst/>
@@ -12329,14 +11115,24 @@
           </a:bodyPr>
           <a:p>
             <a:r>
+              <a:rPr b="0" lang="en-US" sz="2170" spc="-1" strike="noStrike">
+                <a:solidFill>
+                  <a:srgbClr val="111111"/>
+                </a:solidFill>
+                <a:latin typeface="NotoSansJP"/>
+                <a:ea typeface="NotoSansJP"/>
+              </a:rPr>
+              <a:t>VSCode</a:t>
+            </a:r>
+            <a:r>
               <a:rPr b="0" lang="zh-CN" sz="2170" spc="-1" strike="noStrike">
                 <a:solidFill>
                   <a:srgbClr val="111111"/>
                 </a:solidFill>
-                <a:latin typeface="NotoSansCJKjp"/>
-                <a:ea typeface="NotoSansCJKjp"/>
-              </a:rPr>
-              <a:t>補⾜</a:t>
+                <a:latin typeface="NotoSansJP"/>
+                <a:ea typeface="NotoSansJP"/>
+              </a:rPr>
+              <a:t>のコードスニペットはこのテンプレートに含まれています。</a:t>
             </a:r>
             <a:endParaRPr b="0" lang="en-US" sz="2170" spc="-1" strike="noStrike">
               <a:solidFill>
@@ -12349,490 +11145,7 @@
       </p:sp>
       <p:sp>
         <p:nvSpPr>
-          <p:cNvPr id="186" name=""/>
-          <p:cNvSpPr txBox="1"/>
-          <p:nvPr/>
-        </p:nvSpPr>
-        <p:spPr>
-          <a:xfrm>
-            <a:off x="533520" y="4988880"/>
-            <a:ext cx="750600" cy="308160"/>
-          </a:xfrm>
-          <a:prstGeom prst="rect">
-            <a:avLst/>
-          </a:prstGeom>
-          <a:noFill/>
-          <a:ln w="0">
-            <a:noFill/>
-          </a:ln>
-        </p:spPr>
-        <p:txBody>
-          <a:bodyPr wrap="none" lIns="0" rIns="0" tIns="0" bIns="0" anchor="t">
-            <a:noAutofit/>
-          </a:bodyPr>
-          <a:p>
-            <a:r>
-              <a:rPr b="0" lang="en-US" sz="2170" spc="-1" strike="noStrike">
-                <a:solidFill>
-                  <a:srgbClr val="111111"/>
-                </a:solidFill>
-                <a:latin typeface="Arial"/>
-                <a:ea typeface="Arial"/>
-              </a:rPr>
-              <a:t>HTML</a:t>
-            </a:r>
-            <a:endParaRPr b="0" lang="en-US" sz="2170" spc="-1" strike="noStrike">
-              <a:solidFill>
-                <a:srgbClr val="000000"/>
-              </a:solidFill>
-              <a:latin typeface="Times New Roman"/>
-            </a:endParaRPr>
-          </a:p>
-        </p:txBody>
-      </p:sp>
-      <p:sp>
-        <p:nvSpPr>
-          <p:cNvPr id="187" name=""/>
-          <p:cNvSpPr txBox="1"/>
-          <p:nvPr/>
-        </p:nvSpPr>
-        <p:spPr>
-          <a:xfrm>
-            <a:off x="1285200" y="4918320"/>
-            <a:ext cx="10207080" cy="399600"/>
-          </a:xfrm>
-          <a:prstGeom prst="rect">
-            <a:avLst/>
-          </a:prstGeom>
-          <a:noFill/>
-          <a:ln w="0">
-            <a:noFill/>
-          </a:ln>
-        </p:spPr>
-        <p:txBody>
-          <a:bodyPr wrap="none" lIns="0" rIns="0" tIns="0" bIns="0" anchor="t">
-            <a:noAutofit/>
-          </a:bodyPr>
-          <a:p>
-            <a:r>
-              <a:rPr b="0" lang="zh-CN" sz="2170" spc="-1" strike="noStrike">
-                <a:solidFill>
-                  <a:srgbClr val="111111"/>
-                </a:solidFill>
-                <a:latin typeface="NotoSansCJKjp"/>
-                <a:ea typeface="NotoSansCJKjp"/>
-              </a:rPr>
-              <a:t>コードをいちいち毎回すべて⼊⼒するのが⼤変なので、コードスニペット機能を活</a:t>
-            </a:r>
-            <a:endParaRPr b="0" lang="en-US" sz="2170" spc="-1" strike="noStrike">
-              <a:solidFill>
-                <a:srgbClr val="000000"/>
-              </a:solidFill>
-              <a:latin typeface="Times New Roman"/>
-            </a:endParaRPr>
-          </a:p>
-        </p:txBody>
-      </p:sp>
-      <p:sp>
-        <p:nvSpPr>
-          <p:cNvPr id="188" name=""/>
-          <p:cNvSpPr txBox="1"/>
-          <p:nvPr/>
-        </p:nvSpPr>
-        <p:spPr>
-          <a:xfrm>
-            <a:off x="533520" y="5328000"/>
-            <a:ext cx="3310920" cy="399600"/>
-          </a:xfrm>
-          <a:prstGeom prst="rect">
-            <a:avLst/>
-          </a:prstGeom>
-          <a:noFill/>
-          <a:ln w="0">
-            <a:noFill/>
-          </a:ln>
-        </p:spPr>
-        <p:txBody>
-          <a:bodyPr wrap="none" lIns="0" rIns="0" tIns="0" bIns="0" anchor="t">
-            <a:noAutofit/>
-          </a:bodyPr>
-          <a:p>
-            <a:r>
-              <a:rPr b="0" lang="zh-CN" sz="2170" spc="-1" strike="noStrike">
-                <a:solidFill>
-                  <a:srgbClr val="111111"/>
-                </a:solidFill>
-                <a:latin typeface="NotoSansCJKjp"/>
-                <a:ea typeface="NotoSansCJKjp"/>
-              </a:rPr>
-              <a:t>⽤するとよいと思います。</a:t>
-            </a:r>
-            <a:endParaRPr b="0" lang="en-US" sz="2170" spc="-1" strike="noStrike">
-              <a:solidFill>
-                <a:srgbClr val="000000"/>
-              </a:solidFill>
-              <a:latin typeface="Times New Roman"/>
-            </a:endParaRPr>
-          </a:p>
-        </p:txBody>
-      </p:sp>
-      <p:sp>
-        <p:nvSpPr>
-          <p:cNvPr id="189" name=""/>
-          <p:cNvSpPr txBox="1"/>
-          <p:nvPr/>
-        </p:nvSpPr>
-        <p:spPr>
-          <a:xfrm>
-            <a:off x="533520" y="5912640"/>
-            <a:ext cx="1027800" cy="308160"/>
-          </a:xfrm>
-          <a:prstGeom prst="rect">
-            <a:avLst/>
-          </a:prstGeom>
-          <a:noFill/>
-          <a:ln w="0">
-            <a:noFill/>
-          </a:ln>
-        </p:spPr>
-        <p:txBody>
-          <a:bodyPr wrap="none" lIns="0" rIns="0" tIns="0" bIns="0" anchor="t">
-            <a:noAutofit/>
-          </a:bodyPr>
-          <a:p>
-            <a:r>
-              <a:rPr b="0" lang="en-US" sz="2170" spc="-1" strike="noStrike">
-                <a:solidFill>
-                  <a:srgbClr val="111111"/>
-                </a:solidFill>
-                <a:latin typeface="Arial"/>
-                <a:ea typeface="Arial"/>
-              </a:rPr>
-              <a:t>VSCode</a:t>
-            </a:r>
-            <a:endParaRPr b="0" lang="en-US" sz="2170" spc="-1" strike="noStrike">
-              <a:solidFill>
-                <a:srgbClr val="000000"/>
-              </a:solidFill>
-              <a:latin typeface="Times New Roman"/>
-            </a:endParaRPr>
-          </a:p>
-        </p:txBody>
-      </p:sp>
-      <p:sp>
-        <p:nvSpPr>
-          <p:cNvPr id="190" name=""/>
-          <p:cNvSpPr txBox="1"/>
-          <p:nvPr/>
-        </p:nvSpPr>
-        <p:spPr>
-          <a:xfrm>
-            <a:off x="1562400" y="5842080"/>
-            <a:ext cx="7448400" cy="399600"/>
-          </a:xfrm>
-          <a:prstGeom prst="rect">
-            <a:avLst/>
-          </a:prstGeom>
-          <a:noFill/>
-          <a:ln w="0">
-            <a:noFill/>
-          </a:ln>
-        </p:spPr>
-        <p:txBody>
-          <a:bodyPr wrap="none" lIns="0" rIns="0" tIns="0" bIns="0" anchor="t">
-            <a:noAutofit/>
-          </a:bodyPr>
-          <a:p>
-            <a:r>
-              <a:rPr b="0" lang="zh-CN" sz="2170" spc="-1" strike="noStrike">
-                <a:solidFill>
-                  <a:srgbClr val="111111"/>
-                </a:solidFill>
-                <a:latin typeface="NotoSansCJKjp"/>
-                <a:ea typeface="NotoSansCJKjp"/>
-              </a:rPr>
-              <a:t>のコードスニペットはこのテンプレートに含まれています。</a:t>
-            </a:r>
-            <a:endParaRPr b="0" lang="en-US" sz="2170" spc="-1" strike="noStrike">
-              <a:solidFill>
-                <a:srgbClr val="000000"/>
-              </a:solidFill>
-              <a:latin typeface="Times New Roman"/>
-            </a:endParaRPr>
-          </a:p>
-        </p:txBody>
-      </p:sp>
-      <p:sp>
-        <p:nvSpPr>
-          <p:cNvPr id="191" name=""/>
-          <p:cNvSpPr txBox="1"/>
-          <p:nvPr/>
-        </p:nvSpPr>
-        <p:spPr>
-          <a:xfrm>
-            <a:off x="914400" y="351000"/>
-            <a:ext cx="249120" cy="360000"/>
-          </a:xfrm>
-          <a:prstGeom prst="rect">
-            <a:avLst/>
-          </a:prstGeom>
-          <a:noFill/>
-          <a:ln w="0">
-            <a:noFill/>
-          </a:ln>
-        </p:spPr>
-        <p:txBody>
-          <a:bodyPr wrap="none" lIns="0" rIns="0" tIns="0" bIns="0" anchor="t">
-            <a:noAutofit/>
-          </a:bodyPr>
-          <a:p>
-            <a:r>
-              <a:rPr b="0" lang="zh-CN" sz="1950" spc="-1" strike="noStrike">
-                <a:solidFill>
-                  <a:srgbClr val="111111"/>
-                </a:solidFill>
-                <a:latin typeface="NotoSansCJKjp"/>
-                <a:ea typeface="NotoSansCJKjp"/>
-              </a:rPr>
-              <a:t>上</a:t>
-            </a:r>
-            <a:endParaRPr b="0" lang="en-US" sz="1950" spc="-1" strike="noStrike">
-              <a:solidFill>
-                <a:srgbClr val="000000"/>
-              </a:solidFill>
-              <a:latin typeface="Times New Roman"/>
-            </a:endParaRPr>
-          </a:p>
-        </p:txBody>
-      </p:sp>
-      <p:sp>
-        <p:nvSpPr>
-          <p:cNvPr id="192" name=""/>
-          <p:cNvSpPr txBox="1"/>
-          <p:nvPr/>
-        </p:nvSpPr>
-        <p:spPr>
-          <a:xfrm>
-            <a:off x="1162080" y="414000"/>
-            <a:ext cx="247320" cy="279360"/>
-          </a:xfrm>
-          <a:prstGeom prst="rect">
-            <a:avLst/>
-          </a:prstGeom>
-          <a:noFill/>
-          <a:ln w="0">
-            <a:noFill/>
-          </a:ln>
-        </p:spPr>
-        <p:txBody>
-          <a:bodyPr wrap="none" lIns="0" rIns="0" tIns="0" bIns="0" anchor="t">
-            <a:noAutofit/>
-          </a:bodyPr>
-          <a:p>
-            <a:r>
-              <a:rPr b="1" lang="en-US" sz="1950" spc="-1" strike="noStrike">
-                <a:solidFill>
-                  <a:srgbClr val="111111"/>
-                </a:solidFill>
-                <a:latin typeface="Arial"/>
-                <a:ea typeface="Arial"/>
-              </a:rPr>
-              <a:t>2</a:t>
-            </a:r>
-            <a:endParaRPr b="0" lang="en-US" sz="1950" spc="-1" strike="noStrike">
-              <a:solidFill>
-                <a:srgbClr val="000000"/>
-              </a:solidFill>
-              <a:latin typeface="Times New Roman"/>
-            </a:endParaRPr>
-          </a:p>
-        </p:txBody>
-      </p:sp>
-      <p:sp>
-        <p:nvSpPr>
-          <p:cNvPr id="193" name=""/>
-          <p:cNvSpPr txBox="1"/>
-          <p:nvPr/>
-        </p:nvSpPr>
-        <p:spPr>
-          <a:xfrm>
-            <a:off x="1299960" y="351000"/>
-            <a:ext cx="249120" cy="360000"/>
-          </a:xfrm>
-          <a:prstGeom prst="rect">
-            <a:avLst/>
-          </a:prstGeom>
-          <a:noFill/>
-          <a:ln w="0">
-            <a:noFill/>
-          </a:ln>
-        </p:spPr>
-        <p:txBody>
-          <a:bodyPr wrap="none" lIns="0" rIns="0" tIns="0" bIns="0" anchor="t">
-            <a:noAutofit/>
-          </a:bodyPr>
-          <a:p>
-            <a:r>
-              <a:rPr b="0" lang="zh-CN" sz="1950" spc="-1" strike="noStrike">
-                <a:solidFill>
-                  <a:srgbClr val="111111"/>
-                </a:solidFill>
-                <a:latin typeface="NotoSansCJKjp"/>
-                <a:ea typeface="NotoSansCJKjp"/>
-              </a:rPr>
-              <a:t>段</a:t>
-            </a:r>
-            <a:endParaRPr b="0" lang="en-US" sz="1950" spc="-1" strike="noStrike">
-              <a:solidFill>
-                <a:srgbClr val="000000"/>
-              </a:solidFill>
-              <a:latin typeface="Times New Roman"/>
-            </a:endParaRPr>
-          </a:p>
-        </p:txBody>
-      </p:sp>
-      <p:sp>
-        <p:nvSpPr>
-          <p:cNvPr id="194" name=""/>
-          <p:cNvSpPr txBox="1"/>
-          <p:nvPr/>
-        </p:nvSpPr>
-        <p:spPr>
-          <a:xfrm>
-            <a:off x="1547280" y="414000"/>
-            <a:ext cx="282960" cy="279360"/>
-          </a:xfrm>
-          <a:prstGeom prst="rect">
-            <a:avLst/>
-          </a:prstGeom>
-          <a:noFill/>
-          <a:ln w="0">
-            <a:noFill/>
-          </a:ln>
-        </p:spPr>
-        <p:txBody>
-          <a:bodyPr wrap="none" lIns="0" rIns="0" tIns="0" bIns="0" anchor="t">
-            <a:noAutofit/>
-          </a:bodyPr>
-          <a:p>
-            <a:r>
-              <a:rPr b="1" lang="en-US" sz="1950" spc="-1" strike="noStrike">
-                <a:solidFill>
-                  <a:srgbClr val="111111"/>
-                </a:solidFill>
-                <a:latin typeface="Arial"/>
-                <a:ea typeface="Arial"/>
-              </a:rPr>
-              <a:t> </a:t>
-            </a:r>
-            <a:r>
-              <a:rPr b="1" lang="en-US" sz="1950" spc="-1" strike="noStrike">
-                <a:solidFill>
-                  <a:srgbClr val="111111"/>
-                </a:solidFill>
-                <a:latin typeface="Arial"/>
-                <a:ea typeface="Arial"/>
-              </a:rPr>
-              <a:t>+ </a:t>
-            </a:r>
-            <a:endParaRPr b="0" lang="en-US" sz="1950" spc="-1" strike="noStrike">
-              <a:solidFill>
-                <a:srgbClr val="000000"/>
-              </a:solidFill>
-              <a:latin typeface="Times New Roman"/>
-            </a:endParaRPr>
-          </a:p>
-        </p:txBody>
-      </p:sp>
-      <p:sp>
-        <p:nvSpPr>
-          <p:cNvPr id="195" name=""/>
-          <p:cNvSpPr txBox="1"/>
-          <p:nvPr/>
-        </p:nvSpPr>
-        <p:spPr>
-          <a:xfrm>
-            <a:off x="1829520" y="351000"/>
-            <a:ext cx="249120" cy="360000"/>
-          </a:xfrm>
-          <a:prstGeom prst="rect">
-            <a:avLst/>
-          </a:prstGeom>
-          <a:noFill/>
-          <a:ln w="0">
-            <a:noFill/>
-          </a:ln>
-        </p:spPr>
-        <p:txBody>
-          <a:bodyPr wrap="none" lIns="0" rIns="0" tIns="0" bIns="0" anchor="t">
-            <a:noAutofit/>
-          </a:bodyPr>
-          <a:p>
-            <a:r>
-              <a:rPr b="0" lang="zh-CN" sz="1950" spc="-1" strike="noStrike">
-                <a:solidFill>
-                  <a:srgbClr val="111111"/>
-                </a:solidFill>
-                <a:latin typeface="NotoSansCJKjp"/>
-                <a:ea typeface="NotoSansCJKjp"/>
-              </a:rPr>
-              <a:t>下</a:t>
-            </a:r>
-            <a:endParaRPr b="0" lang="en-US" sz="1950" spc="-1" strike="noStrike">
-              <a:solidFill>
-                <a:srgbClr val="000000"/>
-              </a:solidFill>
-              <a:latin typeface="Times New Roman"/>
-            </a:endParaRPr>
-          </a:p>
-        </p:txBody>
-      </p:sp>
-      <p:sp>
-        <p:nvSpPr>
-          <p:cNvPr id="196" name=""/>
-          <p:cNvSpPr txBox="1"/>
-          <p:nvPr/>
-        </p:nvSpPr>
-        <p:spPr>
-          <a:xfrm>
-            <a:off x="2077200" y="414000"/>
-            <a:ext cx="247320" cy="279360"/>
-          </a:xfrm>
-          <a:prstGeom prst="rect">
-            <a:avLst/>
-          </a:prstGeom>
-          <a:noFill/>
-          <a:ln w="0">
-            <a:noFill/>
-          </a:ln>
-        </p:spPr>
-        <p:txBody>
-          <a:bodyPr wrap="none" lIns="0" rIns="0" tIns="0" bIns="0" anchor="t">
-            <a:noAutofit/>
-          </a:bodyPr>
-          <a:p>
-            <a:r>
-              <a:rPr b="1" lang="en-US" sz="1950" spc="-1" strike="noStrike">
-                <a:solidFill>
-                  <a:srgbClr val="111111"/>
-                </a:solidFill>
-                <a:latin typeface="Arial"/>
-                <a:ea typeface="Arial"/>
-              </a:rPr>
-              <a:t>1</a:t>
-            </a:r>
-            <a:endParaRPr b="0" lang="en-US" sz="1950" spc="-1" strike="noStrike">
-              <a:solidFill>
-                <a:srgbClr val="000000"/>
-              </a:solidFill>
-              <a:latin typeface="Times New Roman"/>
-            </a:endParaRPr>
-          </a:p>
-        </p:txBody>
-      </p:sp>
-      <p:sp>
-        <p:nvSpPr>
-          <p:cNvPr id="197" name=""/>
+          <p:cNvPr id="138" name=""/>
           <p:cNvSpPr/>
           <p:nvPr/>
         </p:nvSpPr>
@@ -12970,14 +11283,14 @@
       </p:sp>
       <p:sp>
         <p:nvSpPr>
-          <p:cNvPr id="198" name=""/>
+          <p:cNvPr id="139" name=""/>
           <p:cNvSpPr txBox="1"/>
           <p:nvPr/>
         </p:nvSpPr>
         <p:spPr>
           <a:xfrm>
-            <a:off x="2215080" y="351000"/>
-            <a:ext cx="1491120" cy="360000"/>
+            <a:off x="914400" y="392400"/>
+            <a:ext cx="3193560" cy="361440"/>
           </a:xfrm>
           <a:prstGeom prst="rect">
             <a:avLst/>
@@ -12997,8 +11310,68 @@
                 <a:solidFill>
                   <a:srgbClr val="111111"/>
                 </a:solidFill>
-                <a:latin typeface="NotoSansCJKjp"/>
-                <a:ea typeface="NotoSansCJKjp"/>
+                <a:latin typeface="NotoSansJP"/>
+                <a:ea typeface="NotoSansJP"/>
+              </a:rPr>
+              <a:t>上</a:t>
+            </a:r>
+            <a:r>
+              <a:rPr b="0" lang="en-US" sz="1950" spc="-1" strike="noStrike">
+                <a:solidFill>
+                  <a:srgbClr val="111111"/>
+                </a:solidFill>
+                <a:latin typeface="NotoSansJP"/>
+                <a:ea typeface="NotoSansJP"/>
+              </a:rPr>
+              <a:t>2</a:t>
+            </a:r>
+            <a:r>
+              <a:rPr b="0" lang="zh-CN" sz="1950" spc="-1" strike="noStrike">
+                <a:solidFill>
+                  <a:srgbClr val="111111"/>
+                </a:solidFill>
+                <a:latin typeface="NotoSansJP"/>
+                <a:ea typeface="NotoSansJP"/>
+              </a:rPr>
+              <a:t>段 </a:t>
+            </a:r>
+            <a:r>
+              <a:rPr b="0" lang="en-US" sz="1950" spc="-1" strike="noStrike">
+                <a:solidFill>
+                  <a:srgbClr val="111111"/>
+                </a:solidFill>
+                <a:latin typeface="NotoSansJP"/>
+                <a:ea typeface="NotoSansJP"/>
+              </a:rPr>
+              <a:t>+ </a:t>
+            </a:r>
+            <a:r>
+              <a:rPr b="0" lang="zh-CN" sz="1950" spc="-1" strike="noStrike">
+                <a:solidFill>
+                  <a:srgbClr val="111111"/>
+                </a:solidFill>
+                <a:latin typeface="NotoSansJP"/>
+                <a:ea typeface="NotoSansJP"/>
+              </a:rPr>
+              <a:t>下</a:t>
+            </a:r>
+            <a:r>
+              <a:rPr b="0" lang="en-US" sz="1950" spc="-1" strike="noStrike">
+                <a:solidFill>
+                  <a:srgbClr val="111111"/>
+                </a:solidFill>
+                <a:latin typeface="NotoSansJP"/>
+                <a:ea typeface="NotoSansJP"/>
+              </a:rPr>
+              <a:t>1</a:t>
+            </a:r>
+            <a:r>
+              <a:rPr b="0" lang="zh-CN" sz="1950" spc="-1" strike="noStrike">
+                <a:solidFill>
+                  <a:srgbClr val="111111"/>
+                </a:solidFill>
+                <a:latin typeface="NotoSansJP"/>
+                <a:ea typeface="NotoSansJP"/>
               </a:rPr>
               <a:t>段のサンプル</a:t>
             </a:r>
@@ -13013,14 +11386,14 @@
       </p:sp>
       <p:sp>
         <p:nvSpPr>
-          <p:cNvPr id="199" name=""/>
+          <p:cNvPr id="140" name=""/>
           <p:cNvSpPr txBox="1"/>
           <p:nvPr/>
         </p:nvSpPr>
         <p:spPr>
           <a:xfrm>
-            <a:off x="11946240" y="6458400"/>
-            <a:ext cx="304560" cy="340200"/>
+            <a:off x="11946600" y="6436800"/>
+            <a:ext cx="304560" cy="416520"/>
           </a:xfrm>
           <a:prstGeom prst="rect">
             <a:avLst/>
@@ -13040,8 +11413,8 @@
                 <a:solidFill>
                   <a:srgbClr val="111111"/>
                 </a:solidFill>
-                <a:latin typeface="Arial"/>
-                <a:ea typeface="Arial"/>
+                <a:latin typeface="NotoSansJP"/>
+                <a:ea typeface="NotoSansJP"/>
               </a:rPr>
               <a:t>9</a:t>
             </a:r>
